--- a/docs/BOB_Presentation.pptx
+++ b/docs/BOB_Presentation.pptx
@@ -18,9 +18,8 @@
     <p:sldId id="266" r:id="rId17"/>
     <p:sldId id="267" r:id="rId18"/>
     <p:sldId id="268" r:id="rId19"/>
-    <p:sldId id="269" r:id="rId20"/>
   </p:sldIdLst>
-  <p:sldSz cx="12191695" cy="6858000" type="screen4x3"/>
+  <p:sldSz cx="9144000" cy="6858000" type="screen4x3"/>
   <p:notesSz cx="6858000" cy="9144000"/>
   <p:defaultTextStyle>
     <a:defPPr>
@@ -3103,14 +3102,57 @@
       <p:grpSpPr/>
       <p:sp>
         <p:nvSpPr>
-          <p:cNvPr id="2" name="TextBox 1"/>
+          <p:cNvPr id="2" name="Rectangle 1"/>
+          <p:cNvSpPr/>
+          <p:nvPr/>
+        </p:nvSpPr>
+        <p:spPr>
+          <a:xfrm>
+            <a:off x="0" y="0"/>
+            <a:ext cx="9144000" cy="1371600"/>
+          </a:xfrm>
+          <a:prstGeom prst="rect">
+            <a:avLst/>
+          </a:prstGeom>
+          <a:solidFill>
+            <a:srgbClr val="FFCC00"/>
+          </a:solidFill>
+          <a:ln>
+            <a:noFill/>
+          </a:ln>
+        </p:spPr>
+        <p:style>
+          <a:lnRef idx="1">
+            <a:schemeClr val="accent1"/>
+          </a:lnRef>
+          <a:fillRef idx="3">
+            <a:schemeClr val="accent1"/>
+          </a:fillRef>
+          <a:effectRef idx="2">
+            <a:schemeClr val="accent1"/>
+          </a:effectRef>
+          <a:fontRef idx="minor">
+            <a:schemeClr val="lt1"/>
+          </a:fontRef>
+        </p:style>
+        <p:txBody>
+          <a:bodyPr rtlCol="0" anchor="ctr"/>
+          <a:lstStyle/>
+          <a:p>
+            <a:pPr algn="ctr"/>
+          </a:p>
+        </p:txBody>
+      </p:sp>
+      <p:sp>
+        <p:nvSpPr>
+          <p:cNvPr id="3" name="TextBox 2"/>
           <p:cNvSpPr txBox="1"/>
           <p:nvPr/>
         </p:nvSpPr>
         <p:spPr>
           <a:xfrm>
-            <a:off x="457200" y="2286000"/>
-            <a:ext cx="11277295" cy="1371600"/>
+            <a:off x="457200" y="1645920"/>
+            <a:ext cx="8229600" cy="1371600"/>
           </a:xfrm>
           <a:prstGeom prst="rect">
             <a:avLst/>
@@ -3124,24 +3166,28 @@
           <a:lstStyle/>
           <a:p>
             <a:pPr algn="ctr">
-              <a:defRPr sz="4400" b="1"/>
-            </a:pPr>
-            <a:r>
-              <a:t>BOB: Build Orchestration Bot</a:t>
-            </a:r>
-          </a:p>
-        </p:txBody>
-      </p:sp>
-      <p:sp>
-        <p:nvSpPr>
-          <p:cNvPr id="3" name="TextBox 2"/>
+              <a:defRPr sz="4400" b="1">
+                <a:solidFill>
+                  <a:srgbClr val="003366"/>
+                </a:solidFill>
+              </a:defRPr>
+            </a:pPr>
+            <a:r>
+              <a:t>🔨 BOB: Build Orchestration Bot 🔨</a:t>
+            </a:r>
+          </a:p>
+        </p:txBody>
+      </p:sp>
+      <p:sp>
+        <p:nvSpPr>
+          <p:cNvPr id="4" name="TextBox 3"/>
           <p:cNvSpPr txBox="1"/>
           <p:nvPr/>
         </p:nvSpPr>
         <p:spPr>
           <a:xfrm>
-            <a:off x="457200" y="3657600"/>
-            <a:ext cx="11277295" cy="914400"/>
+            <a:off x="457200" y="3017520"/>
+            <a:ext cx="8229600" cy="914400"/>
           </a:xfrm>
           <a:prstGeom prst="rect">
             <a:avLst/>
@@ -3155,10 +3201,123 @@
           <a:lstStyle/>
           <a:p>
             <a:pPr algn="ctr">
-              <a:defRPr sz="2400"/>
-            </a:pPr>
-            <a:r>
-              <a:t>A Production-Ready Framework for Autonomous AI-Assisted Software Development</a:t>
+              <a:defRPr sz="2400">
+                <a:solidFill>
+                  <a:srgbClr val="404040"/>
+                </a:solidFill>
+              </a:defRPr>
+            </a:pPr>
+            <a:r>
+              <a:t>A Production-Ready Framework for</a:t>
+            </a:r>
+            <a:br/>
+            <a:r>
+              <a:t>Autonomous AI-Assisted Software Development</a:t>
+            </a:r>
+          </a:p>
+        </p:txBody>
+      </p:sp>
+      <p:sp>
+        <p:nvSpPr>
+          <p:cNvPr id="5" name="TextBox 4"/>
+          <p:cNvSpPr txBox="1"/>
+          <p:nvPr/>
+        </p:nvSpPr>
+        <p:spPr>
+          <a:xfrm>
+            <a:off x="457200" y="3931920"/>
+            <a:ext cx="8229600" cy="457200"/>
+          </a:xfrm>
+          <a:prstGeom prst="rect">
+            <a:avLst/>
+          </a:prstGeom>
+          <a:noFill/>
+        </p:spPr>
+        <p:txBody>
+          <a:bodyPr wrap="none">
+            <a:spAutoFit/>
+          </a:bodyPr>
+          <a:lstStyle/>
+          <a:p>
+            <a:pPr algn="ctr">
+              <a:defRPr sz="2000" i="1">
+                <a:solidFill>
+                  <a:srgbClr val="FF8C00"/>
+                </a:solidFill>
+              </a:defRPr>
+            </a:pPr>
+            <a:r>
+              <a:t>"Can We Build It? Yes We Can!"</a:t>
+            </a:r>
+          </a:p>
+        </p:txBody>
+      </p:sp>
+      <p:sp>
+        <p:nvSpPr>
+          <p:cNvPr id="6" name="TextBox 5"/>
+          <p:cNvSpPr txBox="1"/>
+          <p:nvPr/>
+        </p:nvSpPr>
+        <p:spPr>
+          <a:xfrm>
+            <a:off x="457200" y="5029200"/>
+            <a:ext cx="8229600" cy="457200"/>
+          </a:xfrm>
+          <a:prstGeom prst="rect">
+            <a:avLst/>
+          </a:prstGeom>
+          <a:noFill/>
+        </p:spPr>
+        <p:txBody>
+          <a:bodyPr wrap="none">
+            <a:spAutoFit/>
+          </a:bodyPr>
+          <a:lstStyle/>
+          <a:p>
+            <a:pPr algn="ctr">
+              <a:defRPr sz="1800">
+                <a:solidFill>
+                  <a:srgbClr val="003366"/>
+                </a:solidFill>
+              </a:defRPr>
+            </a:pPr>
+            <a:r>
+              <a:t>Yaakoub Elkhamra, PhD</a:t>
+            </a:r>
+          </a:p>
+        </p:txBody>
+      </p:sp>
+      <p:sp>
+        <p:nvSpPr>
+          <p:cNvPr id="7" name="TextBox 6"/>
+          <p:cNvSpPr txBox="1"/>
+          <p:nvPr/>
+        </p:nvSpPr>
+        <p:spPr>
+          <a:xfrm>
+            <a:off x="457200" y="5486400"/>
+            <a:ext cx="8229600" cy="457200"/>
+          </a:xfrm>
+          <a:prstGeom prst="rect">
+            <a:avLst/>
+          </a:prstGeom>
+          <a:noFill/>
+        </p:spPr>
+        <p:txBody>
+          <a:bodyPr wrap="none">
+            <a:spAutoFit/>
+          </a:bodyPr>
+          <a:lstStyle/>
+          <a:p>
+            <a:pPr algn="ctr">
+              <a:defRPr sz="1600">
+                <a:solidFill>
+                  <a:srgbClr val="404040"/>
+                </a:solidFill>
+              </a:defRPr>
+            </a:pPr>
+            <a:r>
+              <a:t>January 2026</a:t>
             </a:r>
           </a:p>
         </p:txBody>
@@ -3183,14 +3342,57 @@
       <p:grpSpPr/>
       <p:sp>
         <p:nvSpPr>
-          <p:cNvPr id="2" name="TextBox 1"/>
+          <p:cNvPr id="2" name="Rectangle 1"/>
+          <p:cNvSpPr/>
+          <p:nvPr/>
+        </p:nvSpPr>
+        <p:spPr>
+          <a:xfrm>
+            <a:off x="0" y="0"/>
+            <a:ext cx="9144000" cy="914400"/>
+          </a:xfrm>
+          <a:prstGeom prst="rect">
+            <a:avLst/>
+          </a:prstGeom>
+          <a:solidFill>
+            <a:srgbClr val="FFCC00"/>
+          </a:solidFill>
+          <a:ln>
+            <a:noFill/>
+          </a:ln>
+        </p:spPr>
+        <p:style>
+          <a:lnRef idx="1">
+            <a:schemeClr val="accent1"/>
+          </a:lnRef>
+          <a:fillRef idx="3">
+            <a:schemeClr val="accent1"/>
+          </a:fillRef>
+          <a:effectRef idx="2">
+            <a:schemeClr val="accent1"/>
+          </a:effectRef>
+          <a:fontRef idx="minor">
+            <a:schemeClr val="lt1"/>
+          </a:fontRef>
+        </p:style>
+        <p:txBody>
+          <a:bodyPr rtlCol="0" anchor="ctr"/>
+          <a:lstStyle/>
+          <a:p>
+            <a:pPr algn="ctr"/>
+          </a:p>
+        </p:txBody>
+      </p:sp>
+      <p:sp>
+        <p:nvSpPr>
+          <p:cNvPr id="3" name="TextBox 2"/>
           <p:cNvSpPr txBox="1"/>
           <p:nvPr/>
         </p:nvSpPr>
         <p:spPr>
           <a:xfrm>
-            <a:off x="457200" y="274320"/>
-            <a:ext cx="11277295" cy="731520"/>
+            <a:off x="274320" y="182880"/>
+            <a:ext cx="8595360" cy="640080"/>
           </a:xfrm>
           <a:prstGeom prst="rect">
             <a:avLst/>
@@ -3204,24 +3406,28 @@
           <a:lstStyle/>
           <a:p>
             <a:pPr>
-              <a:defRPr sz="3200" b="1"/>
-            </a:pPr>
-            <a:r>
-              <a:t>Multiple Specification Formats</a:t>
-            </a:r>
-          </a:p>
-        </p:txBody>
-      </p:sp>
-      <p:sp>
-        <p:nvSpPr>
-          <p:cNvPr id="3" name="TextBox 2"/>
+              <a:defRPr sz="2800" b="1">
+                <a:solidFill>
+                  <a:srgbClr val="003366"/>
+                </a:solidFill>
+              </a:defRPr>
+            </a:pPr>
+            <a:r>
+              <a:t>🔨 Multiple Spec Formats</a:t>
+            </a:r>
+          </a:p>
+        </p:txBody>
+      </p:sp>
+      <p:sp>
+        <p:nvSpPr>
+          <p:cNvPr id="4" name="TextBox 3"/>
           <p:cNvSpPr txBox="1"/>
           <p:nvPr/>
         </p:nvSpPr>
         <p:spPr>
           <a:xfrm>
             <a:off x="457200" y="1097280"/>
-            <a:ext cx="5486400" cy="457200"/>
+            <a:ext cx="8229600" cy="5029200"/>
           </a:xfrm>
           <a:prstGeom prst="rect">
             <a:avLst/>
@@ -3229,241 +3435,95 @@
           <a:noFill/>
         </p:spPr>
         <p:txBody>
-          <a:bodyPr wrap="none">
-            <a:spAutoFit/>
-          </a:bodyPr>
-          <a:lstStyle/>
-          <a:p>
-            <a:pPr>
-              <a:defRPr sz="2200" b="1"/>
-            </a:pPr>
-            <a:r>
-              <a:t>File-Based Specs</a:t>
-            </a:r>
-          </a:p>
-        </p:txBody>
-      </p:sp>
-      <p:sp>
-        <p:nvSpPr>
-          <p:cNvPr id="4" name="TextBox 3"/>
-          <p:cNvSpPr txBox="1"/>
-          <p:nvPr/>
-        </p:nvSpPr>
-        <p:spPr>
-          <a:xfrm>
-            <a:off x="457200" y="1645920"/>
-            <a:ext cx="5486400" cy="4572000"/>
-          </a:xfrm>
-          <a:prstGeom prst="rect">
-            <a:avLst/>
-          </a:prstGeom>
-          <a:noFill/>
-        </p:spPr>
-        <p:txBody>
           <a:bodyPr wrap="square">
             <a:spAutoFit/>
           </a:bodyPr>
           <a:lstStyle/>
           <a:p>
             <a:pPr>
-              <a:spcBef>
-                <a:spcPts val="800"/>
-              </a:spcBef>
-              <a:defRPr sz="1800"/>
-            </a:pPr>
-            <a:r>
-              <a:t>YAML (recommended):</a:t>
-            </a:r>
-          </a:p>
-          <a:p>
-            <a:pPr>
-              <a:spcBef>
-                <a:spcPts val="800"/>
-              </a:spcBef>
-              <a:defRPr sz="1800"/>
-            </a:pPr>
-            <a:r>
-              <a:t>  tasks:</a:t>
-            </a:r>
-          </a:p>
-          <a:p>
-            <a:pPr>
-              <a:spcBef>
-                <a:spcPts val="800"/>
-              </a:spcBef>
-              <a:defRPr sz="1800"/>
-            </a:pPr>
-            <a:r>
-              <a:t>    - id: auth-login</a:t>
-            </a:r>
-          </a:p>
-          <a:p>
-            <a:pPr>
-              <a:spcBef>
-                <a:spcPts val="800"/>
-              </a:spcBef>
-              <a:defRPr sz="1800"/>
-            </a:pPr>
-            <a:r>
-              <a:t>      title: User Login</a:t>
-            </a:r>
-          </a:p>
-          <a:p>
-            <a:pPr>
-              <a:spcBef>
-                <a:spcPts val="800"/>
-              </a:spcBef>
-              <a:defRPr sz="1800"/>
-            </a:pPr>
-            <a:r>
-              <a:t>      depends_on: [db-setup]</a:t>
-            </a:r>
-          </a:p>
-          <a:p>
-            <a:pPr>
-              <a:spcBef>
-                <a:spcPts val="800"/>
-              </a:spcBef>
-              <a:defRPr sz="1800"/>
-            </a:pPr>
-          </a:p>
-          <a:p>
-            <a:pPr>
-              <a:spcBef>
-                <a:spcPts val="800"/>
-              </a:spcBef>
-              <a:defRPr sz="1800"/>
-            </a:pPr>
-            <a:r>
-              <a:t>JSON &amp; Markdown also supported</a:t>
-            </a:r>
-          </a:p>
-        </p:txBody>
-      </p:sp>
-      <p:sp>
-        <p:nvSpPr>
-          <p:cNvPr id="5" name="TextBox 4"/>
-          <p:cNvSpPr txBox="1"/>
-          <p:nvPr/>
-        </p:nvSpPr>
-        <p:spPr>
-          <a:xfrm>
-            <a:off x="6248095" y="1097280"/>
-            <a:ext cx="5486400" cy="457200"/>
-          </a:xfrm>
-          <a:prstGeom prst="rect">
-            <a:avLst/>
-          </a:prstGeom>
-          <a:noFill/>
-        </p:spPr>
-        <p:txBody>
-          <a:bodyPr wrap="none">
-            <a:spAutoFit/>
-          </a:bodyPr>
-          <a:lstStyle/>
-          <a:p>
-            <a:pPr>
-              <a:defRPr sz="2200" b="1"/>
-            </a:pPr>
-            <a:r>
-              <a:t>GitHub Integration</a:t>
-            </a:r>
-          </a:p>
-        </p:txBody>
-      </p:sp>
-      <p:sp>
-        <p:nvSpPr>
-          <p:cNvPr id="6" name="TextBox 5"/>
-          <p:cNvSpPr txBox="1"/>
-          <p:nvPr/>
-        </p:nvSpPr>
-        <p:spPr>
-          <a:xfrm>
-            <a:off x="6248095" y="1645920"/>
-            <a:ext cx="5486400" cy="4572000"/>
-          </a:xfrm>
-          <a:prstGeom prst="rect">
-            <a:avLst/>
-          </a:prstGeom>
-          <a:noFill/>
-        </p:spPr>
-        <p:txBody>
-          <a:bodyPr wrap="square">
-            <a:spAutoFit/>
-          </a:bodyPr>
-          <a:lstStyle/>
-          <a:p>
-            <a:pPr>
-              <a:spcBef>
-                <a:spcPts val="800"/>
-              </a:spcBef>
-              <a:defRPr sz="1800"/>
-            </a:pPr>
-            <a:r>
-              <a:t>$ bob project create app ./work \</a:t>
-            </a:r>
-          </a:p>
-          <a:p>
-            <a:pPr>
-              <a:spcBef>
-                <a:spcPts val="800"/>
-              </a:spcBef>
-              <a:defRPr sz="1800"/>
-            </a:pPr>
-            <a:r>
-              <a:t>    github://org/repo?label=ai-implement</a:t>
-            </a:r>
-          </a:p>
-          <a:p>
-            <a:pPr>
-              <a:spcBef>
-                <a:spcPts val="800"/>
-              </a:spcBef>
-              <a:defRPr sz="1800"/>
-            </a:pPr>
-          </a:p>
-          <a:p>
-            <a:pPr>
-              <a:spcBef>
-                <a:spcPts val="800"/>
-              </a:spcBef>
-              <a:defRPr sz="1800"/>
-            </a:pPr>
-            <a:r>
-              <a:t>Sync issues directly as tasks!</a:t>
-            </a:r>
-          </a:p>
-          <a:p>
-            <a:pPr>
-              <a:spcBef>
-                <a:spcPts val="800"/>
-              </a:spcBef>
-              <a:defRPr sz="1800"/>
-            </a:pPr>
-            <a:r>
-              <a:t>  - Title -&gt; Task title</a:t>
-            </a:r>
-          </a:p>
-          <a:p>
-            <a:pPr>
-              <a:spcBef>
-                <a:spcPts val="800"/>
-              </a:spcBef>
-              <a:defRPr sz="1800"/>
-            </a:pPr>
-            <a:r>
-              <a:t>  - Body -&gt; Description</a:t>
-            </a:r>
-          </a:p>
-          <a:p>
-            <a:pPr>
-              <a:spcBef>
-                <a:spcPts val="800"/>
-              </a:spcBef>
-              <a:defRPr sz="1800"/>
-            </a:pPr>
-            <a:r>
-              <a:t>  - Labels -&gt; Priority &amp; tags</a:t>
+              <a:spcAft>
+                <a:spcPts val="600"/>
+              </a:spcAft>
+              <a:defRPr sz="1400">
+                <a:solidFill>
+                  <a:srgbClr val="000000"/>
+                </a:solidFill>
+              </a:defRPr>
+            </a:pPr>
+            <a:r>
+              <a:t>YAML         | JSON           | MARKDOWN        | GITHUB ISSUES</a:t>
+            </a:r>
+          </a:p>
+          <a:p>
+            <a:pPr>
+              <a:spcAft>
+                <a:spcPts val="600"/>
+              </a:spcAft>
+              <a:defRPr sz="1400">
+                <a:solidFill>
+                  <a:srgbClr val="000000"/>
+                </a:solidFill>
+              </a:defRPr>
+            </a:pPr>
+            <a:r>
+              <a:t>tasks:       | {tasks:[..]}   | ## task-id      | Issue #42</a:t>
+            </a:r>
+          </a:p>
+          <a:p>
+            <a:pPr>
+              <a:spcAft>
+                <a:spcPts val="600"/>
+              </a:spcAft>
+              <a:defRPr sz="1400">
+                <a:solidFill>
+                  <a:srgbClr val="000000"/>
+                </a:solidFill>
+              </a:defRPr>
+            </a:pPr>
+            <a:r>
+              <a:t>  - id: x    |                | [priority:high] | Labels: ai-implement</a:t>
+            </a:r>
+          </a:p>
+          <a:p>
+            <a:pPr>
+              <a:spcAft>
+                <a:spcPts val="600"/>
+              </a:spcAft>
+              <a:defRPr sz="1400">
+                <a:solidFill>
+                  <a:srgbClr val="000000"/>
+                </a:solidFill>
+              </a:defRPr>
+            </a:pPr>
+          </a:p>
+          <a:p>
+            <a:pPr>
+              <a:spcAft>
+                <a:spcPts val="600"/>
+              </a:spcAft>
+              <a:defRPr sz="1400">
+                <a:solidFill>
+                  <a:srgbClr val="000000"/>
+                </a:solidFill>
+              </a:defRPr>
+            </a:pPr>
+            <a:r>
+              <a:t>$ bob project create app ./work github://org/repo?label=ai</a:t>
+            </a:r>
+          </a:p>
+          <a:p>
+            <a:pPr>
+              <a:spcAft>
+                <a:spcPts val="600"/>
+              </a:spcAft>
+              <a:defRPr sz="1400">
+                <a:solidFill>
+                  <a:srgbClr val="000000"/>
+                </a:solidFill>
+              </a:defRPr>
+            </a:pPr>
+            <a:r>
+              <a:t>Sync issues labeled 'ai' directly as tasks!</a:t>
             </a:r>
           </a:p>
         </p:txBody>
@@ -3488,14 +3548,57 @@
       <p:grpSpPr/>
       <p:sp>
         <p:nvSpPr>
-          <p:cNvPr id="2" name="TextBox 1"/>
+          <p:cNvPr id="2" name="Rectangle 1"/>
+          <p:cNvSpPr/>
+          <p:nvPr/>
+        </p:nvSpPr>
+        <p:spPr>
+          <a:xfrm>
+            <a:off x="0" y="0"/>
+            <a:ext cx="9144000" cy="914400"/>
+          </a:xfrm>
+          <a:prstGeom prst="rect">
+            <a:avLst/>
+          </a:prstGeom>
+          <a:solidFill>
+            <a:srgbClr val="FFCC00"/>
+          </a:solidFill>
+          <a:ln>
+            <a:noFill/>
+          </a:ln>
+        </p:spPr>
+        <p:style>
+          <a:lnRef idx="1">
+            <a:schemeClr val="accent1"/>
+          </a:lnRef>
+          <a:fillRef idx="3">
+            <a:schemeClr val="accent1"/>
+          </a:fillRef>
+          <a:effectRef idx="2">
+            <a:schemeClr val="accent1"/>
+          </a:effectRef>
+          <a:fontRef idx="minor">
+            <a:schemeClr val="lt1"/>
+          </a:fontRef>
+        </p:style>
+        <p:txBody>
+          <a:bodyPr rtlCol="0" anchor="ctr"/>
+          <a:lstStyle/>
+          <a:p>
+            <a:pPr algn="ctr"/>
+          </a:p>
+        </p:txBody>
+      </p:sp>
+      <p:sp>
+        <p:nvSpPr>
+          <p:cNvPr id="3" name="TextBox 2"/>
           <p:cNvSpPr txBox="1"/>
           <p:nvPr/>
         </p:nvSpPr>
         <p:spPr>
           <a:xfrm>
-            <a:off x="457200" y="274320"/>
-            <a:ext cx="11277295" cy="731520"/>
+            <a:off x="274320" y="182880"/>
+            <a:ext cx="8595360" cy="640080"/>
           </a:xfrm>
           <a:prstGeom prst="rect">
             <a:avLst/>
@@ -3509,24 +3612,28 @@
           <a:lstStyle/>
           <a:p>
             <a:pPr>
-              <a:defRPr sz="3200" b="1"/>
-            </a:pPr>
-            <a:r>
-              <a:t>Parallel Task Execution</a:t>
-            </a:r>
-          </a:p>
-        </p:txBody>
-      </p:sp>
-      <p:sp>
-        <p:nvSpPr>
-          <p:cNvPr id="3" name="TextBox 2"/>
+              <a:defRPr sz="2800" b="1">
+                <a:solidFill>
+                  <a:srgbClr val="003366"/>
+                </a:solidFill>
+              </a:defRPr>
+            </a:pPr>
+            <a:r>
+              <a:t>🔨 Parallel Execution</a:t>
+            </a:r>
+          </a:p>
+        </p:txBody>
+      </p:sp>
+      <p:sp>
+        <p:nvSpPr>
+          <p:cNvPr id="4" name="TextBox 3"/>
           <p:cNvSpPr txBox="1"/>
           <p:nvPr/>
         </p:nvSpPr>
         <p:spPr>
           <a:xfrm>
             <a:off x="457200" y="1097280"/>
-            <a:ext cx="11277295" cy="5029200"/>
+            <a:ext cx="8229600" cy="5029200"/>
           </a:xfrm>
           <a:prstGeom prst="rect">
             <a:avLst/>
@@ -3540,158 +3647,176 @@
           <a:lstStyle/>
           <a:p>
             <a:pPr>
-              <a:spcBef>
-                <a:spcPts val="1200"/>
-              </a:spcBef>
-              <a:defRPr sz="2000"/>
-            </a:pPr>
-            <a:r>
-              <a:t>BOB builds a dependency graph (DAG) and runs independent tasks in parallel</a:t>
-            </a:r>
-          </a:p>
-          <a:p>
-            <a:pPr>
-              <a:spcBef>
-                <a:spcPts val="1200"/>
-              </a:spcBef>
-              <a:defRPr sz="2000"/>
-            </a:pPr>
-          </a:p>
-          <a:p>
-            <a:pPr>
-              <a:spcBef>
-                <a:spcPts val="1200"/>
-              </a:spcBef>
-              <a:defRPr sz="2000"/>
-            </a:pPr>
-            <a:r>
-              <a:t>Dependency Graph:        Execution Timeline:</a:t>
-            </a:r>
-          </a:p>
-          <a:p>
-            <a:pPr>
-              <a:spcBef>
-                <a:spcPts val="1200"/>
-              </a:spcBef>
-              <a:defRPr sz="2000"/>
-            </a:pPr>
-            <a:r>
-              <a:t>     [setup]             [setup]</a:t>
-            </a:r>
-          </a:p>
-          <a:p>
-            <a:pPr>
-              <a:spcBef>
-                <a:spcPts val="1200"/>
-              </a:spcBef>
-              <a:defRPr sz="2000"/>
-            </a:pPr>
-            <a:r>
-              <a:t>       / \                  |</a:t>
-            </a:r>
-          </a:p>
-          <a:p>
-            <a:pPr>
-              <a:spcBef>
-                <a:spcPts val="1200"/>
-              </a:spcBef>
-              <a:defRPr sz="2000"/>
-            </a:pPr>
-            <a:r>
-              <a:t>    [api] [ui]           [api][ui]  &lt;- PARALLEL</a:t>
-            </a:r>
-          </a:p>
-          <a:p>
-            <a:pPr>
-              <a:spcBef>
-                <a:spcPts val="1200"/>
-              </a:spcBef>
-              <a:defRPr sz="2000"/>
-            </a:pPr>
-            <a:r>
-              <a:t>       \ /                  |</a:t>
-            </a:r>
-          </a:p>
-          <a:p>
-            <a:pPr>
-              <a:spcBef>
-                <a:spcPts val="1200"/>
-              </a:spcBef>
-              <a:defRPr sz="2000"/>
-            </a:pPr>
-            <a:r>
-              <a:t>     [tests]             [tests]</a:t>
-            </a:r>
-          </a:p>
-          <a:p>
-            <a:pPr>
-              <a:spcBef>
-                <a:spcPts val="1200"/>
-              </a:spcBef>
-              <a:defRPr sz="2000"/>
-            </a:pPr>
-          </a:p>
-          <a:p>
-            <a:pPr>
-              <a:spcBef>
-                <a:spcPts val="1200"/>
-              </a:spcBef>
-              <a:defRPr sz="2000"/>
-            </a:pPr>
-            <a:r>
-              <a:t>$ bob run --parallel 3    # Run up to 3 tasks concurrently</a:t>
-            </a:r>
-          </a:p>
-          <a:p>
-            <a:pPr>
-              <a:spcBef>
-                <a:spcPts val="1200"/>
-              </a:spcBef>
-              <a:defRPr sz="2000"/>
-            </a:pPr>
-          </a:p>
-          <a:p>
-            <a:pPr>
-              <a:spcBef>
-                <a:spcPts val="1200"/>
-              </a:spcBef>
-              <a:defRPr sz="2000"/>
-            </a:pPr>
-            <a:r>
-              <a:t>Benefits:</a:t>
-            </a:r>
-          </a:p>
-          <a:p>
-            <a:pPr>
-              <a:spcBef>
-                <a:spcPts val="1200"/>
-              </a:spcBef>
-              <a:defRPr sz="2000"/>
-            </a:pPr>
-            <a:r>
-              <a:t>  - Faster overall completion</a:t>
-            </a:r>
-          </a:p>
-          <a:p>
-            <a:pPr>
-              <a:spcBef>
-                <a:spcPts val="1200"/>
-              </a:spcBef>
-              <a:defRPr sz="2000"/>
-            </a:pPr>
-            <a:r>
-              <a:t>  - Each task gets isolated session</a:t>
-            </a:r>
-          </a:p>
-          <a:p>
-            <a:pPr>
-              <a:spcBef>
-                <a:spcPts val="1200"/>
-              </a:spcBef>
-              <a:defRPr sz="2000"/>
-            </a:pPr>
-            <a:r>
-              <a:t>  - Failures don't block independent work</a:t>
+              <a:spcAft>
+                <a:spcPts val="600"/>
+              </a:spcAft>
+              <a:defRPr sz="1400">
+                <a:solidFill>
+                  <a:srgbClr val="000000"/>
+                </a:solidFill>
+              </a:defRPr>
+            </a:pPr>
+            <a:r>
+              <a:t>BOB builds a dependency graph and runs independent tasks in parallel:</a:t>
+            </a:r>
+          </a:p>
+          <a:p>
+            <a:pPr>
+              <a:spcAft>
+                <a:spcPts val="600"/>
+              </a:spcAft>
+              <a:defRPr sz="1400">
+                <a:solidFill>
+                  <a:srgbClr val="000000"/>
+                </a:solidFill>
+              </a:defRPr>
+            </a:pPr>
+          </a:p>
+          <a:p>
+            <a:pPr>
+              <a:spcAft>
+                <a:spcPts val="600"/>
+              </a:spcAft>
+              <a:defRPr sz="1400">
+                <a:solidFill>
+                  <a:srgbClr val="000000"/>
+                </a:solidFill>
+              </a:defRPr>
+            </a:pPr>
+            <a:r>
+              <a:t>     setup                  Time -&gt;</a:t>
+            </a:r>
+          </a:p>
+          <a:p>
+            <a:pPr>
+              <a:spcAft>
+                <a:spcPts val="600"/>
+              </a:spcAft>
+              <a:defRPr sz="1400">
+                <a:solidFill>
+                  <a:srgbClr val="000000"/>
+                </a:solidFill>
+              </a:defRPr>
+            </a:pPr>
+            <a:r>
+              <a:t>       |                    [  setup  ]</a:t>
+            </a:r>
+          </a:p>
+          <a:p>
+            <a:pPr>
+              <a:spcAft>
+                <a:spcPts val="600"/>
+              </a:spcAft>
+              <a:defRPr sz="1400">
+                <a:solidFill>
+                  <a:srgbClr val="000000"/>
+                </a:solidFill>
+              </a:defRPr>
+            </a:pPr>
+            <a:r>
+              <a:t>    +--+--+                      |</a:t>
+            </a:r>
+          </a:p>
+          <a:p>
+            <a:pPr>
+              <a:spcAft>
+                <a:spcPts val="600"/>
+              </a:spcAft>
+              <a:defRPr sz="1400">
+                <a:solidFill>
+                  <a:srgbClr val="000000"/>
+                </a:solidFill>
+              </a:defRPr>
+            </a:pPr>
+            <a:r>
+              <a:t>    |     |                 [ api | ui ] PARALLEL</a:t>
+            </a:r>
+          </a:p>
+          <a:p>
+            <a:pPr>
+              <a:spcAft>
+                <a:spcPts val="600"/>
+              </a:spcAft>
+              <a:defRPr sz="1400">
+                <a:solidFill>
+                  <a:srgbClr val="000000"/>
+                </a:solidFill>
+              </a:defRPr>
+            </a:pPr>
+            <a:r>
+              <a:t>   api   ui                      |</a:t>
+            </a:r>
+          </a:p>
+          <a:p>
+            <a:pPr>
+              <a:spcAft>
+                <a:spcPts val="600"/>
+              </a:spcAft>
+              <a:defRPr sz="1400">
+                <a:solidFill>
+                  <a:srgbClr val="000000"/>
+                </a:solidFill>
+              </a:defRPr>
+            </a:pPr>
+            <a:r>
+              <a:t>    |     |                 [  tests   ]</a:t>
+            </a:r>
+          </a:p>
+          <a:p>
+            <a:pPr>
+              <a:spcAft>
+                <a:spcPts val="600"/>
+              </a:spcAft>
+              <a:defRPr sz="1400">
+                <a:solidFill>
+                  <a:srgbClr val="000000"/>
+                </a:solidFill>
+              </a:defRPr>
+            </a:pPr>
+            <a:r>
+              <a:t>    +--+--+</a:t>
+            </a:r>
+          </a:p>
+          <a:p>
+            <a:pPr>
+              <a:spcAft>
+                <a:spcPts val="600"/>
+              </a:spcAft>
+              <a:defRPr sz="1400">
+                <a:solidFill>
+                  <a:srgbClr val="000000"/>
+                </a:solidFill>
+              </a:defRPr>
+            </a:pPr>
+            <a:r>
+              <a:t>     tests</a:t>
+            </a:r>
+          </a:p>
+          <a:p>
+            <a:pPr>
+              <a:spcAft>
+                <a:spcPts val="600"/>
+              </a:spcAft>
+              <a:defRPr sz="1400">
+                <a:solidFill>
+                  <a:srgbClr val="000000"/>
+                </a:solidFill>
+              </a:defRPr>
+            </a:pPr>
+          </a:p>
+          <a:p>
+            <a:pPr>
+              <a:spcAft>
+                <a:spcPts val="600"/>
+              </a:spcAft>
+              <a:defRPr sz="1400">
+                <a:solidFill>
+                  <a:srgbClr val="000000"/>
+                </a:solidFill>
+              </a:defRPr>
+            </a:pPr>
+            <a:r>
+              <a:t>$ bob run --parallel 3</a:t>
             </a:r>
           </a:p>
         </p:txBody>
@@ -3716,14 +3841,57 @@
       <p:grpSpPr/>
       <p:sp>
         <p:nvSpPr>
-          <p:cNvPr id="2" name="TextBox 1"/>
+          <p:cNvPr id="2" name="Rectangle 1"/>
+          <p:cNvSpPr/>
+          <p:nvPr/>
+        </p:nvSpPr>
+        <p:spPr>
+          <a:xfrm>
+            <a:off x="0" y="0"/>
+            <a:ext cx="9144000" cy="914400"/>
+          </a:xfrm>
+          <a:prstGeom prst="rect">
+            <a:avLst/>
+          </a:prstGeom>
+          <a:solidFill>
+            <a:srgbClr val="FFCC00"/>
+          </a:solidFill>
+          <a:ln>
+            <a:noFill/>
+          </a:ln>
+        </p:spPr>
+        <p:style>
+          <a:lnRef idx="1">
+            <a:schemeClr val="accent1"/>
+          </a:lnRef>
+          <a:fillRef idx="3">
+            <a:schemeClr val="accent1"/>
+          </a:fillRef>
+          <a:effectRef idx="2">
+            <a:schemeClr val="accent1"/>
+          </a:effectRef>
+          <a:fontRef idx="minor">
+            <a:schemeClr val="lt1"/>
+          </a:fontRef>
+        </p:style>
+        <p:txBody>
+          <a:bodyPr rtlCol="0" anchor="ctr"/>
+          <a:lstStyle/>
+          <a:p>
+            <a:pPr algn="ctr"/>
+          </a:p>
+        </p:txBody>
+      </p:sp>
+      <p:sp>
+        <p:nvSpPr>
+          <p:cNvPr id="3" name="TextBox 2"/>
           <p:cNvSpPr txBox="1"/>
           <p:nvPr/>
         </p:nvSpPr>
         <p:spPr>
           <a:xfrm>
-            <a:off x="457200" y="274320"/>
-            <a:ext cx="11277295" cy="731520"/>
+            <a:off x="274320" y="182880"/>
+            <a:ext cx="8595360" cy="640080"/>
           </a:xfrm>
           <a:prstGeom prst="rect">
             <a:avLst/>
@@ -3737,24 +3905,28 @@
           <a:lstStyle/>
           <a:p>
             <a:pPr>
-              <a:defRPr sz="3200" b="1"/>
-            </a:pPr>
-            <a:r>
-              <a:t>BOB vs. Traditional Approaches</a:t>
-            </a:r>
-          </a:p>
-        </p:txBody>
-      </p:sp>
-      <p:sp>
-        <p:nvSpPr>
-          <p:cNvPr id="3" name="TextBox 2"/>
+              <a:defRPr sz="2800" b="1">
+                <a:solidFill>
+                  <a:srgbClr val="003366"/>
+                </a:solidFill>
+              </a:defRPr>
+            </a:pPr>
+            <a:r>
+              <a:t>🔨 Quick Start</a:t>
+            </a:r>
+          </a:p>
+        </p:txBody>
+      </p:sp>
+      <p:sp>
+        <p:nvSpPr>
+          <p:cNvPr id="4" name="TextBox 3"/>
           <p:cNvSpPr txBox="1"/>
           <p:nvPr/>
         </p:nvSpPr>
         <p:spPr>
           <a:xfrm>
             <a:off x="457200" y="1097280"/>
-            <a:ext cx="5486400" cy="457200"/>
+            <a:ext cx="8229600" cy="5029200"/>
           </a:xfrm>
           <a:prstGeom prst="rect">
             <a:avLst/>
@@ -3762,269 +3934,152 @@
           <a:noFill/>
         </p:spPr>
         <p:txBody>
-          <a:bodyPr wrap="none">
-            <a:spAutoFit/>
-          </a:bodyPr>
-          <a:lstStyle/>
-          <a:p>
-            <a:pPr>
-              <a:defRPr sz="2200" b="1"/>
-            </a:pPr>
-            <a:r>
-              <a:t>Traditional</a:t>
-            </a:r>
-          </a:p>
-        </p:txBody>
-      </p:sp>
-      <p:sp>
-        <p:nvSpPr>
-          <p:cNvPr id="4" name="TextBox 3"/>
-          <p:cNvSpPr txBox="1"/>
-          <p:nvPr/>
-        </p:nvSpPr>
-        <p:spPr>
-          <a:xfrm>
-            <a:off x="457200" y="1645920"/>
-            <a:ext cx="5486400" cy="4572000"/>
-          </a:xfrm>
-          <a:prstGeom prst="rect">
-            <a:avLst/>
-          </a:prstGeom>
-          <a:noFill/>
-        </p:spPr>
-        <p:txBody>
           <a:bodyPr wrap="square">
             <a:spAutoFit/>
           </a:bodyPr>
           <a:lstStyle/>
           <a:p>
             <a:pPr>
-              <a:spcBef>
-                <a:spcPts val="800"/>
-              </a:spcBef>
-              <a:defRPr sz="1800"/>
-            </a:pPr>
-            <a:r>
-              <a:t>Single project, manual switching</a:t>
-            </a:r>
-          </a:p>
-          <a:p>
-            <a:pPr>
-              <a:spcBef>
-                <a:spcPts val="800"/>
-              </a:spcBef>
-              <a:defRPr sz="1800"/>
-            </a:pPr>
-            <a:r>
-              <a:t>Flat JSON files, no transactions</a:t>
-            </a:r>
-          </a:p>
-          <a:p>
-            <a:pPr>
-              <a:spcBef>
-                <a:spcPts val="800"/>
-              </a:spcBef>
-              <a:defRPr sz="1800"/>
-            </a:pPr>
-            <a:r>
-              <a:t>No cost visibility, surprise bills</a:t>
-            </a:r>
-          </a:p>
-          <a:p>
-            <a:pPr>
-              <a:spcBef>
-                <a:spcPts val="800"/>
-              </a:spcBef>
-              <a:defRPr sz="1800"/>
-            </a:pPr>
-            <a:r>
-              <a:t>Sequential tasks only</a:t>
-            </a:r>
-          </a:p>
-          <a:p>
-            <a:pPr>
-              <a:spcBef>
-                <a:spcPts val="800"/>
-              </a:spcBef>
-              <a:defRPr sz="1800"/>
-            </a:pPr>
-            <a:r>
-              <a:t>Manual retry, same approach</a:t>
-            </a:r>
-          </a:p>
-          <a:p>
-            <a:pPr>
-              <a:spcBef>
-                <a:spcPts val="800"/>
-              </a:spcBef>
-              <a:defRPr sz="1800"/>
-            </a:pPr>
-            <a:r>
-              <a:t>Start over on interruption</a:t>
-            </a:r>
-          </a:p>
-          <a:p>
-            <a:pPr>
-              <a:spcBef>
-                <a:spcPts val="800"/>
-              </a:spcBef>
-              <a:defRPr sz="1800"/>
-            </a:pPr>
-            <a:r>
-              <a:t>Plain text logs, hard to analyze</a:t>
-            </a:r>
-          </a:p>
-          <a:p>
-            <a:pPr>
-              <a:spcBef>
-                <a:spcPts val="800"/>
-              </a:spcBef>
-              <a:defRPr sz="1800"/>
-            </a:pPr>
-            <a:r>
-              <a:t>Hardcoded configuration</a:t>
-            </a:r>
-          </a:p>
-        </p:txBody>
-      </p:sp>
-      <p:sp>
-        <p:nvSpPr>
-          <p:cNvPr id="5" name="TextBox 4"/>
-          <p:cNvSpPr txBox="1"/>
-          <p:nvPr/>
-        </p:nvSpPr>
-        <p:spPr>
-          <a:xfrm>
-            <a:off x="6248095" y="1097280"/>
-            <a:ext cx="5486400" cy="457200"/>
-          </a:xfrm>
-          <a:prstGeom prst="rect">
-            <a:avLst/>
-          </a:prstGeom>
-          <a:noFill/>
-        </p:spPr>
-        <p:txBody>
-          <a:bodyPr wrap="none">
-            <a:spAutoFit/>
-          </a:bodyPr>
-          <a:lstStyle/>
-          <a:p>
-            <a:pPr>
-              <a:defRPr sz="2200" b="1"/>
-            </a:pPr>
-            <a:r>
-              <a:t>BOB</a:t>
-            </a:r>
-          </a:p>
-        </p:txBody>
-      </p:sp>
-      <p:sp>
-        <p:nvSpPr>
-          <p:cNvPr id="6" name="TextBox 5"/>
-          <p:cNvSpPr txBox="1"/>
-          <p:nvPr/>
-        </p:nvSpPr>
-        <p:spPr>
-          <a:xfrm>
-            <a:off x="6248095" y="1645920"/>
-            <a:ext cx="5486400" cy="4572000"/>
-          </a:xfrm>
-          <a:prstGeom prst="rect">
-            <a:avLst/>
-          </a:prstGeom>
-          <a:noFill/>
-        </p:spPr>
-        <p:txBody>
-          <a:bodyPr wrap="square">
-            <a:spAutoFit/>
-          </a:bodyPr>
-          <a:lstStyle/>
-          <a:p>
-            <a:pPr>
-              <a:spcBef>
-                <a:spcPts val="800"/>
-              </a:spcBef>
-              <a:defRPr sz="1800"/>
-            </a:pPr>
-            <a:r>
-              <a:t>Multi-project, isolated state</a:t>
-            </a:r>
-          </a:p>
-          <a:p>
-            <a:pPr>
-              <a:spcBef>
-                <a:spcPts val="800"/>
-              </a:spcBef>
-              <a:defRPr sz="1800"/>
-            </a:pPr>
-            <a:r>
-              <a:t>SQLite database, indexed &amp; queried</a:t>
-            </a:r>
-          </a:p>
-          <a:p>
-            <a:pPr>
-              <a:spcBef>
-                <a:spcPts val="800"/>
-              </a:spcBef>
-              <a:defRPr sz="1800"/>
-            </a:pPr>
-            <a:r>
-              <a:t>Real-time tracking, budget enforcement</a:t>
-            </a:r>
-          </a:p>
-          <a:p>
-            <a:pPr>
-              <a:spcBef>
-                <a:spcPts val="800"/>
-              </a:spcBef>
-              <a:defRPr sz="1800"/>
-            </a:pPr>
-            <a:r>
-              <a:t>Parallel + DAG, dependency-aware</a:t>
-            </a:r>
-          </a:p>
-          <a:p>
-            <a:pPr>
-              <a:spcBef>
-                <a:spcPts val="800"/>
-              </a:spcBef>
-              <a:defRPr sz="1800"/>
-            </a:pPr>
-            <a:r>
-              <a:t>Auto-escalation, intelligent action</a:t>
-            </a:r>
-          </a:p>
-          <a:p>
-            <a:pPr>
-              <a:spcBef>
-                <a:spcPts val="800"/>
-              </a:spcBef>
-              <a:defRPr sz="1800"/>
-            </a:pPr>
-            <a:r>
-              <a:t>Checkpoint &amp; resume, context preserved</a:t>
-            </a:r>
-          </a:p>
-          <a:p>
-            <a:pPr>
-              <a:spcBef>
-                <a:spcPts val="800"/>
-              </a:spcBef>
-              <a:defRPr sz="1800"/>
-            </a:pPr>
-            <a:r>
-              <a:t>Structured JSON, queryable events</a:t>
-            </a:r>
-          </a:p>
-          <a:p>
-            <a:pPr>
-              <a:spcBef>
-                <a:spcPts val="800"/>
-              </a:spcBef>
-              <a:defRPr sz="1800"/>
-            </a:pPr>
-            <a:r>
-              <a:t>Per-project YAML, customizable</a:t>
+              <a:spcAft>
+                <a:spcPts val="600"/>
+              </a:spcAft>
+              <a:defRPr sz="1400">
+                <a:solidFill>
+                  <a:srgbClr val="000000"/>
+                </a:solidFill>
+              </a:defRPr>
+            </a:pPr>
+            <a:r>
+              <a:t>1. INSTALL</a:t>
+            </a:r>
+          </a:p>
+          <a:p>
+            <a:pPr>
+              <a:spcAft>
+                <a:spcPts val="600"/>
+              </a:spcAft>
+              <a:defRPr sz="1400">
+                <a:solidFill>
+                  <a:srgbClr val="000000"/>
+                </a:solidFill>
+              </a:defRPr>
+            </a:pPr>
+            <a:r>
+              <a:t>   $ git clone https://github.com/yye00/bob.git</a:t>
+            </a:r>
+          </a:p>
+          <a:p>
+            <a:pPr>
+              <a:spcAft>
+                <a:spcPts val="600"/>
+              </a:spcAft>
+              <a:defRPr sz="1400">
+                <a:solidFill>
+                  <a:srgbClr val="000000"/>
+                </a:solidFill>
+              </a:defRPr>
+            </a:pPr>
+            <a:r>
+              <a:t>   $ cd bob &amp;&amp; ./init.sh</a:t>
+            </a:r>
+          </a:p>
+          <a:p>
+            <a:pPr>
+              <a:spcAft>
+                <a:spcPts val="600"/>
+              </a:spcAft>
+              <a:defRPr sz="1400">
+                <a:solidFill>
+                  <a:srgbClr val="000000"/>
+                </a:solidFill>
+              </a:defRPr>
+            </a:pPr>
+          </a:p>
+          <a:p>
+            <a:pPr>
+              <a:spcAft>
+                <a:spcPts val="600"/>
+              </a:spcAft>
+              <a:defRPr sz="1400">
+                <a:solidFill>
+                  <a:srgbClr val="000000"/>
+                </a:solidFill>
+              </a:defRPr>
+            </a:pPr>
+            <a:r>
+              <a:t>2. CREATE PROJECT</a:t>
+            </a:r>
+          </a:p>
+          <a:p>
+            <a:pPr>
+              <a:spcAft>
+                <a:spcPts val="600"/>
+              </a:spcAft>
+              <a:defRPr sz="1400">
+                <a:solidFill>
+                  <a:srgbClr val="000000"/>
+                </a:solidFill>
+              </a:defRPr>
+            </a:pPr>
+            <a:r>
+              <a:t>   $ bob project create my-app ./workspace file://spec.yaml</a:t>
+            </a:r>
+          </a:p>
+          <a:p>
+            <a:pPr>
+              <a:spcAft>
+                <a:spcPts val="600"/>
+              </a:spcAft>
+              <a:defRPr sz="1400">
+                <a:solidFill>
+                  <a:srgbClr val="000000"/>
+                </a:solidFill>
+              </a:defRPr>
+            </a:pPr>
+          </a:p>
+          <a:p>
+            <a:pPr>
+              <a:spcAft>
+                <a:spcPts val="600"/>
+              </a:spcAft>
+              <a:defRPr sz="1400">
+                <a:solidFill>
+                  <a:srgbClr val="000000"/>
+                </a:solidFill>
+              </a:defRPr>
+            </a:pPr>
+            <a:r>
+              <a:t>3. RUN</a:t>
+            </a:r>
+          </a:p>
+          <a:p>
+            <a:pPr>
+              <a:spcAft>
+                <a:spcPts val="600"/>
+              </a:spcAft>
+              <a:defRPr sz="1400">
+                <a:solidFill>
+                  <a:srgbClr val="000000"/>
+                </a:solidFill>
+              </a:defRPr>
+            </a:pPr>
+            <a:r>
+              <a:t>   $ bob run</a:t>
+            </a:r>
+          </a:p>
+          <a:p>
+            <a:pPr>
+              <a:spcAft>
+                <a:spcPts val="600"/>
+              </a:spcAft>
+              <a:defRPr sz="1400">
+                <a:solidFill>
+                  <a:srgbClr val="000000"/>
+                </a:solidFill>
+              </a:defRPr>
+            </a:pPr>
+            <a:r>
+              <a:t>   $ bob logs --follow</a:t>
             </a:r>
           </a:p>
         </p:txBody>
@@ -4049,14 +4104,57 @@
       <p:grpSpPr/>
       <p:sp>
         <p:nvSpPr>
-          <p:cNvPr id="2" name="TextBox 1"/>
+          <p:cNvPr id="2" name="Rectangle 1"/>
+          <p:cNvSpPr/>
+          <p:nvPr/>
+        </p:nvSpPr>
+        <p:spPr>
+          <a:xfrm>
+            <a:off x="0" y="0"/>
+            <a:ext cx="9144000" cy="914400"/>
+          </a:xfrm>
+          <a:prstGeom prst="rect">
+            <a:avLst/>
+          </a:prstGeom>
+          <a:solidFill>
+            <a:srgbClr val="FFCC00"/>
+          </a:solidFill>
+          <a:ln>
+            <a:noFill/>
+          </a:ln>
+        </p:spPr>
+        <p:style>
+          <a:lnRef idx="1">
+            <a:schemeClr val="accent1"/>
+          </a:lnRef>
+          <a:fillRef idx="3">
+            <a:schemeClr val="accent1"/>
+          </a:fillRef>
+          <a:effectRef idx="2">
+            <a:schemeClr val="accent1"/>
+          </a:effectRef>
+          <a:fontRef idx="minor">
+            <a:schemeClr val="lt1"/>
+          </a:fontRef>
+        </p:style>
+        <p:txBody>
+          <a:bodyPr rtlCol="0" anchor="ctr"/>
+          <a:lstStyle/>
+          <a:p>
+            <a:pPr algn="ctr"/>
+          </a:p>
+        </p:txBody>
+      </p:sp>
+      <p:sp>
+        <p:nvSpPr>
+          <p:cNvPr id="3" name="TextBox 2"/>
           <p:cNvSpPr txBox="1"/>
           <p:nvPr/>
         </p:nvSpPr>
         <p:spPr>
           <a:xfrm>
-            <a:off x="457200" y="274320"/>
-            <a:ext cx="11277295" cy="731520"/>
+            <a:off x="274320" y="182880"/>
+            <a:ext cx="8595360" cy="640080"/>
           </a:xfrm>
           <a:prstGeom prst="rect">
             <a:avLst/>
@@ -4070,24 +4168,28 @@
           <a:lstStyle/>
           <a:p>
             <a:pPr>
-              <a:defRPr sz="3200" b="1"/>
-            </a:pPr>
-            <a:r>
-              <a:t>Quick Start Guide</a:t>
-            </a:r>
-          </a:p>
-        </p:txBody>
-      </p:sp>
-      <p:sp>
-        <p:nvSpPr>
-          <p:cNvPr id="3" name="TextBox 2"/>
+              <a:defRPr sz="2800" b="1">
+                <a:solidFill>
+                  <a:srgbClr val="003366"/>
+                </a:solidFill>
+              </a:defRPr>
+            </a:pPr>
+            <a:r>
+              <a:t>🔨 Summary</a:t>
+            </a:r>
+          </a:p>
+        </p:txBody>
+      </p:sp>
+      <p:sp>
+        <p:nvSpPr>
+          <p:cNvPr id="4" name="TextBox 3"/>
           <p:cNvSpPr txBox="1"/>
           <p:nvPr/>
         </p:nvSpPr>
         <p:spPr>
           <a:xfrm>
             <a:off x="457200" y="1097280"/>
-            <a:ext cx="11277295" cy="5029200"/>
+            <a:ext cx="8229600" cy="5029200"/>
           </a:xfrm>
           <a:prstGeom prst="rect">
             <a:avLst/>
@@ -4101,241 +4203,29 @@
           <a:lstStyle/>
           <a:p>
             <a:pPr>
-              <a:spcBef>
-                <a:spcPts val="1200"/>
-              </a:spcBef>
-              <a:defRPr sz="2000"/>
-            </a:pPr>
-            <a:r>
-              <a:t>1. INSTALL</a:t>
-            </a:r>
-          </a:p>
-          <a:p>
-            <a:pPr>
-              <a:spcBef>
-                <a:spcPts val="1200"/>
-              </a:spcBef>
-              <a:defRPr sz="2000"/>
-            </a:pPr>
-            <a:r>
-              <a:t>   $ git clone https://github.com/yourusername/bob.git</a:t>
-            </a:r>
-          </a:p>
-          <a:p>
-            <a:pPr>
-              <a:spcBef>
-                <a:spcPts val="1200"/>
-              </a:spcBef>
-              <a:defRPr sz="2000"/>
-            </a:pPr>
-            <a:r>
-              <a:t>   $ cd bob &amp;&amp; ./init.sh</a:t>
-            </a:r>
-          </a:p>
-          <a:p>
-            <a:pPr>
-              <a:spcBef>
-                <a:spcPts val="1200"/>
-              </a:spcBef>
-              <a:defRPr sz="2000"/>
-            </a:pPr>
-            <a:r>
-              <a:t>   $ export ANTHROPIC_API_KEY='your-key'</a:t>
-            </a:r>
-          </a:p>
-          <a:p>
-            <a:pPr>
-              <a:spcBef>
-                <a:spcPts val="1200"/>
-              </a:spcBef>
-              <a:defRPr sz="2000"/>
-            </a:pPr>
-          </a:p>
-          <a:p>
-            <a:pPr>
-              <a:spcBef>
-                <a:spcPts val="1200"/>
-              </a:spcBef>
-              <a:defRPr sz="2000"/>
-            </a:pPr>
-            <a:r>
-              <a:t>2. CREATE PROJECT</a:t>
-            </a:r>
-          </a:p>
-          <a:p>
-            <a:pPr>
-              <a:spcBef>
-                <a:spcPts val="1200"/>
-              </a:spcBef>
-              <a:defRPr sz="2000"/>
-            </a:pPr>
-            <a:r>
-              <a:t>   $ bob init</a:t>
-            </a:r>
-          </a:p>
-          <a:p>
-            <a:pPr>
-              <a:spcBef>
-                <a:spcPts val="1200"/>
-              </a:spcBef>
-              <a:defRPr sz="2000"/>
-            </a:pPr>
-            <a:r>
-              <a:t>   $ bob project create my-app ./workspace file://spec.yaml</a:t>
-            </a:r>
-          </a:p>
-          <a:p>
-            <a:pPr>
-              <a:spcBef>
-                <a:spcPts val="1200"/>
-              </a:spcBef>
-              <a:defRPr sz="2000"/>
-            </a:pPr>
-            <a:r>
-              <a:t>   $ bob project use my-app</a:t>
-            </a:r>
-          </a:p>
-          <a:p>
-            <a:pPr>
-              <a:spcBef>
-                <a:spcPts val="1200"/>
-              </a:spcBef>
-              <a:defRPr sz="2000"/>
-            </a:pPr>
-          </a:p>
-          <a:p>
-            <a:pPr>
-              <a:spcBef>
-                <a:spcPts val="1200"/>
-              </a:spcBef>
-              <a:defRPr sz="2000"/>
-            </a:pPr>
-            <a:r>
-              <a:t>3. RUN</a:t>
-            </a:r>
-          </a:p>
-          <a:p>
-            <a:pPr>
-              <a:spcBef>
-                <a:spcPts val="1200"/>
-              </a:spcBef>
-              <a:defRPr sz="2000"/>
-            </a:pPr>
-            <a:r>
-              <a:t>   $ bob run                # Start autonomous development</a:t>
-            </a:r>
-          </a:p>
-          <a:p>
-            <a:pPr>
-              <a:spcBef>
-                <a:spcPts val="1200"/>
-              </a:spcBef>
-              <a:defRPr sz="2000"/>
-            </a:pPr>
-            <a:r>
-              <a:t>   $ bob status             # Check progress</a:t>
-            </a:r>
-          </a:p>
-          <a:p>
-            <a:pPr>
-              <a:spcBef>
-                <a:spcPts val="1200"/>
-              </a:spcBef>
-              <a:defRPr sz="2000"/>
-            </a:pPr>
-            <a:r>
-              <a:t>   $ bob logs --follow      # Watch in real-time</a:t>
-            </a:r>
-          </a:p>
-        </p:txBody>
-      </p:sp>
-    </p:spTree>
-  </p:cSld>
-  <p:clrMapOvr>
-    <a:masterClrMapping/>
-  </p:clrMapOvr>
-</p:sld>
-</file>
-
-<file path=ppt/slides/slide14.xml><?xml version="1.0" encoding="utf-8"?>
-<p:sld xmlns:a="http://schemas.openxmlformats.org/drawingml/2006/main" xmlns:p="http://schemas.openxmlformats.org/presentationml/2006/main" xmlns:r="http://schemas.openxmlformats.org/officeDocument/2006/relationships">
-  <p:cSld>
-    <p:spTree>
-      <p:nvGrpSpPr>
-        <p:cNvPr id="1" name=""/>
-        <p:cNvGrpSpPr/>
-        <p:nvPr/>
-      </p:nvGrpSpPr>
-      <p:grpSpPr/>
-      <p:sp>
-        <p:nvSpPr>
-          <p:cNvPr id="2" name="TextBox 1"/>
-          <p:cNvSpPr txBox="1"/>
-          <p:nvPr/>
-        </p:nvSpPr>
-        <p:spPr>
-          <a:xfrm>
-            <a:off x="457200" y="274320"/>
-            <a:ext cx="11277295" cy="731520"/>
-          </a:xfrm>
-          <a:prstGeom prst="rect">
-            <a:avLst/>
-          </a:prstGeom>
-          <a:noFill/>
-        </p:spPr>
-        <p:txBody>
-          <a:bodyPr wrap="none">
-            <a:spAutoFit/>
-          </a:bodyPr>
-          <a:lstStyle/>
-          <a:p>
-            <a:pPr>
-              <a:defRPr sz="3200" b="1"/>
-            </a:pPr>
-            <a:r>
-              <a:t>Summary: BOB - The Complete Autonomous Coding Framework</a:t>
-            </a:r>
-          </a:p>
-        </p:txBody>
-      </p:sp>
-      <p:sp>
-        <p:nvSpPr>
-          <p:cNvPr id="3" name="TextBox 2"/>
-          <p:cNvSpPr txBox="1"/>
-          <p:nvPr/>
-        </p:nvSpPr>
-        <p:spPr>
-          <a:xfrm>
-            <a:off x="457200" y="1097280"/>
-            <a:ext cx="11277295" cy="5029200"/>
-          </a:xfrm>
-          <a:prstGeom prst="rect">
-            <a:avLst/>
-          </a:prstGeom>
-          <a:noFill/>
-        </p:spPr>
-        <p:txBody>
-          <a:bodyPr wrap="square">
-            <a:spAutoFit/>
-          </a:bodyPr>
-          <a:lstStyle/>
-          <a:p>
-            <a:pPr>
-              <a:spcBef>
-                <a:spcPts val="1200"/>
-              </a:spcBef>
-              <a:defRPr sz="2000"/>
-            </a:pPr>
-            <a:r>
-              <a:t>Core Capabilities:</a:t>
-            </a:r>
-          </a:p>
-          <a:p>
-            <a:pPr>
-              <a:spcBef>
-                <a:spcPts val="1200"/>
-              </a:spcBef>
-              <a:defRPr sz="2000"/>
+              <a:spcAft>
+                <a:spcPts val="600"/>
+              </a:spcAft>
+              <a:defRPr sz="1400">
+                <a:solidFill>
+                  <a:srgbClr val="000000"/>
+                </a:solidFill>
+              </a:defRPr>
+            </a:pPr>
+            <a:r>
+              <a:t>CORE CAPABILITIES</a:t>
+            </a:r>
+          </a:p>
+          <a:p>
+            <a:pPr>
+              <a:spcAft>
+                <a:spcPts val="600"/>
+              </a:spcAft>
+              <a:defRPr sz="1400">
+                <a:solidFill>
+                  <a:srgbClr val="000000"/>
+                </a:solidFill>
+              </a:defRPr>
             </a:pPr>
             <a:r>
               <a:t>  - Multi-project management with isolated state</a:t>
@@ -4343,10 +4233,14 @@
           </a:p>
           <a:p>
             <a:pPr>
-              <a:spcBef>
-                <a:spcPts val="1200"/>
-              </a:spcBef>
-              <a:defRPr sz="2000"/>
+              <a:spcAft>
+                <a:spcPts val="600"/>
+              </a:spcAft>
+              <a:defRPr sz="1400">
+                <a:solidFill>
+                  <a:srgbClr val="000000"/>
+                </a:solidFill>
+              </a:defRPr>
             </a:pPr>
             <a:r>
               <a:t>  - Intelligent escalation: Sonnet -&gt; Opus -&gt; Diagnosis</a:t>
@@ -4354,10 +4248,14 @@
           </a:p>
           <a:p>
             <a:pPr>
-              <a:spcBef>
-                <a:spcPts val="1200"/>
-              </a:spcBef>
-              <a:defRPr sz="2000"/>
+              <a:spcAft>
+                <a:spcPts val="600"/>
+              </a:spcAft>
+              <a:defRPr sz="1400">
+                <a:solidFill>
+                  <a:srgbClr val="000000"/>
+                </a:solidFill>
+              </a:defRPr>
             </a:pPr>
             <a:r>
               <a:t>  - Research-first workflow for knowledge-heavy tasks</a:t>
@@ -4365,10 +4263,14 @@
           </a:p>
           <a:p>
             <a:pPr>
-              <a:spcBef>
-                <a:spcPts val="1200"/>
-              </a:spcBef>
-              <a:defRPr sz="2000"/>
+              <a:spcAft>
+                <a:spcPts val="600"/>
+              </a:spcAft>
+              <a:defRPr sz="1400">
+                <a:solidFill>
+                  <a:srgbClr val="000000"/>
+                </a:solidFill>
+              </a:defRPr>
             </a:pPr>
             <a:r>
               <a:t>  - Parallel execution with dependency resolution</a:t>
@@ -4376,10 +4278,14 @@
           </a:p>
           <a:p>
             <a:pPr>
-              <a:spcBef>
-                <a:spcPts val="1200"/>
-              </a:spcBef>
-              <a:defRPr sz="2000"/>
+              <a:spcAft>
+                <a:spcPts val="600"/>
+              </a:spcAft>
+              <a:defRPr sz="1400">
+                <a:solidFill>
+                  <a:srgbClr val="000000"/>
+                </a:solidFill>
+              </a:defRPr>
             </a:pPr>
             <a:r>
               <a:t>  - Real-time cost tracking with budget controls</a:t>
@@ -4387,95 +4293,125 @@
           </a:p>
           <a:p>
             <a:pPr>
-              <a:spcBef>
-                <a:spcPts val="1200"/>
-              </a:spcBef>
-              <a:defRPr sz="2000"/>
-            </a:pPr>
-          </a:p>
-          <a:p>
-            <a:pPr>
-              <a:spcBef>
-                <a:spcPts val="1200"/>
-              </a:spcBef>
-              <a:defRPr sz="2000"/>
-            </a:pPr>
-            <a:r>
-              <a:t>Production Ready:</a:t>
-            </a:r>
-          </a:p>
-          <a:p>
-            <a:pPr>
-              <a:spcBef>
-                <a:spcPts val="1200"/>
-              </a:spcBef>
-              <a:defRPr sz="2000"/>
-            </a:pPr>
-            <a:r>
-              <a:t>  - 1,200+ tests passing</a:t>
-            </a:r>
-          </a:p>
-          <a:p>
-            <a:pPr>
-              <a:spcBef>
-                <a:spcPts val="1200"/>
-              </a:spcBef>
-              <a:defRPr sz="2000"/>
-            </a:pPr>
-            <a:r>
-              <a:t>  - SQLite persistence with transactions</a:t>
-            </a:r>
-          </a:p>
-          <a:p>
-            <a:pPr>
-              <a:spcBef>
-                <a:spcPts val="1200"/>
-              </a:spcBef>
-              <a:defRPr sz="2000"/>
-            </a:pPr>
-            <a:r>
-              <a:t>  - Comprehensive CLI with JSON output</a:t>
-            </a:r>
-          </a:p>
-          <a:p>
-            <a:pPr>
-              <a:spcBef>
-                <a:spcPts val="1200"/>
-              </a:spcBef>
-              <a:defRPr sz="2000"/>
-            </a:pPr>
-          </a:p>
-          <a:p>
-            <a:pPr>
-              <a:spcBef>
-                <a:spcPts val="1200"/>
-              </a:spcBef>
-              <a:defRPr sz="2000"/>
-            </a:pPr>
-            <a:r>
-              <a:t>Get Started:</a:t>
-            </a:r>
-          </a:p>
-          <a:p>
-            <a:pPr>
-              <a:spcBef>
-                <a:spcPts val="1200"/>
-              </a:spcBef>
-              <a:defRPr sz="2000"/>
-            </a:pPr>
-            <a:r>
-              <a:t>  $ git clone https://github.com/yourusername/bob.git</a:t>
-            </a:r>
-          </a:p>
-          <a:p>
-            <a:pPr>
-              <a:spcBef>
-                <a:spcPts val="1200"/>
-              </a:spcBef>
-              <a:defRPr sz="2000"/>
-            </a:pPr>
-            <a:r>
-              <a:t>  $ bob project create my-app ./workspace file://spec.yaml &amp;&amp; bob run</a:t>
+              <a:spcAft>
+                <a:spcPts val="600"/>
+              </a:spcAft>
+              <a:defRPr sz="1400">
+                <a:solidFill>
+                  <a:srgbClr val="000000"/>
+                </a:solidFill>
+              </a:defRPr>
+            </a:pPr>
+          </a:p>
+          <a:p>
+            <a:pPr>
+              <a:spcAft>
+                <a:spcPts val="600"/>
+              </a:spcAft>
+              <a:defRPr sz="1400">
+                <a:solidFill>
+                  <a:srgbClr val="000000"/>
+                </a:solidFill>
+              </a:defRPr>
+            </a:pPr>
+            <a:r>
+              <a:t>PRODUCTION READY: 1,200+ tests - SQLite - Claude Code SDK</a:t>
+            </a:r>
+          </a:p>
+          <a:p>
+            <a:pPr>
+              <a:spcAft>
+                <a:spcPts val="600"/>
+              </a:spcAft>
+              <a:defRPr sz="1400">
+                <a:solidFill>
+                  <a:srgbClr val="000000"/>
+                </a:solidFill>
+              </a:defRPr>
+            </a:pPr>
+          </a:p>
+          <a:p>
+            <a:pPr>
+              <a:spcAft>
+                <a:spcPts val="600"/>
+              </a:spcAft>
+              <a:defRPr sz="1400">
+                <a:solidFill>
+                  <a:srgbClr val="000000"/>
+                </a:solidFill>
+              </a:defRPr>
+            </a:pPr>
+            <a:r>
+              <a:t>GET STARTED:</a:t>
+            </a:r>
+          </a:p>
+          <a:p>
+            <a:pPr>
+              <a:spcAft>
+                <a:spcPts val="600"/>
+              </a:spcAft>
+              <a:defRPr sz="1400">
+                <a:solidFill>
+                  <a:srgbClr val="000000"/>
+                </a:solidFill>
+              </a:defRPr>
+            </a:pPr>
+            <a:r>
+              <a:t>  $ git clone https://github.com/yye00/bob.git &amp;&amp; bob run</a:t>
+            </a:r>
+          </a:p>
+          <a:p>
+            <a:pPr>
+              <a:spcAft>
+                <a:spcPts val="600"/>
+              </a:spcAft>
+              <a:defRPr sz="1400">
+                <a:solidFill>
+                  <a:srgbClr val="000000"/>
+                </a:solidFill>
+              </a:defRPr>
+            </a:pPr>
+          </a:p>
+          <a:p>
+            <a:pPr>
+              <a:spcAft>
+                <a:spcPts val="600"/>
+              </a:spcAft>
+              <a:defRPr sz="1400">
+                <a:solidFill>
+                  <a:srgbClr val="000000"/>
+                </a:solidFill>
+              </a:defRPr>
+            </a:pPr>
+            <a:r>
+              <a:t>"Can We Build It? YES WE CAN!"</a:t>
+            </a:r>
+          </a:p>
+          <a:p>
+            <a:pPr>
+              <a:spcAft>
+                <a:spcPts val="600"/>
+              </a:spcAft>
+              <a:defRPr sz="1400">
+                <a:solidFill>
+                  <a:srgbClr val="000000"/>
+                </a:solidFill>
+              </a:defRPr>
+            </a:pPr>
+          </a:p>
+          <a:p>
+            <a:pPr>
+              <a:spcAft>
+                <a:spcPts val="600"/>
+              </a:spcAft>
+              <a:defRPr sz="1400">
+                <a:solidFill>
+                  <a:srgbClr val="000000"/>
+                </a:solidFill>
+              </a:defRPr>
+            </a:pPr>
+            <a:r>
+              <a:t>Yaakoub Elkhamra, PhD - https://github.com/yye00/bob</a:t>
             </a:r>
           </a:p>
         </p:txBody>
@@ -4500,14 +4436,57 @@
       <p:grpSpPr/>
       <p:sp>
         <p:nvSpPr>
-          <p:cNvPr id="2" name="TextBox 1"/>
+          <p:cNvPr id="2" name="Rectangle 1"/>
+          <p:cNvSpPr/>
+          <p:nvPr/>
+        </p:nvSpPr>
+        <p:spPr>
+          <a:xfrm>
+            <a:off x="0" y="0"/>
+            <a:ext cx="9144000" cy="914400"/>
+          </a:xfrm>
+          <a:prstGeom prst="rect">
+            <a:avLst/>
+          </a:prstGeom>
+          <a:solidFill>
+            <a:srgbClr val="FFCC00"/>
+          </a:solidFill>
+          <a:ln>
+            <a:noFill/>
+          </a:ln>
+        </p:spPr>
+        <p:style>
+          <a:lnRef idx="1">
+            <a:schemeClr val="accent1"/>
+          </a:lnRef>
+          <a:fillRef idx="3">
+            <a:schemeClr val="accent1"/>
+          </a:fillRef>
+          <a:effectRef idx="2">
+            <a:schemeClr val="accent1"/>
+          </a:effectRef>
+          <a:fontRef idx="minor">
+            <a:schemeClr val="lt1"/>
+          </a:fontRef>
+        </p:style>
+        <p:txBody>
+          <a:bodyPr rtlCol="0" anchor="ctr"/>
+          <a:lstStyle/>
+          <a:p>
+            <a:pPr algn="ctr"/>
+          </a:p>
+        </p:txBody>
+      </p:sp>
+      <p:sp>
+        <p:nvSpPr>
+          <p:cNvPr id="3" name="TextBox 2"/>
           <p:cNvSpPr txBox="1"/>
           <p:nvPr/>
         </p:nvSpPr>
         <p:spPr>
           <a:xfrm>
-            <a:off x="457200" y="274320"/>
-            <a:ext cx="11277295" cy="731520"/>
+            <a:off x="274320" y="182880"/>
+            <a:ext cx="8595360" cy="640080"/>
           </a:xfrm>
           <a:prstGeom prst="rect">
             <a:avLst/>
@@ -4521,24 +4500,28 @@
           <a:lstStyle/>
           <a:p>
             <a:pPr>
-              <a:defRPr sz="3200" b="1"/>
-            </a:pPr>
-            <a:r>
-              <a:t>The Challenge: AI-Assisted Development at Scale</a:t>
-            </a:r>
-          </a:p>
-        </p:txBody>
-      </p:sp>
-      <p:sp>
-        <p:nvSpPr>
-          <p:cNvPr id="3" name="TextBox 2"/>
+              <a:defRPr sz="2800" b="1">
+                <a:solidFill>
+                  <a:srgbClr val="003366"/>
+                </a:solidFill>
+              </a:defRPr>
+            </a:pPr>
+            <a:r>
+              <a:t>🔨 The Origin Story</a:t>
+            </a:r>
+          </a:p>
+        </p:txBody>
+      </p:sp>
+      <p:sp>
+        <p:nvSpPr>
+          <p:cNvPr id="4" name="TextBox 3"/>
           <p:cNvSpPr txBox="1"/>
           <p:nvPr/>
         </p:nvSpPr>
         <p:spPr>
           <a:xfrm>
             <a:off x="457200" y="1097280"/>
-            <a:ext cx="11277295" cy="5029200"/>
+            <a:ext cx="8229600" cy="5029200"/>
           </a:xfrm>
           <a:prstGeom prst="rect">
             <a:avLst/>
@@ -4552,76 +4535,263 @@
           <a:lstStyle/>
           <a:p>
             <a:pPr>
-              <a:spcBef>
-                <a:spcPts val="1200"/>
-              </a:spcBef>
-              <a:defRPr sz="2000"/>
-            </a:pPr>
-            <a:r>
-              <a:t>Single Project Focus - Can only work on one project at a time</a:t>
-            </a:r>
-          </a:p>
-          <a:p>
-            <a:pPr>
-              <a:spcBef>
-                <a:spcPts val="1200"/>
-              </a:spcBef>
-              <a:defRPr sz="2000"/>
-            </a:pPr>
-            <a:r>
-              <a:t>No Visibility - Unknown costs, no progress tracking, plain text logs</a:t>
-            </a:r>
-          </a:p>
-          <a:p>
-            <a:pPr>
-              <a:spcBef>
-                <a:spcPts val="1200"/>
-              </a:spcBef>
-              <a:defRPr sz="2000"/>
-            </a:pPr>
-            <a:r>
-              <a:t>Fragile Execution - Sequential tasks, manual intervention on failure</a:t>
-            </a:r>
-          </a:p>
-          <a:p>
-            <a:pPr>
-              <a:spcBef>
-                <a:spcPts val="1200"/>
-              </a:spcBef>
-              <a:defRPr sz="2000"/>
-            </a:pPr>
-            <a:r>
-              <a:t>Limited Intelligence - Same approach regardless of problem type</a:t>
-            </a:r>
-          </a:p>
-          <a:p>
-            <a:pPr>
-              <a:spcBef>
-                <a:spcPts val="1200"/>
-              </a:spcBef>
-              <a:defRPr sz="2000"/>
-            </a:pPr>
-            <a:r>
-              <a:t>No Recovery - Lost progress when interrupted</a:t>
-            </a:r>
-          </a:p>
-          <a:p>
-            <a:pPr>
-              <a:spcBef>
-                <a:spcPts val="1200"/>
-              </a:spcBef>
-              <a:defRPr sz="2000"/>
-            </a:pPr>
-          </a:p>
-          <a:p>
-            <a:pPr>
-              <a:spcBef>
-                <a:spcPts val="1200"/>
-              </a:spcBef>
-              <a:defRPr sz="2000"/>
-            </a:pPr>
-            <a:r>
-              <a:t>We need infrastructure, not just an agent.</a:t>
+              <a:spcAft>
+                <a:spcPts val="600"/>
+              </a:spcAft>
+              <a:defRPr sz="1400">
+                <a:solidFill>
+                  <a:srgbClr val="000000"/>
+                </a:solidFill>
+              </a:defRPr>
+            </a:pPr>
+            <a:r>
+              <a:t>THE VISION:</a:t>
+            </a:r>
+          </a:p>
+          <a:p>
+            <a:pPr>
+              <a:spcAft>
+                <a:spcPts val="600"/>
+              </a:spcAft>
+              <a:defRPr sz="1400">
+                <a:solidFill>
+                  <a:srgbClr val="000000"/>
+                </a:solidFill>
+              </a:defRPr>
+            </a:pPr>
+            <a:r>
+              <a:t>I wanted to build a RECURSIVE workflow:</a:t>
+            </a:r>
+          </a:p>
+          <a:p>
+            <a:pPr>
+              <a:spcAft>
+                <a:spcPts val="600"/>
+              </a:spcAft>
+              <a:defRPr sz="1400">
+                <a:solidFill>
+                  <a:srgbClr val="000000"/>
+                </a:solidFill>
+              </a:defRPr>
+            </a:pPr>
+            <a:r>
+              <a:t>    RESEARCH -&gt; PLAN -&gt; EXECUTE -&gt; (loop until done)</a:t>
+            </a:r>
+          </a:p>
+          <a:p>
+            <a:pPr>
+              <a:spcAft>
+                <a:spcPts val="600"/>
+              </a:spcAft>
+              <a:defRPr sz="1400">
+                <a:solidFill>
+                  <a:srgbClr val="000000"/>
+                </a:solidFill>
+              </a:defRPr>
+            </a:pPr>
+          </a:p>
+          <a:p>
+            <a:pPr>
+              <a:spcAft>
+                <a:spcPts val="600"/>
+              </a:spcAft>
+              <a:defRPr sz="1400">
+                <a:solidFill>
+                  <a:srgbClr val="000000"/>
+                </a:solidFill>
+              </a:defRPr>
+            </a:pPr>
+            <a:r>
+              <a:t>THE PROBLEM:</a:t>
+            </a:r>
+          </a:p>
+          <a:p>
+            <a:pPr>
+              <a:spcAft>
+                <a:spcPts val="600"/>
+              </a:spcAft>
+              <a:defRPr sz="1400">
+                <a:solidFill>
+                  <a:srgbClr val="000000"/>
+                </a:solidFill>
+              </a:defRPr>
+            </a:pPr>
+            <a:r>
+              <a:t>TOKENS WERE AN ISSUE</a:t>
+            </a:r>
+          </a:p>
+          <a:p>
+            <a:pPr>
+              <a:spcAft>
+                <a:spcPts val="600"/>
+              </a:spcAft>
+              <a:defRPr sz="1400">
+                <a:solidFill>
+                  <a:srgbClr val="000000"/>
+                </a:solidFill>
+              </a:defRPr>
+            </a:pPr>
+            <a:r>
+              <a:t>- Complex multi-step workflows = massive context</a:t>
+            </a:r>
+          </a:p>
+          <a:p>
+            <a:pPr>
+              <a:spcAft>
+                <a:spcPts val="600"/>
+              </a:spcAft>
+              <a:defRPr sz="1400">
+                <a:solidFill>
+                  <a:srgbClr val="000000"/>
+                </a:solidFill>
+              </a:defRPr>
+            </a:pPr>
+            <a:r>
+              <a:t>- API costs added up quickly</a:t>
+            </a:r>
+          </a:p>
+          <a:p>
+            <a:pPr>
+              <a:spcAft>
+                <a:spcPts val="600"/>
+              </a:spcAft>
+              <a:defRPr sz="1400">
+                <a:solidFill>
+                  <a:srgbClr val="000000"/>
+                </a:solidFill>
+              </a:defRPr>
+            </a:pPr>
+            <a:r>
+              <a:t>- Had to choose between capability and affordability</a:t>
+            </a:r>
+          </a:p>
+          <a:p>
+            <a:pPr>
+              <a:spcAft>
+                <a:spcPts val="600"/>
+              </a:spcAft>
+              <a:defRPr sz="1400">
+                <a:solidFill>
+                  <a:srgbClr val="000000"/>
+                </a:solidFill>
+              </a:defRPr>
+            </a:pPr>
+          </a:p>
+          <a:p>
+            <a:pPr>
+              <a:spcAft>
+                <a:spcPts val="600"/>
+              </a:spcAft>
+              <a:defRPr sz="1400">
+                <a:solidFill>
+                  <a:srgbClr val="000000"/>
+                </a:solidFill>
+              </a:defRPr>
+            </a:pPr>
+            <a:r>
+              <a:t>THE BREAKTHROUGH:</a:t>
+            </a:r>
+          </a:p>
+          <a:p>
+            <a:pPr>
+              <a:spcAft>
+                <a:spcPts val="600"/>
+              </a:spcAft>
+              <a:defRPr sz="1400">
+                <a:solidFill>
+                  <a:srgbClr val="000000"/>
+                </a:solidFill>
+              </a:defRPr>
+            </a:pPr>
+            <a:r>
+              <a:t>CLAUDE CODE MAX SUBSCRIPTION</a:t>
+            </a:r>
+          </a:p>
+          <a:p>
+            <a:pPr>
+              <a:spcAft>
+                <a:spcPts val="600"/>
+              </a:spcAft>
+              <a:defRPr sz="1400">
+                <a:solidFill>
+                  <a:srgbClr val="000000"/>
+                </a:solidFill>
+              </a:defRPr>
+            </a:pPr>
+            <a:r>
+              <a:t>- Unlimited tokens for complex workflows</a:t>
+            </a:r>
+          </a:p>
+          <a:p>
+            <a:pPr>
+              <a:spcAft>
+                <a:spcPts val="600"/>
+              </a:spcAft>
+              <a:defRPr sz="1400">
+                <a:solidFill>
+                  <a:srgbClr val="000000"/>
+                </a:solidFill>
+              </a:defRPr>
+            </a:pPr>
+            <a:r>
+              <a:t>- Started with Claude Code Harness Demo</a:t>
+            </a:r>
+          </a:p>
+          <a:p>
+            <a:pPr>
+              <a:spcAft>
+                <a:spcPts val="600"/>
+              </a:spcAft>
+              <a:defRPr sz="1400">
+                <a:solidFill>
+                  <a:srgbClr val="000000"/>
+                </a:solidFill>
+              </a:defRPr>
+            </a:pPr>
+            <a:r>
+              <a:t>  (Anthropic's Autonomous Coding Quickstart)</a:t>
+            </a:r>
+          </a:p>
+          <a:p>
+            <a:pPr>
+              <a:spcAft>
+                <a:spcPts val="600"/>
+              </a:spcAft>
+              <a:defRPr sz="1400">
+                <a:solidFill>
+                  <a:srgbClr val="000000"/>
+                </a:solidFill>
+              </a:defRPr>
+            </a:pPr>
+            <a:r>
+              <a:t>- Extended it into a full production framework</a:t>
+            </a:r>
+          </a:p>
+          <a:p>
+            <a:pPr>
+              <a:spcAft>
+                <a:spcPts val="600"/>
+              </a:spcAft>
+              <a:defRPr sz="1400">
+                <a:solidFill>
+                  <a:srgbClr val="000000"/>
+                </a:solidFill>
+              </a:defRPr>
+            </a:pPr>
+          </a:p>
+          <a:p>
+            <a:pPr>
+              <a:spcAft>
+                <a:spcPts val="600"/>
+              </a:spcAft>
+              <a:defRPr sz="1400">
+                <a:solidFill>
+                  <a:srgbClr val="000000"/>
+                </a:solidFill>
+              </a:defRPr>
+            </a:pPr>
+            <a:r>
+              <a:t>Built with: CLAUDE CODE SDK</a:t>
             </a:r>
           </a:p>
         </p:txBody>
@@ -4646,14 +4816,57 @@
       <p:grpSpPr/>
       <p:sp>
         <p:nvSpPr>
-          <p:cNvPr id="2" name="TextBox 1"/>
+          <p:cNvPr id="2" name="Rectangle 1"/>
+          <p:cNvSpPr/>
+          <p:nvPr/>
+        </p:nvSpPr>
+        <p:spPr>
+          <a:xfrm>
+            <a:off x="0" y="0"/>
+            <a:ext cx="9144000" cy="914400"/>
+          </a:xfrm>
+          <a:prstGeom prst="rect">
+            <a:avLst/>
+          </a:prstGeom>
+          <a:solidFill>
+            <a:srgbClr val="FFCC00"/>
+          </a:solidFill>
+          <a:ln>
+            <a:noFill/>
+          </a:ln>
+        </p:spPr>
+        <p:style>
+          <a:lnRef idx="1">
+            <a:schemeClr val="accent1"/>
+          </a:lnRef>
+          <a:fillRef idx="3">
+            <a:schemeClr val="accent1"/>
+          </a:fillRef>
+          <a:effectRef idx="2">
+            <a:schemeClr val="accent1"/>
+          </a:effectRef>
+          <a:fontRef idx="minor">
+            <a:schemeClr val="lt1"/>
+          </a:fontRef>
+        </p:style>
+        <p:txBody>
+          <a:bodyPr rtlCol="0" anchor="ctr"/>
+          <a:lstStyle/>
+          <a:p>
+            <a:pPr algn="ctr"/>
+          </a:p>
+        </p:txBody>
+      </p:sp>
+      <p:sp>
+        <p:nvSpPr>
+          <p:cNvPr id="3" name="TextBox 2"/>
           <p:cNvSpPr txBox="1"/>
           <p:nvPr/>
         </p:nvSpPr>
         <p:spPr>
           <a:xfrm>
-            <a:off x="457200" y="274320"/>
-            <a:ext cx="11277295" cy="731520"/>
+            <a:off x="274320" y="182880"/>
+            <a:ext cx="8595360" cy="640080"/>
           </a:xfrm>
           <a:prstGeom prst="rect">
             <a:avLst/>
@@ -4667,24 +4880,28 @@
           <a:lstStyle/>
           <a:p>
             <a:pPr>
-              <a:defRPr sz="3200" b="1"/>
-            </a:pPr>
-            <a:r>
-              <a:t>BOB: Build Orchestration Bot</a:t>
-            </a:r>
-          </a:p>
-        </p:txBody>
-      </p:sp>
-      <p:sp>
-        <p:nvSpPr>
-          <p:cNvPr id="3" name="TextBox 2"/>
+              <a:defRPr sz="2800" b="1">
+                <a:solidFill>
+                  <a:srgbClr val="003366"/>
+                </a:solidFill>
+              </a:defRPr>
+            </a:pPr>
+            <a:r>
+              <a:t>🔨 The Challenge</a:t>
+            </a:r>
+          </a:p>
+        </p:txBody>
+      </p:sp>
+      <p:sp>
+        <p:nvSpPr>
+          <p:cNvPr id="4" name="TextBox 3"/>
           <p:cNvSpPr txBox="1"/>
           <p:nvPr/>
         </p:nvSpPr>
         <p:spPr>
           <a:xfrm>
             <a:off x="457200" y="1097280"/>
-            <a:ext cx="11277295" cy="5029200"/>
+            <a:ext cx="8229600" cy="5029200"/>
           </a:xfrm>
           <a:prstGeom prst="rect">
             <a:avLst/>
@@ -4698,92 +4915,116 @@
           <a:lstStyle/>
           <a:p>
             <a:pPr>
-              <a:spcBef>
-                <a:spcPts val="1200"/>
-              </a:spcBef>
-              <a:defRPr sz="2000"/>
-            </a:pPr>
-            <a:r>
-              <a:t>A complete framework for autonomous coding at production scale</a:t>
-            </a:r>
-          </a:p>
-          <a:p>
-            <a:pPr>
-              <a:spcBef>
-                <a:spcPts val="1200"/>
-              </a:spcBef>
-              <a:defRPr sz="2000"/>
-            </a:pPr>
-          </a:p>
-          <a:p>
-            <a:pPr>
-              <a:spcBef>
-                <a:spcPts val="1200"/>
-              </a:spcBef>
-              <a:defRPr sz="2000"/>
-            </a:pPr>
-            <a:r>
-              <a:t>Multi-Project Management - Isolated state, per-project configs</a:t>
-            </a:r>
-          </a:p>
-          <a:p>
-            <a:pPr>
-              <a:spcBef>
-                <a:spcPts val="1200"/>
-              </a:spcBef>
-              <a:defRPr sz="2000"/>
-            </a:pPr>
-            <a:r>
-              <a:t>Intelligent Execution - Parallel tasks, auto-escalation, research-first</a:t>
-            </a:r>
-          </a:p>
-          <a:p>
-            <a:pPr>
-              <a:spcBef>
-                <a:spcPts val="1200"/>
-              </a:spcBef>
-              <a:defRPr sz="2000"/>
-            </a:pPr>
-            <a:r>
-              <a:t>Full Observability - Cost tracking, JSON logging, checkpointing</a:t>
-            </a:r>
-          </a:p>
-          <a:p>
-            <a:pPr>
-              <a:spcBef>
-                <a:spcPts val="1200"/>
-              </a:spcBef>
-              <a:defRPr sz="2000"/>
-            </a:pPr>
-          </a:p>
-          <a:p>
-            <a:pPr>
-              <a:spcBef>
-                <a:spcPts val="1200"/>
-              </a:spcBef>
-              <a:defRPr sz="2000"/>
-            </a:pPr>
-            <a:r>
-              <a:t>Key Innovation: BOB doesn't just run agents - it ORCHESTRATES them</a:t>
-            </a:r>
-          </a:p>
-          <a:p>
-            <a:pPr>
-              <a:spcBef>
-                <a:spcPts val="1200"/>
-              </a:spcBef>
-              <a:defRPr sz="2000"/>
-            </a:pPr>
-          </a:p>
-          <a:p>
-            <a:pPr>
-              <a:spcBef>
-                <a:spcPts val="1200"/>
-              </a:spcBef>
-              <a:defRPr sz="2000"/>
-            </a:pPr>
-            <a:r>
-              <a:t>Built on: Anthropic Claude Quickstarts - Autonomous Coding Demo</a:t>
+              <a:spcAft>
+                <a:spcPts val="600"/>
+              </a:spcAft>
+              <a:defRPr sz="1400">
+                <a:solidFill>
+                  <a:srgbClr val="000000"/>
+                </a:solidFill>
+              </a:defRPr>
+            </a:pPr>
+            <a:r>
+              <a:t>Current Pain Points:</a:t>
+            </a:r>
+          </a:p>
+          <a:p>
+            <a:pPr>
+              <a:spcAft>
+                <a:spcPts val="600"/>
+              </a:spcAft>
+              <a:defRPr sz="1400">
+                <a:solidFill>
+                  <a:srgbClr val="000000"/>
+                </a:solidFill>
+              </a:defRPr>
+            </a:pPr>
+          </a:p>
+          <a:p>
+            <a:pPr>
+              <a:spcAft>
+                <a:spcPts val="600"/>
+              </a:spcAft>
+              <a:defRPr sz="1400">
+                <a:solidFill>
+                  <a:srgbClr val="000000"/>
+                </a:solidFill>
+              </a:defRPr>
+            </a:pPr>
+            <a:r>
+              <a:t>[!] Single Project Focus - Can only work on one project at a time</a:t>
+            </a:r>
+          </a:p>
+          <a:p>
+            <a:pPr>
+              <a:spcAft>
+                <a:spcPts val="600"/>
+              </a:spcAft>
+              <a:defRPr sz="1400">
+                <a:solidFill>
+                  <a:srgbClr val="000000"/>
+                </a:solidFill>
+              </a:defRPr>
+            </a:pPr>
+            <a:r>
+              <a:t>[!] No Visibility - Unknown costs until the bill arrives</a:t>
+            </a:r>
+          </a:p>
+          <a:p>
+            <a:pPr>
+              <a:spcAft>
+                <a:spcPts val="600"/>
+              </a:spcAft>
+              <a:defRPr sz="1400">
+                <a:solidFill>
+                  <a:srgbClr val="000000"/>
+                </a:solidFill>
+              </a:defRPr>
+            </a:pPr>
+            <a:r>
+              <a:t>[!] Fragile Execution - Sequential task processing only</a:t>
+            </a:r>
+          </a:p>
+          <a:p>
+            <a:pPr>
+              <a:spcAft>
+                <a:spcPts val="600"/>
+              </a:spcAft>
+              <a:defRPr sz="1400">
+                <a:solidFill>
+                  <a:srgbClr val="000000"/>
+                </a:solidFill>
+              </a:defRPr>
+            </a:pPr>
+            <a:r>
+              <a:t>[!] Limited Intelligence - Same approach regardless of problem type</a:t>
+            </a:r>
+          </a:p>
+          <a:p>
+            <a:pPr>
+              <a:spcAft>
+                <a:spcPts val="600"/>
+              </a:spcAft>
+              <a:defRPr sz="1400">
+                <a:solidFill>
+                  <a:srgbClr val="000000"/>
+                </a:solidFill>
+              </a:defRPr>
+            </a:pPr>
+          </a:p>
+          <a:p>
+            <a:pPr>
+              <a:spcAft>
+                <a:spcPts val="600"/>
+              </a:spcAft>
+              <a:defRPr sz="1400">
+                <a:solidFill>
+                  <a:srgbClr val="000000"/>
+                </a:solidFill>
+              </a:defRPr>
+            </a:pPr>
+            <a:r>
+              <a:t>"We need infrastructure, not just an agent."</a:t>
             </a:r>
           </a:p>
         </p:txBody>
@@ -4808,14 +5049,57 @@
       <p:grpSpPr/>
       <p:sp>
         <p:nvSpPr>
-          <p:cNvPr id="2" name="TextBox 1"/>
+          <p:cNvPr id="2" name="Rectangle 1"/>
+          <p:cNvSpPr/>
+          <p:nvPr/>
+        </p:nvSpPr>
+        <p:spPr>
+          <a:xfrm>
+            <a:off x="0" y="0"/>
+            <a:ext cx="9144000" cy="914400"/>
+          </a:xfrm>
+          <a:prstGeom prst="rect">
+            <a:avLst/>
+          </a:prstGeom>
+          <a:solidFill>
+            <a:srgbClr val="FFCC00"/>
+          </a:solidFill>
+          <a:ln>
+            <a:noFill/>
+          </a:ln>
+        </p:spPr>
+        <p:style>
+          <a:lnRef idx="1">
+            <a:schemeClr val="accent1"/>
+          </a:lnRef>
+          <a:fillRef idx="3">
+            <a:schemeClr val="accent1"/>
+          </a:fillRef>
+          <a:effectRef idx="2">
+            <a:schemeClr val="accent1"/>
+          </a:effectRef>
+          <a:fontRef idx="minor">
+            <a:schemeClr val="lt1"/>
+          </a:fontRef>
+        </p:style>
+        <p:txBody>
+          <a:bodyPr rtlCol="0" anchor="ctr"/>
+          <a:lstStyle/>
+          <a:p>
+            <a:pPr algn="ctr"/>
+          </a:p>
+        </p:txBody>
+      </p:sp>
+      <p:sp>
+        <p:nvSpPr>
+          <p:cNvPr id="3" name="TextBox 2"/>
           <p:cNvSpPr txBox="1"/>
           <p:nvPr/>
         </p:nvSpPr>
         <p:spPr>
           <a:xfrm>
-            <a:off x="457200" y="274320"/>
-            <a:ext cx="11277295" cy="731520"/>
+            <a:off x="274320" y="182880"/>
+            <a:ext cx="8595360" cy="640080"/>
           </a:xfrm>
           <a:prstGeom prst="rect">
             <a:avLst/>
@@ -4829,24 +5113,28 @@
           <a:lstStyle/>
           <a:p>
             <a:pPr>
-              <a:defRPr sz="3200" b="1"/>
-            </a:pPr>
-            <a:r>
-              <a:t>Key Features Overview</a:t>
-            </a:r>
-          </a:p>
-        </p:txBody>
-      </p:sp>
-      <p:sp>
-        <p:nvSpPr>
-          <p:cNvPr id="3" name="TextBox 2"/>
+              <a:defRPr sz="2800" b="1">
+                <a:solidFill>
+                  <a:srgbClr val="003366"/>
+                </a:solidFill>
+              </a:defRPr>
+            </a:pPr>
+            <a:r>
+              <a:t>🔨 The Solution</a:t>
+            </a:r>
+          </a:p>
+        </p:txBody>
+      </p:sp>
+      <p:sp>
+        <p:nvSpPr>
+          <p:cNvPr id="4" name="TextBox 3"/>
           <p:cNvSpPr txBox="1"/>
           <p:nvPr/>
         </p:nvSpPr>
         <p:spPr>
           <a:xfrm>
             <a:off x="457200" y="1097280"/>
-            <a:ext cx="11277295" cy="5029200"/>
+            <a:ext cx="8229600" cy="5029200"/>
           </a:xfrm>
           <a:prstGeom prst="rect">
             <a:avLst/>
@@ -4860,101 +5148,143 @@
           <a:lstStyle/>
           <a:p>
             <a:pPr>
-              <a:spcBef>
-                <a:spcPts val="1200"/>
-              </a:spcBef>
-              <a:defRPr sz="2000"/>
-            </a:pPr>
-            <a:r>
-              <a:t>Multi-Project Management - Create, switch, track multiple projects</a:t>
-            </a:r>
-          </a:p>
-          <a:p>
-            <a:pPr>
-              <a:spcBef>
-                <a:spcPts val="1200"/>
-              </a:spcBef>
-              <a:defRPr sz="2000"/>
-            </a:pPr>
-            <a:r>
-              <a:t>Flexible Spec Sources - YAML, JSON, Markdown, GitHub Issues</a:t>
-            </a:r>
-          </a:p>
-          <a:p>
-            <a:pPr>
-              <a:spcBef>
-                <a:spcPts val="1200"/>
-              </a:spcBef>
-              <a:defRPr sz="2000"/>
-            </a:pPr>
-            <a:r>
-              <a:t>Intelligent Escalation - Sonnet -&gt; Opus -&gt; Diagnosis -&gt; Action</a:t>
-            </a:r>
-          </a:p>
-          <a:p>
-            <a:pPr>
-              <a:spcBef>
-                <a:spcPts val="1200"/>
-              </a:spcBef>
-              <a:defRPr sz="2000"/>
-            </a:pPr>
-            <a:r>
-              <a:t>Research-First Workflow - Proactive research before coding</a:t>
-            </a:r>
-          </a:p>
-          <a:p>
-            <a:pPr>
-              <a:spcBef>
-                <a:spcPts val="1200"/>
-              </a:spcBef>
-              <a:defRPr sz="2000"/>
-            </a:pPr>
-            <a:r>
-              <a:t>Parallel Execution - Run independent tasks concurrently</a:t>
-            </a:r>
-          </a:p>
-          <a:p>
-            <a:pPr>
-              <a:spcBef>
-                <a:spcPts val="1200"/>
-              </a:spcBef>
-              <a:defRPr sz="2000"/>
-            </a:pPr>
-            <a:r>
-              <a:t>Cost Tracking - Per-project, per-session, per-task with budgets</a:t>
-            </a:r>
-          </a:p>
-          <a:p>
-            <a:pPr>
-              <a:spcBef>
-                <a:spcPts val="1200"/>
-              </a:spcBef>
-              <a:defRPr sz="2000"/>
-            </a:pPr>
-            <a:r>
-              <a:t>Structured Logging - JSON events with full metadata</a:t>
-            </a:r>
-          </a:p>
-          <a:p>
-            <a:pPr>
-              <a:spcBef>
-                <a:spcPts val="1200"/>
-              </a:spcBef>
-              <a:defRPr sz="2000"/>
-            </a:pPr>
-            <a:r>
-              <a:t>Checkpoint &amp; Resume - Never lose progress to interruptions</a:t>
-            </a:r>
-          </a:p>
-          <a:p>
-            <a:pPr>
-              <a:spcBef>
-                <a:spcPts val="1200"/>
-              </a:spcBef>
-              <a:defRPr sz="2000"/>
-            </a:pPr>
-            <a:r>
-              <a:t>Plugin Architecture - Extend with custom agents &amp; sources</a:t>
+              <a:spcAft>
+                <a:spcPts val="600"/>
+              </a:spcAft>
+              <a:defRPr sz="1400">
+                <a:solidFill>
+                  <a:srgbClr val="000000"/>
+                </a:solidFill>
+              </a:defRPr>
+            </a:pPr>
+            <a:r>
+              <a:t>A complete framework for autonomous coding at production scale.</a:t>
+            </a:r>
+          </a:p>
+          <a:p>
+            <a:pPr>
+              <a:spcAft>
+                <a:spcPts val="600"/>
+              </a:spcAft>
+              <a:defRPr sz="1400">
+                <a:solidFill>
+                  <a:srgbClr val="000000"/>
+                </a:solidFill>
+              </a:defRPr>
+            </a:pPr>
+          </a:p>
+          <a:p>
+            <a:pPr>
+              <a:spcAft>
+                <a:spcPts val="600"/>
+              </a:spcAft>
+              <a:defRPr sz="1400">
+                <a:solidFill>
+                  <a:srgbClr val="000000"/>
+                </a:solidFill>
+              </a:defRPr>
+            </a:pPr>
+            <a:r>
+              <a:t>MULTI-PROJECT MANAGEMENT | INTELLIGENT EXECUTION | FULL OBSERVABILITY</a:t>
+            </a:r>
+          </a:p>
+          <a:p>
+            <a:pPr>
+              <a:spcAft>
+                <a:spcPts val="600"/>
+              </a:spcAft>
+              <a:defRPr sz="1400">
+                <a:solidFill>
+                  <a:srgbClr val="000000"/>
+                </a:solidFill>
+              </a:defRPr>
+            </a:pPr>
+            <a:r>
+              <a:t>Isolated state          | Parallel tasks       | Cost tracking</a:t>
+            </a:r>
+          </a:p>
+          <a:p>
+            <a:pPr>
+              <a:spcAft>
+                <a:spcPts val="600"/>
+              </a:spcAft>
+              <a:defRPr sz="1400">
+                <a:solidFill>
+                  <a:srgbClr val="000000"/>
+                </a:solidFill>
+              </a:defRPr>
+            </a:pPr>
+            <a:r>
+              <a:t>Per-project configs     | Auto-escalate        | JSON logging</a:t>
+            </a:r>
+          </a:p>
+          <a:p>
+            <a:pPr>
+              <a:spcAft>
+                <a:spcPts val="600"/>
+              </a:spcAft>
+              <a:defRPr sz="1400">
+                <a:solidFill>
+                  <a:srgbClr val="000000"/>
+                </a:solidFill>
+              </a:defRPr>
+            </a:pPr>
+          </a:p>
+          <a:p>
+            <a:pPr>
+              <a:spcAft>
+                <a:spcPts val="600"/>
+              </a:spcAft>
+              <a:defRPr sz="1400">
+                <a:solidFill>
+                  <a:srgbClr val="000000"/>
+                </a:solidFill>
+              </a:defRPr>
+            </a:pPr>
+            <a:r>
+              <a:t>Key Innovation: BOB doesn't just run agents - it ORCHESTRATES them.</a:t>
+            </a:r>
+          </a:p>
+          <a:p>
+            <a:pPr>
+              <a:spcAft>
+                <a:spcPts val="600"/>
+              </a:spcAft>
+              <a:defRPr sz="1400">
+                <a:solidFill>
+                  <a:srgbClr val="000000"/>
+                </a:solidFill>
+              </a:defRPr>
+            </a:pPr>
+          </a:p>
+          <a:p>
+            <a:pPr>
+              <a:spcAft>
+                <a:spcPts val="600"/>
+              </a:spcAft>
+              <a:defRPr sz="1400">
+                <a:solidFill>
+                  <a:srgbClr val="000000"/>
+                </a:solidFill>
+              </a:defRPr>
+            </a:pPr>
+            <a:r>
+              <a:t>Built on: Anthropic Claude Code SDK + Claude Code Harness</a:t>
+            </a:r>
+          </a:p>
+          <a:p>
+            <a:pPr>
+              <a:spcAft>
+                <a:spcPts val="600"/>
+              </a:spcAft>
+              <a:defRPr sz="1400">
+                <a:solidFill>
+                  <a:srgbClr val="000000"/>
+                </a:solidFill>
+              </a:defRPr>
+            </a:pPr>
+            <a:r>
+              <a:t>Enhanced: From demo to production-ready framework</a:t>
             </a:r>
           </a:p>
         </p:txBody>
@@ -4979,14 +5309,57 @@
       <p:grpSpPr/>
       <p:sp>
         <p:nvSpPr>
-          <p:cNvPr id="2" name="TextBox 1"/>
+          <p:cNvPr id="2" name="Rectangle 1"/>
+          <p:cNvSpPr/>
+          <p:nvPr/>
+        </p:nvSpPr>
+        <p:spPr>
+          <a:xfrm>
+            <a:off x="0" y="0"/>
+            <a:ext cx="9144000" cy="914400"/>
+          </a:xfrm>
+          <a:prstGeom prst="rect">
+            <a:avLst/>
+          </a:prstGeom>
+          <a:solidFill>
+            <a:srgbClr val="FFCC00"/>
+          </a:solidFill>
+          <a:ln>
+            <a:noFill/>
+          </a:ln>
+        </p:spPr>
+        <p:style>
+          <a:lnRef idx="1">
+            <a:schemeClr val="accent1"/>
+          </a:lnRef>
+          <a:fillRef idx="3">
+            <a:schemeClr val="accent1"/>
+          </a:fillRef>
+          <a:effectRef idx="2">
+            <a:schemeClr val="accent1"/>
+          </a:effectRef>
+          <a:fontRef idx="minor">
+            <a:schemeClr val="lt1"/>
+          </a:fontRef>
+        </p:style>
+        <p:txBody>
+          <a:bodyPr rtlCol="0" anchor="ctr"/>
+          <a:lstStyle/>
+          <a:p>
+            <a:pPr algn="ctr"/>
+          </a:p>
+        </p:txBody>
+      </p:sp>
+      <p:sp>
+        <p:nvSpPr>
+          <p:cNvPr id="3" name="TextBox 2"/>
           <p:cNvSpPr txBox="1"/>
           <p:nvPr/>
         </p:nvSpPr>
         <p:spPr>
           <a:xfrm>
-            <a:off x="457200" y="274320"/>
-            <a:ext cx="11277295" cy="731520"/>
+            <a:off x="274320" y="182880"/>
+            <a:ext cx="8595360" cy="640080"/>
           </a:xfrm>
           <a:prstGeom prst="rect">
             <a:avLst/>
@@ -5000,24 +5373,28 @@
           <a:lstStyle/>
           <a:p>
             <a:pPr>
-              <a:defRPr sz="3200" b="1"/>
-            </a:pPr>
-            <a:r>
-              <a:t>System Architecture</a:t>
-            </a:r>
-          </a:p>
-        </p:txBody>
-      </p:sp>
-      <p:sp>
-        <p:nvSpPr>
-          <p:cNvPr id="3" name="TextBox 2"/>
+              <a:defRPr sz="2800" b="1">
+                <a:solidFill>
+                  <a:srgbClr val="003366"/>
+                </a:solidFill>
+              </a:defRPr>
+            </a:pPr>
+            <a:r>
+              <a:t>🔨 What BOB Provides</a:t>
+            </a:r>
+          </a:p>
+        </p:txBody>
+      </p:sp>
+      <p:sp>
+        <p:nvSpPr>
+          <p:cNvPr id="4" name="TextBox 3"/>
           <p:cNvSpPr txBox="1"/>
           <p:nvPr/>
         </p:nvSpPr>
         <p:spPr>
           <a:xfrm>
             <a:off x="457200" y="1097280"/>
-            <a:ext cx="11277295" cy="5029200"/>
+            <a:ext cx="8229600" cy="5029200"/>
           </a:xfrm>
           <a:prstGeom prst="rect">
             <a:avLst/>
@@ -5031,136 +5408,152 @@
           <a:lstStyle/>
           <a:p>
             <a:pPr>
-              <a:spcBef>
-                <a:spcPts val="1200"/>
-              </a:spcBef>
-              <a:defRPr sz="2000"/>
-            </a:pPr>
-            <a:r>
-              <a:t>CLI Layer: bob project | task | run | status | logs | costs</a:t>
-            </a:r>
-          </a:p>
-          <a:p>
-            <a:pPr>
-              <a:spcBef>
-                <a:spcPts val="1200"/>
-              </a:spcBef>
-              <a:defRPr sz="2000"/>
-            </a:pPr>
-          </a:p>
-          <a:p>
-            <a:pPr>
-              <a:spcBef>
-                <a:spcPts val="1200"/>
-              </a:spcBef>
-              <a:defRPr sz="2000"/>
-            </a:pPr>
-            <a:r>
-              <a:t>Management Layer:</a:t>
-            </a:r>
-          </a:p>
-          <a:p>
-            <a:pPr>
-              <a:spcBef>
-                <a:spcPts val="1200"/>
-              </a:spcBef>
-              <a:defRPr sz="2000"/>
-            </a:pPr>
-            <a:r>
-              <a:t>  - Project Manager (create, list, delete, switch)</a:t>
-            </a:r>
-          </a:p>
-          <a:p>
-            <a:pPr>
-              <a:spcBef>
-                <a:spcPts val="1200"/>
-              </a:spcBef>
-              <a:defRPr sz="2000"/>
-            </a:pPr>
-            <a:r>
-              <a:t>  - Spec Sources (File, GitHub, extensible)</a:t>
-            </a:r>
-          </a:p>
-          <a:p>
-            <a:pPr>
-              <a:spcBef>
-                <a:spcPts val="1200"/>
-              </a:spcBef>
-              <a:defRPr sz="2000"/>
-            </a:pPr>
-            <a:r>
-              <a:t>  - Agent Registry (Coding, Research, Diagnosis, Custom)</a:t>
-            </a:r>
-          </a:p>
-          <a:p>
-            <a:pPr>
-              <a:spcBef>
-                <a:spcPts val="1200"/>
-              </a:spcBef>
-              <a:defRPr sz="2000"/>
-            </a:pPr>
-          </a:p>
-          <a:p>
-            <a:pPr>
-              <a:spcBef>
-                <a:spcPts val="1200"/>
-              </a:spcBef>
-              <a:defRPr sz="2000"/>
-            </a:pPr>
-            <a:r>
-              <a:t>Orchestration Engine:</a:t>
-            </a:r>
-          </a:p>
-          <a:p>
-            <a:pPr>
-              <a:spcBef>
-                <a:spcPts val="1200"/>
-              </a:spcBef>
-              <a:defRPr sz="2000"/>
-            </a:pPr>
-            <a:r>
-              <a:t>  - Task Queue (priority, DAG dependencies, parallel)</a:t>
-            </a:r>
-          </a:p>
-          <a:p>
-            <a:pPr>
-              <a:spcBef>
-                <a:spcPts val="1200"/>
-              </a:spcBef>
-              <a:defRPr sz="2000"/>
-            </a:pPr>
-            <a:r>
-              <a:t>  - Escalation Controller (model tiers, failure classification)</a:t>
-            </a:r>
-          </a:p>
-          <a:p>
-            <a:pPr>
-              <a:spcBef>
-                <a:spcPts val="1200"/>
-              </a:spcBef>
-              <a:defRPr sz="2000"/>
-            </a:pPr>
-            <a:r>
-              <a:t>  - Research Controller (Perplexity, web search)</a:t>
-            </a:r>
-          </a:p>
-          <a:p>
-            <a:pPr>
-              <a:spcBef>
-                <a:spcPts val="1200"/>
-              </a:spcBef>
-              <a:defRPr sz="2000"/>
-            </a:pPr>
-          </a:p>
-          <a:p>
-            <a:pPr>
-              <a:spcBef>
-                <a:spcPts val="1200"/>
-              </a:spcBef>
-              <a:defRPr sz="2000"/>
-            </a:pPr>
-            <a:r>
-              <a:t>Persistence: SQLite | Observability: JSON Logs + Cost Tracker</a:t>
+              <a:spcAft>
+                <a:spcPts val="600"/>
+              </a:spcAft>
+              <a:defRPr sz="1400">
+                <a:solidFill>
+                  <a:srgbClr val="000000"/>
+                </a:solidFill>
+              </a:defRPr>
+            </a:pPr>
+            <a:r>
+              <a:t>Multi-Project Management    Create, switch, track multiple projects</a:t>
+            </a:r>
+          </a:p>
+          <a:p>
+            <a:pPr>
+              <a:spcAft>
+                <a:spcPts val="600"/>
+              </a:spcAft>
+              <a:defRPr sz="1400">
+                <a:solidFill>
+                  <a:srgbClr val="000000"/>
+                </a:solidFill>
+              </a:defRPr>
+            </a:pPr>
+            <a:r>
+              <a:t>Flexible Spec Sources       YAML, JSON, Markdown, GitHub Issues</a:t>
+            </a:r>
+          </a:p>
+          <a:p>
+            <a:pPr>
+              <a:spcAft>
+                <a:spcPts val="600"/>
+              </a:spcAft>
+              <a:defRPr sz="1400">
+                <a:solidFill>
+                  <a:srgbClr val="000000"/>
+                </a:solidFill>
+              </a:defRPr>
+            </a:pPr>
+            <a:r>
+              <a:t>Intelligent Escalation      Sonnet -&gt; Opus -&gt; Diagnosis -&gt; Action</a:t>
+            </a:r>
+          </a:p>
+          <a:p>
+            <a:pPr>
+              <a:spcAft>
+                <a:spcPts val="600"/>
+              </a:spcAft>
+              <a:defRPr sz="1400">
+                <a:solidFill>
+                  <a:srgbClr val="000000"/>
+                </a:solidFill>
+              </a:defRPr>
+            </a:pPr>
+            <a:r>
+              <a:t>Research-First Workflow     Proactive research before coding</a:t>
+            </a:r>
+          </a:p>
+          <a:p>
+            <a:pPr>
+              <a:spcAft>
+                <a:spcPts val="600"/>
+              </a:spcAft>
+              <a:defRPr sz="1400">
+                <a:solidFill>
+                  <a:srgbClr val="000000"/>
+                </a:solidFill>
+              </a:defRPr>
+            </a:pPr>
+            <a:r>
+              <a:t>Parallel Execution          Run independent tasks concurrently</a:t>
+            </a:r>
+          </a:p>
+          <a:p>
+            <a:pPr>
+              <a:spcAft>
+                <a:spcPts val="600"/>
+              </a:spcAft>
+              <a:defRPr sz="1400">
+                <a:solidFill>
+                  <a:srgbClr val="000000"/>
+                </a:solidFill>
+              </a:defRPr>
+            </a:pPr>
+            <a:r>
+              <a:t>Cost Tracking               Per-project, per-session, per-task</a:t>
+            </a:r>
+          </a:p>
+          <a:p>
+            <a:pPr>
+              <a:spcAft>
+                <a:spcPts val="600"/>
+              </a:spcAft>
+              <a:defRPr sz="1400">
+                <a:solidFill>
+                  <a:srgbClr val="000000"/>
+                </a:solidFill>
+              </a:defRPr>
+            </a:pPr>
+            <a:r>
+              <a:t>Structured Logging          JSON events with full metadata</a:t>
+            </a:r>
+          </a:p>
+          <a:p>
+            <a:pPr>
+              <a:spcAft>
+                <a:spcPts val="600"/>
+              </a:spcAft>
+              <a:defRPr sz="1400">
+                <a:solidFill>
+                  <a:srgbClr val="000000"/>
+                </a:solidFill>
+              </a:defRPr>
+            </a:pPr>
+            <a:r>
+              <a:t>Checkpoint &amp; Resume         Never lose progress to interruptions</a:t>
+            </a:r>
+          </a:p>
+          <a:p>
+            <a:pPr>
+              <a:spcAft>
+                <a:spcPts val="600"/>
+              </a:spcAft>
+              <a:defRPr sz="1400">
+                <a:solidFill>
+                  <a:srgbClr val="000000"/>
+                </a:solidFill>
+              </a:defRPr>
+            </a:pPr>
+            <a:r>
+              <a:t>Plugin Architecture         Extend with custom agents &amp; sources</a:t>
+            </a:r>
+          </a:p>
+          <a:p>
+            <a:pPr>
+              <a:spcAft>
+                <a:spcPts val="600"/>
+              </a:spcAft>
+              <a:defRPr sz="1400">
+                <a:solidFill>
+                  <a:srgbClr val="000000"/>
+                </a:solidFill>
+              </a:defRPr>
+            </a:pPr>
+            <a:r>
+              <a:t>SQLite Persistence          Queryable, transactional data store</a:t>
             </a:r>
           </a:p>
         </p:txBody>
@@ -5185,14 +5578,57 @@
       <p:grpSpPr/>
       <p:sp>
         <p:nvSpPr>
-          <p:cNvPr id="2" name="TextBox 1"/>
+          <p:cNvPr id="2" name="Rectangle 1"/>
+          <p:cNvSpPr/>
+          <p:nvPr/>
+        </p:nvSpPr>
+        <p:spPr>
+          <a:xfrm>
+            <a:off x="0" y="0"/>
+            <a:ext cx="9144000" cy="914400"/>
+          </a:xfrm>
+          <a:prstGeom prst="rect">
+            <a:avLst/>
+          </a:prstGeom>
+          <a:solidFill>
+            <a:srgbClr val="FFCC00"/>
+          </a:solidFill>
+          <a:ln>
+            <a:noFill/>
+          </a:ln>
+        </p:spPr>
+        <p:style>
+          <a:lnRef idx="1">
+            <a:schemeClr val="accent1"/>
+          </a:lnRef>
+          <a:fillRef idx="3">
+            <a:schemeClr val="accent1"/>
+          </a:fillRef>
+          <a:effectRef idx="2">
+            <a:schemeClr val="accent1"/>
+          </a:effectRef>
+          <a:fontRef idx="minor">
+            <a:schemeClr val="lt1"/>
+          </a:fontRef>
+        </p:style>
+        <p:txBody>
+          <a:bodyPr rtlCol="0" anchor="ctr"/>
+          <a:lstStyle/>
+          <a:p>
+            <a:pPr algn="ctr"/>
+          </a:p>
+        </p:txBody>
+      </p:sp>
+      <p:sp>
+        <p:nvSpPr>
+          <p:cNvPr id="3" name="TextBox 2"/>
           <p:cNvSpPr txBox="1"/>
           <p:nvPr/>
         </p:nvSpPr>
         <p:spPr>
           <a:xfrm>
-            <a:off x="457200" y="274320"/>
-            <a:ext cx="11277295" cy="731520"/>
+            <a:off x="274320" y="182880"/>
+            <a:ext cx="8595360" cy="640080"/>
           </a:xfrm>
           <a:prstGeom prst="rect">
             <a:avLst/>
@@ -5206,24 +5642,28 @@
           <a:lstStyle/>
           <a:p>
             <a:pPr>
-              <a:defRPr sz="3200" b="1"/>
-            </a:pPr>
-            <a:r>
-              <a:t>Intelligent Escalation System</a:t>
-            </a:r>
-          </a:p>
-        </p:txBody>
-      </p:sp>
-      <p:sp>
-        <p:nvSpPr>
-          <p:cNvPr id="3" name="TextBox 2"/>
+              <a:defRPr sz="2800" b="1">
+                <a:solidFill>
+                  <a:srgbClr val="003366"/>
+                </a:solidFill>
+              </a:defRPr>
+            </a:pPr>
+            <a:r>
+              <a:t>🔨 Intelligent Failure Handling</a:t>
+            </a:r>
+          </a:p>
+        </p:txBody>
+      </p:sp>
+      <p:sp>
+        <p:nvSpPr>
+          <p:cNvPr id="4" name="TextBox 3"/>
           <p:cNvSpPr txBox="1"/>
           <p:nvPr/>
         </p:nvSpPr>
         <p:spPr>
           <a:xfrm>
             <a:off x="457200" y="1097280"/>
-            <a:ext cx="11277295" cy="5029200"/>
+            <a:ext cx="8229600" cy="5029200"/>
           </a:xfrm>
           <a:prstGeom prst="rect">
             <a:avLst/>
@@ -5237,139 +5677,158 @@
           <a:lstStyle/>
           <a:p>
             <a:pPr>
-              <a:spcBef>
-                <a:spcPts val="1200"/>
-              </a:spcBef>
-              <a:defRPr sz="2000"/>
-            </a:pPr>
-            <a:r>
-              <a:t>When a task fails, BOB escalates intelligently:</a:t>
-            </a:r>
-          </a:p>
-          <a:p>
-            <a:pPr>
-              <a:spcBef>
-                <a:spcPts val="1200"/>
-              </a:spcBef>
-              <a:defRPr sz="2000"/>
-            </a:pPr>
-          </a:p>
-          <a:p>
-            <a:pPr>
-              <a:spcBef>
-                <a:spcPts val="1200"/>
-              </a:spcBef>
-              <a:defRPr sz="2000"/>
-            </a:pPr>
-            <a:r>
-              <a:t>SONNET (3 attempts) - Fast, cost-effective ($3/$15 per 1M tokens)</a:t>
-            </a:r>
-          </a:p>
-          <a:p>
-            <a:pPr>
-              <a:spcBef>
-                <a:spcPts val="1200"/>
-              </a:spcBef>
-              <a:defRPr sz="2000"/>
-            </a:pPr>
-            <a:r>
-              <a:t>  |  still failing</a:t>
-            </a:r>
-          </a:p>
-          <a:p>
-            <a:pPr>
-              <a:spcBef>
-                <a:spcPts val="1200"/>
-              </a:spcBef>
-              <a:defRPr sz="2000"/>
-            </a:pPr>
-            <a:r>
-              <a:t>OPUS (3 attempts) - More capable ($15/$75 per 1M tokens)</a:t>
-            </a:r>
-          </a:p>
-          <a:p>
-            <a:pPr>
-              <a:spcBef>
-                <a:spcPts val="1200"/>
-              </a:spcBef>
-              <a:defRPr sz="2000"/>
-            </a:pPr>
-            <a:r>
-              <a:t>  |  still failing</a:t>
-            </a:r>
-          </a:p>
-          <a:p>
-            <a:pPr>
-              <a:spcBef>
-                <a:spcPts val="1200"/>
-              </a:spcBef>
-              <a:defRPr sz="2000"/>
-            </a:pPr>
-            <a:r>
-              <a:t>DIAGNOSIS - Root cause analysis, classifies failure type</a:t>
-            </a:r>
-          </a:p>
-          <a:p>
-            <a:pPr>
-              <a:spcBef>
-                <a:spcPts val="1200"/>
-              </a:spcBef>
-              <a:defRPr sz="2000"/>
-            </a:pPr>
-          </a:p>
-          <a:p>
-            <a:pPr>
-              <a:spcBef>
-                <a:spcPts val="1200"/>
-              </a:spcBef>
-              <a:defRPr sz="2000"/>
-            </a:pPr>
-            <a:r>
-              <a:t>Actions based on failure type:</a:t>
-            </a:r>
-          </a:p>
-          <a:p>
-            <a:pPr>
-              <a:spcBef>
-                <a:spcPts val="1200"/>
-              </a:spcBef>
-              <a:defRPr sz="2000"/>
-            </a:pPr>
-            <a:r>
-              <a:t>  TOO_BIG -&gt; Decompose into subtasks</a:t>
-            </a:r>
-          </a:p>
-          <a:p>
-            <a:pPr>
-              <a:spcBef>
-                <a:spcPts val="1200"/>
-              </a:spcBef>
-              <a:defRPr sz="2000"/>
-            </a:pPr>
-            <a:r>
-              <a:t>  MISSING_INFO -&gt; Research with Perplexity</a:t>
-            </a:r>
-          </a:p>
-          <a:p>
-            <a:pPr>
-              <a:spcBef>
-                <a:spcPts val="1200"/>
-              </a:spcBef>
-              <a:defRPr sz="2000"/>
-            </a:pPr>
-            <a:r>
-              <a:t>  WRONG_INFRA -&gt; Request user help</a:t>
-            </a:r>
-          </a:p>
-          <a:p>
-            <a:pPr>
-              <a:spcBef>
-                <a:spcPts val="1200"/>
-              </a:spcBef>
-              <a:defRPr sz="2000"/>
-            </a:pPr>
-            <a:r>
-              <a:t>  BAD_ASSUMPTIONS -&gt; Research and restructure</a:t>
+              <a:spcAft>
+                <a:spcPts val="600"/>
+              </a:spcAft>
+              <a:defRPr sz="1400">
+                <a:solidFill>
+                  <a:srgbClr val="000000"/>
+                </a:solidFill>
+              </a:defRPr>
+            </a:pPr>
+            <a:r>
+              <a:t>When a task fails, BOB doesn't give up - it escalates intelligently.</a:t>
+            </a:r>
+          </a:p>
+          <a:p>
+            <a:pPr>
+              <a:spcAft>
+                <a:spcPts val="600"/>
+              </a:spcAft>
+              <a:defRPr sz="1400">
+                <a:solidFill>
+                  <a:srgbClr val="000000"/>
+                </a:solidFill>
+              </a:defRPr>
+            </a:pPr>
+          </a:p>
+          <a:p>
+            <a:pPr>
+              <a:spcAft>
+                <a:spcPts val="600"/>
+              </a:spcAft>
+              <a:defRPr sz="1400">
+                <a:solidFill>
+                  <a:srgbClr val="000000"/>
+                </a:solidFill>
+              </a:defRPr>
+            </a:pPr>
+            <a:r>
+              <a:t>Task Attempt -&gt; SONNET (3 attempts) -&gt; OPUS (3 attempts) -&gt; DIAGNOSIS</a:t>
+            </a:r>
+          </a:p>
+          <a:p>
+            <a:pPr>
+              <a:spcAft>
+                <a:spcPts val="600"/>
+              </a:spcAft>
+              <a:defRPr sz="1400">
+                <a:solidFill>
+                  <a:srgbClr val="000000"/>
+                </a:solidFill>
+              </a:defRPr>
+            </a:pPr>
+          </a:p>
+          <a:p>
+            <a:pPr>
+              <a:spcAft>
+                <a:spcPts val="600"/>
+              </a:spcAft>
+              <a:defRPr sz="1400">
+                <a:solidFill>
+                  <a:srgbClr val="000000"/>
+                </a:solidFill>
+              </a:defRPr>
+            </a:pPr>
+            <a:r>
+              <a:t>Diagnosis Actions:</a:t>
+            </a:r>
+          </a:p>
+          <a:p>
+            <a:pPr>
+              <a:spcAft>
+                <a:spcPts val="600"/>
+              </a:spcAft>
+              <a:defRPr sz="1400">
+                <a:solidFill>
+                  <a:srgbClr val="000000"/>
+                </a:solidFill>
+              </a:defRPr>
+            </a:pPr>
+            <a:r>
+              <a:t>  TOO_BIG ---------&gt; Decompose subtasks</a:t>
+            </a:r>
+          </a:p>
+          <a:p>
+            <a:pPr>
+              <a:spcAft>
+                <a:spcPts val="600"/>
+              </a:spcAft>
+              <a:defRPr sz="1400">
+                <a:solidFill>
+                  <a:srgbClr val="000000"/>
+                </a:solidFill>
+              </a:defRPr>
+            </a:pPr>
+            <a:r>
+              <a:t>  MISSING_INFO ----&gt; Research first</a:t>
+            </a:r>
+          </a:p>
+          <a:p>
+            <a:pPr>
+              <a:spcAft>
+                <a:spcPts val="600"/>
+              </a:spcAft>
+              <a:defRPr sz="1400">
+                <a:solidFill>
+                  <a:srgbClr val="000000"/>
+                </a:solidFill>
+              </a:defRPr>
+            </a:pPr>
+            <a:r>
+              <a:t>  WRONG_INFRA -----&gt; Request user help</a:t>
+            </a:r>
+          </a:p>
+          <a:p>
+            <a:pPr>
+              <a:spcAft>
+                <a:spcPts val="600"/>
+              </a:spcAft>
+              <a:defRPr sz="1400">
+                <a:solidFill>
+                  <a:srgbClr val="000000"/>
+                </a:solidFill>
+              </a:defRPr>
+            </a:pPr>
+            <a:r>
+              <a:t>  NEEDS_RESEARCH --&gt; Targeted research</a:t>
+            </a:r>
+          </a:p>
+          <a:p>
+            <a:pPr>
+              <a:spcAft>
+                <a:spcPts val="600"/>
+              </a:spcAft>
+              <a:defRPr sz="1400">
+                <a:solidFill>
+                  <a:srgbClr val="000000"/>
+                </a:solidFill>
+              </a:defRPr>
+            </a:pPr>
+          </a:p>
+          <a:p>
+            <a:pPr>
+              <a:spcAft>
+                <a:spcPts val="600"/>
+              </a:spcAft>
+              <a:defRPr sz="1400">
+                <a:solidFill>
+                  <a:srgbClr val="000000"/>
+                </a:solidFill>
+              </a:defRPr>
+            </a:pPr>
+            <a:r>
+              <a:t>Result: Automatic recovery from most failure modes</a:t>
             </a:r>
           </a:p>
         </p:txBody>
@@ -5394,14 +5853,57 @@
       <p:grpSpPr/>
       <p:sp>
         <p:nvSpPr>
-          <p:cNvPr id="2" name="TextBox 1"/>
+          <p:cNvPr id="2" name="Rectangle 1"/>
+          <p:cNvSpPr/>
+          <p:nvPr/>
+        </p:nvSpPr>
+        <p:spPr>
+          <a:xfrm>
+            <a:off x="0" y="0"/>
+            <a:ext cx="9144000" cy="914400"/>
+          </a:xfrm>
+          <a:prstGeom prst="rect">
+            <a:avLst/>
+          </a:prstGeom>
+          <a:solidFill>
+            <a:srgbClr val="FFCC00"/>
+          </a:solidFill>
+          <a:ln>
+            <a:noFill/>
+          </a:ln>
+        </p:spPr>
+        <p:style>
+          <a:lnRef idx="1">
+            <a:schemeClr val="accent1"/>
+          </a:lnRef>
+          <a:fillRef idx="3">
+            <a:schemeClr val="accent1"/>
+          </a:fillRef>
+          <a:effectRef idx="2">
+            <a:schemeClr val="accent1"/>
+          </a:effectRef>
+          <a:fontRef idx="minor">
+            <a:schemeClr val="lt1"/>
+          </a:fontRef>
+        </p:style>
+        <p:txBody>
+          <a:bodyPr rtlCol="0" anchor="ctr"/>
+          <a:lstStyle/>
+          <a:p>
+            <a:pPr algn="ctr"/>
+          </a:p>
+        </p:txBody>
+      </p:sp>
+      <p:sp>
+        <p:nvSpPr>
+          <p:cNvPr id="3" name="TextBox 2"/>
           <p:cNvSpPr txBox="1"/>
           <p:nvPr/>
         </p:nvSpPr>
         <p:spPr>
           <a:xfrm>
-            <a:off x="457200" y="274320"/>
-            <a:ext cx="11277295" cy="731520"/>
+            <a:off x="274320" y="182880"/>
+            <a:ext cx="8595360" cy="640080"/>
           </a:xfrm>
           <a:prstGeom prst="rect">
             <a:avLst/>
@@ -5415,24 +5917,28 @@
           <a:lstStyle/>
           <a:p>
             <a:pPr>
-              <a:defRPr sz="3200" b="1"/>
-            </a:pPr>
-            <a:r>
-              <a:t>Research-First Workflow</a:t>
-            </a:r>
-          </a:p>
-        </p:txBody>
-      </p:sp>
-      <p:sp>
-        <p:nvSpPr>
-          <p:cNvPr id="3" name="TextBox 2"/>
+              <a:defRPr sz="2800" b="1">
+                <a:solidFill>
+                  <a:srgbClr val="003366"/>
+                </a:solidFill>
+              </a:defRPr>
+            </a:pPr>
+            <a:r>
+              <a:t>🔨 Research-First Workflow</a:t>
+            </a:r>
+          </a:p>
+        </p:txBody>
+      </p:sp>
+      <p:sp>
+        <p:nvSpPr>
+          <p:cNvPr id="4" name="TextBox 3"/>
           <p:cNvSpPr txBox="1"/>
           <p:nvPr/>
         </p:nvSpPr>
         <p:spPr>
           <a:xfrm>
             <a:off x="457200" y="1097280"/>
-            <a:ext cx="11277295" cy="5029200"/>
+            <a:ext cx="8229600" cy="5029200"/>
           </a:xfrm>
           <a:prstGeom prst="rect">
             <a:avLst/>
@@ -5446,10 +5952,14 @@
           <a:lstStyle/>
           <a:p>
             <a:pPr>
-              <a:spcBef>
-                <a:spcPts val="1200"/>
-              </a:spcBef>
-              <a:defRPr sz="2000"/>
+              <a:spcAft>
+                <a:spcPts val="600"/>
+              </a:spcAft>
+              <a:defRPr sz="1400">
+                <a:solidFill>
+                  <a:srgbClr val="000000"/>
+                </a:solidFill>
+              </a:defRPr>
             </a:pPr>
             <a:r>
               <a:t>Traditional: Code -&gt; Fail -&gt; Research -&gt; Code -&gt; Fail -&gt; ... -&gt; Success</a:t>
@@ -5457,29 +5967,41 @@
           </a:p>
           <a:p>
             <a:pPr>
-              <a:spcBef>
-                <a:spcPts val="1200"/>
-              </a:spcBef>
-              <a:defRPr sz="2000"/>
-            </a:pPr>
-            <a:r>
-              <a:t>  [Expensive: Multiple Opus escalations, wasted attempts]</a:t>
-            </a:r>
-          </a:p>
-          <a:p>
-            <a:pPr>
-              <a:spcBef>
-                <a:spcPts val="1200"/>
-              </a:spcBef>
-              <a:defRPr sz="2000"/>
-            </a:pPr>
-          </a:p>
-          <a:p>
-            <a:pPr>
-              <a:spcBef>
-                <a:spcPts val="1200"/>
-              </a:spcBef>
-              <a:defRPr sz="2000"/>
+              <a:spcAft>
+                <a:spcPts val="600"/>
+              </a:spcAft>
+              <a:defRPr sz="1400">
+                <a:solidFill>
+                  <a:srgbClr val="000000"/>
+                </a:solidFill>
+              </a:defRPr>
+            </a:pPr>
+            <a:r>
+              <a:t>             [Expensive: Multiple Opus escalations]</a:t>
+            </a:r>
+          </a:p>
+          <a:p>
+            <a:pPr>
+              <a:spcAft>
+                <a:spcPts val="600"/>
+              </a:spcAft>
+              <a:defRPr sz="1400">
+                <a:solidFill>
+                  <a:srgbClr val="000000"/>
+                </a:solidFill>
+              </a:defRPr>
+            </a:pPr>
+          </a:p>
+          <a:p>
+            <a:pPr>
+              <a:spcAft>
+                <a:spcPts val="600"/>
+              </a:spcAft>
+              <a:defRPr sz="1400">
+                <a:solidFill>
+                  <a:srgbClr val="000000"/>
+                </a:solidFill>
+              </a:defRPr>
             </a:pPr>
             <a:r>
               <a:t>BOB's Approach: Research -&gt; Code -&gt; Success</a:t>
@@ -5487,95 +6009,131 @@
           </a:p>
           <a:p>
             <a:pPr>
-              <a:spcBef>
-                <a:spcPts val="1200"/>
-              </a:spcBef>
-              <a:defRPr sz="2000"/>
-            </a:pPr>
-            <a:r>
-              <a:t>  [Efficient: Research upfront, implement with knowledge]</a:t>
-            </a:r>
-          </a:p>
-          <a:p>
-            <a:pPr>
-              <a:spcBef>
-                <a:spcPts val="1200"/>
-              </a:spcBef>
-              <a:defRPr sz="2000"/>
-            </a:pPr>
-          </a:p>
-          <a:p>
-            <a:pPr>
-              <a:spcBef>
-                <a:spcPts val="1200"/>
-              </a:spcBef>
-              <a:defRPr sz="2000"/>
-            </a:pPr>
-            <a:r>
-              <a:t>Mark tasks that need research BEFORE implementation:</a:t>
-            </a:r>
-          </a:p>
-          <a:p>
-            <a:pPr>
-              <a:spcBef>
-                <a:spcPts val="1200"/>
-              </a:spcBef>
-              <a:defRPr sz="2000"/>
-            </a:pPr>
-            <a:r>
-              <a:t>  research_required: true</a:t>
-            </a:r>
-          </a:p>
-          <a:p>
-            <a:pPr>
-              <a:spcBef>
-                <a:spcPts val="1200"/>
-              </a:spcBef>
-              <a:defRPr sz="2000"/>
-            </a:pPr>
-            <a:r>
-              <a:t>  research_queries:</a:t>
-            </a:r>
-          </a:p>
-          <a:p>
-            <a:pPr>
-              <a:spcBef>
-                <a:spcPts val="1200"/>
-              </a:spcBef>
-              <a:defRPr sz="2000"/>
-            </a:pPr>
-            <a:r>
-              <a:t>    - 'PostgreSQL query optimization patterns'</a:t>
-            </a:r>
-          </a:p>
-          <a:p>
-            <a:pPr>
-              <a:spcBef>
-                <a:spcPts val="1200"/>
-              </a:spcBef>
-              <a:defRPr sz="2000"/>
-            </a:pPr>
-            <a:r>
-              <a:t>    - 'Index strategies for time-series data'</a:t>
-            </a:r>
-          </a:p>
-          <a:p>
-            <a:pPr>
-              <a:spcBef>
-                <a:spcPts val="1200"/>
-              </a:spcBef>
-              <a:defRPr sz="2000"/>
-            </a:pPr>
-          </a:p>
-          <a:p>
-            <a:pPr>
-              <a:spcBef>
-                <a:spcPts val="1200"/>
-              </a:spcBef>
-              <a:defRPr sz="2000"/>
-            </a:pPr>
-            <a:r>
-              <a:t>Benefits: Proactive, guided queries, persistent findings, cost-efficient</a:t>
+              <a:spcAft>
+                <a:spcPts val="600"/>
+              </a:spcAft>
+              <a:defRPr sz="1400">
+                <a:solidFill>
+                  <a:srgbClr val="000000"/>
+                </a:solidFill>
+              </a:defRPr>
+            </a:pPr>
+            <a:r>
+              <a:t>                [Efficient: Research upfront]</a:t>
+            </a:r>
+          </a:p>
+          <a:p>
+            <a:pPr>
+              <a:spcAft>
+                <a:spcPts val="600"/>
+              </a:spcAft>
+              <a:defRPr sz="1400">
+                <a:solidFill>
+                  <a:srgbClr val="000000"/>
+                </a:solidFill>
+              </a:defRPr>
+            </a:pPr>
+          </a:p>
+          <a:p>
+            <a:pPr>
+              <a:spcAft>
+                <a:spcPts val="600"/>
+              </a:spcAft>
+              <a:defRPr sz="1400">
+                <a:solidFill>
+                  <a:srgbClr val="000000"/>
+                </a:solidFill>
+              </a:defRPr>
+            </a:pPr>
+            <a:r>
+              <a:t>tasks:</a:t>
+            </a:r>
+          </a:p>
+          <a:p>
+            <a:pPr>
+              <a:spcAft>
+                <a:spcPts val="600"/>
+              </a:spcAft>
+              <a:defRPr sz="1400">
+                <a:solidFill>
+                  <a:srgbClr val="000000"/>
+                </a:solidFill>
+              </a:defRPr>
+            </a:pPr>
+            <a:r>
+              <a:t>  - id: optimize-queries</a:t>
+            </a:r>
+          </a:p>
+          <a:p>
+            <a:pPr>
+              <a:spcAft>
+                <a:spcPts val="600"/>
+              </a:spcAft>
+              <a:defRPr sz="1400">
+                <a:solidFill>
+                  <a:srgbClr val="000000"/>
+                </a:solidFill>
+              </a:defRPr>
+            </a:pPr>
+            <a:r>
+              <a:t>    research_required: true</a:t>
+            </a:r>
+          </a:p>
+          <a:p>
+            <a:pPr>
+              <a:spcAft>
+                <a:spcPts val="600"/>
+              </a:spcAft>
+              <a:defRPr sz="1400">
+                <a:solidFill>
+                  <a:srgbClr val="000000"/>
+                </a:solidFill>
+              </a:defRPr>
+            </a:pPr>
+            <a:r>
+              <a:t>    research_queries:</a:t>
+            </a:r>
+          </a:p>
+          <a:p>
+            <a:pPr>
+              <a:spcAft>
+                <a:spcPts val="600"/>
+              </a:spcAft>
+              <a:defRPr sz="1400">
+                <a:solidFill>
+                  <a:srgbClr val="000000"/>
+                </a:solidFill>
+              </a:defRPr>
+            </a:pPr>
+            <a:r>
+              <a:t>      - "PostgreSQL EXPLAIN ANALYZE patterns"</a:t>
+            </a:r>
+          </a:p>
+          <a:p>
+            <a:pPr>
+              <a:spcAft>
+                <a:spcPts val="600"/>
+              </a:spcAft>
+              <a:defRPr sz="1400">
+                <a:solidFill>
+                  <a:srgbClr val="000000"/>
+                </a:solidFill>
+              </a:defRPr>
+            </a:pPr>
+          </a:p>
+          <a:p>
+            <a:pPr>
+              <a:spcAft>
+                <a:spcPts val="600"/>
+              </a:spcAft>
+              <a:defRPr sz="1400">
+                <a:solidFill>
+                  <a:srgbClr val="000000"/>
+                </a:solidFill>
+              </a:defRPr>
+            </a:pPr>
+            <a:r>
+              <a:t>Benefits: Proactive - Domain-specific - Persistent findings</a:t>
             </a:r>
           </a:p>
         </p:txBody>
@@ -5600,14 +6158,57 @@
       <p:grpSpPr/>
       <p:sp>
         <p:nvSpPr>
-          <p:cNvPr id="2" name="TextBox 1"/>
+          <p:cNvPr id="2" name="Rectangle 1"/>
+          <p:cNvSpPr/>
+          <p:nvPr/>
+        </p:nvSpPr>
+        <p:spPr>
+          <a:xfrm>
+            <a:off x="0" y="0"/>
+            <a:ext cx="9144000" cy="914400"/>
+          </a:xfrm>
+          <a:prstGeom prst="rect">
+            <a:avLst/>
+          </a:prstGeom>
+          <a:solidFill>
+            <a:srgbClr val="FFCC00"/>
+          </a:solidFill>
+          <a:ln>
+            <a:noFill/>
+          </a:ln>
+        </p:spPr>
+        <p:style>
+          <a:lnRef idx="1">
+            <a:schemeClr val="accent1"/>
+          </a:lnRef>
+          <a:fillRef idx="3">
+            <a:schemeClr val="accent1"/>
+          </a:fillRef>
+          <a:effectRef idx="2">
+            <a:schemeClr val="accent1"/>
+          </a:effectRef>
+          <a:fontRef idx="minor">
+            <a:schemeClr val="lt1"/>
+          </a:fontRef>
+        </p:style>
+        <p:txBody>
+          <a:bodyPr rtlCol="0" anchor="ctr"/>
+          <a:lstStyle/>
+          <a:p>
+            <a:pPr algn="ctr"/>
+          </a:p>
+        </p:txBody>
+      </p:sp>
+      <p:sp>
+        <p:nvSpPr>
+          <p:cNvPr id="3" name="TextBox 2"/>
           <p:cNvSpPr txBox="1"/>
           <p:nvPr/>
         </p:nvSpPr>
         <p:spPr>
           <a:xfrm>
-            <a:off x="457200" y="274320"/>
-            <a:ext cx="11277295" cy="731520"/>
+            <a:off x="274320" y="182880"/>
+            <a:ext cx="8595360" cy="640080"/>
           </a:xfrm>
           <a:prstGeom prst="rect">
             <a:avLst/>
@@ -5621,24 +6222,28 @@
           <a:lstStyle/>
           <a:p>
             <a:pPr>
-              <a:defRPr sz="3200" b="1"/>
-            </a:pPr>
-            <a:r>
-              <a:t>Real-Time Cost Tracking &amp; Budget Control</a:t>
-            </a:r>
-          </a:p>
-        </p:txBody>
-      </p:sp>
-      <p:sp>
-        <p:nvSpPr>
-          <p:cNvPr id="3" name="TextBox 2"/>
+              <a:defRPr sz="2800" b="1">
+                <a:solidFill>
+                  <a:srgbClr val="003366"/>
+                </a:solidFill>
+              </a:defRPr>
+            </a:pPr>
+            <a:r>
+              <a:t>🔨 Real-Time Cost Visibility</a:t>
+            </a:r>
+          </a:p>
+        </p:txBody>
+      </p:sp>
+      <p:sp>
+        <p:nvSpPr>
+          <p:cNvPr id="4" name="TextBox 3"/>
           <p:cNvSpPr txBox="1"/>
           <p:nvPr/>
         </p:nvSpPr>
         <p:spPr>
           <a:xfrm>
             <a:off x="457200" y="1097280"/>
-            <a:ext cx="11277295" cy="5029200"/>
+            <a:ext cx="8229600" cy="5029200"/>
           </a:xfrm>
           <a:prstGeom prst="rect">
             <a:avLst/>
@@ -5652,10 +6257,14 @@
           <a:lstStyle/>
           <a:p>
             <a:pPr>
-              <a:spcBef>
-                <a:spcPts val="1200"/>
-              </a:spcBef>
-              <a:defRPr sz="2000"/>
+              <a:spcAft>
+                <a:spcPts val="600"/>
+              </a:spcAft>
+              <a:defRPr sz="1400">
+                <a:solidFill>
+                  <a:srgbClr val="000000"/>
+                </a:solidFill>
+              </a:defRPr>
             </a:pPr>
             <a:r>
               <a:t>$ bob costs</a:t>
@@ -5663,18 +6272,26 @@
           </a:p>
           <a:p>
             <a:pPr>
-              <a:spcBef>
-                <a:spcPts val="1200"/>
-              </a:spcBef>
-              <a:defRPr sz="2000"/>
-            </a:pPr>
-          </a:p>
-          <a:p>
-            <a:pPr>
-              <a:spcBef>
-                <a:spcPts val="1200"/>
-              </a:spcBef>
-              <a:defRPr sz="2000"/>
+              <a:spcAft>
+                <a:spcPts val="600"/>
+              </a:spcAft>
+              <a:defRPr sz="1400">
+                <a:solidFill>
+                  <a:srgbClr val="000000"/>
+                </a:solidFill>
+              </a:defRPr>
+            </a:pPr>
+          </a:p>
+          <a:p>
+            <a:pPr>
+              <a:spcAft>
+                <a:spcPts val="600"/>
+              </a:spcAft>
+              <a:defRPr sz="1400">
+                <a:solidFill>
+                  <a:srgbClr val="000000"/>
+                </a:solidFill>
+              </a:defRPr>
             </a:pPr>
             <a:r>
               <a:t>Total Cost: $45.67</a:t>
@@ -5682,78 +6299,95 @@
           </a:p>
           <a:p>
             <a:pPr>
-              <a:spcBef>
-                <a:spcPts val="1200"/>
-              </a:spcBef>
-              <a:defRPr sz="2000"/>
-            </a:pPr>
-          </a:p>
-          <a:p>
-            <a:pPr>
-              <a:spcBef>
-                <a:spcPts val="1200"/>
-              </a:spcBef>
-              <a:defRPr sz="2000"/>
-            </a:pPr>
-            <a:r>
-              <a:t>By Model:</a:t>
-            </a:r>
-          </a:p>
-          <a:p>
-            <a:pPr>
-              <a:spcBef>
-                <a:spcPts val="1200"/>
-              </a:spcBef>
-              <a:defRPr sz="2000"/>
-            </a:pPr>
-            <a:r>
-              <a:t>  claude-sonnet-4-5: $32.10 (70.3%)</a:t>
-            </a:r>
-          </a:p>
-          <a:p>
-            <a:pPr>
-              <a:spcBef>
-                <a:spcPts val="1200"/>
-              </a:spcBef>
-              <a:defRPr sz="2000"/>
-            </a:pPr>
-            <a:r>
-              <a:t>  claude-opus-4-5:   $13.57 (29.7%)</a:t>
-            </a:r>
-          </a:p>
-          <a:p>
-            <a:pPr>
-              <a:spcBef>
-                <a:spcPts val="1200"/>
-              </a:spcBef>
-              <a:defRPr sz="2000"/>
-            </a:pPr>
-          </a:p>
-          <a:p>
-            <a:pPr>
-              <a:spcBef>
-                <a:spcPts val="1200"/>
-              </a:spcBef>
-              <a:defRPr sz="2000"/>
-            </a:pPr>
-            <a:r>
-              <a:t>By Agent: coding $38.00, research $4.50, diagnosis $3.17</a:t>
-            </a:r>
-          </a:p>
-          <a:p>
-            <a:pPr>
-              <a:spcBef>
-                <a:spcPts val="1200"/>
-              </a:spcBef>
-              <a:defRPr sz="2000"/>
-            </a:pPr>
-          </a:p>
-          <a:p>
-            <a:pPr>
-              <a:spcBef>
-                <a:spcPts val="1200"/>
-              </a:spcBef>
-              <a:defRPr sz="2000"/>
+              <a:spcAft>
+                <a:spcPts val="600"/>
+              </a:spcAft>
+              <a:defRPr sz="1400">
+                <a:solidFill>
+                  <a:srgbClr val="000000"/>
+                </a:solidFill>
+              </a:defRPr>
+            </a:pPr>
+          </a:p>
+          <a:p>
+            <a:pPr>
+              <a:spcAft>
+                <a:spcPts val="600"/>
+              </a:spcAft>
+              <a:defRPr sz="1400">
+                <a:solidFill>
+                  <a:srgbClr val="000000"/>
+                </a:solidFill>
+              </a:defRPr>
+            </a:pPr>
+            <a:r>
+              <a:t>By Model:   claude-sonnet-4-5: $32.10 (70.3%)</a:t>
+            </a:r>
+          </a:p>
+          <a:p>
+            <a:pPr>
+              <a:spcAft>
+                <a:spcPts val="600"/>
+              </a:spcAft>
+              <a:defRPr sz="1400">
+                <a:solidFill>
+                  <a:srgbClr val="000000"/>
+                </a:solidFill>
+              </a:defRPr>
+            </a:pPr>
+            <a:r>
+              <a:t>            claude-opus-4-5:   $13.57 (29.7%)</a:t>
+            </a:r>
+          </a:p>
+          <a:p>
+            <a:pPr>
+              <a:spcAft>
+                <a:spcPts val="600"/>
+              </a:spcAft>
+              <a:defRPr sz="1400">
+                <a:solidFill>
+                  <a:srgbClr val="000000"/>
+                </a:solidFill>
+              </a:defRPr>
+            </a:pPr>
+          </a:p>
+          <a:p>
+            <a:pPr>
+              <a:spcAft>
+                <a:spcPts val="600"/>
+              </a:spcAft>
+              <a:defRPr sz="1400">
+                <a:solidFill>
+                  <a:srgbClr val="000000"/>
+                </a:solidFill>
+              </a:defRPr>
+            </a:pPr>
+            <a:r>
+              <a:t>By Agent:   coding: $38.00 | research: $4.50 | diagnosis: $3.17</a:t>
+            </a:r>
+          </a:p>
+          <a:p>
+            <a:pPr>
+              <a:spcAft>
+                <a:spcPts val="600"/>
+              </a:spcAft>
+              <a:defRPr sz="1400">
+                <a:solidFill>
+                  <a:srgbClr val="000000"/>
+                </a:solidFill>
+              </a:defRPr>
+            </a:pPr>
+          </a:p>
+          <a:p>
+            <a:pPr>
+              <a:spcAft>
+                <a:spcPts val="600"/>
+              </a:spcAft>
+              <a:defRPr sz="1400">
+                <a:solidFill>
+                  <a:srgbClr val="000000"/>
+                </a:solidFill>
+              </a:defRPr>
             </a:pPr>
             <a:r>
               <a:t>Budget Controls:</a:t>
@@ -5761,35 +6395,32 @@
           </a:p>
           <a:p>
             <a:pPr>
-              <a:spcBef>
-                <a:spcPts val="1200"/>
-              </a:spcBef>
-              <a:defRPr sz="2000"/>
-            </a:pPr>
-            <a:r>
-              <a:t>  max_cost_per_project: 100.0  # Hard stop at $100</a:t>
-            </a:r>
-          </a:p>
-          <a:p>
-            <a:pPr>
-              <a:spcBef>
-                <a:spcPts val="1200"/>
-              </a:spcBef>
-              <a:defRPr sz="2000"/>
-            </a:pPr>
-            <a:r>
-              <a:t>  max_cost_per_session: 5.0    # Per-session limit</a:t>
-            </a:r>
-          </a:p>
-          <a:p>
-            <a:pPr>
-              <a:spcBef>
-                <a:spcPts val="1200"/>
-              </a:spcBef>
-              <a:defRPr sz="2000"/>
-            </a:pPr>
-            <a:r>
-              <a:t>  warn_at_percent: 80          # Alert at 80%</a:t>
+              <a:spcAft>
+                <a:spcPts val="600"/>
+              </a:spcAft>
+              <a:defRPr sz="1400">
+                <a:solidFill>
+                  <a:srgbClr val="000000"/>
+                </a:solidFill>
+              </a:defRPr>
+            </a:pPr>
+            <a:r>
+              <a:t>  max_cost_per_project: 100.0</a:t>
+            </a:r>
+          </a:p>
+          <a:p>
+            <a:pPr>
+              <a:spcAft>
+                <a:spcPts val="600"/>
+              </a:spcAft>
+              <a:defRPr sz="1400">
+                <a:solidFill>
+                  <a:srgbClr val="000000"/>
+                </a:solidFill>
+              </a:defRPr>
+            </a:pPr>
+            <a:r>
+              <a:t>  max_cost_per_session: 5.0</a:t>
             </a:r>
           </a:p>
         </p:txBody>
@@ -5814,14 +6445,57 @@
       <p:grpSpPr/>
       <p:sp>
         <p:nvSpPr>
-          <p:cNvPr id="2" name="TextBox 1"/>
+          <p:cNvPr id="2" name="Rectangle 1"/>
+          <p:cNvSpPr/>
+          <p:nvPr/>
+        </p:nvSpPr>
+        <p:spPr>
+          <a:xfrm>
+            <a:off x="0" y="0"/>
+            <a:ext cx="9144000" cy="914400"/>
+          </a:xfrm>
+          <a:prstGeom prst="rect">
+            <a:avLst/>
+          </a:prstGeom>
+          <a:solidFill>
+            <a:srgbClr val="FFCC00"/>
+          </a:solidFill>
+          <a:ln>
+            <a:noFill/>
+          </a:ln>
+        </p:spPr>
+        <p:style>
+          <a:lnRef idx="1">
+            <a:schemeClr val="accent1"/>
+          </a:lnRef>
+          <a:fillRef idx="3">
+            <a:schemeClr val="accent1"/>
+          </a:fillRef>
+          <a:effectRef idx="2">
+            <a:schemeClr val="accent1"/>
+          </a:effectRef>
+          <a:fontRef idx="minor">
+            <a:schemeClr val="lt1"/>
+          </a:fontRef>
+        </p:style>
+        <p:txBody>
+          <a:bodyPr rtlCol="0" anchor="ctr"/>
+          <a:lstStyle/>
+          <a:p>
+            <a:pPr algn="ctr"/>
+          </a:p>
+        </p:txBody>
+      </p:sp>
+      <p:sp>
+        <p:nvSpPr>
+          <p:cNvPr id="3" name="TextBox 2"/>
           <p:cNvSpPr txBox="1"/>
           <p:nvPr/>
         </p:nvSpPr>
         <p:spPr>
           <a:xfrm>
-            <a:off x="457200" y="274320"/>
-            <a:ext cx="11277295" cy="731520"/>
+            <a:off x="274320" y="182880"/>
+            <a:ext cx="8595360" cy="640080"/>
           </a:xfrm>
           <a:prstGeom prst="rect">
             <a:avLst/>
@@ -5835,24 +6509,28 @@
           <a:lstStyle/>
           <a:p>
             <a:pPr>
-              <a:defRPr sz="3200" b="1"/>
-            </a:pPr>
-            <a:r>
-              <a:t>Developer-Friendly CLI</a:t>
-            </a:r>
-          </a:p>
-        </p:txBody>
-      </p:sp>
-      <p:sp>
-        <p:nvSpPr>
-          <p:cNvPr id="3" name="TextBox 2"/>
+              <a:defRPr sz="2800" b="1">
+                <a:solidFill>
+                  <a:srgbClr val="003366"/>
+                </a:solidFill>
+              </a:defRPr>
+            </a:pPr>
+            <a:r>
+              <a:t>🔨 Developer-Friendly CLI</a:t>
+            </a:r>
+          </a:p>
+        </p:txBody>
+      </p:sp>
+      <p:sp>
+        <p:nvSpPr>
+          <p:cNvPr id="4" name="TextBox 3"/>
           <p:cNvSpPr txBox="1"/>
           <p:nvPr/>
         </p:nvSpPr>
         <p:spPr>
           <a:xfrm>
             <a:off x="457200" y="1097280"/>
-            <a:ext cx="5486400" cy="457200"/>
+            <a:ext cx="8229600" cy="5029200"/>
           </a:xfrm>
           <a:prstGeom prst="rect">
             <a:avLst/>
@@ -5860,263 +6538,95 @@
           <a:noFill/>
         </p:spPr>
         <p:txBody>
-          <a:bodyPr wrap="none">
-            <a:spAutoFit/>
-          </a:bodyPr>
-          <a:lstStyle/>
-          <a:p>
-            <a:pPr>
-              <a:defRPr sz="2200" b="1"/>
-            </a:pPr>
-            <a:r>
-              <a:t>Project &amp; Task Management</a:t>
-            </a:r>
-          </a:p>
-        </p:txBody>
-      </p:sp>
-      <p:sp>
-        <p:nvSpPr>
-          <p:cNvPr id="4" name="TextBox 3"/>
-          <p:cNvSpPr txBox="1"/>
-          <p:nvPr/>
-        </p:nvSpPr>
-        <p:spPr>
-          <a:xfrm>
-            <a:off x="457200" y="1645920"/>
-            <a:ext cx="5486400" cy="4572000"/>
-          </a:xfrm>
-          <a:prstGeom prst="rect">
-            <a:avLst/>
-          </a:prstGeom>
-          <a:noFill/>
-        </p:spPr>
-        <p:txBody>
           <a:bodyPr wrap="square">
             <a:spAutoFit/>
           </a:bodyPr>
           <a:lstStyle/>
           <a:p>
             <a:pPr>
-              <a:spcBef>
-                <a:spcPts val="800"/>
-              </a:spcBef>
-              <a:defRPr sz="1800"/>
-            </a:pPr>
-            <a:r>
-              <a:t>$ bob project create my-app ./workspace file://spec.yaml</a:t>
-            </a:r>
-          </a:p>
-          <a:p>
-            <a:pPr>
-              <a:spcBef>
-                <a:spcPts val="800"/>
-              </a:spcBef>
-              <a:defRPr sz="1800"/>
-            </a:pPr>
-            <a:r>
-              <a:t>$ bob project list</a:t>
-            </a:r>
-          </a:p>
-          <a:p>
-            <a:pPr>
-              <a:spcBef>
-                <a:spcPts val="800"/>
-              </a:spcBef>
-              <a:defRPr sz="1800"/>
-            </a:pPr>
-            <a:r>
-              <a:t>$ bob project use my-app</a:t>
-            </a:r>
-          </a:p>
-          <a:p>
-            <a:pPr>
-              <a:spcBef>
-                <a:spcPts val="800"/>
-              </a:spcBef>
-              <a:defRPr sz="1800"/>
-            </a:pPr>
-          </a:p>
-          <a:p>
-            <a:pPr>
-              <a:spcBef>
-                <a:spcPts val="800"/>
-              </a:spcBef>
-              <a:defRPr sz="1800"/>
-            </a:pPr>
-            <a:r>
-              <a:t>$ bob task list</a:t>
-            </a:r>
-          </a:p>
-          <a:p>
-            <a:pPr>
-              <a:spcBef>
-                <a:spcPts val="800"/>
-              </a:spcBef>
-              <a:defRPr sz="1800"/>
-            </a:pPr>
-            <a:r>
-              <a:t>$ bob task list --status failed</a:t>
-            </a:r>
-          </a:p>
-          <a:p>
-            <a:pPr>
-              <a:spcBef>
-                <a:spcPts val="800"/>
-              </a:spcBef>
-              <a:defRPr sz="1800"/>
-            </a:pPr>
-            <a:r>
-              <a:t>$ bob task show F001 --escalation</a:t>
-            </a:r>
-          </a:p>
-          <a:p>
-            <a:pPr>
-              <a:spcBef>
-                <a:spcPts val="800"/>
-              </a:spcBef>
-              <a:defRPr sz="1800"/>
-            </a:pPr>
-            <a:r>
-              <a:t>$ bob task retry F001</a:t>
-            </a:r>
-          </a:p>
-        </p:txBody>
-      </p:sp>
-      <p:sp>
-        <p:nvSpPr>
-          <p:cNvPr id="5" name="TextBox 4"/>
-          <p:cNvSpPr txBox="1"/>
-          <p:nvPr/>
-        </p:nvSpPr>
-        <p:spPr>
-          <a:xfrm>
-            <a:off x="6248095" y="1097280"/>
-            <a:ext cx="5486400" cy="457200"/>
-          </a:xfrm>
-          <a:prstGeom prst="rect">
-            <a:avLst/>
-          </a:prstGeom>
-          <a:noFill/>
-        </p:spPr>
-        <p:txBody>
-          <a:bodyPr wrap="none">
-            <a:spAutoFit/>
-          </a:bodyPr>
-          <a:lstStyle/>
-          <a:p>
-            <a:pPr>
-              <a:defRPr sz="2200" b="1"/>
-            </a:pPr>
-            <a:r>
-              <a:t>Execution &amp; Monitoring</a:t>
-            </a:r>
-          </a:p>
-        </p:txBody>
-      </p:sp>
-      <p:sp>
-        <p:nvSpPr>
-          <p:cNvPr id="6" name="TextBox 5"/>
-          <p:cNvSpPr txBox="1"/>
-          <p:nvPr/>
-        </p:nvSpPr>
-        <p:spPr>
-          <a:xfrm>
-            <a:off x="6248095" y="1645920"/>
-            <a:ext cx="5486400" cy="4572000"/>
-          </a:xfrm>
-          <a:prstGeom prst="rect">
-            <a:avLst/>
-          </a:prstGeom>
-          <a:noFill/>
-        </p:spPr>
-        <p:txBody>
-          <a:bodyPr wrap="square">
-            <a:spAutoFit/>
-          </a:bodyPr>
-          <a:lstStyle/>
-          <a:p>
-            <a:pPr>
-              <a:spcBef>
-                <a:spcPts val="800"/>
-              </a:spcBef>
-              <a:defRPr sz="1800"/>
-            </a:pPr>
-            <a:r>
-              <a:t>$ bob run</a:t>
-            </a:r>
-          </a:p>
-          <a:p>
-            <a:pPr>
-              <a:spcBef>
-                <a:spcPts val="800"/>
-              </a:spcBef>
-              <a:defRPr sz="1800"/>
-            </a:pPr>
-            <a:r>
-              <a:t>$ bob run --parallel 3</a:t>
-            </a:r>
-          </a:p>
-          <a:p>
-            <a:pPr>
-              <a:spcBef>
-                <a:spcPts val="800"/>
-              </a:spcBef>
-              <a:defRPr sz="1800"/>
-            </a:pPr>
-            <a:r>
-              <a:t>$ bob run --dry-run</a:t>
-            </a:r>
-          </a:p>
-          <a:p>
-            <a:pPr>
-              <a:spcBef>
-                <a:spcPts val="800"/>
-              </a:spcBef>
-              <a:defRPr sz="1800"/>
-            </a:pPr>
-            <a:r>
-              <a:t>$ bob run --resume</a:t>
-            </a:r>
-          </a:p>
-          <a:p>
-            <a:pPr>
-              <a:spcBef>
-                <a:spcPts val="800"/>
-              </a:spcBef>
-              <a:defRPr sz="1800"/>
-            </a:pPr>
-          </a:p>
-          <a:p>
-            <a:pPr>
-              <a:spcBef>
-                <a:spcPts val="800"/>
-              </a:spcBef>
-              <a:defRPr sz="1800"/>
-            </a:pPr>
-            <a:r>
-              <a:t>$ bob status</a:t>
-            </a:r>
-          </a:p>
-          <a:p>
-            <a:pPr>
-              <a:spcBef>
-                <a:spcPts val="800"/>
-              </a:spcBef>
-              <a:defRPr sz="1800"/>
-            </a:pPr>
-            <a:r>
-              <a:t>$ bob logs --follow</a:t>
-            </a:r>
-          </a:p>
-          <a:p>
-            <a:pPr>
-              <a:spcBef>
-                <a:spcPts val="800"/>
-              </a:spcBef>
-              <a:defRPr sz="1800"/>
-            </a:pPr>
-            <a:r>
-              <a:t>$ bob costs</a:t>
+              <a:spcAft>
+                <a:spcPts val="600"/>
+              </a:spcAft>
+              <a:defRPr sz="1400">
+                <a:solidFill>
+                  <a:srgbClr val="000000"/>
+                </a:solidFill>
+              </a:defRPr>
+            </a:pPr>
+            <a:r>
+              <a:t>PROJECT: bob project create/list/use/status</a:t>
+            </a:r>
+          </a:p>
+          <a:p>
+            <a:pPr>
+              <a:spcAft>
+                <a:spcPts val="600"/>
+              </a:spcAft>
+              <a:defRPr sz="1400">
+                <a:solidFill>
+                  <a:srgbClr val="000000"/>
+                </a:solidFill>
+              </a:defRPr>
+            </a:pPr>
+            <a:r>
+              <a:t>TASK:    bob task list --status failed --needs-research</a:t>
+            </a:r>
+          </a:p>
+          <a:p>
+            <a:pPr>
+              <a:spcAft>
+                <a:spcPts val="600"/>
+              </a:spcAft>
+              <a:defRPr sz="1400">
+                <a:solidFill>
+                  <a:srgbClr val="000000"/>
+                </a:solidFill>
+              </a:defRPr>
+            </a:pPr>
+            <a:r>
+              <a:t>RUN:     bob run / bob run --parallel 3 / bob run --resume</a:t>
+            </a:r>
+          </a:p>
+          <a:p>
+            <a:pPr>
+              <a:spcAft>
+                <a:spcPts val="600"/>
+              </a:spcAft>
+              <a:defRPr sz="1400">
+                <a:solidFill>
+                  <a:srgbClr val="000000"/>
+                </a:solidFill>
+              </a:defRPr>
+            </a:pPr>
+            <a:r>
+              <a:t>MONITOR: bob status / bob logs --follow / bob costs</a:t>
+            </a:r>
+          </a:p>
+          <a:p>
+            <a:pPr>
+              <a:spcAft>
+                <a:spcPts val="600"/>
+              </a:spcAft>
+              <a:defRPr sz="1400">
+                <a:solidFill>
+                  <a:srgbClr val="000000"/>
+                </a:solidFill>
+              </a:defRPr>
+            </a:pPr>
+          </a:p>
+          <a:p>
+            <a:pPr>
+              <a:spcAft>
+                <a:spcPts val="600"/>
+              </a:spcAft>
+              <a:defRPr sz="1400">
+                <a:solidFill>
+                  <a:srgbClr val="000000"/>
+                </a:solidFill>
+              </a:defRPr>
+            </a:pPr>
+            <a:r>
+              <a:t>All commands support --json for scripting integration</a:t>
             </a:r>
           </a:p>
         </p:txBody>

--- a/docs/BOB_Presentation.pptx
+++ b/docs/BOB_Presentation.pptx
@@ -19,7 +19,7 @@
     <p:sldId id="267" r:id="rId18"/>
     <p:sldId id="268" r:id="rId19"/>
   </p:sldIdLst>
-  <p:sldSz cx="9144000" cy="6858000" type="screen4x3"/>
+  <p:sldSz cx="12191695" cy="6858000" type="screen4x3"/>
   <p:notesSz cx="6858000" cy="9144000"/>
   <p:defaultTextStyle>
     <a:defPPr>
@@ -3109,13 +3109,13 @@
         <p:spPr>
           <a:xfrm>
             <a:off x="0" y="0"/>
-            <a:ext cx="9144000" cy="1371600"/>
+            <a:ext cx="12191695" cy="1371600"/>
           </a:xfrm>
           <a:prstGeom prst="rect">
             <a:avLst/>
           </a:prstGeom>
           <a:solidFill>
-            <a:srgbClr val="FFCC00"/>
+            <a:srgbClr val="FFC107"/>
           </a:solidFill>
           <a:ln>
             <a:noFill/>
@@ -3151,29 +3151,29 @@
         </p:nvSpPr>
         <p:spPr>
           <a:xfrm>
-            <a:off x="457200" y="1645920"/>
-            <a:ext cx="8229600" cy="1371600"/>
-          </a:xfrm>
-          <a:prstGeom prst="rect">
-            <a:avLst/>
-          </a:prstGeom>
-          <a:noFill/>
-        </p:spPr>
-        <p:txBody>
-          <a:bodyPr wrap="none">
+            <a:off x="457200" y="1828800"/>
+            <a:ext cx="11277295" cy="914400"/>
+          </a:xfrm>
+          <a:prstGeom prst="rect">
+            <a:avLst/>
+          </a:prstGeom>
+          <a:noFill/>
+        </p:spPr>
+        <p:txBody>
+          <a:bodyPr wrap="square">
             <a:spAutoFit/>
           </a:bodyPr>
           <a:lstStyle/>
           <a:p>
             <a:pPr algn="ctr">
-              <a:defRPr sz="4400" b="1">
-                <a:solidFill>
-                  <a:srgbClr val="003366"/>
-                </a:solidFill>
-              </a:defRPr>
-            </a:pPr>
-            <a:r>
-              <a:t>🔨 BOB: Build Orchestration Bot 🔨</a:t>
+              <a:defRPr sz="7200" b="1">
+                <a:solidFill>
+                  <a:srgbClr val="0D47A1"/>
+                </a:solidFill>
+              </a:defRPr>
+            </a:pPr>
+            <a:r>
+              <a:t>BOB</a:t>
             </a:r>
           </a:p>
         </p:txBody>
@@ -3186,33 +3186,29 @@
         </p:nvSpPr>
         <p:spPr>
           <a:xfrm>
-            <a:off x="457200" y="3017520"/>
-            <a:ext cx="8229600" cy="914400"/>
-          </a:xfrm>
-          <a:prstGeom prst="rect">
-            <a:avLst/>
-          </a:prstGeom>
-          <a:noFill/>
-        </p:spPr>
-        <p:txBody>
-          <a:bodyPr wrap="none">
+            <a:off x="457200" y="2743200"/>
+            <a:ext cx="11277295" cy="548640"/>
+          </a:xfrm>
+          <a:prstGeom prst="rect">
+            <a:avLst/>
+          </a:prstGeom>
+          <a:noFill/>
+        </p:spPr>
+        <p:txBody>
+          <a:bodyPr wrap="square">
             <a:spAutoFit/>
           </a:bodyPr>
           <a:lstStyle/>
           <a:p>
             <a:pPr algn="ctr">
-              <a:defRPr sz="2400">
-                <a:solidFill>
-                  <a:srgbClr val="404040"/>
-                </a:solidFill>
-              </a:defRPr>
-            </a:pPr>
-            <a:r>
-              <a:t>A Production-Ready Framework for</a:t>
-            </a:r>
-            <a:br/>
-            <a:r>
-              <a:t>Autonomous AI-Assisted Software Development</a:t>
+              <a:defRPr sz="3600" b="0">
+                <a:solidFill>
+                  <a:srgbClr val="616161"/>
+                </a:solidFill>
+              </a:defRPr>
+            </a:pPr>
+            <a:r>
+              <a:t>Build Orchestration Bot</a:t>
             </a:r>
           </a:p>
         </p:txBody>
@@ -3225,24 +3221,59 @@
         </p:nvSpPr>
         <p:spPr>
           <a:xfrm>
-            <a:off x="457200" y="3931920"/>
-            <a:ext cx="8229600" cy="457200"/>
-          </a:xfrm>
-          <a:prstGeom prst="rect">
-            <a:avLst/>
-          </a:prstGeom>
-          <a:noFill/>
-        </p:spPr>
-        <p:txBody>
-          <a:bodyPr wrap="none">
+            <a:off x="457200" y="3383280"/>
+            <a:ext cx="11277295" cy="457200"/>
+          </a:xfrm>
+          <a:prstGeom prst="rect">
+            <a:avLst/>
+          </a:prstGeom>
+          <a:noFill/>
+        </p:spPr>
+        <p:txBody>
+          <a:bodyPr wrap="square">
             <a:spAutoFit/>
           </a:bodyPr>
           <a:lstStyle/>
           <a:p>
             <a:pPr algn="ctr">
-              <a:defRPr sz="2000" i="1">
-                <a:solidFill>
-                  <a:srgbClr val="FF8C00"/>
+              <a:defRPr sz="2000" b="0">
+                <a:solidFill>
+                  <a:srgbClr val="616161"/>
+                </a:solidFill>
+              </a:defRPr>
+            </a:pPr>
+            <a:r>
+              <a:t>A Production-Ready Framework for Autonomous AI-Assisted Development</a:t>
+            </a:r>
+          </a:p>
+        </p:txBody>
+      </p:sp>
+      <p:sp>
+        <p:nvSpPr>
+          <p:cNvPr id="6" name="TextBox 5"/>
+          <p:cNvSpPr txBox="1"/>
+          <p:nvPr/>
+        </p:nvSpPr>
+        <p:spPr>
+          <a:xfrm>
+            <a:off x="457200" y="4114800"/>
+            <a:ext cx="11277295" cy="457200"/>
+          </a:xfrm>
+          <a:prstGeom prst="rect">
+            <a:avLst/>
+          </a:prstGeom>
+          <a:noFill/>
+        </p:spPr>
+        <p:txBody>
+          <a:bodyPr wrap="square">
+            <a:spAutoFit/>
+          </a:bodyPr>
+          <a:lstStyle/>
+          <a:p>
+            <a:pPr algn="ctr">
+              <a:defRPr sz="1800" b="0">
+                <a:solidFill>
+                  <a:srgbClr val="FF9800"/>
                 </a:solidFill>
               </a:defRPr>
             </a:pPr>
@@ -3254,30 +3285,30 @@
       </p:sp>
       <p:sp>
         <p:nvSpPr>
-          <p:cNvPr id="6" name="TextBox 5"/>
-          <p:cNvSpPr txBox="1"/>
-          <p:nvPr/>
-        </p:nvSpPr>
-        <p:spPr>
-          <a:xfrm>
-            <a:off x="457200" y="5029200"/>
-            <a:ext cx="8229600" cy="457200"/>
-          </a:xfrm>
-          <a:prstGeom prst="rect">
-            <a:avLst/>
-          </a:prstGeom>
-          <a:noFill/>
-        </p:spPr>
-        <p:txBody>
-          <a:bodyPr wrap="none">
+          <p:cNvPr id="7" name="TextBox 6"/>
+          <p:cNvSpPr txBox="1"/>
+          <p:nvPr/>
+        </p:nvSpPr>
+        <p:spPr>
+          <a:xfrm>
+            <a:off x="457200" y="5303520"/>
+            <a:ext cx="11277295" cy="365760"/>
+          </a:xfrm>
+          <a:prstGeom prst="rect">
+            <a:avLst/>
+          </a:prstGeom>
+          <a:noFill/>
+        </p:spPr>
+        <p:txBody>
+          <a:bodyPr wrap="square">
             <a:spAutoFit/>
           </a:bodyPr>
           <a:lstStyle/>
           <a:p>
             <a:pPr algn="ctr">
-              <a:defRPr sz="1800">
-                <a:solidFill>
-                  <a:srgbClr val="003366"/>
+              <a:defRPr sz="2000" b="1">
+                <a:solidFill>
+                  <a:srgbClr val="0D47A1"/>
                 </a:solidFill>
               </a:defRPr>
             </a:pPr>
@@ -3289,30 +3320,30 @@
       </p:sp>
       <p:sp>
         <p:nvSpPr>
-          <p:cNvPr id="7" name="TextBox 6"/>
-          <p:cNvSpPr txBox="1"/>
-          <p:nvPr/>
-        </p:nvSpPr>
-        <p:spPr>
-          <a:xfrm>
-            <a:off x="457200" y="5486400"/>
-            <a:ext cx="8229600" cy="457200"/>
-          </a:xfrm>
-          <a:prstGeom prst="rect">
-            <a:avLst/>
-          </a:prstGeom>
-          <a:noFill/>
-        </p:spPr>
-        <p:txBody>
-          <a:bodyPr wrap="none">
+          <p:cNvPr id="8" name="TextBox 7"/>
+          <p:cNvSpPr txBox="1"/>
+          <p:nvPr/>
+        </p:nvSpPr>
+        <p:spPr>
+          <a:xfrm>
+            <a:off x="457200" y="5760720"/>
+            <a:ext cx="11277295" cy="274320"/>
+          </a:xfrm>
+          <a:prstGeom prst="rect">
+            <a:avLst/>
+          </a:prstGeom>
+          <a:noFill/>
+        </p:spPr>
+        <p:txBody>
+          <a:bodyPr wrap="square">
             <a:spAutoFit/>
           </a:bodyPr>
           <a:lstStyle/>
           <a:p>
             <a:pPr algn="ctr">
-              <a:defRPr sz="1600">
-                <a:solidFill>
-                  <a:srgbClr val="404040"/>
+              <a:defRPr sz="1400" b="0">
+                <a:solidFill>
+                  <a:srgbClr val="616161"/>
                 </a:solidFill>
               </a:defRPr>
             </a:pPr>
@@ -3349,13 +3380,13 @@
         <p:spPr>
           <a:xfrm>
             <a:off x="0" y="0"/>
-            <a:ext cx="9144000" cy="914400"/>
+            <a:ext cx="12191695" cy="1005840"/>
           </a:xfrm>
           <a:prstGeom prst="rect">
             <a:avLst/>
           </a:prstGeom>
           <a:solidFill>
-            <a:srgbClr val="FFCC00"/>
+            <a:srgbClr val="FFC107"/>
           </a:solidFill>
           <a:ln>
             <a:noFill/>
@@ -3391,8 +3422,8 @@
         </p:nvSpPr>
         <p:spPr>
           <a:xfrm>
-            <a:off x="274320" y="182880"/>
-            <a:ext cx="8595360" cy="640080"/>
+            <a:off x="457200" y="228600"/>
+            <a:ext cx="10972800" cy="640080"/>
           </a:xfrm>
           <a:prstGeom prst="rect">
             <a:avLst/>
@@ -3406,14 +3437,14 @@
           <a:lstStyle/>
           <a:p>
             <a:pPr>
-              <a:defRPr sz="2800" b="1">
-                <a:solidFill>
-                  <a:srgbClr val="003366"/>
-                </a:solidFill>
-              </a:defRPr>
-            </a:pPr>
-            <a:r>
-              <a:t>🔨 Multiple Spec Formats</a:t>
+              <a:defRPr sz="3200" b="1">
+                <a:solidFill>
+                  <a:srgbClr val="0D47A1"/>
+                </a:solidFill>
+              </a:defRPr>
+            </a:pPr>
+            <a:r>
+              <a:t>Developer-Friendly CLI</a:t>
             </a:r>
           </a:p>
         </p:txBody>
@@ -3426,8 +3457,43 @@
         </p:nvSpPr>
         <p:spPr>
           <a:xfrm>
-            <a:off x="457200" y="1097280"/>
-            <a:ext cx="8229600" cy="5029200"/>
+            <a:off x="457200" y="594360"/>
+            <a:ext cx="10972800" cy="365760"/>
+          </a:xfrm>
+          <a:prstGeom prst="rect">
+            <a:avLst/>
+          </a:prstGeom>
+          <a:noFill/>
+        </p:spPr>
+        <p:txBody>
+          <a:bodyPr wrap="none">
+            <a:spAutoFit/>
+          </a:bodyPr>
+          <a:lstStyle/>
+          <a:p>
+            <a:pPr>
+              <a:defRPr sz="1400">
+                <a:solidFill>
+                  <a:srgbClr val="616161"/>
+                </a:solidFill>
+              </a:defRPr>
+            </a:pPr>
+            <a:r>
+              <a:t>Comprehensive Command Interface</a:t>
+            </a:r>
+          </a:p>
+        </p:txBody>
+      </p:sp>
+      <p:sp>
+        <p:nvSpPr>
+          <p:cNvPr id="5" name="TextBox 4"/>
+          <p:cNvSpPr txBox="1"/>
+          <p:nvPr/>
+        </p:nvSpPr>
+        <p:spPr>
+          <a:xfrm>
+            <a:off x="457200" y="1371600"/>
+            <a:ext cx="2743200" cy="365760"/>
           </a:xfrm>
           <a:prstGeom prst="rect">
             <a:avLst/>
@@ -3440,90 +3506,790 @@
           </a:bodyPr>
           <a:lstStyle/>
           <a:p>
-            <a:pPr>
-              <a:spcAft>
-                <a:spcPts val="600"/>
-              </a:spcAft>
-              <a:defRPr sz="1400">
-                <a:solidFill>
-                  <a:srgbClr val="000000"/>
-                </a:solidFill>
-              </a:defRPr>
-            </a:pPr>
-            <a:r>
-              <a:t>YAML         | JSON           | MARKDOWN        | GITHUB ISSUES</a:t>
-            </a:r>
-          </a:p>
-          <a:p>
-            <a:pPr>
-              <a:spcAft>
-                <a:spcPts val="600"/>
-              </a:spcAft>
-              <a:defRPr sz="1400">
-                <a:solidFill>
-                  <a:srgbClr val="000000"/>
-                </a:solidFill>
-              </a:defRPr>
-            </a:pPr>
-            <a:r>
-              <a:t>tasks:       | {tasks:[..]}   | ## task-id      | Issue #42</a:t>
-            </a:r>
-          </a:p>
-          <a:p>
-            <a:pPr>
-              <a:spcAft>
-                <a:spcPts val="600"/>
-              </a:spcAft>
-              <a:defRPr sz="1400">
-                <a:solidFill>
-                  <a:srgbClr val="000000"/>
-                </a:solidFill>
-              </a:defRPr>
-            </a:pPr>
-            <a:r>
-              <a:t>  - id: x    |                | [priority:high] | Labels: ai-implement</a:t>
-            </a:r>
-          </a:p>
-          <a:p>
-            <a:pPr>
-              <a:spcAft>
-                <a:spcPts val="600"/>
-              </a:spcAft>
-              <a:defRPr sz="1400">
-                <a:solidFill>
-                  <a:srgbClr val="000000"/>
-                </a:solidFill>
-              </a:defRPr>
-            </a:pPr>
-          </a:p>
-          <a:p>
-            <a:pPr>
-              <a:spcAft>
-                <a:spcPts val="600"/>
-              </a:spcAft>
-              <a:defRPr sz="1400">
-                <a:solidFill>
-                  <a:srgbClr val="000000"/>
-                </a:solidFill>
-              </a:defRPr>
-            </a:pPr>
-            <a:r>
-              <a:t>$ bob project create app ./work github://org/repo?label=ai</a:t>
-            </a:r>
-          </a:p>
-          <a:p>
-            <a:pPr>
-              <a:spcAft>
-                <a:spcPts val="600"/>
-              </a:spcAft>
-              <a:defRPr sz="1400">
-                <a:solidFill>
-                  <a:srgbClr val="000000"/>
-                </a:solidFill>
-              </a:defRPr>
-            </a:pPr>
-            <a:r>
-              <a:t>Sync issues labeled 'ai' directly as tasks!</a:t>
+            <a:pPr algn="l">
+              <a:defRPr sz="1400" b="1">
+                <a:solidFill>
+                  <a:srgbClr val="0D47A1"/>
+                </a:solidFill>
+              </a:defRPr>
+            </a:pPr>
+            <a:r>
+              <a:t>PROJECT</a:t>
+            </a:r>
+          </a:p>
+        </p:txBody>
+      </p:sp>
+      <p:sp>
+        <p:nvSpPr>
+          <p:cNvPr id="6" name="TextBox 5"/>
+          <p:cNvSpPr txBox="1"/>
+          <p:nvPr/>
+        </p:nvSpPr>
+        <p:spPr>
+          <a:xfrm>
+            <a:off x="457200" y="1828800"/>
+            <a:ext cx="2743200" cy="365760"/>
+          </a:xfrm>
+          <a:prstGeom prst="rect">
+            <a:avLst/>
+          </a:prstGeom>
+          <a:noFill/>
+        </p:spPr>
+        <p:txBody>
+          <a:bodyPr wrap="square">
+            <a:spAutoFit/>
+          </a:bodyPr>
+          <a:lstStyle/>
+          <a:p>
+            <a:pPr algn="l">
+              <a:defRPr sz="1100" b="0">
+                <a:solidFill>
+                  <a:srgbClr val="616161"/>
+                </a:solidFill>
+              </a:defRPr>
+            </a:pPr>
+            <a:r>
+              <a:t>bob project create</a:t>
+            </a:r>
+          </a:p>
+        </p:txBody>
+      </p:sp>
+      <p:sp>
+        <p:nvSpPr>
+          <p:cNvPr id="7" name="TextBox 6"/>
+          <p:cNvSpPr txBox="1"/>
+          <p:nvPr/>
+        </p:nvSpPr>
+        <p:spPr>
+          <a:xfrm>
+            <a:off x="457200" y="2286000"/>
+            <a:ext cx="2743200" cy="365760"/>
+          </a:xfrm>
+          <a:prstGeom prst="rect">
+            <a:avLst/>
+          </a:prstGeom>
+          <a:noFill/>
+        </p:spPr>
+        <p:txBody>
+          <a:bodyPr wrap="square">
+            <a:spAutoFit/>
+          </a:bodyPr>
+          <a:lstStyle/>
+          <a:p>
+            <a:pPr algn="l">
+              <a:defRPr sz="1100" b="0">
+                <a:solidFill>
+                  <a:srgbClr val="616161"/>
+                </a:solidFill>
+              </a:defRPr>
+            </a:pPr>
+            <a:r>
+              <a:t>bob project list</a:t>
+            </a:r>
+          </a:p>
+        </p:txBody>
+      </p:sp>
+      <p:sp>
+        <p:nvSpPr>
+          <p:cNvPr id="8" name="TextBox 7"/>
+          <p:cNvSpPr txBox="1"/>
+          <p:nvPr/>
+        </p:nvSpPr>
+        <p:spPr>
+          <a:xfrm>
+            <a:off x="457200" y="2743200"/>
+            <a:ext cx="2743200" cy="365760"/>
+          </a:xfrm>
+          <a:prstGeom prst="rect">
+            <a:avLst/>
+          </a:prstGeom>
+          <a:noFill/>
+        </p:spPr>
+        <p:txBody>
+          <a:bodyPr wrap="square">
+            <a:spAutoFit/>
+          </a:bodyPr>
+          <a:lstStyle/>
+          <a:p>
+            <a:pPr algn="l">
+              <a:defRPr sz="1100" b="0">
+                <a:solidFill>
+                  <a:srgbClr val="616161"/>
+                </a:solidFill>
+              </a:defRPr>
+            </a:pPr>
+            <a:r>
+              <a:t>bob project use</a:t>
+            </a:r>
+          </a:p>
+        </p:txBody>
+      </p:sp>
+      <p:sp>
+        <p:nvSpPr>
+          <p:cNvPr id="9" name="TextBox 8"/>
+          <p:cNvSpPr txBox="1"/>
+          <p:nvPr/>
+        </p:nvSpPr>
+        <p:spPr>
+          <a:xfrm>
+            <a:off x="457200" y="3200400"/>
+            <a:ext cx="2743200" cy="365760"/>
+          </a:xfrm>
+          <a:prstGeom prst="rect">
+            <a:avLst/>
+          </a:prstGeom>
+          <a:noFill/>
+        </p:spPr>
+        <p:txBody>
+          <a:bodyPr wrap="square">
+            <a:spAutoFit/>
+          </a:bodyPr>
+          <a:lstStyle/>
+          <a:p>
+            <a:pPr algn="l">
+              <a:defRPr sz="1100" b="0">
+                <a:solidFill>
+                  <a:srgbClr val="616161"/>
+                </a:solidFill>
+              </a:defRPr>
+            </a:pPr>
+            <a:r>
+              <a:t>bob project status</a:t>
+            </a:r>
+          </a:p>
+        </p:txBody>
+      </p:sp>
+      <p:sp>
+        <p:nvSpPr>
+          <p:cNvPr id="10" name="TextBox 9"/>
+          <p:cNvSpPr txBox="1"/>
+          <p:nvPr/>
+        </p:nvSpPr>
+        <p:spPr>
+          <a:xfrm>
+            <a:off x="3383280" y="1371600"/>
+            <a:ext cx="2743200" cy="365760"/>
+          </a:xfrm>
+          <a:prstGeom prst="rect">
+            <a:avLst/>
+          </a:prstGeom>
+          <a:noFill/>
+        </p:spPr>
+        <p:txBody>
+          <a:bodyPr wrap="square">
+            <a:spAutoFit/>
+          </a:bodyPr>
+          <a:lstStyle/>
+          <a:p>
+            <a:pPr algn="l">
+              <a:defRPr sz="1400" b="1">
+                <a:solidFill>
+                  <a:srgbClr val="0D47A1"/>
+                </a:solidFill>
+              </a:defRPr>
+            </a:pPr>
+            <a:r>
+              <a:t>TASK</a:t>
+            </a:r>
+          </a:p>
+        </p:txBody>
+      </p:sp>
+      <p:sp>
+        <p:nvSpPr>
+          <p:cNvPr id="11" name="TextBox 10"/>
+          <p:cNvSpPr txBox="1"/>
+          <p:nvPr/>
+        </p:nvSpPr>
+        <p:spPr>
+          <a:xfrm>
+            <a:off x="3383280" y="1828800"/>
+            <a:ext cx="2743200" cy="365760"/>
+          </a:xfrm>
+          <a:prstGeom prst="rect">
+            <a:avLst/>
+          </a:prstGeom>
+          <a:noFill/>
+        </p:spPr>
+        <p:txBody>
+          <a:bodyPr wrap="square">
+            <a:spAutoFit/>
+          </a:bodyPr>
+          <a:lstStyle/>
+          <a:p>
+            <a:pPr algn="l">
+              <a:defRPr sz="1100" b="0">
+                <a:solidFill>
+                  <a:srgbClr val="616161"/>
+                </a:solidFill>
+              </a:defRPr>
+            </a:pPr>
+            <a:r>
+              <a:t>bob task list</a:t>
+            </a:r>
+          </a:p>
+        </p:txBody>
+      </p:sp>
+      <p:sp>
+        <p:nvSpPr>
+          <p:cNvPr id="12" name="TextBox 11"/>
+          <p:cNvSpPr txBox="1"/>
+          <p:nvPr/>
+        </p:nvSpPr>
+        <p:spPr>
+          <a:xfrm>
+            <a:off x="3383280" y="2286000"/>
+            <a:ext cx="2743200" cy="365760"/>
+          </a:xfrm>
+          <a:prstGeom prst="rect">
+            <a:avLst/>
+          </a:prstGeom>
+          <a:noFill/>
+        </p:spPr>
+        <p:txBody>
+          <a:bodyPr wrap="square">
+            <a:spAutoFit/>
+          </a:bodyPr>
+          <a:lstStyle/>
+          <a:p>
+            <a:pPr algn="l">
+              <a:defRPr sz="1100" b="0">
+                <a:solidFill>
+                  <a:srgbClr val="616161"/>
+                </a:solidFill>
+              </a:defRPr>
+            </a:pPr>
+            <a:r>
+              <a:t>bob task show &lt;id&gt;</a:t>
+            </a:r>
+          </a:p>
+        </p:txBody>
+      </p:sp>
+      <p:sp>
+        <p:nvSpPr>
+          <p:cNvPr id="13" name="TextBox 12"/>
+          <p:cNvSpPr txBox="1"/>
+          <p:nvPr/>
+        </p:nvSpPr>
+        <p:spPr>
+          <a:xfrm>
+            <a:off x="3383280" y="2743200"/>
+            <a:ext cx="2743200" cy="365760"/>
+          </a:xfrm>
+          <a:prstGeom prst="rect">
+            <a:avLst/>
+          </a:prstGeom>
+          <a:noFill/>
+        </p:spPr>
+        <p:txBody>
+          <a:bodyPr wrap="square">
+            <a:spAutoFit/>
+          </a:bodyPr>
+          <a:lstStyle/>
+          <a:p>
+            <a:pPr algn="l">
+              <a:defRPr sz="1100" b="0">
+                <a:solidFill>
+                  <a:srgbClr val="616161"/>
+                </a:solidFill>
+              </a:defRPr>
+            </a:pPr>
+            <a:r>
+              <a:t>bob task retry &lt;id&gt;</a:t>
+            </a:r>
+          </a:p>
+        </p:txBody>
+      </p:sp>
+      <p:sp>
+        <p:nvSpPr>
+          <p:cNvPr id="14" name="TextBox 13"/>
+          <p:cNvSpPr txBox="1"/>
+          <p:nvPr/>
+        </p:nvSpPr>
+        <p:spPr>
+          <a:xfrm>
+            <a:off x="3383280" y="3200400"/>
+            <a:ext cx="2743200" cy="365760"/>
+          </a:xfrm>
+          <a:prstGeom prst="rect">
+            <a:avLst/>
+          </a:prstGeom>
+          <a:noFill/>
+        </p:spPr>
+        <p:txBody>
+          <a:bodyPr wrap="square">
+            <a:spAutoFit/>
+          </a:bodyPr>
+          <a:lstStyle/>
+          <a:p>
+            <a:pPr algn="l">
+              <a:defRPr sz="1100" b="0">
+                <a:solidFill>
+                  <a:srgbClr val="616161"/>
+                </a:solidFill>
+              </a:defRPr>
+            </a:pPr>
+            <a:r>
+              <a:t>bob task list --needs-research</a:t>
+            </a:r>
+          </a:p>
+        </p:txBody>
+      </p:sp>
+      <p:sp>
+        <p:nvSpPr>
+          <p:cNvPr id="15" name="TextBox 14"/>
+          <p:cNvSpPr txBox="1"/>
+          <p:nvPr/>
+        </p:nvSpPr>
+        <p:spPr>
+          <a:xfrm>
+            <a:off x="6309360" y="1371600"/>
+            <a:ext cx="2743200" cy="365760"/>
+          </a:xfrm>
+          <a:prstGeom prst="rect">
+            <a:avLst/>
+          </a:prstGeom>
+          <a:noFill/>
+        </p:spPr>
+        <p:txBody>
+          <a:bodyPr wrap="square">
+            <a:spAutoFit/>
+          </a:bodyPr>
+          <a:lstStyle/>
+          <a:p>
+            <a:pPr algn="l">
+              <a:defRPr sz="1400" b="1">
+                <a:solidFill>
+                  <a:srgbClr val="0D47A1"/>
+                </a:solidFill>
+              </a:defRPr>
+            </a:pPr>
+            <a:r>
+              <a:t>EXECUTION</a:t>
+            </a:r>
+          </a:p>
+        </p:txBody>
+      </p:sp>
+      <p:sp>
+        <p:nvSpPr>
+          <p:cNvPr id="16" name="TextBox 15"/>
+          <p:cNvSpPr txBox="1"/>
+          <p:nvPr/>
+        </p:nvSpPr>
+        <p:spPr>
+          <a:xfrm>
+            <a:off x="6309360" y="1828800"/>
+            <a:ext cx="2743200" cy="365760"/>
+          </a:xfrm>
+          <a:prstGeom prst="rect">
+            <a:avLst/>
+          </a:prstGeom>
+          <a:noFill/>
+        </p:spPr>
+        <p:txBody>
+          <a:bodyPr wrap="square">
+            <a:spAutoFit/>
+          </a:bodyPr>
+          <a:lstStyle/>
+          <a:p>
+            <a:pPr algn="l">
+              <a:defRPr sz="1100" b="0">
+                <a:solidFill>
+                  <a:srgbClr val="616161"/>
+                </a:solidFill>
+              </a:defRPr>
+            </a:pPr>
+            <a:r>
+              <a:t>bob run</a:t>
+            </a:r>
+          </a:p>
+        </p:txBody>
+      </p:sp>
+      <p:sp>
+        <p:nvSpPr>
+          <p:cNvPr id="17" name="TextBox 16"/>
+          <p:cNvSpPr txBox="1"/>
+          <p:nvPr/>
+        </p:nvSpPr>
+        <p:spPr>
+          <a:xfrm>
+            <a:off x="6309360" y="2286000"/>
+            <a:ext cx="2743200" cy="365760"/>
+          </a:xfrm>
+          <a:prstGeom prst="rect">
+            <a:avLst/>
+          </a:prstGeom>
+          <a:noFill/>
+        </p:spPr>
+        <p:txBody>
+          <a:bodyPr wrap="square">
+            <a:spAutoFit/>
+          </a:bodyPr>
+          <a:lstStyle/>
+          <a:p>
+            <a:pPr algn="l">
+              <a:defRPr sz="1100" b="0">
+                <a:solidFill>
+                  <a:srgbClr val="616161"/>
+                </a:solidFill>
+              </a:defRPr>
+            </a:pPr>
+            <a:r>
+              <a:t>bob run --parallel 3</a:t>
+            </a:r>
+          </a:p>
+        </p:txBody>
+      </p:sp>
+      <p:sp>
+        <p:nvSpPr>
+          <p:cNvPr id="18" name="TextBox 17"/>
+          <p:cNvSpPr txBox="1"/>
+          <p:nvPr/>
+        </p:nvSpPr>
+        <p:spPr>
+          <a:xfrm>
+            <a:off x="6309360" y="2743200"/>
+            <a:ext cx="2743200" cy="365760"/>
+          </a:xfrm>
+          <a:prstGeom prst="rect">
+            <a:avLst/>
+          </a:prstGeom>
+          <a:noFill/>
+        </p:spPr>
+        <p:txBody>
+          <a:bodyPr wrap="square">
+            <a:spAutoFit/>
+          </a:bodyPr>
+          <a:lstStyle/>
+          <a:p>
+            <a:pPr algn="l">
+              <a:defRPr sz="1100" b="0">
+                <a:solidFill>
+                  <a:srgbClr val="616161"/>
+                </a:solidFill>
+              </a:defRPr>
+            </a:pPr>
+            <a:r>
+              <a:t>bob run --dry-run</a:t>
+            </a:r>
+          </a:p>
+        </p:txBody>
+      </p:sp>
+      <p:sp>
+        <p:nvSpPr>
+          <p:cNvPr id="19" name="TextBox 18"/>
+          <p:cNvSpPr txBox="1"/>
+          <p:nvPr/>
+        </p:nvSpPr>
+        <p:spPr>
+          <a:xfrm>
+            <a:off x="6309360" y="3200400"/>
+            <a:ext cx="2743200" cy="365760"/>
+          </a:xfrm>
+          <a:prstGeom prst="rect">
+            <a:avLst/>
+          </a:prstGeom>
+          <a:noFill/>
+        </p:spPr>
+        <p:txBody>
+          <a:bodyPr wrap="square">
+            <a:spAutoFit/>
+          </a:bodyPr>
+          <a:lstStyle/>
+          <a:p>
+            <a:pPr algn="l">
+              <a:defRPr sz="1100" b="0">
+                <a:solidFill>
+                  <a:srgbClr val="616161"/>
+                </a:solidFill>
+              </a:defRPr>
+            </a:pPr>
+            <a:r>
+              <a:t>bob run --resume</a:t>
+            </a:r>
+          </a:p>
+        </p:txBody>
+      </p:sp>
+      <p:sp>
+        <p:nvSpPr>
+          <p:cNvPr id="20" name="TextBox 19"/>
+          <p:cNvSpPr txBox="1"/>
+          <p:nvPr/>
+        </p:nvSpPr>
+        <p:spPr>
+          <a:xfrm>
+            <a:off x="9235440" y="1371600"/>
+            <a:ext cx="2743200" cy="365760"/>
+          </a:xfrm>
+          <a:prstGeom prst="rect">
+            <a:avLst/>
+          </a:prstGeom>
+          <a:noFill/>
+        </p:spPr>
+        <p:txBody>
+          <a:bodyPr wrap="square">
+            <a:spAutoFit/>
+          </a:bodyPr>
+          <a:lstStyle/>
+          <a:p>
+            <a:pPr algn="l">
+              <a:defRPr sz="1400" b="1">
+                <a:solidFill>
+                  <a:srgbClr val="0D47A1"/>
+                </a:solidFill>
+              </a:defRPr>
+            </a:pPr>
+            <a:r>
+              <a:t>MONITORING</a:t>
+            </a:r>
+          </a:p>
+        </p:txBody>
+      </p:sp>
+      <p:sp>
+        <p:nvSpPr>
+          <p:cNvPr id="21" name="TextBox 20"/>
+          <p:cNvSpPr txBox="1"/>
+          <p:nvPr/>
+        </p:nvSpPr>
+        <p:spPr>
+          <a:xfrm>
+            <a:off x="9235440" y="1828800"/>
+            <a:ext cx="2743200" cy="365760"/>
+          </a:xfrm>
+          <a:prstGeom prst="rect">
+            <a:avLst/>
+          </a:prstGeom>
+          <a:noFill/>
+        </p:spPr>
+        <p:txBody>
+          <a:bodyPr wrap="square">
+            <a:spAutoFit/>
+          </a:bodyPr>
+          <a:lstStyle/>
+          <a:p>
+            <a:pPr algn="l">
+              <a:defRPr sz="1100" b="0">
+                <a:solidFill>
+                  <a:srgbClr val="616161"/>
+                </a:solidFill>
+              </a:defRPr>
+            </a:pPr>
+            <a:r>
+              <a:t>bob status</a:t>
+            </a:r>
+          </a:p>
+        </p:txBody>
+      </p:sp>
+      <p:sp>
+        <p:nvSpPr>
+          <p:cNvPr id="22" name="TextBox 21"/>
+          <p:cNvSpPr txBox="1"/>
+          <p:nvPr/>
+        </p:nvSpPr>
+        <p:spPr>
+          <a:xfrm>
+            <a:off x="9235440" y="2286000"/>
+            <a:ext cx="2743200" cy="365760"/>
+          </a:xfrm>
+          <a:prstGeom prst="rect">
+            <a:avLst/>
+          </a:prstGeom>
+          <a:noFill/>
+        </p:spPr>
+        <p:txBody>
+          <a:bodyPr wrap="square">
+            <a:spAutoFit/>
+          </a:bodyPr>
+          <a:lstStyle/>
+          <a:p>
+            <a:pPr algn="l">
+              <a:defRPr sz="1100" b="0">
+                <a:solidFill>
+                  <a:srgbClr val="616161"/>
+                </a:solidFill>
+              </a:defRPr>
+            </a:pPr>
+            <a:r>
+              <a:t>bob logs --follow</a:t>
+            </a:r>
+          </a:p>
+        </p:txBody>
+      </p:sp>
+      <p:sp>
+        <p:nvSpPr>
+          <p:cNvPr id="23" name="TextBox 22"/>
+          <p:cNvSpPr txBox="1"/>
+          <p:nvPr/>
+        </p:nvSpPr>
+        <p:spPr>
+          <a:xfrm>
+            <a:off x="9235440" y="2743200"/>
+            <a:ext cx="2743200" cy="365760"/>
+          </a:xfrm>
+          <a:prstGeom prst="rect">
+            <a:avLst/>
+          </a:prstGeom>
+          <a:noFill/>
+        </p:spPr>
+        <p:txBody>
+          <a:bodyPr wrap="square">
+            <a:spAutoFit/>
+          </a:bodyPr>
+          <a:lstStyle/>
+          <a:p>
+            <a:pPr algn="l">
+              <a:defRPr sz="1100" b="0">
+                <a:solidFill>
+                  <a:srgbClr val="616161"/>
+                </a:solidFill>
+              </a:defRPr>
+            </a:pPr>
+            <a:r>
+              <a:t>bob costs</a:t>
+            </a:r>
+          </a:p>
+        </p:txBody>
+      </p:sp>
+      <p:sp>
+        <p:nvSpPr>
+          <p:cNvPr id="24" name="TextBox 23"/>
+          <p:cNvSpPr txBox="1"/>
+          <p:nvPr/>
+        </p:nvSpPr>
+        <p:spPr>
+          <a:xfrm>
+            <a:off x="9235440" y="3200400"/>
+            <a:ext cx="2743200" cy="365760"/>
+          </a:xfrm>
+          <a:prstGeom prst="rect">
+            <a:avLst/>
+          </a:prstGeom>
+          <a:noFill/>
+        </p:spPr>
+        <p:txBody>
+          <a:bodyPr wrap="square">
+            <a:spAutoFit/>
+          </a:bodyPr>
+          <a:lstStyle/>
+          <a:p>
+            <a:pPr algn="l">
+              <a:defRPr sz="1100" b="0">
+                <a:solidFill>
+                  <a:srgbClr val="616161"/>
+                </a:solidFill>
+              </a:defRPr>
+            </a:pPr>
+            <a:r>
+              <a:t>bob logs --json | jq</a:t>
+            </a:r>
+          </a:p>
+        </p:txBody>
+      </p:sp>
+      <p:sp>
+        <p:nvSpPr>
+          <p:cNvPr id="25" name="Rounded Rectangle 24"/>
+          <p:cNvSpPr/>
+          <p:nvPr/>
+        </p:nvSpPr>
+        <p:spPr>
+          <a:xfrm>
+            <a:off x="457200" y="5029200"/>
+            <a:ext cx="11277295" cy="1188720"/>
+          </a:xfrm>
+          <a:prstGeom prst="roundRect">
+            <a:avLst/>
+          </a:prstGeom>
+          <a:solidFill>
+            <a:srgbClr val="F5F5F5"/>
+          </a:solidFill>
+        </p:spPr>
+        <p:style>
+          <a:lnRef idx="1">
+            <a:schemeClr val="accent1"/>
+          </a:lnRef>
+          <a:fillRef idx="3">
+            <a:schemeClr val="accent1"/>
+          </a:fillRef>
+          <a:effectRef idx="2">
+            <a:schemeClr val="accent1"/>
+          </a:effectRef>
+          <a:fontRef idx="minor">
+            <a:schemeClr val="lt1"/>
+          </a:fontRef>
+        </p:style>
+        <p:txBody>
+          <a:bodyPr rtlCol="0" anchor="ctr"/>
+          <a:lstStyle/>
+          <a:p>
+            <a:pPr algn="ctr"/>
+          </a:p>
+        </p:txBody>
+      </p:sp>
+      <p:sp>
+        <p:nvSpPr>
+          <p:cNvPr id="26" name="TextBox 25"/>
+          <p:cNvSpPr txBox="1"/>
+          <p:nvPr/>
+        </p:nvSpPr>
+        <p:spPr>
+          <a:xfrm>
+            <a:off x="640080" y="5212080"/>
+            <a:ext cx="10972800" cy="365760"/>
+          </a:xfrm>
+          <a:prstGeom prst="rect">
+            <a:avLst/>
+          </a:prstGeom>
+          <a:noFill/>
+        </p:spPr>
+        <p:txBody>
+          <a:bodyPr wrap="square">
+            <a:spAutoFit/>
+          </a:bodyPr>
+          <a:lstStyle/>
+          <a:p>
+            <a:pPr algn="ctr">
+              <a:defRPr sz="1400" b="1">
+                <a:solidFill>
+                  <a:srgbClr val="0D47A1"/>
+                </a:solidFill>
+              </a:defRPr>
+            </a:pPr>
+            <a:r>
+              <a:t>All commands support --json for scripting integration</a:t>
+            </a:r>
+          </a:p>
+        </p:txBody>
+      </p:sp>
+      <p:sp>
+        <p:nvSpPr>
+          <p:cNvPr id="27" name="TextBox 26"/>
+          <p:cNvSpPr txBox="1"/>
+          <p:nvPr/>
+        </p:nvSpPr>
+        <p:spPr>
+          <a:xfrm>
+            <a:off x="640080" y="5669280"/>
+            <a:ext cx="10972800" cy="365760"/>
+          </a:xfrm>
+          <a:prstGeom prst="rect">
+            <a:avLst/>
+          </a:prstGeom>
+          <a:noFill/>
+        </p:spPr>
+        <p:txBody>
+          <a:bodyPr wrap="square">
+            <a:spAutoFit/>
+          </a:bodyPr>
+          <a:lstStyle/>
+          <a:p>
+            <a:pPr algn="ctr">
+              <a:defRPr sz="1200" b="0">
+                <a:solidFill>
+                  <a:srgbClr val="616161"/>
+                </a:solidFill>
+              </a:defRPr>
+            </a:pPr>
+            <a:r>
+              <a:t>bob task list --json | jq '.[] | select(.status=="failed")'</a:t>
             </a:r>
           </a:p>
         </p:txBody>
@@ -3555,13 +4321,13 @@
         <p:spPr>
           <a:xfrm>
             <a:off x="0" y="0"/>
-            <a:ext cx="9144000" cy="914400"/>
+            <a:ext cx="12191695" cy="1005840"/>
           </a:xfrm>
           <a:prstGeom prst="rect">
             <a:avLst/>
           </a:prstGeom>
           <a:solidFill>
-            <a:srgbClr val="FFCC00"/>
+            <a:srgbClr val="FFC107"/>
           </a:solidFill>
           <a:ln>
             <a:noFill/>
@@ -3597,8 +4363,8 @@
         </p:nvSpPr>
         <p:spPr>
           <a:xfrm>
-            <a:off x="274320" y="182880"/>
-            <a:ext cx="8595360" cy="640080"/>
+            <a:off x="457200" y="228600"/>
+            <a:ext cx="10972800" cy="640080"/>
           </a:xfrm>
           <a:prstGeom prst="rect">
             <a:avLst/>
@@ -3612,14 +4378,14 @@
           <a:lstStyle/>
           <a:p>
             <a:pPr>
-              <a:defRPr sz="2800" b="1">
-                <a:solidFill>
-                  <a:srgbClr val="003366"/>
-                </a:solidFill>
-              </a:defRPr>
-            </a:pPr>
-            <a:r>
-              <a:t>🔨 Parallel Execution</a:t>
+              <a:defRPr sz="3200" b="1">
+                <a:solidFill>
+                  <a:srgbClr val="0D47A1"/>
+                </a:solidFill>
+              </a:defRPr>
+            </a:pPr>
+            <a:r>
+              <a:t>Flexible Specification Sources</a:t>
             </a:r>
           </a:p>
         </p:txBody>
@@ -3632,8 +4398,88 @@
         </p:nvSpPr>
         <p:spPr>
           <a:xfrm>
-            <a:off x="457200" y="1097280"/>
-            <a:ext cx="8229600" cy="5029200"/>
+            <a:off x="457200" y="594360"/>
+            <a:ext cx="10972800" cy="365760"/>
+          </a:xfrm>
+          <a:prstGeom prst="rect">
+            <a:avLst/>
+          </a:prstGeom>
+          <a:noFill/>
+        </p:spPr>
+        <p:txBody>
+          <a:bodyPr wrap="none">
+            <a:spAutoFit/>
+          </a:bodyPr>
+          <a:lstStyle/>
+          <a:p>
+            <a:pPr>
+              <a:defRPr sz="1400">
+                <a:solidFill>
+                  <a:srgbClr val="616161"/>
+                </a:solidFill>
+              </a:defRPr>
+            </a:pPr>
+            <a:r>
+              <a:t>Multiple Formats, One Interface</a:t>
+            </a:r>
+          </a:p>
+        </p:txBody>
+      </p:sp>
+      <p:sp>
+        <p:nvSpPr>
+          <p:cNvPr id="5" name="Rounded Rectangle 4"/>
+          <p:cNvSpPr/>
+          <p:nvPr/>
+        </p:nvSpPr>
+        <p:spPr>
+          <a:xfrm>
+            <a:off x="457200" y="1371600"/>
+            <a:ext cx="2743200" cy="3200400"/>
+          </a:xfrm>
+          <a:prstGeom prst="roundRect">
+            <a:avLst/>
+          </a:prstGeom>
+          <a:solidFill>
+            <a:srgbClr val="F5F5F5"/>
+          </a:solidFill>
+          <a:ln>
+            <a:solidFill>
+              <a:srgbClr val="2196F3"/>
+            </a:solidFill>
+          </a:ln>
+        </p:spPr>
+        <p:style>
+          <a:lnRef idx="1">
+            <a:schemeClr val="accent1"/>
+          </a:lnRef>
+          <a:fillRef idx="3">
+            <a:schemeClr val="accent1"/>
+          </a:fillRef>
+          <a:effectRef idx="2">
+            <a:schemeClr val="accent1"/>
+          </a:effectRef>
+          <a:fontRef idx="minor">
+            <a:schemeClr val="lt1"/>
+          </a:fontRef>
+        </p:style>
+        <p:txBody>
+          <a:bodyPr rtlCol="0" anchor="ctr"/>
+          <a:lstStyle/>
+          <a:p>
+            <a:pPr algn="ctr"/>
+          </a:p>
+        </p:txBody>
+      </p:sp>
+      <p:sp>
+        <p:nvSpPr>
+          <p:cNvPr id="6" name="TextBox 5"/>
+          <p:cNvSpPr txBox="1"/>
+          <p:nvPr/>
+        </p:nvSpPr>
+        <p:spPr>
+          <a:xfrm>
+            <a:off x="548640" y="1463040"/>
+            <a:ext cx="2560320" cy="365760"/>
           </a:xfrm>
           <a:prstGeom prst="rect">
             <a:avLst/>
@@ -3646,177 +4492,511 @@
           </a:bodyPr>
           <a:lstStyle/>
           <a:p>
-            <a:pPr>
-              <a:spcAft>
-                <a:spcPts val="600"/>
-              </a:spcAft>
-              <a:defRPr sz="1400">
-                <a:solidFill>
-                  <a:srgbClr val="000000"/>
-                </a:solidFill>
-              </a:defRPr>
-            </a:pPr>
-            <a:r>
-              <a:t>BOB builds a dependency graph and runs independent tasks in parallel:</a:t>
-            </a:r>
-          </a:p>
-          <a:p>
-            <a:pPr>
-              <a:spcAft>
-                <a:spcPts val="600"/>
-              </a:spcAft>
-              <a:defRPr sz="1400">
-                <a:solidFill>
-                  <a:srgbClr val="000000"/>
-                </a:solidFill>
-              </a:defRPr>
-            </a:pPr>
-          </a:p>
-          <a:p>
-            <a:pPr>
-              <a:spcAft>
-                <a:spcPts val="600"/>
-              </a:spcAft>
-              <a:defRPr sz="1400">
-                <a:solidFill>
-                  <a:srgbClr val="000000"/>
-                </a:solidFill>
-              </a:defRPr>
-            </a:pPr>
-            <a:r>
-              <a:t>     setup                  Time -&gt;</a:t>
-            </a:r>
-          </a:p>
-          <a:p>
-            <a:pPr>
-              <a:spcAft>
-                <a:spcPts val="600"/>
-              </a:spcAft>
-              <a:defRPr sz="1400">
-                <a:solidFill>
-                  <a:srgbClr val="000000"/>
-                </a:solidFill>
-              </a:defRPr>
-            </a:pPr>
-            <a:r>
-              <a:t>       |                    [  setup  ]</a:t>
-            </a:r>
-          </a:p>
-          <a:p>
-            <a:pPr>
-              <a:spcAft>
-                <a:spcPts val="600"/>
-              </a:spcAft>
-              <a:defRPr sz="1400">
-                <a:solidFill>
-                  <a:srgbClr val="000000"/>
-                </a:solidFill>
-              </a:defRPr>
-            </a:pPr>
-            <a:r>
-              <a:t>    +--+--+                      |</a:t>
-            </a:r>
-          </a:p>
-          <a:p>
-            <a:pPr>
-              <a:spcAft>
-                <a:spcPts val="600"/>
-              </a:spcAft>
-              <a:defRPr sz="1400">
-                <a:solidFill>
-                  <a:srgbClr val="000000"/>
-                </a:solidFill>
-              </a:defRPr>
-            </a:pPr>
-            <a:r>
-              <a:t>    |     |                 [ api | ui ] PARALLEL</a:t>
-            </a:r>
-          </a:p>
-          <a:p>
-            <a:pPr>
-              <a:spcAft>
-                <a:spcPts val="600"/>
-              </a:spcAft>
-              <a:defRPr sz="1400">
-                <a:solidFill>
-                  <a:srgbClr val="000000"/>
-                </a:solidFill>
-              </a:defRPr>
-            </a:pPr>
-            <a:r>
-              <a:t>   api   ui                      |</a:t>
-            </a:r>
-          </a:p>
-          <a:p>
-            <a:pPr>
-              <a:spcAft>
-                <a:spcPts val="600"/>
-              </a:spcAft>
-              <a:defRPr sz="1400">
-                <a:solidFill>
-                  <a:srgbClr val="000000"/>
-                </a:solidFill>
-              </a:defRPr>
-            </a:pPr>
-            <a:r>
-              <a:t>    |     |                 [  tests   ]</a:t>
-            </a:r>
-          </a:p>
-          <a:p>
-            <a:pPr>
-              <a:spcAft>
-                <a:spcPts val="600"/>
-              </a:spcAft>
-              <a:defRPr sz="1400">
-                <a:solidFill>
-                  <a:srgbClr val="000000"/>
-                </a:solidFill>
-              </a:defRPr>
-            </a:pPr>
-            <a:r>
-              <a:t>    +--+--+</a:t>
-            </a:r>
-          </a:p>
-          <a:p>
-            <a:pPr>
-              <a:spcAft>
-                <a:spcPts val="600"/>
-              </a:spcAft>
-              <a:defRPr sz="1400">
-                <a:solidFill>
-                  <a:srgbClr val="000000"/>
-                </a:solidFill>
-              </a:defRPr>
-            </a:pPr>
-            <a:r>
-              <a:t>     tests</a:t>
-            </a:r>
-          </a:p>
-          <a:p>
-            <a:pPr>
-              <a:spcAft>
-                <a:spcPts val="600"/>
-              </a:spcAft>
-              <a:defRPr sz="1400">
-                <a:solidFill>
-                  <a:srgbClr val="000000"/>
-                </a:solidFill>
-              </a:defRPr>
-            </a:pPr>
-          </a:p>
-          <a:p>
-            <a:pPr>
-              <a:spcAft>
-                <a:spcPts val="600"/>
-              </a:spcAft>
-              <a:defRPr sz="1400">
-                <a:solidFill>
-                  <a:srgbClr val="000000"/>
-                </a:solidFill>
-              </a:defRPr>
-            </a:pPr>
-            <a:r>
-              <a:t>$ bob run --parallel 3</a:t>
+            <a:pPr algn="l">
+              <a:defRPr sz="1400" b="1">
+                <a:solidFill>
+                  <a:srgbClr val="2196F3"/>
+                </a:solidFill>
+              </a:defRPr>
+            </a:pPr>
+            <a:r>
+              <a:t>YAML</a:t>
+            </a:r>
+          </a:p>
+        </p:txBody>
+      </p:sp>
+      <p:sp>
+        <p:nvSpPr>
+          <p:cNvPr id="7" name="TextBox 6"/>
+          <p:cNvSpPr txBox="1"/>
+          <p:nvPr/>
+        </p:nvSpPr>
+        <p:spPr>
+          <a:xfrm>
+            <a:off x="548640" y="1920240"/>
+            <a:ext cx="2560320" cy="2560320"/>
+          </a:xfrm>
+          <a:prstGeom prst="rect">
+            <a:avLst/>
+          </a:prstGeom>
+          <a:noFill/>
+        </p:spPr>
+        <p:txBody>
+          <a:bodyPr wrap="square">
+            <a:spAutoFit/>
+          </a:bodyPr>
+          <a:lstStyle/>
+          <a:p>
+            <a:pPr algn="l">
+              <a:defRPr sz="1000" b="0">
+                <a:solidFill>
+                  <a:srgbClr val="212121"/>
+                </a:solidFill>
+              </a:defRPr>
+            </a:pPr>
+            <a:r>
+              <a:t>tasks:</a:t>
+            </a:r>
+            <a:br/>
+            <a:r>
+              <a:t>  - id: auth</a:t>
+            </a:r>
+            <a:br/>
+            <a:r>
+              <a:t>    title: User Auth</a:t>
+            </a:r>
+            <a:br/>
+            <a:r>
+              <a:t>    priority: critical</a:t>
+            </a:r>
+          </a:p>
+        </p:txBody>
+      </p:sp>
+      <p:sp>
+        <p:nvSpPr>
+          <p:cNvPr id="8" name="Rounded Rectangle 7"/>
+          <p:cNvSpPr/>
+          <p:nvPr/>
+        </p:nvSpPr>
+        <p:spPr>
+          <a:xfrm>
+            <a:off x="3383280" y="1371600"/>
+            <a:ext cx="2743200" cy="3200400"/>
+          </a:xfrm>
+          <a:prstGeom prst="roundRect">
+            <a:avLst/>
+          </a:prstGeom>
+          <a:solidFill>
+            <a:srgbClr val="F5F5F5"/>
+          </a:solidFill>
+          <a:ln>
+            <a:solidFill>
+              <a:srgbClr val="FF9800"/>
+            </a:solidFill>
+          </a:ln>
+        </p:spPr>
+        <p:style>
+          <a:lnRef idx="1">
+            <a:schemeClr val="accent1"/>
+          </a:lnRef>
+          <a:fillRef idx="3">
+            <a:schemeClr val="accent1"/>
+          </a:fillRef>
+          <a:effectRef idx="2">
+            <a:schemeClr val="accent1"/>
+          </a:effectRef>
+          <a:fontRef idx="minor">
+            <a:schemeClr val="lt1"/>
+          </a:fontRef>
+        </p:style>
+        <p:txBody>
+          <a:bodyPr rtlCol="0" anchor="ctr"/>
+          <a:lstStyle/>
+          <a:p>
+            <a:pPr algn="ctr"/>
+          </a:p>
+        </p:txBody>
+      </p:sp>
+      <p:sp>
+        <p:nvSpPr>
+          <p:cNvPr id="9" name="TextBox 8"/>
+          <p:cNvSpPr txBox="1"/>
+          <p:nvPr/>
+        </p:nvSpPr>
+        <p:spPr>
+          <a:xfrm>
+            <a:off x="3474720" y="1463040"/>
+            <a:ext cx="2560320" cy="365760"/>
+          </a:xfrm>
+          <a:prstGeom prst="rect">
+            <a:avLst/>
+          </a:prstGeom>
+          <a:noFill/>
+        </p:spPr>
+        <p:txBody>
+          <a:bodyPr wrap="square">
+            <a:spAutoFit/>
+          </a:bodyPr>
+          <a:lstStyle/>
+          <a:p>
+            <a:pPr algn="l">
+              <a:defRPr sz="1400" b="1">
+                <a:solidFill>
+                  <a:srgbClr val="FF9800"/>
+                </a:solidFill>
+              </a:defRPr>
+            </a:pPr>
+            <a:r>
+              <a:t>JSON</a:t>
+            </a:r>
+          </a:p>
+        </p:txBody>
+      </p:sp>
+      <p:sp>
+        <p:nvSpPr>
+          <p:cNvPr id="10" name="TextBox 9"/>
+          <p:cNvSpPr txBox="1"/>
+          <p:nvPr/>
+        </p:nvSpPr>
+        <p:spPr>
+          <a:xfrm>
+            <a:off x="3474720" y="1920240"/>
+            <a:ext cx="2560320" cy="2560320"/>
+          </a:xfrm>
+          <a:prstGeom prst="rect">
+            <a:avLst/>
+          </a:prstGeom>
+          <a:noFill/>
+        </p:spPr>
+        <p:txBody>
+          <a:bodyPr wrap="square">
+            <a:spAutoFit/>
+          </a:bodyPr>
+          <a:lstStyle/>
+          <a:p>
+            <a:pPr algn="l">
+              <a:defRPr sz="1000" b="0">
+                <a:solidFill>
+                  <a:srgbClr val="212121"/>
+                </a:solidFill>
+              </a:defRPr>
+            </a:pPr>
+            <a:r>
+              <a:t>{"tasks": [</a:t>
+            </a:r>
+            <a:br/>
+            <a:r>
+              <a:t>  {"id": "auth",</a:t>
+            </a:r>
+            <a:br/>
+            <a:r>
+              <a:t>   "title": "User Auth"}</a:t>
+            </a:r>
+            <a:br/>
+            <a:r>
+              <a:t>]}</a:t>
+            </a:r>
+          </a:p>
+        </p:txBody>
+      </p:sp>
+      <p:sp>
+        <p:nvSpPr>
+          <p:cNvPr id="11" name="Rounded Rectangle 10"/>
+          <p:cNvSpPr/>
+          <p:nvPr/>
+        </p:nvSpPr>
+        <p:spPr>
+          <a:xfrm>
+            <a:off x="6309360" y="1371600"/>
+            <a:ext cx="2743200" cy="3200400"/>
+          </a:xfrm>
+          <a:prstGeom prst="roundRect">
+            <a:avLst/>
+          </a:prstGeom>
+          <a:solidFill>
+            <a:srgbClr val="F5F5F5"/>
+          </a:solidFill>
+          <a:ln>
+            <a:solidFill>
+              <a:srgbClr val="4CAF50"/>
+            </a:solidFill>
+          </a:ln>
+        </p:spPr>
+        <p:style>
+          <a:lnRef idx="1">
+            <a:schemeClr val="accent1"/>
+          </a:lnRef>
+          <a:fillRef idx="3">
+            <a:schemeClr val="accent1"/>
+          </a:fillRef>
+          <a:effectRef idx="2">
+            <a:schemeClr val="accent1"/>
+          </a:effectRef>
+          <a:fontRef idx="minor">
+            <a:schemeClr val="lt1"/>
+          </a:fontRef>
+        </p:style>
+        <p:txBody>
+          <a:bodyPr rtlCol="0" anchor="ctr"/>
+          <a:lstStyle/>
+          <a:p>
+            <a:pPr algn="ctr"/>
+          </a:p>
+        </p:txBody>
+      </p:sp>
+      <p:sp>
+        <p:nvSpPr>
+          <p:cNvPr id="12" name="TextBox 11"/>
+          <p:cNvSpPr txBox="1"/>
+          <p:nvPr/>
+        </p:nvSpPr>
+        <p:spPr>
+          <a:xfrm>
+            <a:off x="6400800" y="1463040"/>
+            <a:ext cx="2560320" cy="365760"/>
+          </a:xfrm>
+          <a:prstGeom prst="rect">
+            <a:avLst/>
+          </a:prstGeom>
+          <a:noFill/>
+        </p:spPr>
+        <p:txBody>
+          <a:bodyPr wrap="square">
+            <a:spAutoFit/>
+          </a:bodyPr>
+          <a:lstStyle/>
+          <a:p>
+            <a:pPr algn="l">
+              <a:defRPr sz="1400" b="1">
+                <a:solidFill>
+                  <a:srgbClr val="4CAF50"/>
+                </a:solidFill>
+              </a:defRPr>
+            </a:pPr>
+            <a:r>
+              <a:t>Markdown</a:t>
+            </a:r>
+          </a:p>
+        </p:txBody>
+      </p:sp>
+      <p:sp>
+        <p:nvSpPr>
+          <p:cNvPr id="13" name="TextBox 12"/>
+          <p:cNvSpPr txBox="1"/>
+          <p:nvPr/>
+        </p:nvSpPr>
+        <p:spPr>
+          <a:xfrm>
+            <a:off x="6400800" y="1920240"/>
+            <a:ext cx="2560320" cy="2560320"/>
+          </a:xfrm>
+          <a:prstGeom prst="rect">
+            <a:avLst/>
+          </a:prstGeom>
+          <a:noFill/>
+        </p:spPr>
+        <p:txBody>
+          <a:bodyPr wrap="square">
+            <a:spAutoFit/>
+          </a:bodyPr>
+          <a:lstStyle/>
+          <a:p>
+            <a:pPr algn="l">
+              <a:defRPr sz="1000" b="0">
+                <a:solidFill>
+                  <a:srgbClr val="212121"/>
+                </a:solidFill>
+              </a:defRPr>
+            </a:pPr>
+            <a:r>
+              <a:t>## auth: User Auth</a:t>
+            </a:r>
+            <a:br/>
+            <a:r>
+              <a:t>[priority:critical]</a:t>
+            </a:r>
+            <a:br/>
+            <a:br/>
+            <a:r>
+              <a:t>### Criteria</a:t>
+            </a:r>
+            <a:br/>
+            <a:r>
+              <a:t>- Login works</a:t>
+            </a:r>
+          </a:p>
+        </p:txBody>
+      </p:sp>
+      <p:sp>
+        <p:nvSpPr>
+          <p:cNvPr id="14" name="Rounded Rectangle 13"/>
+          <p:cNvSpPr/>
+          <p:nvPr/>
+        </p:nvSpPr>
+        <p:spPr>
+          <a:xfrm>
+            <a:off x="9235440" y="1371600"/>
+            <a:ext cx="2743200" cy="3200400"/>
+          </a:xfrm>
+          <a:prstGeom prst="roundRect">
+            <a:avLst/>
+          </a:prstGeom>
+          <a:solidFill>
+            <a:srgbClr val="F5F5F5"/>
+          </a:solidFill>
+          <a:ln>
+            <a:solidFill>
+              <a:srgbClr val="0D47A1"/>
+            </a:solidFill>
+          </a:ln>
+        </p:spPr>
+        <p:style>
+          <a:lnRef idx="1">
+            <a:schemeClr val="accent1"/>
+          </a:lnRef>
+          <a:fillRef idx="3">
+            <a:schemeClr val="accent1"/>
+          </a:fillRef>
+          <a:effectRef idx="2">
+            <a:schemeClr val="accent1"/>
+          </a:effectRef>
+          <a:fontRef idx="minor">
+            <a:schemeClr val="lt1"/>
+          </a:fontRef>
+        </p:style>
+        <p:txBody>
+          <a:bodyPr rtlCol="0" anchor="ctr"/>
+          <a:lstStyle/>
+          <a:p>
+            <a:pPr algn="ctr"/>
+          </a:p>
+        </p:txBody>
+      </p:sp>
+      <p:sp>
+        <p:nvSpPr>
+          <p:cNvPr id="15" name="TextBox 14"/>
+          <p:cNvSpPr txBox="1"/>
+          <p:nvPr/>
+        </p:nvSpPr>
+        <p:spPr>
+          <a:xfrm>
+            <a:off x="9326880" y="1463040"/>
+            <a:ext cx="2560320" cy="365760"/>
+          </a:xfrm>
+          <a:prstGeom prst="rect">
+            <a:avLst/>
+          </a:prstGeom>
+          <a:noFill/>
+        </p:spPr>
+        <p:txBody>
+          <a:bodyPr wrap="square">
+            <a:spAutoFit/>
+          </a:bodyPr>
+          <a:lstStyle/>
+          <a:p>
+            <a:pPr algn="l">
+              <a:defRPr sz="1400" b="1">
+                <a:solidFill>
+                  <a:srgbClr val="0D47A1"/>
+                </a:solidFill>
+              </a:defRPr>
+            </a:pPr>
+            <a:r>
+              <a:t>GitHub Issues</a:t>
+            </a:r>
+          </a:p>
+        </p:txBody>
+      </p:sp>
+      <p:sp>
+        <p:nvSpPr>
+          <p:cNvPr id="16" name="TextBox 15"/>
+          <p:cNvSpPr txBox="1"/>
+          <p:nvPr/>
+        </p:nvSpPr>
+        <p:spPr>
+          <a:xfrm>
+            <a:off x="9326880" y="1920240"/>
+            <a:ext cx="2560320" cy="2560320"/>
+          </a:xfrm>
+          <a:prstGeom prst="rect">
+            <a:avLst/>
+          </a:prstGeom>
+          <a:noFill/>
+        </p:spPr>
+        <p:txBody>
+          <a:bodyPr wrap="square">
+            <a:spAutoFit/>
+          </a:bodyPr>
+          <a:lstStyle/>
+          <a:p>
+            <a:pPr algn="l">
+              <a:defRPr sz="1000" b="0">
+                <a:solidFill>
+                  <a:srgbClr val="212121"/>
+                </a:solidFill>
+              </a:defRPr>
+            </a:pPr>
+            <a:r>
+              <a:t>Issue #42: User Auth</a:t>
+            </a:r>
+            <a:br/>
+            <a:r>
+              <a:t>Labels: ai-implement</a:t>
+            </a:r>
+            <a:br/>
+            <a:br/>
+            <a:r>
+              <a:t>Checkboxes as criteria</a:t>
+            </a:r>
+          </a:p>
+        </p:txBody>
+      </p:sp>
+      <p:sp>
+        <p:nvSpPr>
+          <p:cNvPr id="17" name="TextBox 16"/>
+          <p:cNvSpPr txBox="1"/>
+          <p:nvPr/>
+        </p:nvSpPr>
+        <p:spPr>
+          <a:xfrm>
+            <a:off x="457200" y="5029200"/>
+            <a:ext cx="10972800" cy="365760"/>
+          </a:xfrm>
+          <a:prstGeom prst="rect">
+            <a:avLst/>
+          </a:prstGeom>
+          <a:noFill/>
+        </p:spPr>
+        <p:txBody>
+          <a:bodyPr wrap="square">
+            <a:spAutoFit/>
+          </a:bodyPr>
+          <a:lstStyle/>
+          <a:p>
+            <a:pPr algn="ctr">
+              <a:defRPr sz="1400" b="1">
+                <a:solidFill>
+                  <a:srgbClr val="0D47A1"/>
+                </a:solidFill>
+              </a:defRPr>
+            </a:pPr>
+            <a:r>
+              <a:t>$ bob project create app ./work github://org/repo?label=ai-implement</a:t>
+            </a:r>
+          </a:p>
+        </p:txBody>
+      </p:sp>
+      <p:sp>
+        <p:nvSpPr>
+          <p:cNvPr id="18" name="TextBox 17"/>
+          <p:cNvSpPr txBox="1"/>
+          <p:nvPr/>
+        </p:nvSpPr>
+        <p:spPr>
+          <a:xfrm>
+            <a:off x="457200" y="5486400"/>
+            <a:ext cx="10972800" cy="365760"/>
+          </a:xfrm>
+          <a:prstGeom prst="rect">
+            <a:avLst/>
+          </a:prstGeom>
+          <a:noFill/>
+        </p:spPr>
+        <p:txBody>
+          <a:bodyPr wrap="square">
+            <a:spAutoFit/>
+          </a:bodyPr>
+          <a:lstStyle/>
+          <a:p>
+            <a:pPr algn="ctr">
+              <a:defRPr sz="1300" b="0">
+                <a:solidFill>
+                  <a:srgbClr val="616161"/>
+                </a:solidFill>
+              </a:defRPr>
+            </a:pPr>
+            <a:r>
+              <a:t>Sync GitHub issues directly as tasks!</a:t>
             </a:r>
           </a:p>
         </p:txBody>
@@ -3848,13 +5028,13 @@
         <p:spPr>
           <a:xfrm>
             <a:off x="0" y="0"/>
-            <a:ext cx="9144000" cy="914400"/>
+            <a:ext cx="12191695" cy="1005840"/>
           </a:xfrm>
           <a:prstGeom prst="rect">
             <a:avLst/>
           </a:prstGeom>
           <a:solidFill>
-            <a:srgbClr val="FFCC00"/>
+            <a:srgbClr val="FFC107"/>
           </a:solidFill>
           <a:ln>
             <a:noFill/>
@@ -3890,8 +5070,8 @@
         </p:nvSpPr>
         <p:spPr>
           <a:xfrm>
-            <a:off x="274320" y="182880"/>
-            <a:ext cx="8595360" cy="640080"/>
+            <a:off x="457200" y="228600"/>
+            <a:ext cx="10972800" cy="640080"/>
           </a:xfrm>
           <a:prstGeom prst="rect">
             <a:avLst/>
@@ -3905,14 +5085,14 @@
           <a:lstStyle/>
           <a:p>
             <a:pPr>
-              <a:defRPr sz="2800" b="1">
-                <a:solidFill>
-                  <a:srgbClr val="003366"/>
-                </a:solidFill>
-              </a:defRPr>
-            </a:pPr>
-            <a:r>
-              <a:t>🔨 Quick Start</a:t>
+              <a:defRPr sz="3200" b="1">
+                <a:solidFill>
+                  <a:srgbClr val="0D47A1"/>
+                </a:solidFill>
+              </a:defRPr>
+            </a:pPr>
+            <a:r>
+              <a:t>Quick Start Guide</a:t>
             </a:r>
           </a:p>
         </p:txBody>
@@ -3925,8 +5105,86 @@
         </p:nvSpPr>
         <p:spPr>
           <a:xfrm>
-            <a:off x="457200" y="1097280"/>
-            <a:ext cx="8229600" cy="5029200"/>
+            <a:off x="457200" y="594360"/>
+            <a:ext cx="10972800" cy="365760"/>
+          </a:xfrm>
+          <a:prstGeom prst="rect">
+            <a:avLst/>
+          </a:prstGeom>
+          <a:noFill/>
+        </p:spPr>
+        <p:txBody>
+          <a:bodyPr wrap="none">
+            <a:spAutoFit/>
+          </a:bodyPr>
+          <a:lstStyle/>
+          <a:p>
+            <a:pPr>
+              <a:defRPr sz="1400">
+                <a:solidFill>
+                  <a:srgbClr val="616161"/>
+                </a:solidFill>
+              </a:defRPr>
+            </a:pPr>
+            <a:r>
+              <a:t>Get Running in Minutes</a:t>
+            </a:r>
+          </a:p>
+        </p:txBody>
+      </p:sp>
+      <p:sp>
+        <p:nvSpPr>
+          <p:cNvPr id="5" name="Rounded Rectangle 4"/>
+          <p:cNvSpPr/>
+          <p:nvPr/>
+        </p:nvSpPr>
+        <p:spPr>
+          <a:xfrm>
+            <a:off x="457200" y="1371600"/>
+            <a:ext cx="2743200" cy="3657600"/>
+          </a:xfrm>
+          <a:prstGeom prst="roundRect">
+            <a:avLst/>
+          </a:prstGeom>
+          <a:solidFill>
+            <a:srgbClr val="2196F3"/>
+          </a:solidFill>
+          <a:ln>
+            <a:noFill/>
+          </a:ln>
+        </p:spPr>
+        <p:style>
+          <a:lnRef idx="1">
+            <a:schemeClr val="accent1"/>
+          </a:lnRef>
+          <a:fillRef idx="3">
+            <a:schemeClr val="accent1"/>
+          </a:fillRef>
+          <a:effectRef idx="2">
+            <a:schemeClr val="accent1"/>
+          </a:effectRef>
+          <a:fontRef idx="minor">
+            <a:schemeClr val="lt1"/>
+          </a:fontRef>
+        </p:style>
+        <p:txBody>
+          <a:bodyPr rtlCol="0" anchor="ctr"/>
+          <a:lstStyle/>
+          <a:p>
+            <a:pPr algn="ctr"/>
+          </a:p>
+        </p:txBody>
+      </p:sp>
+      <p:sp>
+        <p:nvSpPr>
+          <p:cNvPr id="6" name="TextBox 5"/>
+          <p:cNvSpPr txBox="1"/>
+          <p:nvPr/>
+        </p:nvSpPr>
+        <p:spPr>
+          <a:xfrm>
+            <a:off x="548640" y="1554480"/>
+            <a:ext cx="2560320" cy="457200"/>
           </a:xfrm>
           <a:prstGeom prst="rect">
             <a:avLst/>
@@ -3939,13 +5197,10 @@
           </a:bodyPr>
           <a:lstStyle/>
           <a:p>
-            <a:pPr>
-              <a:spcAft>
-                <a:spcPts val="600"/>
-              </a:spcAft>
-              <a:defRPr sz="1400">
-                <a:solidFill>
-                  <a:srgbClr val="000000"/>
+            <a:pPr algn="l">
+              <a:defRPr sz="1600" b="1">
+                <a:solidFill>
+                  <a:srgbClr val="FFFFFF"/>
                 </a:solidFill>
               </a:defRPr>
             </a:pPr>
@@ -3953,133 +5208,693 @@
               <a:t>1. INSTALL</a:t>
             </a:r>
           </a:p>
-          <a:p>
-            <a:pPr>
-              <a:spcAft>
-                <a:spcPts val="600"/>
-              </a:spcAft>
-              <a:defRPr sz="1400">
-                <a:solidFill>
-                  <a:srgbClr val="000000"/>
-                </a:solidFill>
-              </a:defRPr>
-            </a:pPr>
-            <a:r>
-              <a:t>   $ git clone https://github.com/yye00/bob.git</a:t>
-            </a:r>
-          </a:p>
-          <a:p>
-            <a:pPr>
-              <a:spcAft>
-                <a:spcPts val="600"/>
-              </a:spcAft>
-              <a:defRPr sz="1400">
-                <a:solidFill>
-                  <a:srgbClr val="000000"/>
-                </a:solidFill>
-              </a:defRPr>
-            </a:pPr>
-            <a:r>
-              <a:t>   $ cd bob &amp;&amp; ./init.sh</a:t>
-            </a:r>
-          </a:p>
-          <a:p>
-            <a:pPr>
-              <a:spcAft>
-                <a:spcPts val="600"/>
-              </a:spcAft>
-              <a:defRPr sz="1400">
-                <a:solidFill>
-                  <a:srgbClr val="000000"/>
-                </a:solidFill>
-              </a:defRPr>
-            </a:pPr>
-          </a:p>
-          <a:p>
-            <a:pPr>
-              <a:spcAft>
-                <a:spcPts val="600"/>
-              </a:spcAft>
-              <a:defRPr sz="1400">
-                <a:solidFill>
-                  <a:srgbClr val="000000"/>
-                </a:solidFill>
-              </a:defRPr>
-            </a:pPr>
-            <a:r>
-              <a:t>2. CREATE PROJECT</a:t>
-            </a:r>
-          </a:p>
-          <a:p>
-            <a:pPr>
-              <a:spcAft>
-                <a:spcPts val="600"/>
-              </a:spcAft>
-              <a:defRPr sz="1400">
-                <a:solidFill>
-                  <a:srgbClr val="000000"/>
-                </a:solidFill>
-              </a:defRPr>
-            </a:pPr>
-            <a:r>
-              <a:t>   $ bob project create my-app ./workspace file://spec.yaml</a:t>
-            </a:r>
-          </a:p>
-          <a:p>
-            <a:pPr>
-              <a:spcAft>
-                <a:spcPts val="600"/>
-              </a:spcAft>
-              <a:defRPr sz="1400">
-                <a:solidFill>
-                  <a:srgbClr val="000000"/>
-                </a:solidFill>
-              </a:defRPr>
-            </a:pPr>
-          </a:p>
-          <a:p>
-            <a:pPr>
-              <a:spcAft>
-                <a:spcPts val="600"/>
-              </a:spcAft>
-              <a:defRPr sz="1400">
-                <a:solidFill>
-                  <a:srgbClr val="000000"/>
-                </a:solidFill>
-              </a:defRPr>
-            </a:pPr>
-            <a:r>
-              <a:t>3. RUN</a:t>
-            </a:r>
-          </a:p>
-          <a:p>
-            <a:pPr>
-              <a:spcAft>
-                <a:spcPts val="600"/>
-              </a:spcAft>
-              <a:defRPr sz="1400">
-                <a:solidFill>
-                  <a:srgbClr val="000000"/>
-                </a:solidFill>
-              </a:defRPr>
-            </a:pPr>
-            <a:r>
-              <a:t>   $ bob run</a:t>
-            </a:r>
-          </a:p>
-          <a:p>
-            <a:pPr>
-              <a:spcAft>
-                <a:spcPts val="600"/>
-              </a:spcAft>
-              <a:defRPr sz="1400">
-                <a:solidFill>
-                  <a:srgbClr val="000000"/>
-                </a:solidFill>
-              </a:defRPr>
-            </a:pPr>
-            <a:r>
-              <a:t>   $ bob logs --follow</a:t>
+        </p:txBody>
+      </p:sp>
+      <p:sp>
+        <p:nvSpPr>
+          <p:cNvPr id="7" name="TextBox 6"/>
+          <p:cNvSpPr txBox="1"/>
+          <p:nvPr/>
+        </p:nvSpPr>
+        <p:spPr>
+          <a:xfrm>
+            <a:off x="548640" y="2194560"/>
+            <a:ext cx="2560320" cy="365760"/>
+          </a:xfrm>
+          <a:prstGeom prst="rect">
+            <a:avLst/>
+          </a:prstGeom>
+          <a:noFill/>
+        </p:spPr>
+        <p:txBody>
+          <a:bodyPr wrap="square">
+            <a:spAutoFit/>
+          </a:bodyPr>
+          <a:lstStyle/>
+          <a:p>
+            <a:pPr algn="l">
+              <a:defRPr sz="1000" b="0">
+                <a:solidFill>
+                  <a:srgbClr val="FFFFFF"/>
+                </a:solidFill>
+              </a:defRPr>
+            </a:pPr>
+            <a:r>
+              <a:t>git clone https://github.com/yye00/bob.git</a:t>
+            </a:r>
+          </a:p>
+        </p:txBody>
+      </p:sp>
+      <p:sp>
+        <p:nvSpPr>
+          <p:cNvPr id="8" name="TextBox 7"/>
+          <p:cNvSpPr txBox="1"/>
+          <p:nvPr/>
+        </p:nvSpPr>
+        <p:spPr>
+          <a:xfrm>
+            <a:off x="548640" y="2606040"/>
+            <a:ext cx="2560320" cy="365760"/>
+          </a:xfrm>
+          <a:prstGeom prst="rect">
+            <a:avLst/>
+          </a:prstGeom>
+          <a:noFill/>
+        </p:spPr>
+        <p:txBody>
+          <a:bodyPr wrap="square">
+            <a:spAutoFit/>
+          </a:bodyPr>
+          <a:lstStyle/>
+          <a:p>
+            <a:pPr algn="l">
+              <a:defRPr sz="1000" b="0">
+                <a:solidFill>
+                  <a:srgbClr val="FFFFFF"/>
+                </a:solidFill>
+              </a:defRPr>
+            </a:pPr>
+            <a:r>
+              <a:t>cd bob &amp;&amp; ./init.sh</a:t>
+            </a:r>
+          </a:p>
+        </p:txBody>
+      </p:sp>
+      <p:sp>
+        <p:nvSpPr>
+          <p:cNvPr id="9" name="TextBox 8"/>
+          <p:cNvSpPr txBox="1"/>
+          <p:nvPr/>
+        </p:nvSpPr>
+        <p:spPr>
+          <a:xfrm>
+            <a:off x="548640" y="3017520"/>
+            <a:ext cx="2560320" cy="365760"/>
+          </a:xfrm>
+          <a:prstGeom prst="rect">
+            <a:avLst/>
+          </a:prstGeom>
+          <a:noFill/>
+        </p:spPr>
+        <p:txBody>
+          <a:bodyPr wrap="square">
+            <a:spAutoFit/>
+          </a:bodyPr>
+          <a:lstStyle/>
+          <a:p>
+            <a:pPr algn="l">
+              <a:defRPr sz="1000" b="0">
+                <a:solidFill>
+                  <a:srgbClr val="FFFFFF"/>
+                </a:solidFill>
+              </a:defRPr>
+            </a:pPr>
+            <a:r>
+              <a:t>export ANTHROPIC_API_KEY='...'</a:t>
+            </a:r>
+          </a:p>
+        </p:txBody>
+      </p:sp>
+      <p:sp>
+        <p:nvSpPr>
+          <p:cNvPr id="10" name="Rounded Rectangle 9"/>
+          <p:cNvSpPr/>
+          <p:nvPr/>
+        </p:nvSpPr>
+        <p:spPr>
+          <a:xfrm>
+            <a:off x="3383280" y="1371600"/>
+            <a:ext cx="2743200" cy="3657600"/>
+          </a:xfrm>
+          <a:prstGeom prst="roundRect">
+            <a:avLst/>
+          </a:prstGeom>
+          <a:solidFill>
+            <a:srgbClr val="FF9800"/>
+          </a:solidFill>
+          <a:ln>
+            <a:noFill/>
+          </a:ln>
+        </p:spPr>
+        <p:style>
+          <a:lnRef idx="1">
+            <a:schemeClr val="accent1"/>
+          </a:lnRef>
+          <a:fillRef idx="3">
+            <a:schemeClr val="accent1"/>
+          </a:fillRef>
+          <a:effectRef idx="2">
+            <a:schemeClr val="accent1"/>
+          </a:effectRef>
+          <a:fontRef idx="minor">
+            <a:schemeClr val="lt1"/>
+          </a:fontRef>
+        </p:style>
+        <p:txBody>
+          <a:bodyPr rtlCol="0" anchor="ctr"/>
+          <a:lstStyle/>
+          <a:p>
+            <a:pPr algn="ctr"/>
+          </a:p>
+        </p:txBody>
+      </p:sp>
+      <p:sp>
+        <p:nvSpPr>
+          <p:cNvPr id="11" name="TextBox 10"/>
+          <p:cNvSpPr txBox="1"/>
+          <p:nvPr/>
+        </p:nvSpPr>
+        <p:spPr>
+          <a:xfrm>
+            <a:off x="3474720" y="1554480"/>
+            <a:ext cx="2560320" cy="457200"/>
+          </a:xfrm>
+          <a:prstGeom prst="rect">
+            <a:avLst/>
+          </a:prstGeom>
+          <a:noFill/>
+        </p:spPr>
+        <p:txBody>
+          <a:bodyPr wrap="square">
+            <a:spAutoFit/>
+          </a:bodyPr>
+          <a:lstStyle/>
+          <a:p>
+            <a:pPr algn="l">
+              <a:defRPr sz="1600" b="1">
+                <a:solidFill>
+                  <a:srgbClr val="FFFFFF"/>
+                </a:solidFill>
+              </a:defRPr>
+            </a:pPr>
+            <a:r>
+              <a:t>2. CREATE</a:t>
+            </a:r>
+          </a:p>
+        </p:txBody>
+      </p:sp>
+      <p:sp>
+        <p:nvSpPr>
+          <p:cNvPr id="12" name="TextBox 11"/>
+          <p:cNvSpPr txBox="1"/>
+          <p:nvPr/>
+        </p:nvSpPr>
+        <p:spPr>
+          <a:xfrm>
+            <a:off x="3474720" y="2194560"/>
+            <a:ext cx="2560320" cy="365760"/>
+          </a:xfrm>
+          <a:prstGeom prst="rect">
+            <a:avLst/>
+          </a:prstGeom>
+          <a:noFill/>
+        </p:spPr>
+        <p:txBody>
+          <a:bodyPr wrap="square">
+            <a:spAutoFit/>
+          </a:bodyPr>
+          <a:lstStyle/>
+          <a:p>
+            <a:pPr algn="l">
+              <a:defRPr sz="1000" b="0">
+                <a:solidFill>
+                  <a:srgbClr val="FFFFFF"/>
+                </a:solidFill>
+              </a:defRPr>
+            </a:pPr>
+            <a:r>
+              <a:t>bob init</a:t>
+            </a:r>
+          </a:p>
+        </p:txBody>
+      </p:sp>
+      <p:sp>
+        <p:nvSpPr>
+          <p:cNvPr id="13" name="TextBox 12"/>
+          <p:cNvSpPr txBox="1"/>
+          <p:nvPr/>
+        </p:nvSpPr>
+        <p:spPr>
+          <a:xfrm>
+            <a:off x="3474720" y="2606040"/>
+            <a:ext cx="2560320" cy="365760"/>
+          </a:xfrm>
+          <a:prstGeom prst="rect">
+            <a:avLst/>
+          </a:prstGeom>
+          <a:noFill/>
+        </p:spPr>
+        <p:txBody>
+          <a:bodyPr wrap="square">
+            <a:spAutoFit/>
+          </a:bodyPr>
+          <a:lstStyle/>
+          <a:p>
+            <a:pPr algn="l">
+              <a:defRPr sz="1000" b="0">
+                <a:solidFill>
+                  <a:srgbClr val="FFFFFF"/>
+                </a:solidFill>
+              </a:defRPr>
+            </a:pPr>
+            <a:r>
+              <a:t>bob project create my-app ./workspace file://spec.yaml</a:t>
+            </a:r>
+          </a:p>
+        </p:txBody>
+      </p:sp>
+      <p:sp>
+        <p:nvSpPr>
+          <p:cNvPr id="14" name="Rounded Rectangle 13"/>
+          <p:cNvSpPr/>
+          <p:nvPr/>
+        </p:nvSpPr>
+        <p:spPr>
+          <a:xfrm>
+            <a:off x="6309360" y="1371600"/>
+            <a:ext cx="2743200" cy="3657600"/>
+          </a:xfrm>
+          <a:prstGeom prst="roundRect">
+            <a:avLst/>
+          </a:prstGeom>
+          <a:solidFill>
+            <a:srgbClr val="4CAF50"/>
+          </a:solidFill>
+          <a:ln>
+            <a:noFill/>
+          </a:ln>
+        </p:spPr>
+        <p:style>
+          <a:lnRef idx="1">
+            <a:schemeClr val="accent1"/>
+          </a:lnRef>
+          <a:fillRef idx="3">
+            <a:schemeClr val="accent1"/>
+          </a:fillRef>
+          <a:effectRef idx="2">
+            <a:schemeClr val="accent1"/>
+          </a:effectRef>
+          <a:fontRef idx="minor">
+            <a:schemeClr val="lt1"/>
+          </a:fontRef>
+        </p:style>
+        <p:txBody>
+          <a:bodyPr rtlCol="0" anchor="ctr"/>
+          <a:lstStyle/>
+          <a:p>
+            <a:pPr algn="ctr"/>
+          </a:p>
+        </p:txBody>
+      </p:sp>
+      <p:sp>
+        <p:nvSpPr>
+          <p:cNvPr id="15" name="TextBox 14"/>
+          <p:cNvSpPr txBox="1"/>
+          <p:nvPr/>
+        </p:nvSpPr>
+        <p:spPr>
+          <a:xfrm>
+            <a:off x="6400800" y="1554480"/>
+            <a:ext cx="2560320" cy="457200"/>
+          </a:xfrm>
+          <a:prstGeom prst="rect">
+            <a:avLst/>
+          </a:prstGeom>
+          <a:noFill/>
+        </p:spPr>
+        <p:txBody>
+          <a:bodyPr wrap="square">
+            <a:spAutoFit/>
+          </a:bodyPr>
+          <a:lstStyle/>
+          <a:p>
+            <a:pPr algn="l">
+              <a:defRPr sz="1600" b="1">
+                <a:solidFill>
+                  <a:srgbClr val="FFFFFF"/>
+                </a:solidFill>
+              </a:defRPr>
+            </a:pPr>
+            <a:r>
+              <a:t>3. DEFINE</a:t>
+            </a:r>
+          </a:p>
+        </p:txBody>
+      </p:sp>
+      <p:sp>
+        <p:nvSpPr>
+          <p:cNvPr id="16" name="TextBox 15"/>
+          <p:cNvSpPr txBox="1"/>
+          <p:nvPr/>
+        </p:nvSpPr>
+        <p:spPr>
+          <a:xfrm>
+            <a:off x="6400800" y="2194560"/>
+            <a:ext cx="2560320" cy="365760"/>
+          </a:xfrm>
+          <a:prstGeom prst="rect">
+            <a:avLst/>
+          </a:prstGeom>
+          <a:noFill/>
+        </p:spPr>
+        <p:txBody>
+          <a:bodyPr wrap="square">
+            <a:spAutoFit/>
+          </a:bodyPr>
+          <a:lstStyle/>
+          <a:p>
+            <a:pPr algn="l">
+              <a:defRPr sz="1000" b="0">
+                <a:solidFill>
+                  <a:srgbClr val="FFFFFF"/>
+                </a:solidFill>
+              </a:defRPr>
+            </a:pPr>
+            <a:r>
+              <a:t># spec.yaml</a:t>
+            </a:r>
+          </a:p>
+        </p:txBody>
+      </p:sp>
+      <p:sp>
+        <p:nvSpPr>
+          <p:cNvPr id="17" name="TextBox 16"/>
+          <p:cNvSpPr txBox="1"/>
+          <p:nvPr/>
+        </p:nvSpPr>
+        <p:spPr>
+          <a:xfrm>
+            <a:off x="6400800" y="2606040"/>
+            <a:ext cx="2560320" cy="365760"/>
+          </a:xfrm>
+          <a:prstGeom prst="rect">
+            <a:avLst/>
+          </a:prstGeom>
+          <a:noFill/>
+        </p:spPr>
+        <p:txBody>
+          <a:bodyPr wrap="square">
+            <a:spAutoFit/>
+          </a:bodyPr>
+          <a:lstStyle/>
+          <a:p>
+            <a:pPr algn="l">
+              <a:defRPr sz="1000" b="0">
+                <a:solidFill>
+                  <a:srgbClr val="FFFFFF"/>
+                </a:solidFill>
+              </a:defRPr>
+            </a:pPr>
+            <a:r>
+              <a:t>tasks:</a:t>
+            </a:r>
+          </a:p>
+        </p:txBody>
+      </p:sp>
+      <p:sp>
+        <p:nvSpPr>
+          <p:cNvPr id="18" name="TextBox 17"/>
+          <p:cNvSpPr txBox="1"/>
+          <p:nvPr/>
+        </p:nvSpPr>
+        <p:spPr>
+          <a:xfrm>
+            <a:off x="6400800" y="3017520"/>
+            <a:ext cx="2560320" cy="365760"/>
+          </a:xfrm>
+          <a:prstGeom prst="rect">
+            <a:avLst/>
+          </a:prstGeom>
+          <a:noFill/>
+        </p:spPr>
+        <p:txBody>
+          <a:bodyPr wrap="square">
+            <a:spAutoFit/>
+          </a:bodyPr>
+          <a:lstStyle/>
+          <a:p>
+            <a:pPr algn="l">
+              <a:defRPr sz="1000" b="0">
+                <a:solidFill>
+                  <a:srgbClr val="FFFFFF"/>
+                </a:solidFill>
+              </a:defRPr>
+            </a:pPr>
+            <a:r>
+              <a:t>  - id: setup</a:t>
+            </a:r>
+          </a:p>
+        </p:txBody>
+      </p:sp>
+      <p:sp>
+        <p:nvSpPr>
+          <p:cNvPr id="19" name="TextBox 18"/>
+          <p:cNvSpPr txBox="1"/>
+          <p:nvPr/>
+        </p:nvSpPr>
+        <p:spPr>
+          <a:xfrm>
+            <a:off x="6400800" y="3429000"/>
+            <a:ext cx="2560320" cy="365760"/>
+          </a:xfrm>
+          <a:prstGeom prst="rect">
+            <a:avLst/>
+          </a:prstGeom>
+          <a:noFill/>
+        </p:spPr>
+        <p:txBody>
+          <a:bodyPr wrap="square">
+            <a:spAutoFit/>
+          </a:bodyPr>
+          <a:lstStyle/>
+          <a:p>
+            <a:pPr algn="l">
+              <a:defRPr sz="1000" b="0">
+                <a:solidFill>
+                  <a:srgbClr val="FFFFFF"/>
+                </a:solidFill>
+              </a:defRPr>
+            </a:pPr>
+            <a:r>
+              <a:t>    priority: critical</a:t>
+            </a:r>
+          </a:p>
+        </p:txBody>
+      </p:sp>
+      <p:sp>
+        <p:nvSpPr>
+          <p:cNvPr id="20" name="Rounded Rectangle 19"/>
+          <p:cNvSpPr/>
+          <p:nvPr/>
+        </p:nvSpPr>
+        <p:spPr>
+          <a:xfrm>
+            <a:off x="9235440" y="1371600"/>
+            <a:ext cx="2743200" cy="3657600"/>
+          </a:xfrm>
+          <a:prstGeom prst="roundRect">
+            <a:avLst/>
+          </a:prstGeom>
+          <a:solidFill>
+            <a:srgbClr val="0D47A1"/>
+          </a:solidFill>
+          <a:ln>
+            <a:noFill/>
+          </a:ln>
+        </p:spPr>
+        <p:style>
+          <a:lnRef idx="1">
+            <a:schemeClr val="accent1"/>
+          </a:lnRef>
+          <a:fillRef idx="3">
+            <a:schemeClr val="accent1"/>
+          </a:fillRef>
+          <a:effectRef idx="2">
+            <a:schemeClr val="accent1"/>
+          </a:effectRef>
+          <a:fontRef idx="minor">
+            <a:schemeClr val="lt1"/>
+          </a:fontRef>
+        </p:style>
+        <p:txBody>
+          <a:bodyPr rtlCol="0" anchor="ctr"/>
+          <a:lstStyle/>
+          <a:p>
+            <a:pPr algn="ctr"/>
+          </a:p>
+        </p:txBody>
+      </p:sp>
+      <p:sp>
+        <p:nvSpPr>
+          <p:cNvPr id="21" name="TextBox 20"/>
+          <p:cNvSpPr txBox="1"/>
+          <p:nvPr/>
+        </p:nvSpPr>
+        <p:spPr>
+          <a:xfrm>
+            <a:off x="9326880" y="1554480"/>
+            <a:ext cx="2560320" cy="457200"/>
+          </a:xfrm>
+          <a:prstGeom prst="rect">
+            <a:avLst/>
+          </a:prstGeom>
+          <a:noFill/>
+        </p:spPr>
+        <p:txBody>
+          <a:bodyPr wrap="square">
+            <a:spAutoFit/>
+          </a:bodyPr>
+          <a:lstStyle/>
+          <a:p>
+            <a:pPr algn="l">
+              <a:defRPr sz="1600" b="1">
+                <a:solidFill>
+                  <a:srgbClr val="FFFFFF"/>
+                </a:solidFill>
+              </a:defRPr>
+            </a:pPr>
+            <a:r>
+              <a:t>4. RUN</a:t>
+            </a:r>
+          </a:p>
+        </p:txBody>
+      </p:sp>
+      <p:sp>
+        <p:nvSpPr>
+          <p:cNvPr id="22" name="TextBox 21"/>
+          <p:cNvSpPr txBox="1"/>
+          <p:nvPr/>
+        </p:nvSpPr>
+        <p:spPr>
+          <a:xfrm>
+            <a:off x="9326880" y="2194560"/>
+            <a:ext cx="2560320" cy="365760"/>
+          </a:xfrm>
+          <a:prstGeom prst="rect">
+            <a:avLst/>
+          </a:prstGeom>
+          <a:noFill/>
+        </p:spPr>
+        <p:txBody>
+          <a:bodyPr wrap="square">
+            <a:spAutoFit/>
+          </a:bodyPr>
+          <a:lstStyle/>
+          <a:p>
+            <a:pPr algn="l">
+              <a:defRPr sz="1000" b="0">
+                <a:solidFill>
+                  <a:srgbClr val="FFFFFF"/>
+                </a:solidFill>
+              </a:defRPr>
+            </a:pPr>
+            <a:r>
+              <a:t>bob run</a:t>
+            </a:r>
+          </a:p>
+        </p:txBody>
+      </p:sp>
+      <p:sp>
+        <p:nvSpPr>
+          <p:cNvPr id="23" name="TextBox 22"/>
+          <p:cNvSpPr txBox="1"/>
+          <p:nvPr/>
+        </p:nvSpPr>
+        <p:spPr>
+          <a:xfrm>
+            <a:off x="9326880" y="2606040"/>
+            <a:ext cx="2560320" cy="365760"/>
+          </a:xfrm>
+          <a:prstGeom prst="rect">
+            <a:avLst/>
+          </a:prstGeom>
+          <a:noFill/>
+        </p:spPr>
+        <p:txBody>
+          <a:bodyPr wrap="square">
+            <a:spAutoFit/>
+          </a:bodyPr>
+          <a:lstStyle/>
+          <a:p>
+            <a:pPr algn="l">
+              <a:defRPr sz="1000" b="0">
+                <a:solidFill>
+                  <a:srgbClr val="FFFFFF"/>
+                </a:solidFill>
+              </a:defRPr>
+            </a:pPr>
+            <a:r>
+              <a:t>bob status</a:t>
+            </a:r>
+          </a:p>
+        </p:txBody>
+      </p:sp>
+      <p:sp>
+        <p:nvSpPr>
+          <p:cNvPr id="24" name="TextBox 23"/>
+          <p:cNvSpPr txBox="1"/>
+          <p:nvPr/>
+        </p:nvSpPr>
+        <p:spPr>
+          <a:xfrm>
+            <a:off x="9326880" y="3017520"/>
+            <a:ext cx="2560320" cy="365760"/>
+          </a:xfrm>
+          <a:prstGeom prst="rect">
+            <a:avLst/>
+          </a:prstGeom>
+          <a:noFill/>
+        </p:spPr>
+        <p:txBody>
+          <a:bodyPr wrap="square">
+            <a:spAutoFit/>
+          </a:bodyPr>
+          <a:lstStyle/>
+          <a:p>
+            <a:pPr algn="l">
+              <a:defRPr sz="1000" b="0">
+                <a:solidFill>
+                  <a:srgbClr val="FFFFFF"/>
+                </a:solidFill>
+              </a:defRPr>
+            </a:pPr>
+            <a:r>
+              <a:t>bob logs --follow</a:t>
+            </a:r>
+          </a:p>
+        </p:txBody>
+      </p:sp>
+      <p:sp>
+        <p:nvSpPr>
+          <p:cNvPr id="25" name="TextBox 24"/>
+          <p:cNvSpPr txBox="1"/>
+          <p:nvPr/>
+        </p:nvSpPr>
+        <p:spPr>
+          <a:xfrm>
+            <a:off x="457200" y="5669280"/>
+            <a:ext cx="10972800" cy="365760"/>
+          </a:xfrm>
+          <a:prstGeom prst="rect">
+            <a:avLst/>
+          </a:prstGeom>
+          <a:noFill/>
+        </p:spPr>
+        <p:txBody>
+          <a:bodyPr wrap="square">
+            <a:spAutoFit/>
+          </a:bodyPr>
+          <a:lstStyle/>
+          <a:p>
+            <a:pPr algn="ctr">
+              <a:defRPr sz="1600" b="1">
+                <a:solidFill>
+                  <a:srgbClr val="0D47A1"/>
+                </a:solidFill>
+              </a:defRPr>
+            </a:pPr>
+            <a:r>
+              <a:t>https://github.com/yye00/bob</a:t>
             </a:r>
           </a:p>
         </p:txBody>
@@ -4111,13 +5926,13 @@
         <p:spPr>
           <a:xfrm>
             <a:off x="0" y="0"/>
-            <a:ext cx="9144000" cy="914400"/>
+            <a:ext cx="12191695" cy="1005840"/>
           </a:xfrm>
           <a:prstGeom prst="rect">
             <a:avLst/>
           </a:prstGeom>
           <a:solidFill>
-            <a:srgbClr val="FFCC00"/>
+            <a:srgbClr val="FFC107"/>
           </a:solidFill>
           <a:ln>
             <a:noFill/>
@@ -4153,8 +5968,8 @@
         </p:nvSpPr>
         <p:spPr>
           <a:xfrm>
-            <a:off x="274320" y="182880"/>
-            <a:ext cx="8595360" cy="640080"/>
+            <a:off x="457200" y="228600"/>
+            <a:ext cx="10972800" cy="640080"/>
           </a:xfrm>
           <a:prstGeom prst="rect">
             <a:avLst/>
@@ -4168,14 +5983,14 @@
           <a:lstStyle/>
           <a:p>
             <a:pPr>
-              <a:defRPr sz="2800" b="1">
-                <a:solidFill>
-                  <a:srgbClr val="003366"/>
-                </a:solidFill>
-              </a:defRPr>
-            </a:pPr>
-            <a:r>
-              <a:t>🔨 Summary</a:t>
+              <a:defRPr sz="3200" b="1">
+                <a:solidFill>
+                  <a:srgbClr val="0D47A1"/>
+                </a:solidFill>
+              </a:defRPr>
+            </a:pPr>
+            <a:r>
+              <a:t>Summary</a:t>
             </a:r>
           </a:p>
         </p:txBody>
@@ -4188,8 +6003,78 @@
         </p:nvSpPr>
         <p:spPr>
           <a:xfrm>
-            <a:off x="457200" y="1097280"/>
-            <a:ext cx="8229600" cy="5029200"/>
+            <a:off x="457200" y="594360"/>
+            <a:ext cx="10972800" cy="365760"/>
+          </a:xfrm>
+          <a:prstGeom prst="rect">
+            <a:avLst/>
+          </a:prstGeom>
+          <a:noFill/>
+        </p:spPr>
+        <p:txBody>
+          <a:bodyPr wrap="none">
+            <a:spAutoFit/>
+          </a:bodyPr>
+          <a:lstStyle/>
+          <a:p>
+            <a:pPr>
+              <a:defRPr sz="1400">
+                <a:solidFill>
+                  <a:srgbClr val="616161"/>
+                </a:solidFill>
+              </a:defRPr>
+            </a:pPr>
+            <a:r>
+              <a:t>Production-Ready Autonomous Coding</a:t>
+            </a:r>
+          </a:p>
+        </p:txBody>
+      </p:sp>
+      <p:sp>
+        <p:nvSpPr>
+          <p:cNvPr id="5" name="TextBox 4"/>
+          <p:cNvSpPr txBox="1"/>
+          <p:nvPr/>
+        </p:nvSpPr>
+        <p:spPr>
+          <a:xfrm>
+            <a:off x="457200" y="1371600"/>
+            <a:ext cx="5303520" cy="365760"/>
+          </a:xfrm>
+          <a:prstGeom prst="rect">
+            <a:avLst/>
+          </a:prstGeom>
+          <a:noFill/>
+        </p:spPr>
+        <p:txBody>
+          <a:bodyPr wrap="square">
+            <a:spAutoFit/>
+          </a:bodyPr>
+          <a:lstStyle/>
+          <a:p>
+            <a:pPr algn="l">
+              <a:defRPr sz="1600" b="1">
+                <a:solidFill>
+                  <a:srgbClr val="0D47A1"/>
+                </a:solidFill>
+              </a:defRPr>
+            </a:pPr>
+            <a:r>
+              <a:t>CORE CAPABILITIES</a:t>
+            </a:r>
+          </a:p>
+        </p:txBody>
+      </p:sp>
+      <p:sp>
+        <p:nvSpPr>
+          <p:cNvPr id="6" name="TextBox 5"/>
+          <p:cNvSpPr txBox="1"/>
+          <p:nvPr/>
+        </p:nvSpPr>
+        <p:spPr>
+          <a:xfrm>
+            <a:off x="457200" y="1828800"/>
+            <a:ext cx="5303520" cy="2743200"/>
           </a:xfrm>
           <a:prstGeom prst="rect">
             <a:avLst/>
@@ -4204,182 +6089,312 @@
           <a:p>
             <a:pPr>
               <a:spcAft>
-                <a:spcPts val="600"/>
+                <a:spcPts val="800"/>
               </a:spcAft>
-              <a:defRPr sz="1400">
-                <a:solidFill>
-                  <a:srgbClr val="000000"/>
-                </a:solidFill>
-              </a:defRPr>
-            </a:pPr>
-            <a:r>
-              <a:t>CORE CAPABILITIES</a:t>
+              <a:defRPr sz="1300">
+                <a:solidFill>
+                  <a:srgbClr val="212121"/>
+                </a:solidFill>
+              </a:defRPr>
+            </a:pPr>
+            <a:r>
+              <a:t>Multi-project management</a:t>
             </a:r>
           </a:p>
           <a:p>
             <a:pPr>
               <a:spcAft>
-                <a:spcPts val="600"/>
+                <a:spcPts val="800"/>
               </a:spcAft>
-              <a:defRPr sz="1400">
-                <a:solidFill>
-                  <a:srgbClr val="000000"/>
-                </a:solidFill>
-              </a:defRPr>
-            </a:pPr>
-            <a:r>
-              <a:t>  - Multi-project management with isolated state</a:t>
+              <a:defRPr sz="1300">
+                <a:solidFill>
+                  <a:srgbClr val="212121"/>
+                </a:solidFill>
+              </a:defRPr>
+            </a:pPr>
+            <a:r>
+              <a:t>Intelligent escalation (Sonnet -&gt; Opus -&gt; Diagnosis)</a:t>
             </a:r>
           </a:p>
           <a:p>
             <a:pPr>
               <a:spcAft>
-                <a:spcPts val="600"/>
+                <a:spcPts val="800"/>
               </a:spcAft>
-              <a:defRPr sz="1400">
-                <a:solidFill>
-                  <a:srgbClr val="000000"/>
-                </a:solidFill>
-              </a:defRPr>
-            </a:pPr>
-            <a:r>
-              <a:t>  - Intelligent escalation: Sonnet -&gt; Opus -&gt; Diagnosis</a:t>
+              <a:defRPr sz="1300">
+                <a:solidFill>
+                  <a:srgbClr val="212121"/>
+                </a:solidFill>
+              </a:defRPr>
+            </a:pPr>
+            <a:r>
+              <a:t>Research-first workflow</a:t>
             </a:r>
           </a:p>
           <a:p>
             <a:pPr>
               <a:spcAft>
-                <a:spcPts val="600"/>
+                <a:spcPts val="800"/>
               </a:spcAft>
-              <a:defRPr sz="1400">
-                <a:solidFill>
-                  <a:srgbClr val="000000"/>
-                </a:solidFill>
-              </a:defRPr>
-            </a:pPr>
-            <a:r>
-              <a:t>  - Research-first workflow for knowledge-heavy tasks</a:t>
+              <a:defRPr sz="1300">
+                <a:solidFill>
+                  <a:srgbClr val="212121"/>
+                </a:solidFill>
+              </a:defRPr>
+            </a:pPr>
+            <a:r>
+              <a:t>Parallel DAG-based execution</a:t>
             </a:r>
           </a:p>
           <a:p>
             <a:pPr>
               <a:spcAft>
-                <a:spcPts val="600"/>
+                <a:spcPts val="800"/>
               </a:spcAft>
-              <a:defRPr sz="1400">
-                <a:solidFill>
-                  <a:srgbClr val="000000"/>
-                </a:solidFill>
-              </a:defRPr>
-            </a:pPr>
-            <a:r>
-              <a:t>  - Parallel execution with dependency resolution</a:t>
+              <a:defRPr sz="1300">
+                <a:solidFill>
+                  <a:srgbClr val="212121"/>
+                </a:solidFill>
+              </a:defRPr>
+            </a:pPr>
+            <a:r>
+              <a:t>Real-time cost tracking</a:t>
             </a:r>
           </a:p>
           <a:p>
             <a:pPr>
               <a:spcAft>
-                <a:spcPts val="600"/>
+                <a:spcPts val="800"/>
               </a:spcAft>
-              <a:defRPr sz="1400">
-                <a:solidFill>
-                  <a:srgbClr val="000000"/>
-                </a:solidFill>
-              </a:defRPr>
-            </a:pPr>
-            <a:r>
-              <a:t>  - Real-time cost tracking with budget controls</a:t>
+              <a:defRPr sz="1300">
+                <a:solidFill>
+                  <a:srgbClr val="212121"/>
+                </a:solidFill>
+              </a:defRPr>
+            </a:pPr>
+            <a:r>
+              <a:t>Structured JSON logging</a:t>
             </a:r>
           </a:p>
           <a:p>
             <a:pPr>
               <a:spcAft>
-                <a:spcPts val="600"/>
+                <a:spcPts val="800"/>
               </a:spcAft>
-              <a:defRPr sz="1400">
-                <a:solidFill>
-                  <a:srgbClr val="000000"/>
-                </a:solidFill>
-              </a:defRPr>
-            </a:pPr>
-          </a:p>
+              <a:defRPr sz="1300">
+                <a:solidFill>
+                  <a:srgbClr val="212121"/>
+                </a:solidFill>
+              </a:defRPr>
+            </a:pPr>
+            <a:r>
+              <a:t>Checkpoint and resume</a:t>
+            </a:r>
+          </a:p>
+        </p:txBody>
+      </p:sp>
+      <p:sp>
+        <p:nvSpPr>
+          <p:cNvPr id="7" name="TextBox 6"/>
+          <p:cNvSpPr txBox="1"/>
+          <p:nvPr/>
+        </p:nvSpPr>
+        <p:spPr>
+          <a:xfrm>
+            <a:off x="6400800" y="1371600"/>
+            <a:ext cx="5303520" cy="365760"/>
+          </a:xfrm>
+          <a:prstGeom prst="rect">
+            <a:avLst/>
+          </a:prstGeom>
+          <a:noFill/>
+        </p:spPr>
+        <p:txBody>
+          <a:bodyPr wrap="square">
+            <a:spAutoFit/>
+          </a:bodyPr>
+          <a:lstStyle/>
+          <a:p>
+            <a:pPr algn="l">
+              <a:defRPr sz="1600" b="1">
+                <a:solidFill>
+                  <a:srgbClr val="4CAF50"/>
+                </a:solidFill>
+              </a:defRPr>
+            </a:pPr>
+            <a:r>
+              <a:t>PRODUCTION READY</a:t>
+            </a:r>
+          </a:p>
+        </p:txBody>
+      </p:sp>
+      <p:sp>
+        <p:nvSpPr>
+          <p:cNvPr id="8" name="TextBox 7"/>
+          <p:cNvSpPr txBox="1"/>
+          <p:nvPr/>
+        </p:nvSpPr>
+        <p:spPr>
+          <a:xfrm>
+            <a:off x="6400800" y="1828800"/>
+            <a:ext cx="5303520" cy="1828800"/>
+          </a:xfrm>
+          <a:prstGeom prst="rect">
+            <a:avLst/>
+          </a:prstGeom>
+          <a:noFill/>
+        </p:spPr>
+        <p:txBody>
+          <a:bodyPr wrap="square">
+            <a:spAutoFit/>
+          </a:bodyPr>
+          <a:lstStyle/>
           <a:p>
             <a:pPr>
               <a:spcAft>
-                <a:spcPts val="600"/>
+                <a:spcPts val="800"/>
               </a:spcAft>
-              <a:defRPr sz="1400">
-                <a:solidFill>
-                  <a:srgbClr val="000000"/>
-                </a:solidFill>
-              </a:defRPr>
-            </a:pPr>
-            <a:r>
-              <a:t>PRODUCTION READY: 1,200+ tests - SQLite - Claude Code SDK</a:t>
+              <a:defRPr sz="1300">
+                <a:solidFill>
+                  <a:srgbClr val="212121"/>
+                </a:solidFill>
+              </a:defRPr>
+            </a:pPr>
+            <a:r>
+              <a:t>1,200+ tests passing</a:t>
             </a:r>
           </a:p>
           <a:p>
             <a:pPr>
               <a:spcAft>
-                <a:spcPts val="600"/>
+                <a:spcPts val="800"/>
               </a:spcAft>
-              <a:defRPr sz="1400">
-                <a:solidFill>
-                  <a:srgbClr val="000000"/>
-                </a:solidFill>
-              </a:defRPr>
-            </a:pPr>
+              <a:defRPr sz="1300">
+                <a:solidFill>
+                  <a:srgbClr val="212121"/>
+                </a:solidFill>
+              </a:defRPr>
+            </a:pPr>
+            <a:r>
+              <a:t>SQLite persistence</a:t>
+            </a:r>
           </a:p>
           <a:p>
             <a:pPr>
               <a:spcAft>
-                <a:spcPts val="600"/>
+                <a:spcPts val="800"/>
               </a:spcAft>
-              <a:defRPr sz="1400">
-                <a:solidFill>
-                  <a:srgbClr val="000000"/>
-                </a:solidFill>
-              </a:defRPr>
-            </a:pPr>
-            <a:r>
-              <a:t>GET STARTED:</a:t>
+              <a:defRPr sz="1300">
+                <a:solidFill>
+                  <a:srgbClr val="212121"/>
+                </a:solidFill>
+              </a:defRPr>
+            </a:pPr>
+            <a:r>
+              <a:t>Comprehensive CLI</a:t>
             </a:r>
           </a:p>
           <a:p>
             <a:pPr>
               <a:spcAft>
-                <a:spcPts val="600"/>
+                <a:spcPts val="800"/>
               </a:spcAft>
-              <a:defRPr sz="1400">
-                <a:solidFill>
-                  <a:srgbClr val="000000"/>
-                </a:solidFill>
-              </a:defRPr>
-            </a:pPr>
-            <a:r>
-              <a:t>  $ git clone https://github.com/yye00/bob.git &amp;&amp; bob run</a:t>
+              <a:defRPr sz="1300">
+                <a:solidFill>
+                  <a:srgbClr val="212121"/>
+                </a:solidFill>
+              </a:defRPr>
+            </a:pPr>
+            <a:r>
+              <a:t>GitHub Issues integration</a:t>
             </a:r>
           </a:p>
           <a:p>
             <a:pPr>
               <a:spcAft>
-                <a:spcPts val="600"/>
+                <a:spcPts val="800"/>
               </a:spcAft>
-              <a:defRPr sz="1400">
-                <a:solidFill>
-                  <a:srgbClr val="000000"/>
-                </a:solidFill>
-              </a:defRPr>
-            </a:pPr>
-          </a:p>
-          <a:p>
-            <a:pPr>
-              <a:spcAft>
-                <a:spcPts val="600"/>
-              </a:spcAft>
-              <a:defRPr sz="1400">
-                <a:solidFill>
-                  <a:srgbClr val="000000"/>
+              <a:defRPr sz="1300">
+                <a:solidFill>
+                  <a:srgbClr val="212121"/>
+                </a:solidFill>
+              </a:defRPr>
+            </a:pPr>
+            <a:r>
+              <a:t>Built with Claude Code SDK</a:t>
+            </a:r>
+          </a:p>
+        </p:txBody>
+      </p:sp>
+      <p:sp>
+        <p:nvSpPr>
+          <p:cNvPr id="9" name="Rounded Rectangle 8"/>
+          <p:cNvSpPr/>
+          <p:nvPr/>
+        </p:nvSpPr>
+        <p:spPr>
+          <a:xfrm>
+            <a:off x="1828800" y="4846320"/>
+            <a:ext cx="8534095" cy="1371600"/>
+          </a:xfrm>
+          <a:prstGeom prst="roundRect">
+            <a:avLst/>
+          </a:prstGeom>
+          <a:solidFill>
+            <a:srgbClr val="FFC107"/>
+          </a:solidFill>
+          <a:ln>
+            <a:noFill/>
+          </a:ln>
+        </p:spPr>
+        <p:style>
+          <a:lnRef idx="1">
+            <a:schemeClr val="accent1"/>
+          </a:lnRef>
+          <a:fillRef idx="3">
+            <a:schemeClr val="accent1"/>
+          </a:fillRef>
+          <a:effectRef idx="2">
+            <a:schemeClr val="accent1"/>
+          </a:effectRef>
+          <a:fontRef idx="minor">
+            <a:schemeClr val="lt1"/>
+          </a:fontRef>
+        </p:style>
+        <p:txBody>
+          <a:bodyPr rtlCol="0" anchor="ctr"/>
+          <a:lstStyle/>
+          <a:p>
+            <a:pPr algn="ctr"/>
+          </a:p>
+        </p:txBody>
+      </p:sp>
+      <p:sp>
+        <p:nvSpPr>
+          <p:cNvPr id="10" name="TextBox 9"/>
+          <p:cNvSpPr txBox="1"/>
+          <p:nvPr/>
+        </p:nvSpPr>
+        <p:spPr>
+          <a:xfrm>
+            <a:off x="1828800" y="5029200"/>
+            <a:ext cx="8534095" cy="457200"/>
+          </a:xfrm>
+          <a:prstGeom prst="rect">
+            <a:avLst/>
+          </a:prstGeom>
+          <a:noFill/>
+        </p:spPr>
+        <p:txBody>
+          <a:bodyPr wrap="square">
+            <a:spAutoFit/>
+          </a:bodyPr>
+          <a:lstStyle/>
+          <a:p>
+            <a:pPr algn="ctr">
+              <a:defRPr sz="2400" b="1">
+                <a:solidFill>
+                  <a:srgbClr val="0D47A1"/>
                 </a:solidFill>
               </a:defRPr>
             </a:pPr>
@@ -4387,31 +6402,39 @@
               <a:t>"Can We Build It? YES WE CAN!"</a:t>
             </a:r>
           </a:p>
-          <a:p>
-            <a:pPr>
-              <a:spcAft>
-                <a:spcPts val="600"/>
-              </a:spcAft>
-              <a:defRPr sz="1400">
-                <a:solidFill>
-                  <a:srgbClr val="000000"/>
-                </a:solidFill>
-              </a:defRPr>
-            </a:pPr>
-          </a:p>
-          <a:p>
-            <a:pPr>
-              <a:spcAft>
-                <a:spcPts val="600"/>
-              </a:spcAft>
-              <a:defRPr sz="1400">
-                <a:solidFill>
-                  <a:srgbClr val="000000"/>
-                </a:solidFill>
-              </a:defRPr>
-            </a:pPr>
-            <a:r>
-              <a:t>Yaakoub Elkhamra, PhD - https://github.com/yye00/bob</a:t>
+        </p:txBody>
+      </p:sp>
+      <p:sp>
+        <p:nvSpPr>
+          <p:cNvPr id="11" name="TextBox 10"/>
+          <p:cNvSpPr txBox="1"/>
+          <p:nvPr/>
+        </p:nvSpPr>
+        <p:spPr>
+          <a:xfrm>
+            <a:off x="1828800" y="5669280"/>
+            <a:ext cx="8534095" cy="365760"/>
+          </a:xfrm>
+          <a:prstGeom prst="rect">
+            <a:avLst/>
+          </a:prstGeom>
+          <a:noFill/>
+        </p:spPr>
+        <p:txBody>
+          <a:bodyPr wrap="square">
+            <a:spAutoFit/>
+          </a:bodyPr>
+          <a:lstStyle/>
+          <a:p>
+            <a:pPr algn="ctr">
+              <a:defRPr sz="1400" b="0">
+                <a:solidFill>
+                  <a:srgbClr val="0D47A1"/>
+                </a:solidFill>
+              </a:defRPr>
+            </a:pPr>
+            <a:r>
+              <a:t>Yaakoub Elkhamra, PhD  |  https://github.com/yye00/bob</a:t>
             </a:r>
           </a:p>
         </p:txBody>
@@ -4443,13 +6466,13 @@
         <p:spPr>
           <a:xfrm>
             <a:off x="0" y="0"/>
-            <a:ext cx="9144000" cy="914400"/>
+            <a:ext cx="12191695" cy="1005840"/>
           </a:xfrm>
           <a:prstGeom prst="rect">
             <a:avLst/>
           </a:prstGeom>
           <a:solidFill>
-            <a:srgbClr val="FFCC00"/>
+            <a:srgbClr val="FFC107"/>
           </a:solidFill>
           <a:ln>
             <a:noFill/>
@@ -4485,8 +6508,8 @@
         </p:nvSpPr>
         <p:spPr>
           <a:xfrm>
-            <a:off x="274320" y="182880"/>
-            <a:ext cx="8595360" cy="640080"/>
+            <a:off x="457200" y="228600"/>
+            <a:ext cx="10972800" cy="640080"/>
           </a:xfrm>
           <a:prstGeom prst="rect">
             <a:avLst/>
@@ -4500,14 +6523,14 @@
           <a:lstStyle/>
           <a:p>
             <a:pPr>
-              <a:defRPr sz="2800" b="1">
-                <a:solidFill>
-                  <a:srgbClr val="003366"/>
-                </a:solidFill>
-              </a:defRPr>
-            </a:pPr>
-            <a:r>
-              <a:t>🔨 The Origin Story</a:t>
+              <a:defRPr sz="3200" b="1">
+                <a:solidFill>
+                  <a:srgbClr val="0D47A1"/>
+                </a:solidFill>
+              </a:defRPr>
+            </a:pPr>
+            <a:r>
+              <a:t>The Origin Story</a:t>
             </a:r>
           </a:p>
         </p:txBody>
@@ -4520,8 +6543,102 @@
         </p:nvSpPr>
         <p:spPr>
           <a:xfrm>
-            <a:off x="457200" y="1097280"/>
-            <a:ext cx="8229600" cy="5029200"/>
+            <a:off x="457200" y="594360"/>
+            <a:ext cx="10972800" cy="365760"/>
+          </a:xfrm>
+          <a:prstGeom prst="rect">
+            <a:avLst/>
+          </a:prstGeom>
+          <a:noFill/>
+        </p:spPr>
+        <p:txBody>
+          <a:bodyPr wrap="none">
+            <a:spAutoFit/>
+          </a:bodyPr>
+          <a:lstStyle/>
+          <a:p>
+            <a:pPr>
+              <a:defRPr sz="1400">
+                <a:solidFill>
+                  <a:srgbClr val="616161"/>
+                </a:solidFill>
+              </a:defRPr>
+            </a:pPr>
+            <a:r>
+              <a:t>How BOB Came To Be</a:t>
+            </a:r>
+          </a:p>
+        </p:txBody>
+      </p:sp>
+      <p:pic>
+        <p:nvPicPr>
+          <p:cNvPr id="5" name="Picture 4" descr="recursive_workflow.png"/>
+          <p:cNvPicPr>
+            <a:picLocks noChangeAspect="1"/>
+          </p:cNvPicPr>
+          <p:nvPr/>
+        </p:nvPicPr>
+        <p:blipFill>
+          <a:blip r:embed="rId2"/>
+          <a:stretch>
+            <a:fillRect/>
+          </a:stretch>
+        </p:blipFill>
+        <p:spPr>
+          <a:xfrm>
+            <a:off x="6400800" y="1371600"/>
+            <a:ext cx="5486400" cy="3269673"/>
+          </a:xfrm>
+          <a:prstGeom prst="rect">
+            <a:avLst/>
+          </a:prstGeom>
+        </p:spPr>
+      </p:pic>
+      <p:sp>
+        <p:nvSpPr>
+          <p:cNvPr id="6" name="TextBox 5"/>
+          <p:cNvSpPr txBox="1"/>
+          <p:nvPr/>
+        </p:nvSpPr>
+        <p:spPr>
+          <a:xfrm>
+            <a:off x="457200" y="1188720"/>
+            <a:ext cx="5486400" cy="365760"/>
+          </a:xfrm>
+          <a:prstGeom prst="rect">
+            <a:avLst/>
+          </a:prstGeom>
+          <a:noFill/>
+        </p:spPr>
+        <p:txBody>
+          <a:bodyPr wrap="square">
+            <a:spAutoFit/>
+          </a:bodyPr>
+          <a:lstStyle/>
+          <a:p>
+            <a:pPr algn="l">
+              <a:defRPr sz="1800" b="1">
+                <a:solidFill>
+                  <a:srgbClr val="0D47A1"/>
+                </a:solidFill>
+              </a:defRPr>
+            </a:pPr>
+            <a:r>
+              <a:t>THE VISION</a:t>
+            </a:r>
+          </a:p>
+        </p:txBody>
+      </p:sp>
+      <p:sp>
+        <p:nvSpPr>
+          <p:cNvPr id="7" name="TextBox 6"/>
+          <p:cNvSpPr txBox="1"/>
+          <p:nvPr/>
+        </p:nvSpPr>
+        <p:spPr>
+          <a:xfrm>
+            <a:off x="457200" y="1645920"/>
+            <a:ext cx="5486400" cy="1097280"/>
           </a:xfrm>
           <a:prstGeom prst="rect">
             <a:avLst/>
@@ -4536,262 +6653,252 @@
           <a:p>
             <a:pPr>
               <a:spcAft>
-                <a:spcPts val="600"/>
+                <a:spcPts val="800"/>
               </a:spcAft>
               <a:defRPr sz="1400">
                 <a:solidFill>
-                  <a:srgbClr val="000000"/>
-                </a:solidFill>
-              </a:defRPr>
-            </a:pPr>
-            <a:r>
-              <a:t>THE VISION:</a:t>
+                  <a:srgbClr val="212121"/>
+                </a:solidFill>
+              </a:defRPr>
+            </a:pPr>
+            <a:r>
+              <a:t>Build a recursive workflow:</a:t>
             </a:r>
           </a:p>
           <a:p>
             <a:pPr>
               <a:spcAft>
-                <a:spcPts val="600"/>
+                <a:spcPts val="800"/>
               </a:spcAft>
               <a:defRPr sz="1400">
                 <a:solidFill>
-                  <a:srgbClr val="000000"/>
-                </a:solidFill>
-              </a:defRPr>
-            </a:pPr>
-            <a:r>
-              <a:t>I wanted to build a RECURSIVE workflow:</a:t>
+                  <a:srgbClr val="212121"/>
+                </a:solidFill>
+              </a:defRPr>
+            </a:pPr>
+            <a:r>
+              <a:t>  RESEARCH -&gt; PLAN -&gt; EXECUTE</a:t>
             </a:r>
           </a:p>
           <a:p>
             <a:pPr>
               <a:spcAft>
-                <a:spcPts val="600"/>
+                <a:spcPts val="800"/>
               </a:spcAft>
               <a:defRPr sz="1400">
                 <a:solidFill>
-                  <a:srgbClr val="000000"/>
-                </a:solidFill>
-              </a:defRPr>
-            </a:pPr>
-            <a:r>
-              <a:t>    RESEARCH -&gt; PLAN -&gt; EXECUTE -&gt; (loop until done)</a:t>
-            </a:r>
-          </a:p>
+                  <a:srgbClr val="212121"/>
+                </a:solidFill>
+              </a:defRPr>
+            </a:pPr>
+            <a:r>
+              <a:t>  (loop until done)</a:t>
+            </a:r>
+          </a:p>
+        </p:txBody>
+      </p:sp>
+      <p:sp>
+        <p:nvSpPr>
+          <p:cNvPr id="8" name="TextBox 7"/>
+          <p:cNvSpPr txBox="1"/>
+          <p:nvPr/>
+        </p:nvSpPr>
+        <p:spPr>
+          <a:xfrm>
+            <a:off x="457200" y="2926080"/>
+            <a:ext cx="5486400" cy="365760"/>
+          </a:xfrm>
+          <a:prstGeom prst="rect">
+            <a:avLst/>
+          </a:prstGeom>
+          <a:noFill/>
+        </p:spPr>
+        <p:txBody>
+          <a:bodyPr wrap="square">
+            <a:spAutoFit/>
+          </a:bodyPr>
+          <a:lstStyle/>
+          <a:p>
+            <a:pPr algn="l">
+              <a:defRPr sz="1800" b="1">
+                <a:solidFill>
+                  <a:srgbClr val="FF9800"/>
+                </a:solidFill>
+              </a:defRPr>
+            </a:pPr>
+            <a:r>
+              <a:t>THE PROBLEM</a:t>
+            </a:r>
+          </a:p>
+        </p:txBody>
+      </p:sp>
+      <p:sp>
+        <p:nvSpPr>
+          <p:cNvPr id="9" name="TextBox 8"/>
+          <p:cNvSpPr txBox="1"/>
+          <p:nvPr/>
+        </p:nvSpPr>
+        <p:spPr>
+          <a:xfrm>
+            <a:off x="457200" y="3383280"/>
+            <a:ext cx="5486400" cy="914400"/>
+          </a:xfrm>
+          <a:prstGeom prst="rect">
+            <a:avLst/>
+          </a:prstGeom>
+          <a:noFill/>
+        </p:spPr>
+        <p:txBody>
+          <a:bodyPr wrap="square">
+            <a:spAutoFit/>
+          </a:bodyPr>
+          <a:lstStyle/>
           <a:p>
             <a:pPr>
               <a:spcAft>
-                <a:spcPts val="600"/>
+                <a:spcPts val="800"/>
               </a:spcAft>
               <a:defRPr sz="1400">
                 <a:solidFill>
-                  <a:srgbClr val="000000"/>
-                </a:solidFill>
-              </a:defRPr>
-            </a:pPr>
+                  <a:srgbClr val="212121"/>
+                </a:solidFill>
+              </a:defRPr>
+            </a:pPr>
+            <a:r>
+              <a:t>Tokens were an issue</a:t>
+            </a:r>
           </a:p>
           <a:p>
             <a:pPr>
               <a:spcAft>
-                <a:spcPts val="600"/>
+                <a:spcPts val="800"/>
               </a:spcAft>
               <a:defRPr sz="1400">
                 <a:solidFill>
-                  <a:srgbClr val="000000"/>
-                </a:solidFill>
-              </a:defRPr>
-            </a:pPr>
-            <a:r>
-              <a:t>THE PROBLEM:</a:t>
+                  <a:srgbClr val="212121"/>
+                </a:solidFill>
+              </a:defRPr>
+            </a:pPr>
+            <a:r>
+              <a:t>Complex workflows = massive context</a:t>
             </a:r>
           </a:p>
           <a:p>
             <a:pPr>
               <a:spcAft>
-                <a:spcPts val="600"/>
+                <a:spcPts val="800"/>
               </a:spcAft>
               <a:defRPr sz="1400">
                 <a:solidFill>
-                  <a:srgbClr val="000000"/>
-                </a:solidFill>
-              </a:defRPr>
-            </a:pPr>
-            <a:r>
-              <a:t>TOKENS WERE AN ISSUE</a:t>
-            </a:r>
-          </a:p>
+                  <a:srgbClr val="212121"/>
+                </a:solidFill>
+              </a:defRPr>
+            </a:pPr>
+            <a:r>
+              <a:t>API costs added up quickly</a:t>
+            </a:r>
+          </a:p>
+        </p:txBody>
+      </p:sp>
+      <p:sp>
+        <p:nvSpPr>
+          <p:cNvPr id="10" name="TextBox 9"/>
+          <p:cNvSpPr txBox="1"/>
+          <p:nvPr/>
+        </p:nvSpPr>
+        <p:spPr>
+          <a:xfrm>
+            <a:off x="457200" y="4572000"/>
+            <a:ext cx="5486400" cy="365760"/>
+          </a:xfrm>
+          <a:prstGeom prst="rect">
+            <a:avLst/>
+          </a:prstGeom>
+          <a:noFill/>
+        </p:spPr>
+        <p:txBody>
+          <a:bodyPr wrap="square">
+            <a:spAutoFit/>
+          </a:bodyPr>
+          <a:lstStyle/>
+          <a:p>
+            <a:pPr algn="l">
+              <a:defRPr sz="1800" b="1">
+                <a:solidFill>
+                  <a:srgbClr val="4CAF50"/>
+                </a:solidFill>
+              </a:defRPr>
+            </a:pPr>
+            <a:r>
+              <a:t>THE BREAKTHROUGH</a:t>
+            </a:r>
+          </a:p>
+        </p:txBody>
+      </p:sp>
+      <p:sp>
+        <p:nvSpPr>
+          <p:cNvPr id="11" name="TextBox 10"/>
+          <p:cNvSpPr txBox="1"/>
+          <p:nvPr/>
+        </p:nvSpPr>
+        <p:spPr>
+          <a:xfrm>
+            <a:off x="457200" y="5029200"/>
+            <a:ext cx="5486400" cy="1097280"/>
+          </a:xfrm>
+          <a:prstGeom prst="rect">
+            <a:avLst/>
+          </a:prstGeom>
+          <a:noFill/>
+        </p:spPr>
+        <p:txBody>
+          <a:bodyPr wrap="square">
+            <a:spAutoFit/>
+          </a:bodyPr>
+          <a:lstStyle/>
           <a:p>
             <a:pPr>
               <a:spcAft>
-                <a:spcPts val="600"/>
+                <a:spcPts val="800"/>
               </a:spcAft>
               <a:defRPr sz="1400">
                 <a:solidFill>
-                  <a:srgbClr val="000000"/>
-                </a:solidFill>
-              </a:defRPr>
-            </a:pPr>
-            <a:r>
-              <a:t>- Complex multi-step workflows = massive context</a:t>
+                  <a:srgbClr val="212121"/>
+                </a:solidFill>
+              </a:defRPr>
+            </a:pPr>
+            <a:r>
+              <a:t>Claude Code Max subscription</a:t>
             </a:r>
           </a:p>
           <a:p>
             <a:pPr>
               <a:spcAft>
-                <a:spcPts val="600"/>
+                <a:spcPts val="800"/>
               </a:spcAft>
               <a:defRPr sz="1400">
                 <a:solidFill>
-                  <a:srgbClr val="000000"/>
-                </a:solidFill>
-              </a:defRPr>
-            </a:pPr>
-            <a:r>
-              <a:t>- API costs added up quickly</a:t>
+                  <a:srgbClr val="212121"/>
+                </a:solidFill>
+              </a:defRPr>
+            </a:pPr>
+            <a:r>
+              <a:t>Started with Claude Code Harness Demo</a:t>
             </a:r>
           </a:p>
           <a:p>
             <a:pPr>
               <a:spcAft>
-                <a:spcPts val="600"/>
+                <a:spcPts val="800"/>
               </a:spcAft>
               <a:defRPr sz="1400">
                 <a:solidFill>
-                  <a:srgbClr val="000000"/>
-                </a:solidFill>
-              </a:defRPr>
-            </a:pPr>
-            <a:r>
-              <a:t>- Had to choose between capability and affordability</a:t>
-            </a:r>
-          </a:p>
-          <a:p>
-            <a:pPr>
-              <a:spcAft>
-                <a:spcPts val="600"/>
-              </a:spcAft>
-              <a:defRPr sz="1400">
-                <a:solidFill>
-                  <a:srgbClr val="000000"/>
-                </a:solidFill>
-              </a:defRPr>
-            </a:pPr>
-          </a:p>
-          <a:p>
-            <a:pPr>
-              <a:spcAft>
-                <a:spcPts val="600"/>
-              </a:spcAft>
-              <a:defRPr sz="1400">
-                <a:solidFill>
-                  <a:srgbClr val="000000"/>
-                </a:solidFill>
-              </a:defRPr>
-            </a:pPr>
-            <a:r>
-              <a:t>THE BREAKTHROUGH:</a:t>
-            </a:r>
-          </a:p>
-          <a:p>
-            <a:pPr>
-              <a:spcAft>
-                <a:spcPts val="600"/>
-              </a:spcAft>
-              <a:defRPr sz="1400">
-                <a:solidFill>
-                  <a:srgbClr val="000000"/>
-                </a:solidFill>
-              </a:defRPr>
-            </a:pPr>
-            <a:r>
-              <a:t>CLAUDE CODE MAX SUBSCRIPTION</a:t>
-            </a:r>
-          </a:p>
-          <a:p>
-            <a:pPr>
-              <a:spcAft>
-                <a:spcPts val="600"/>
-              </a:spcAft>
-              <a:defRPr sz="1400">
-                <a:solidFill>
-                  <a:srgbClr val="000000"/>
-                </a:solidFill>
-              </a:defRPr>
-            </a:pPr>
-            <a:r>
-              <a:t>- Unlimited tokens for complex workflows</a:t>
-            </a:r>
-          </a:p>
-          <a:p>
-            <a:pPr>
-              <a:spcAft>
-                <a:spcPts val="600"/>
-              </a:spcAft>
-              <a:defRPr sz="1400">
-                <a:solidFill>
-                  <a:srgbClr val="000000"/>
-                </a:solidFill>
-              </a:defRPr>
-            </a:pPr>
-            <a:r>
-              <a:t>- Started with Claude Code Harness Demo</a:t>
-            </a:r>
-          </a:p>
-          <a:p>
-            <a:pPr>
-              <a:spcAft>
-                <a:spcPts val="600"/>
-              </a:spcAft>
-              <a:defRPr sz="1400">
-                <a:solidFill>
-                  <a:srgbClr val="000000"/>
-                </a:solidFill>
-              </a:defRPr>
-            </a:pPr>
-            <a:r>
-              <a:t>  (Anthropic's Autonomous Coding Quickstart)</a:t>
-            </a:r>
-          </a:p>
-          <a:p>
-            <a:pPr>
-              <a:spcAft>
-                <a:spcPts val="600"/>
-              </a:spcAft>
-              <a:defRPr sz="1400">
-                <a:solidFill>
-                  <a:srgbClr val="000000"/>
-                </a:solidFill>
-              </a:defRPr>
-            </a:pPr>
-            <a:r>
-              <a:t>- Extended it into a full production framework</a:t>
-            </a:r>
-          </a:p>
-          <a:p>
-            <a:pPr>
-              <a:spcAft>
-                <a:spcPts val="600"/>
-              </a:spcAft>
-              <a:defRPr sz="1400">
-                <a:solidFill>
-                  <a:srgbClr val="000000"/>
-                </a:solidFill>
-              </a:defRPr>
-            </a:pPr>
-          </a:p>
-          <a:p>
-            <a:pPr>
-              <a:spcAft>
-                <a:spcPts val="600"/>
-              </a:spcAft>
-              <a:defRPr sz="1400">
-                <a:solidFill>
-                  <a:srgbClr val="000000"/>
-                </a:solidFill>
-              </a:defRPr>
-            </a:pPr>
-            <a:r>
-              <a:t>Built with: CLAUDE CODE SDK</a:t>
+                  <a:srgbClr val="212121"/>
+                </a:solidFill>
+              </a:defRPr>
+            </a:pPr>
+            <a:r>
+              <a:t>Built with Claude Code SDK</a:t>
             </a:r>
           </a:p>
         </p:txBody>
@@ -4823,13 +6930,13 @@
         <p:spPr>
           <a:xfrm>
             <a:off x="0" y="0"/>
-            <a:ext cx="9144000" cy="914400"/>
+            <a:ext cx="12191695" cy="1005840"/>
           </a:xfrm>
           <a:prstGeom prst="rect">
             <a:avLst/>
           </a:prstGeom>
           <a:solidFill>
-            <a:srgbClr val="FFCC00"/>
+            <a:srgbClr val="FFC107"/>
           </a:solidFill>
           <a:ln>
             <a:noFill/>
@@ -4865,8 +6972,8 @@
         </p:nvSpPr>
         <p:spPr>
           <a:xfrm>
-            <a:off x="274320" y="182880"/>
-            <a:ext cx="8595360" cy="640080"/>
+            <a:off x="457200" y="228600"/>
+            <a:ext cx="10972800" cy="640080"/>
           </a:xfrm>
           <a:prstGeom prst="rect">
             <a:avLst/>
@@ -4880,14 +6987,14 @@
           <a:lstStyle/>
           <a:p>
             <a:pPr>
-              <a:defRPr sz="2800" b="1">
-                <a:solidFill>
-                  <a:srgbClr val="003366"/>
-                </a:solidFill>
-              </a:defRPr>
-            </a:pPr>
-            <a:r>
-              <a:t>🔨 The Challenge</a:t>
+              <a:defRPr sz="3200" b="1">
+                <a:solidFill>
+                  <a:srgbClr val="0D47A1"/>
+                </a:solidFill>
+              </a:defRPr>
+            </a:pPr>
+            <a:r>
+              <a:t>Why The Harness Design Works</a:t>
             </a:r>
           </a:p>
         </p:txBody>
@@ -4900,8 +7007,78 @@
         </p:nvSpPr>
         <p:spPr>
           <a:xfrm>
-            <a:off x="457200" y="1097280"/>
-            <a:ext cx="8229600" cy="5029200"/>
+            <a:off x="457200" y="594360"/>
+            <a:ext cx="10972800" cy="365760"/>
+          </a:xfrm>
+          <a:prstGeom prst="rect">
+            <a:avLst/>
+          </a:prstGeom>
+          <a:noFill/>
+        </p:spPr>
+        <p:txBody>
+          <a:bodyPr wrap="none">
+            <a:spAutoFit/>
+          </a:bodyPr>
+          <a:lstStyle/>
+          <a:p>
+            <a:pPr>
+              <a:defRPr sz="1400">
+                <a:solidFill>
+                  <a:srgbClr val="616161"/>
+                </a:solidFill>
+              </a:defRPr>
+            </a:pPr>
+            <a:r>
+              <a:t>Key Design Patterns That Enable Autonomous Coding</a:t>
+            </a:r>
+          </a:p>
+        </p:txBody>
+      </p:sp>
+      <p:sp>
+        <p:nvSpPr>
+          <p:cNvPr id="5" name="TextBox 4"/>
+          <p:cNvSpPr txBox="1"/>
+          <p:nvPr/>
+        </p:nvSpPr>
+        <p:spPr>
+          <a:xfrm>
+            <a:off x="457200" y="1188720"/>
+            <a:ext cx="5486400" cy="365760"/>
+          </a:xfrm>
+          <a:prstGeom prst="rect">
+            <a:avLst/>
+          </a:prstGeom>
+          <a:noFill/>
+        </p:spPr>
+        <p:txBody>
+          <a:bodyPr wrap="square">
+            <a:spAutoFit/>
+          </a:bodyPr>
+          <a:lstStyle/>
+          <a:p>
+            <a:pPr algn="l">
+              <a:defRPr sz="1600" b="1">
+                <a:solidFill>
+                  <a:srgbClr val="0D47A1"/>
+                </a:solidFill>
+              </a:defRPr>
+            </a:pPr>
+            <a:r>
+              <a:t>1. ORCHESTRATION OVER AGENTS</a:t>
+            </a:r>
+          </a:p>
+        </p:txBody>
+      </p:sp>
+      <p:sp>
+        <p:nvSpPr>
+          <p:cNvPr id="6" name="TextBox 5"/>
+          <p:cNvSpPr txBox="1"/>
+          <p:nvPr/>
+        </p:nvSpPr>
+        <p:spPr>
+          <a:xfrm>
+            <a:off x="457200" y="1645920"/>
+            <a:ext cx="5303520" cy="1188720"/>
           </a:xfrm>
           <a:prstGeom prst="rect">
             <a:avLst/>
@@ -4916,115 +7093,530 @@
           <a:p>
             <a:pPr>
               <a:spcAft>
-                <a:spcPts val="600"/>
+                <a:spcPts val="800"/>
               </a:spcAft>
-              <a:defRPr sz="1400">
-                <a:solidFill>
-                  <a:srgbClr val="000000"/>
-                </a:solidFill>
-              </a:defRPr>
-            </a:pPr>
-            <a:r>
-              <a:t>Current Pain Points:</a:t>
+              <a:defRPr sz="1300">
+                <a:solidFill>
+                  <a:srgbClr val="212121"/>
+                </a:solidFill>
+              </a:defRPr>
+            </a:pPr>
+            <a:r>
+              <a:t>Single agent = limited scope</a:t>
             </a:r>
           </a:p>
           <a:p>
             <a:pPr>
               <a:spcAft>
-                <a:spcPts val="600"/>
+                <a:spcPts val="800"/>
               </a:spcAft>
-              <a:defRPr sz="1400">
-                <a:solidFill>
-                  <a:srgbClr val="000000"/>
-                </a:solidFill>
-              </a:defRPr>
-            </a:pPr>
+              <a:defRPr sz="1300">
+                <a:solidFill>
+                  <a:srgbClr val="212121"/>
+                </a:solidFill>
+              </a:defRPr>
+            </a:pPr>
+            <a:r>
+              <a:t>Orchestrator = coordinates multiple agents</a:t>
+            </a:r>
           </a:p>
           <a:p>
             <a:pPr>
               <a:spcAft>
-                <a:spcPts val="600"/>
+                <a:spcPts val="800"/>
               </a:spcAft>
-              <a:defRPr sz="1400">
-                <a:solidFill>
-                  <a:srgbClr val="000000"/>
-                </a:solidFill>
-              </a:defRPr>
-            </a:pPr>
-            <a:r>
-              <a:t>[!] Single Project Focus - Can only work on one project at a time</a:t>
+              <a:defRPr sz="1300">
+                <a:solidFill>
+                  <a:srgbClr val="212121"/>
+                </a:solidFill>
+              </a:defRPr>
+            </a:pPr>
+            <a:r>
+              <a:t>Each agent specialized for its task</a:t>
             </a:r>
           </a:p>
           <a:p>
             <a:pPr>
               <a:spcAft>
-                <a:spcPts val="600"/>
+                <a:spcPts val="800"/>
               </a:spcAft>
-              <a:defRPr sz="1400">
-                <a:solidFill>
-                  <a:srgbClr val="000000"/>
-                </a:solidFill>
-              </a:defRPr>
-            </a:pPr>
-            <a:r>
-              <a:t>[!] No Visibility - Unknown costs until the bill arrives</a:t>
-            </a:r>
-          </a:p>
+              <a:defRPr sz="1300">
+                <a:solidFill>
+                  <a:srgbClr val="212121"/>
+                </a:solidFill>
+              </a:defRPr>
+            </a:pPr>
+            <a:r>
+              <a:t>Clean separation of concerns</a:t>
+            </a:r>
+          </a:p>
+        </p:txBody>
+      </p:sp>
+      <p:sp>
+        <p:nvSpPr>
+          <p:cNvPr id="7" name="TextBox 6"/>
+          <p:cNvSpPr txBox="1"/>
+          <p:nvPr/>
+        </p:nvSpPr>
+        <p:spPr>
+          <a:xfrm>
+            <a:off x="457200" y="3017520"/>
+            <a:ext cx="5486400" cy="365760"/>
+          </a:xfrm>
+          <a:prstGeom prst="rect">
+            <a:avLst/>
+          </a:prstGeom>
+          <a:noFill/>
+        </p:spPr>
+        <p:txBody>
+          <a:bodyPr wrap="square">
+            <a:spAutoFit/>
+          </a:bodyPr>
+          <a:lstStyle/>
+          <a:p>
+            <a:pPr algn="l">
+              <a:defRPr sz="1600" b="1">
+                <a:solidFill>
+                  <a:srgbClr val="FF9800"/>
+                </a:solidFill>
+              </a:defRPr>
+            </a:pPr>
+            <a:r>
+              <a:t>2. ESCALATION PATTERN</a:t>
+            </a:r>
+          </a:p>
+        </p:txBody>
+      </p:sp>
+      <p:sp>
+        <p:nvSpPr>
+          <p:cNvPr id="8" name="TextBox 7"/>
+          <p:cNvSpPr txBox="1"/>
+          <p:nvPr/>
+        </p:nvSpPr>
+        <p:spPr>
+          <a:xfrm>
+            <a:off x="457200" y="3474720"/>
+            <a:ext cx="5303520" cy="1188720"/>
+          </a:xfrm>
+          <a:prstGeom prst="rect">
+            <a:avLst/>
+          </a:prstGeom>
+          <a:noFill/>
+        </p:spPr>
+        <p:txBody>
+          <a:bodyPr wrap="square">
+            <a:spAutoFit/>
+          </a:bodyPr>
+          <a:lstStyle/>
           <a:p>
             <a:pPr>
               <a:spcAft>
-                <a:spcPts val="600"/>
+                <a:spcPts val="800"/>
               </a:spcAft>
-              <a:defRPr sz="1400">
-                <a:solidFill>
-                  <a:srgbClr val="000000"/>
-                </a:solidFill>
-              </a:defRPr>
-            </a:pPr>
-            <a:r>
-              <a:t>[!] Fragile Execution - Sequential task processing only</a:t>
+              <a:defRPr sz="1300">
+                <a:solidFill>
+                  <a:srgbClr val="212121"/>
+                </a:solidFill>
+              </a:defRPr>
+            </a:pPr>
+            <a:r>
+              <a:t>Start cheap, escalate when needed</a:t>
             </a:r>
           </a:p>
           <a:p>
             <a:pPr>
               <a:spcAft>
-                <a:spcPts val="600"/>
+                <a:spcPts val="800"/>
               </a:spcAft>
-              <a:defRPr sz="1400">
-                <a:solidFill>
-                  <a:srgbClr val="000000"/>
-                </a:solidFill>
-              </a:defRPr>
-            </a:pPr>
-            <a:r>
-              <a:t>[!] Limited Intelligence - Same approach regardless of problem type</a:t>
+              <a:defRPr sz="1300">
+                <a:solidFill>
+                  <a:srgbClr val="212121"/>
+                </a:solidFill>
+              </a:defRPr>
+            </a:pPr>
+            <a:r>
+              <a:t>Sonnet handles 70%+ of tasks</a:t>
             </a:r>
           </a:p>
           <a:p>
             <a:pPr>
               <a:spcAft>
-                <a:spcPts val="600"/>
+                <a:spcPts val="800"/>
               </a:spcAft>
-              <a:defRPr sz="1400">
-                <a:solidFill>
-                  <a:srgbClr val="000000"/>
-                </a:solidFill>
-              </a:defRPr>
-            </a:pPr>
+              <a:defRPr sz="1300">
+                <a:solidFill>
+                  <a:srgbClr val="212121"/>
+                </a:solidFill>
+              </a:defRPr>
+            </a:pPr>
+            <a:r>
+              <a:t>Opus for complex reasoning</a:t>
+            </a:r>
           </a:p>
           <a:p>
             <a:pPr>
               <a:spcAft>
-                <a:spcPts val="600"/>
+                <a:spcPts val="800"/>
               </a:spcAft>
-              <a:defRPr sz="1400">
-                <a:solidFill>
-                  <a:srgbClr val="000000"/>
-                </a:solidFill>
-              </a:defRPr>
-            </a:pPr>
-            <a:r>
-              <a:t>"We need infrastructure, not just an agent."</a:t>
+              <a:defRPr sz="1300">
+                <a:solidFill>
+                  <a:srgbClr val="212121"/>
+                </a:solidFill>
+              </a:defRPr>
+            </a:pPr>
+            <a:r>
+              <a:t>Diagnosis for persistent failures</a:t>
+            </a:r>
+          </a:p>
+        </p:txBody>
+      </p:sp>
+      <p:sp>
+        <p:nvSpPr>
+          <p:cNvPr id="9" name="TextBox 8"/>
+          <p:cNvSpPr txBox="1"/>
+          <p:nvPr/>
+        </p:nvSpPr>
+        <p:spPr>
+          <a:xfrm>
+            <a:off x="6217920" y="1188720"/>
+            <a:ext cx="5486400" cy="365760"/>
+          </a:xfrm>
+          <a:prstGeom prst="rect">
+            <a:avLst/>
+          </a:prstGeom>
+          <a:noFill/>
+        </p:spPr>
+        <p:txBody>
+          <a:bodyPr wrap="square">
+            <a:spAutoFit/>
+          </a:bodyPr>
+          <a:lstStyle/>
+          <a:p>
+            <a:pPr algn="l">
+              <a:defRPr sz="1600" b="1">
+                <a:solidFill>
+                  <a:srgbClr val="4CAF50"/>
+                </a:solidFill>
+              </a:defRPr>
+            </a:pPr>
+            <a:r>
+              <a:t>3. RESEARCH-FIRST PRINCIPLE</a:t>
+            </a:r>
+          </a:p>
+        </p:txBody>
+      </p:sp>
+      <p:sp>
+        <p:nvSpPr>
+          <p:cNvPr id="10" name="TextBox 9"/>
+          <p:cNvSpPr txBox="1"/>
+          <p:nvPr/>
+        </p:nvSpPr>
+        <p:spPr>
+          <a:xfrm>
+            <a:off x="6217920" y="1645920"/>
+            <a:ext cx="5303520" cy="1188720"/>
+          </a:xfrm>
+          <a:prstGeom prst="rect">
+            <a:avLst/>
+          </a:prstGeom>
+          <a:noFill/>
+        </p:spPr>
+        <p:txBody>
+          <a:bodyPr wrap="square">
+            <a:spAutoFit/>
+          </a:bodyPr>
+          <a:lstStyle/>
+          <a:p>
+            <a:pPr>
+              <a:spcAft>
+                <a:spcPts val="800"/>
+              </a:spcAft>
+              <a:defRPr sz="1300">
+                <a:solidFill>
+                  <a:srgbClr val="212121"/>
+                </a:solidFill>
+              </a:defRPr>
+            </a:pPr>
+            <a:r>
+              <a:t>Fail-fast is expensive with LLMs</a:t>
+            </a:r>
+          </a:p>
+          <a:p>
+            <a:pPr>
+              <a:spcAft>
+                <a:spcPts val="800"/>
+              </a:spcAft>
+              <a:defRPr sz="1300">
+                <a:solidFill>
+                  <a:srgbClr val="212121"/>
+                </a:solidFill>
+              </a:defRPr>
+            </a:pPr>
+            <a:r>
+              <a:t>Research before implementation</a:t>
+            </a:r>
+          </a:p>
+          <a:p>
+            <a:pPr>
+              <a:spcAft>
+                <a:spcPts val="800"/>
+              </a:spcAft>
+              <a:defRPr sz="1300">
+                <a:solidFill>
+                  <a:srgbClr val="212121"/>
+                </a:solidFill>
+              </a:defRPr>
+            </a:pPr>
+            <a:r>
+              <a:t>Domain knowledge persists across sessions</a:t>
+            </a:r>
+          </a:p>
+          <a:p>
+            <a:pPr>
+              <a:spcAft>
+                <a:spcPts val="800"/>
+              </a:spcAft>
+              <a:defRPr sz="1300">
+                <a:solidFill>
+                  <a:srgbClr val="212121"/>
+                </a:solidFill>
+              </a:defRPr>
+            </a:pPr>
+            <a:r>
+              <a:t>Prevents repeated failures</a:t>
+            </a:r>
+          </a:p>
+        </p:txBody>
+      </p:sp>
+      <p:sp>
+        <p:nvSpPr>
+          <p:cNvPr id="11" name="TextBox 10"/>
+          <p:cNvSpPr txBox="1"/>
+          <p:nvPr/>
+        </p:nvSpPr>
+        <p:spPr>
+          <a:xfrm>
+            <a:off x="6217920" y="3017520"/>
+            <a:ext cx="5486400" cy="365760"/>
+          </a:xfrm>
+          <a:prstGeom prst="rect">
+            <a:avLst/>
+          </a:prstGeom>
+          <a:noFill/>
+        </p:spPr>
+        <p:txBody>
+          <a:bodyPr wrap="square">
+            <a:spAutoFit/>
+          </a:bodyPr>
+          <a:lstStyle/>
+          <a:p>
+            <a:pPr algn="l">
+              <a:defRPr sz="1600" b="1">
+                <a:solidFill>
+                  <a:srgbClr val="2196F3"/>
+                </a:solidFill>
+              </a:defRPr>
+            </a:pPr>
+            <a:r>
+              <a:t>4. DAG-BASED TASK SCHEDULING</a:t>
+            </a:r>
+          </a:p>
+        </p:txBody>
+      </p:sp>
+      <p:sp>
+        <p:nvSpPr>
+          <p:cNvPr id="12" name="TextBox 11"/>
+          <p:cNvSpPr txBox="1"/>
+          <p:nvPr/>
+        </p:nvSpPr>
+        <p:spPr>
+          <a:xfrm>
+            <a:off x="6217920" y="3474720"/>
+            <a:ext cx="5303520" cy="1188720"/>
+          </a:xfrm>
+          <a:prstGeom prst="rect">
+            <a:avLst/>
+          </a:prstGeom>
+          <a:noFill/>
+        </p:spPr>
+        <p:txBody>
+          <a:bodyPr wrap="square">
+            <a:spAutoFit/>
+          </a:bodyPr>
+          <a:lstStyle/>
+          <a:p>
+            <a:pPr>
+              <a:spcAft>
+                <a:spcPts val="800"/>
+              </a:spcAft>
+              <a:defRPr sz="1300">
+                <a:solidFill>
+                  <a:srgbClr val="212121"/>
+                </a:solidFill>
+              </a:defRPr>
+            </a:pPr>
+            <a:r>
+              <a:t>Dependencies define execution order</a:t>
+            </a:r>
+          </a:p>
+          <a:p>
+            <a:pPr>
+              <a:spcAft>
+                <a:spcPts val="800"/>
+              </a:spcAft>
+              <a:defRPr sz="1300">
+                <a:solidFill>
+                  <a:srgbClr val="212121"/>
+                </a:solidFill>
+              </a:defRPr>
+            </a:pPr>
+            <a:r>
+              <a:t>Independent tasks run in parallel</a:t>
+            </a:r>
+          </a:p>
+          <a:p>
+            <a:pPr>
+              <a:spcAft>
+                <a:spcPts val="800"/>
+              </a:spcAft>
+              <a:defRPr sz="1300">
+                <a:solidFill>
+                  <a:srgbClr val="212121"/>
+                </a:solidFill>
+              </a:defRPr>
+            </a:pPr>
+            <a:r>
+              <a:t>Topological sort ensures correctness</a:t>
+            </a:r>
+          </a:p>
+          <a:p>
+            <a:pPr>
+              <a:spcAft>
+                <a:spcPts val="800"/>
+              </a:spcAft>
+              <a:defRPr sz="1300">
+                <a:solidFill>
+                  <a:srgbClr val="212121"/>
+                </a:solidFill>
+              </a:defRPr>
+            </a:pPr>
+            <a:r>
+              <a:t>Maximizes throughput</a:t>
+            </a:r>
+          </a:p>
+        </p:txBody>
+      </p:sp>
+      <p:sp>
+        <p:nvSpPr>
+          <p:cNvPr id="13" name="Rounded Rectangle 12"/>
+          <p:cNvSpPr/>
+          <p:nvPr/>
+        </p:nvSpPr>
+        <p:spPr>
+          <a:xfrm>
+            <a:off x="457200" y="5029200"/>
+            <a:ext cx="11277295" cy="1371600"/>
+          </a:xfrm>
+          <a:prstGeom prst="roundRect">
+            <a:avLst/>
+          </a:prstGeom>
+          <a:solidFill>
+            <a:srgbClr val="F5F5F5"/>
+          </a:solidFill>
+          <a:ln>
+            <a:solidFill>
+              <a:srgbClr val="0D47A1"/>
+            </a:solidFill>
+          </a:ln>
+        </p:spPr>
+        <p:style>
+          <a:lnRef idx="1">
+            <a:schemeClr val="accent1"/>
+          </a:lnRef>
+          <a:fillRef idx="3">
+            <a:schemeClr val="accent1"/>
+          </a:fillRef>
+          <a:effectRef idx="2">
+            <a:schemeClr val="accent1"/>
+          </a:effectRef>
+          <a:fontRef idx="minor">
+            <a:schemeClr val="lt1"/>
+          </a:fontRef>
+        </p:style>
+        <p:txBody>
+          <a:bodyPr rtlCol="0" anchor="ctr"/>
+          <a:lstStyle/>
+          <a:p>
+            <a:pPr algn="ctr"/>
+          </a:p>
+        </p:txBody>
+      </p:sp>
+      <p:sp>
+        <p:nvSpPr>
+          <p:cNvPr id="14" name="TextBox 13"/>
+          <p:cNvSpPr txBox="1"/>
+          <p:nvPr/>
+        </p:nvSpPr>
+        <p:spPr>
+          <a:xfrm>
+            <a:off x="640080" y="5212080"/>
+            <a:ext cx="10972800" cy="365760"/>
+          </a:xfrm>
+          <a:prstGeom prst="rect">
+            <a:avLst/>
+          </a:prstGeom>
+          <a:noFill/>
+        </p:spPr>
+        <p:txBody>
+          <a:bodyPr wrap="square">
+            <a:spAutoFit/>
+          </a:bodyPr>
+          <a:lstStyle/>
+          <a:p>
+            <a:pPr algn="l">
+              <a:defRPr sz="1400" b="1">
+                <a:solidFill>
+                  <a:srgbClr val="0D47A1"/>
+                </a:solidFill>
+              </a:defRPr>
+            </a:pPr>
+            <a:r>
+              <a:t>KEY INSIGHT: The harness design decouples task specification from execution strategy.</a:t>
+            </a:r>
+          </a:p>
+        </p:txBody>
+      </p:sp>
+      <p:sp>
+        <p:nvSpPr>
+          <p:cNvPr id="15" name="TextBox 14"/>
+          <p:cNvSpPr txBox="1"/>
+          <p:nvPr/>
+        </p:nvSpPr>
+        <p:spPr>
+          <a:xfrm>
+            <a:off x="640080" y="5669280"/>
+            <a:ext cx="10972800" cy="548640"/>
+          </a:xfrm>
+          <a:prstGeom prst="rect">
+            <a:avLst/>
+          </a:prstGeom>
+          <a:noFill/>
+        </p:spPr>
+        <p:txBody>
+          <a:bodyPr wrap="square">
+            <a:spAutoFit/>
+          </a:bodyPr>
+          <a:lstStyle/>
+          <a:p>
+            <a:pPr algn="l">
+              <a:defRPr sz="1300" b="0">
+                <a:solidFill>
+                  <a:srgbClr val="616161"/>
+                </a:solidFill>
+              </a:defRPr>
+            </a:pPr>
+            <a:r>
+              <a:t>This allows the system to adapt its approach based on task complexity and failure patterns, without changing the task definition itself.</a:t>
             </a:r>
           </a:p>
         </p:txBody>
@@ -5056,13 +7648,13 @@
         <p:spPr>
           <a:xfrm>
             <a:off x="0" y="0"/>
-            <a:ext cx="9144000" cy="914400"/>
+            <a:ext cx="12191695" cy="1005840"/>
           </a:xfrm>
           <a:prstGeom prst="rect">
             <a:avLst/>
           </a:prstGeom>
           <a:solidFill>
-            <a:srgbClr val="FFCC00"/>
+            <a:srgbClr val="FFC107"/>
           </a:solidFill>
           <a:ln>
             <a:noFill/>
@@ -5098,8 +7690,8 @@
         </p:nvSpPr>
         <p:spPr>
           <a:xfrm>
-            <a:off x="274320" y="182880"/>
-            <a:ext cx="8595360" cy="640080"/>
+            <a:off x="457200" y="228600"/>
+            <a:ext cx="10972800" cy="640080"/>
           </a:xfrm>
           <a:prstGeom prst="rect">
             <a:avLst/>
@@ -5113,14 +7705,14 @@
           <a:lstStyle/>
           <a:p>
             <a:pPr>
-              <a:defRPr sz="2800" b="1">
-                <a:solidFill>
-                  <a:srgbClr val="003366"/>
-                </a:solidFill>
-              </a:defRPr>
-            </a:pPr>
-            <a:r>
-              <a:t>🔨 The Solution</a:t>
+              <a:defRPr sz="3200" b="1">
+                <a:solidFill>
+                  <a:srgbClr val="0D47A1"/>
+                </a:solidFill>
+              </a:defRPr>
+            </a:pPr>
+            <a:r>
+              <a:t>System Architecture</a:t>
             </a:r>
           </a:p>
         </p:txBody>
@@ -5133,162 +7725,57 @@
         </p:nvSpPr>
         <p:spPr>
           <a:xfrm>
-            <a:off x="457200" y="1097280"/>
-            <a:ext cx="8229600" cy="5029200"/>
-          </a:xfrm>
-          <a:prstGeom prst="rect">
-            <a:avLst/>
-          </a:prstGeom>
-          <a:noFill/>
-        </p:spPr>
-        <p:txBody>
-          <a:bodyPr wrap="square">
+            <a:off x="457200" y="594360"/>
+            <a:ext cx="10972800" cy="365760"/>
+          </a:xfrm>
+          <a:prstGeom prst="rect">
+            <a:avLst/>
+          </a:prstGeom>
+          <a:noFill/>
+        </p:spPr>
+        <p:txBody>
+          <a:bodyPr wrap="none">
             <a:spAutoFit/>
           </a:bodyPr>
           <a:lstStyle/>
           <a:p>
             <a:pPr>
-              <a:spcAft>
-                <a:spcPts val="600"/>
-              </a:spcAft>
               <a:defRPr sz="1400">
                 <a:solidFill>
-                  <a:srgbClr val="000000"/>
-                </a:solidFill>
-              </a:defRPr>
-            </a:pPr>
-            <a:r>
-              <a:t>A complete framework for autonomous coding at production scale.</a:t>
-            </a:r>
-          </a:p>
-          <a:p>
-            <a:pPr>
-              <a:spcAft>
-                <a:spcPts val="600"/>
-              </a:spcAft>
-              <a:defRPr sz="1400">
-                <a:solidFill>
-                  <a:srgbClr val="000000"/>
-                </a:solidFill>
-              </a:defRPr>
-            </a:pPr>
-          </a:p>
-          <a:p>
-            <a:pPr>
-              <a:spcAft>
-                <a:spcPts val="600"/>
-              </a:spcAft>
-              <a:defRPr sz="1400">
-                <a:solidFill>
-                  <a:srgbClr val="000000"/>
-                </a:solidFill>
-              </a:defRPr>
-            </a:pPr>
-            <a:r>
-              <a:t>MULTI-PROJECT MANAGEMENT | INTELLIGENT EXECUTION | FULL OBSERVABILITY</a:t>
-            </a:r>
-          </a:p>
-          <a:p>
-            <a:pPr>
-              <a:spcAft>
-                <a:spcPts val="600"/>
-              </a:spcAft>
-              <a:defRPr sz="1400">
-                <a:solidFill>
-                  <a:srgbClr val="000000"/>
-                </a:solidFill>
-              </a:defRPr>
-            </a:pPr>
-            <a:r>
-              <a:t>Isolated state          | Parallel tasks       | Cost tracking</a:t>
-            </a:r>
-          </a:p>
-          <a:p>
-            <a:pPr>
-              <a:spcAft>
-                <a:spcPts val="600"/>
-              </a:spcAft>
-              <a:defRPr sz="1400">
-                <a:solidFill>
-                  <a:srgbClr val="000000"/>
-                </a:solidFill>
-              </a:defRPr>
-            </a:pPr>
-            <a:r>
-              <a:t>Per-project configs     | Auto-escalate        | JSON logging</a:t>
-            </a:r>
-          </a:p>
-          <a:p>
-            <a:pPr>
-              <a:spcAft>
-                <a:spcPts val="600"/>
-              </a:spcAft>
-              <a:defRPr sz="1400">
-                <a:solidFill>
-                  <a:srgbClr val="000000"/>
-                </a:solidFill>
-              </a:defRPr>
-            </a:pPr>
-          </a:p>
-          <a:p>
-            <a:pPr>
-              <a:spcAft>
-                <a:spcPts val="600"/>
-              </a:spcAft>
-              <a:defRPr sz="1400">
-                <a:solidFill>
-                  <a:srgbClr val="000000"/>
-                </a:solidFill>
-              </a:defRPr>
-            </a:pPr>
-            <a:r>
-              <a:t>Key Innovation: BOB doesn't just run agents - it ORCHESTRATES them.</a:t>
-            </a:r>
-          </a:p>
-          <a:p>
-            <a:pPr>
-              <a:spcAft>
-                <a:spcPts val="600"/>
-              </a:spcAft>
-              <a:defRPr sz="1400">
-                <a:solidFill>
-                  <a:srgbClr val="000000"/>
-                </a:solidFill>
-              </a:defRPr>
-            </a:pPr>
-          </a:p>
-          <a:p>
-            <a:pPr>
-              <a:spcAft>
-                <a:spcPts val="600"/>
-              </a:spcAft>
-              <a:defRPr sz="1400">
-                <a:solidFill>
-                  <a:srgbClr val="000000"/>
-                </a:solidFill>
-              </a:defRPr>
-            </a:pPr>
-            <a:r>
-              <a:t>Built on: Anthropic Claude Code SDK + Claude Code Harness</a:t>
-            </a:r>
-          </a:p>
-          <a:p>
-            <a:pPr>
-              <a:spcAft>
-                <a:spcPts val="600"/>
-              </a:spcAft>
-              <a:defRPr sz="1400">
-                <a:solidFill>
-                  <a:srgbClr val="000000"/>
-                </a:solidFill>
-              </a:defRPr>
-            </a:pPr>
-            <a:r>
-              <a:t>Enhanced: From demo to production-ready framework</a:t>
-            </a:r>
-          </a:p>
-        </p:txBody>
-      </p:sp>
+                  <a:srgbClr val="616161"/>
+                </a:solidFill>
+              </a:defRPr>
+            </a:pPr>
+            <a:r>
+              <a:t>Layered Design for Modularity and Extensibility</a:t>
+            </a:r>
+          </a:p>
+        </p:txBody>
+      </p:sp>
+      <p:pic>
+        <p:nvPicPr>
+          <p:cNvPr id="5" name="Picture 4" descr="architecture_diagram.png"/>
+          <p:cNvPicPr>
+            <a:picLocks noChangeAspect="1"/>
+          </p:cNvPicPr>
+          <p:nvPr/>
+        </p:nvPicPr>
+        <p:blipFill>
+          <a:blip r:embed="rId2"/>
+          <a:stretch>
+            <a:fillRect/>
+          </a:stretch>
+        </p:blipFill>
+        <p:spPr>
+          <a:xfrm>
+            <a:off x="457200" y="1188720"/>
+            <a:ext cx="11277295" cy="7486608"/>
+          </a:xfrm>
+          <a:prstGeom prst="rect">
+            <a:avLst/>
+          </a:prstGeom>
+        </p:spPr>
+      </p:pic>
     </p:spTree>
   </p:cSld>
   <p:clrMapOvr>
@@ -5316,13 +7803,13 @@
         <p:spPr>
           <a:xfrm>
             <a:off x="0" y="0"/>
-            <a:ext cx="9144000" cy="914400"/>
+            <a:ext cx="12191695" cy="1005840"/>
           </a:xfrm>
           <a:prstGeom prst="rect">
             <a:avLst/>
           </a:prstGeom>
           <a:solidFill>
-            <a:srgbClr val="FFCC00"/>
+            <a:srgbClr val="FFC107"/>
           </a:solidFill>
           <a:ln>
             <a:noFill/>
@@ -5358,8 +7845,8 @@
         </p:nvSpPr>
         <p:spPr>
           <a:xfrm>
-            <a:off x="274320" y="182880"/>
-            <a:ext cx="8595360" cy="640080"/>
+            <a:off x="457200" y="228600"/>
+            <a:ext cx="10972800" cy="640080"/>
           </a:xfrm>
           <a:prstGeom prst="rect">
             <a:avLst/>
@@ -5373,14 +7860,14 @@
           <a:lstStyle/>
           <a:p>
             <a:pPr>
-              <a:defRPr sz="2800" b="1">
-                <a:solidFill>
-                  <a:srgbClr val="003366"/>
-                </a:solidFill>
-              </a:defRPr>
-            </a:pPr>
-            <a:r>
-              <a:t>🔨 What BOB Provides</a:t>
+              <a:defRPr sz="3200" b="1">
+                <a:solidFill>
+                  <a:srgbClr val="0D47A1"/>
+                </a:solidFill>
+              </a:defRPr>
+            </a:pPr>
+            <a:r>
+              <a:t>Intelligent Escalation System</a:t>
             </a:r>
           </a:p>
         </p:txBody>
@@ -5393,8 +7880,102 @@
         </p:nvSpPr>
         <p:spPr>
           <a:xfrm>
-            <a:off x="457200" y="1097280"/>
-            <a:ext cx="8229600" cy="5029200"/>
+            <a:off x="457200" y="594360"/>
+            <a:ext cx="10972800" cy="365760"/>
+          </a:xfrm>
+          <a:prstGeom prst="rect">
+            <a:avLst/>
+          </a:prstGeom>
+          <a:noFill/>
+        </p:spPr>
+        <p:txBody>
+          <a:bodyPr wrap="none">
+            <a:spAutoFit/>
+          </a:bodyPr>
+          <a:lstStyle/>
+          <a:p>
+            <a:pPr>
+              <a:defRPr sz="1400">
+                <a:solidFill>
+                  <a:srgbClr val="616161"/>
+                </a:solidFill>
+              </a:defRPr>
+            </a:pPr>
+            <a:r>
+              <a:t>Automatic Failure Recovery</a:t>
+            </a:r>
+          </a:p>
+        </p:txBody>
+      </p:sp>
+      <p:pic>
+        <p:nvPicPr>
+          <p:cNvPr id="5" name="Picture 4" descr="escalation_diagram.png"/>
+          <p:cNvPicPr>
+            <a:picLocks noChangeAspect="1"/>
+          </p:cNvPicPr>
+          <p:nvPr/>
+        </p:nvPicPr>
+        <p:blipFill>
+          <a:blip r:embed="rId2"/>
+          <a:stretch>
+            <a:fillRect/>
+          </a:stretch>
+        </p:blipFill>
+        <p:spPr>
+          <a:xfrm>
+            <a:off x="274320" y="1097280"/>
+            <a:ext cx="7315200" cy="5837382"/>
+          </a:xfrm>
+          <a:prstGeom prst="rect">
+            <a:avLst/>
+          </a:prstGeom>
+        </p:spPr>
+      </p:pic>
+      <p:sp>
+        <p:nvSpPr>
+          <p:cNvPr id="6" name="TextBox 5"/>
+          <p:cNvSpPr txBox="1"/>
+          <p:nvPr/>
+        </p:nvSpPr>
+        <p:spPr>
+          <a:xfrm>
+            <a:off x="7772400" y="1371600"/>
+            <a:ext cx="4114800" cy="365760"/>
+          </a:xfrm>
+          <a:prstGeom prst="rect">
+            <a:avLst/>
+          </a:prstGeom>
+          <a:noFill/>
+        </p:spPr>
+        <p:txBody>
+          <a:bodyPr wrap="square">
+            <a:spAutoFit/>
+          </a:bodyPr>
+          <a:lstStyle/>
+          <a:p>
+            <a:pPr algn="l">
+              <a:defRPr sz="1600" b="1">
+                <a:solidFill>
+                  <a:srgbClr val="0D47A1"/>
+                </a:solidFill>
+              </a:defRPr>
+            </a:pPr>
+            <a:r>
+              <a:t>WHY THIS WORKS</a:t>
+            </a:r>
+          </a:p>
+        </p:txBody>
+      </p:sp>
+      <p:sp>
+        <p:nvSpPr>
+          <p:cNvPr id="7" name="TextBox 6"/>
+          <p:cNvSpPr txBox="1"/>
+          <p:nvPr/>
+        </p:nvSpPr>
+        <p:spPr>
+          <a:xfrm>
+            <a:off x="7772400" y="1828800"/>
+            <a:ext cx="4114800" cy="3657600"/>
           </a:xfrm>
           <a:prstGeom prst="rect">
             <a:avLst/>
@@ -5409,151 +7990,133 @@
           <a:p>
             <a:pPr>
               <a:spcAft>
-                <a:spcPts val="600"/>
+                <a:spcPts val="800"/>
               </a:spcAft>
-              <a:defRPr sz="1400">
-                <a:solidFill>
-                  <a:srgbClr val="000000"/>
-                </a:solidFill>
-              </a:defRPr>
-            </a:pPr>
-            <a:r>
-              <a:t>Multi-Project Management    Create, switch, track multiple projects</a:t>
+              <a:defRPr sz="1200">
+                <a:solidFill>
+                  <a:srgbClr val="212121"/>
+                </a:solidFill>
+              </a:defRPr>
+            </a:pPr>
+            <a:r>
+              <a:t>70%+ tasks succeed with Sonnet</a:t>
             </a:r>
           </a:p>
           <a:p>
             <a:pPr>
               <a:spcAft>
-                <a:spcPts val="600"/>
+                <a:spcPts val="800"/>
               </a:spcAft>
-              <a:defRPr sz="1400">
-                <a:solidFill>
-                  <a:srgbClr val="000000"/>
-                </a:solidFill>
-              </a:defRPr>
-            </a:pPr>
-            <a:r>
-              <a:t>Flexible Spec Sources       YAML, JSON, Markdown, GitHub Issues</a:t>
+              <a:defRPr sz="1200">
+                <a:solidFill>
+                  <a:srgbClr val="212121"/>
+                </a:solidFill>
+              </a:defRPr>
+            </a:pPr>
+            <a:r>
+              <a:t>Only escalate on actual failures</a:t>
             </a:r>
           </a:p>
           <a:p>
             <a:pPr>
               <a:spcAft>
-                <a:spcPts val="600"/>
+                <a:spcPts val="800"/>
               </a:spcAft>
-              <a:defRPr sz="1400">
-                <a:solidFill>
-                  <a:srgbClr val="000000"/>
-                </a:solidFill>
-              </a:defRPr>
-            </a:pPr>
-            <a:r>
-              <a:t>Intelligent Escalation      Sonnet -&gt; Opus -&gt; Diagnosis -&gt; Action</a:t>
+              <a:defRPr sz="1200">
+                <a:solidFill>
+                  <a:srgbClr val="212121"/>
+                </a:solidFill>
+              </a:defRPr>
+            </a:pPr>
+            <a:r>
+              <a:t>Diagnosis identifies root cause</a:t>
             </a:r>
           </a:p>
           <a:p>
             <a:pPr>
               <a:spcAft>
-                <a:spcPts val="600"/>
+                <a:spcPts val="800"/>
               </a:spcAft>
-              <a:defRPr sz="1400">
-                <a:solidFill>
-                  <a:srgbClr val="000000"/>
-                </a:solidFill>
-              </a:defRPr>
-            </a:pPr>
-            <a:r>
-              <a:t>Research-First Workflow     Proactive research before coding</a:t>
+              <a:defRPr sz="1200">
+                <a:solidFill>
+                  <a:srgbClr val="212121"/>
+                </a:solidFill>
+              </a:defRPr>
+            </a:pPr>
+            <a:r>
+              <a:t>Actions are targeted, not random</a:t>
             </a:r>
           </a:p>
           <a:p>
             <a:pPr>
               <a:spcAft>
-                <a:spcPts val="600"/>
+                <a:spcPts val="800"/>
               </a:spcAft>
-              <a:defRPr sz="1400">
-                <a:solidFill>
-                  <a:srgbClr val="000000"/>
-                </a:solidFill>
-              </a:defRPr>
-            </a:pPr>
-            <a:r>
-              <a:t>Parallel Execution          Run independent tasks concurrently</a:t>
-            </a:r>
+              <a:defRPr sz="1200">
+                <a:solidFill>
+                  <a:srgbClr val="212121"/>
+                </a:solidFill>
+              </a:defRPr>
+            </a:pPr>
           </a:p>
           <a:p>
             <a:pPr>
               <a:spcAft>
-                <a:spcPts val="600"/>
+                <a:spcPts val="800"/>
               </a:spcAft>
-              <a:defRPr sz="1400">
-                <a:solidFill>
-                  <a:srgbClr val="000000"/>
-                </a:solidFill>
-              </a:defRPr>
-            </a:pPr>
-            <a:r>
-              <a:t>Cost Tracking               Per-project, per-session, per-task</a:t>
+              <a:defRPr sz="1200">
+                <a:solidFill>
+                  <a:srgbClr val="212121"/>
+                </a:solidFill>
+              </a:defRPr>
+            </a:pPr>
+            <a:r>
+              <a:t>COST OPTIMIZATION:</a:t>
             </a:r>
           </a:p>
           <a:p>
             <a:pPr>
               <a:spcAft>
-                <a:spcPts val="600"/>
+                <a:spcPts val="800"/>
               </a:spcAft>
-              <a:defRPr sz="1400">
-                <a:solidFill>
-                  <a:srgbClr val="000000"/>
-                </a:solidFill>
-              </a:defRPr>
-            </a:pPr>
-            <a:r>
-              <a:t>Structured Logging          JSON events with full metadata</a:t>
+              <a:defRPr sz="1200">
+                <a:solidFill>
+                  <a:srgbClr val="212121"/>
+                </a:solidFill>
+              </a:defRPr>
+            </a:pPr>
+            <a:r>
+              <a:t>- Sonnet: $3/$15 per 1M tokens</a:t>
             </a:r>
           </a:p>
           <a:p>
             <a:pPr>
               <a:spcAft>
-                <a:spcPts val="600"/>
+                <a:spcPts val="800"/>
               </a:spcAft>
-              <a:defRPr sz="1400">
-                <a:solidFill>
-                  <a:srgbClr val="000000"/>
-                </a:solidFill>
-              </a:defRPr>
-            </a:pPr>
-            <a:r>
-              <a:t>Checkpoint &amp; Resume         Never lose progress to interruptions</a:t>
+              <a:defRPr sz="1200">
+                <a:solidFill>
+                  <a:srgbClr val="212121"/>
+                </a:solidFill>
+              </a:defRPr>
+            </a:pPr>
+            <a:r>
+              <a:t>- Opus: $15/$75 per 1M tokens</a:t>
             </a:r>
           </a:p>
           <a:p>
             <a:pPr>
               <a:spcAft>
-                <a:spcPts val="600"/>
+                <a:spcPts val="800"/>
               </a:spcAft>
-              <a:defRPr sz="1400">
-                <a:solidFill>
-                  <a:srgbClr val="000000"/>
-                </a:solidFill>
-              </a:defRPr>
-            </a:pPr>
-            <a:r>
-              <a:t>Plugin Architecture         Extend with custom agents &amp; sources</a:t>
-            </a:r>
-          </a:p>
-          <a:p>
-            <a:pPr>
-              <a:spcAft>
-                <a:spcPts val="600"/>
-              </a:spcAft>
-              <a:defRPr sz="1400">
-                <a:solidFill>
-                  <a:srgbClr val="000000"/>
-                </a:solidFill>
-              </a:defRPr>
-            </a:pPr>
-            <a:r>
-              <a:t>SQLite Persistence          Queryable, transactional data store</a:t>
+              <a:defRPr sz="1200">
+                <a:solidFill>
+                  <a:srgbClr val="212121"/>
+                </a:solidFill>
+              </a:defRPr>
+            </a:pPr>
+            <a:r>
+              <a:t>- 5x cheaper for most tasks</a:t>
             </a:r>
           </a:p>
         </p:txBody>
@@ -5585,13 +8148,13 @@
         <p:spPr>
           <a:xfrm>
             <a:off x="0" y="0"/>
-            <a:ext cx="9144000" cy="914400"/>
+            <a:ext cx="12191695" cy="1005840"/>
           </a:xfrm>
           <a:prstGeom prst="rect">
             <a:avLst/>
           </a:prstGeom>
           <a:solidFill>
-            <a:srgbClr val="FFCC00"/>
+            <a:srgbClr val="FFC107"/>
           </a:solidFill>
           <a:ln>
             <a:noFill/>
@@ -5627,8 +8190,8 @@
         </p:nvSpPr>
         <p:spPr>
           <a:xfrm>
-            <a:off x="274320" y="182880"/>
-            <a:ext cx="8595360" cy="640080"/>
+            <a:off x="457200" y="228600"/>
+            <a:ext cx="10972800" cy="640080"/>
           </a:xfrm>
           <a:prstGeom prst="rect">
             <a:avLst/>
@@ -5642,14 +8205,14 @@
           <a:lstStyle/>
           <a:p>
             <a:pPr>
-              <a:defRPr sz="2800" b="1">
-                <a:solidFill>
-                  <a:srgbClr val="003366"/>
-                </a:solidFill>
-              </a:defRPr>
-            </a:pPr>
-            <a:r>
-              <a:t>🔨 Intelligent Failure Handling</a:t>
+              <a:defRPr sz="3200" b="1">
+                <a:solidFill>
+                  <a:srgbClr val="0D47A1"/>
+                </a:solidFill>
+              </a:defRPr>
+            </a:pPr>
+            <a:r>
+              <a:t>Research-First Workflow</a:t>
             </a:r>
           </a:p>
         </p:txBody>
@@ -5662,8 +8225,67 @@
         </p:nvSpPr>
         <p:spPr>
           <a:xfrm>
-            <a:off x="457200" y="1097280"/>
-            <a:ext cx="8229600" cy="5029200"/>
+            <a:off x="457200" y="594360"/>
+            <a:ext cx="10972800" cy="365760"/>
+          </a:xfrm>
+          <a:prstGeom prst="rect">
+            <a:avLst/>
+          </a:prstGeom>
+          <a:noFill/>
+        </p:spPr>
+        <p:txBody>
+          <a:bodyPr wrap="none">
+            <a:spAutoFit/>
+          </a:bodyPr>
+          <a:lstStyle/>
+          <a:p>
+            <a:pPr>
+              <a:defRPr sz="1400">
+                <a:solidFill>
+                  <a:srgbClr val="616161"/>
+                </a:solidFill>
+              </a:defRPr>
+            </a:pPr>
+            <a:r>
+              <a:t>Proactive Knowledge Acquisition</a:t>
+            </a:r>
+          </a:p>
+        </p:txBody>
+      </p:sp>
+      <p:pic>
+        <p:nvPicPr>
+          <p:cNvPr id="5" name="Picture 4" descr="research_first.png"/>
+          <p:cNvPicPr>
+            <a:picLocks noChangeAspect="1"/>
+          </p:cNvPicPr>
+          <p:nvPr/>
+        </p:nvPicPr>
+        <p:blipFill>
+          <a:blip r:embed="rId2"/>
+          <a:stretch>
+            <a:fillRect/>
+          </a:stretch>
+        </p:blipFill>
+        <p:spPr>
+          <a:xfrm>
+            <a:off x="274320" y="1188720"/>
+            <a:ext cx="11430000" cy="5666975"/>
+          </a:xfrm>
+          <a:prstGeom prst="rect">
+            <a:avLst/>
+          </a:prstGeom>
+        </p:spPr>
+      </p:pic>
+      <p:sp>
+        <p:nvSpPr>
+          <p:cNvPr id="6" name="TextBox 5"/>
+          <p:cNvSpPr txBox="1"/>
+          <p:nvPr/>
+        </p:nvSpPr>
+        <p:spPr>
+          <a:xfrm>
+            <a:off x="457200" y="5029200"/>
+            <a:ext cx="10972800" cy="365760"/>
           </a:xfrm>
           <a:prstGeom prst="rect">
             <a:avLst/>
@@ -5676,159 +8298,50 @@
           </a:bodyPr>
           <a:lstStyle/>
           <a:p>
-            <a:pPr>
-              <a:spcAft>
-                <a:spcPts val="600"/>
-              </a:spcAft>
-              <a:defRPr sz="1400">
-                <a:solidFill>
-                  <a:srgbClr val="000000"/>
-                </a:solidFill>
-              </a:defRPr>
-            </a:pPr>
-            <a:r>
-              <a:t>When a task fails, BOB doesn't give up - it escalates intelligently.</a:t>
-            </a:r>
-          </a:p>
-          <a:p>
-            <a:pPr>
-              <a:spcAft>
-                <a:spcPts val="600"/>
-              </a:spcAft>
-              <a:defRPr sz="1400">
-                <a:solidFill>
-                  <a:srgbClr val="000000"/>
-                </a:solidFill>
-              </a:defRPr>
-            </a:pPr>
-          </a:p>
-          <a:p>
-            <a:pPr>
-              <a:spcAft>
-                <a:spcPts val="600"/>
-              </a:spcAft>
-              <a:defRPr sz="1400">
-                <a:solidFill>
-                  <a:srgbClr val="000000"/>
-                </a:solidFill>
-              </a:defRPr>
-            </a:pPr>
-            <a:r>
-              <a:t>Task Attempt -&gt; SONNET (3 attempts) -&gt; OPUS (3 attempts) -&gt; DIAGNOSIS</a:t>
-            </a:r>
-          </a:p>
-          <a:p>
-            <a:pPr>
-              <a:spcAft>
-                <a:spcPts val="600"/>
-              </a:spcAft>
-              <a:defRPr sz="1400">
-                <a:solidFill>
-                  <a:srgbClr val="000000"/>
-                </a:solidFill>
-              </a:defRPr>
-            </a:pPr>
-          </a:p>
-          <a:p>
-            <a:pPr>
-              <a:spcAft>
-                <a:spcPts val="600"/>
-              </a:spcAft>
-              <a:defRPr sz="1400">
-                <a:solidFill>
-                  <a:srgbClr val="000000"/>
-                </a:solidFill>
-              </a:defRPr>
-            </a:pPr>
-            <a:r>
-              <a:t>Diagnosis Actions:</a:t>
-            </a:r>
-          </a:p>
-          <a:p>
-            <a:pPr>
-              <a:spcAft>
-                <a:spcPts val="600"/>
-              </a:spcAft>
-              <a:defRPr sz="1400">
-                <a:solidFill>
-                  <a:srgbClr val="000000"/>
-                </a:solidFill>
-              </a:defRPr>
-            </a:pPr>
-            <a:r>
-              <a:t>  TOO_BIG ---------&gt; Decompose subtasks</a:t>
-            </a:r>
-          </a:p>
-          <a:p>
-            <a:pPr>
-              <a:spcAft>
-                <a:spcPts val="600"/>
-              </a:spcAft>
-              <a:defRPr sz="1400">
-                <a:solidFill>
-                  <a:srgbClr val="000000"/>
-                </a:solidFill>
-              </a:defRPr>
-            </a:pPr>
-            <a:r>
-              <a:t>  MISSING_INFO ----&gt; Research first</a:t>
-            </a:r>
-          </a:p>
-          <a:p>
-            <a:pPr>
-              <a:spcAft>
-                <a:spcPts val="600"/>
-              </a:spcAft>
-              <a:defRPr sz="1400">
-                <a:solidFill>
-                  <a:srgbClr val="000000"/>
-                </a:solidFill>
-              </a:defRPr>
-            </a:pPr>
-            <a:r>
-              <a:t>  WRONG_INFRA -----&gt; Request user help</a:t>
-            </a:r>
-          </a:p>
-          <a:p>
-            <a:pPr>
-              <a:spcAft>
-                <a:spcPts val="600"/>
-              </a:spcAft>
-              <a:defRPr sz="1400">
-                <a:solidFill>
-                  <a:srgbClr val="000000"/>
-                </a:solidFill>
-              </a:defRPr>
-            </a:pPr>
-            <a:r>
-              <a:t>  NEEDS_RESEARCH --&gt; Targeted research</a:t>
-            </a:r>
-          </a:p>
-          <a:p>
-            <a:pPr>
-              <a:spcAft>
-                <a:spcPts val="600"/>
-              </a:spcAft>
-              <a:defRPr sz="1400">
-                <a:solidFill>
-                  <a:srgbClr val="000000"/>
-                </a:solidFill>
-              </a:defRPr>
-            </a:pPr>
-          </a:p>
-          <a:p>
-            <a:pPr>
-              <a:spcAft>
-                <a:spcPts val="600"/>
-              </a:spcAft>
-              <a:defRPr sz="1400">
-                <a:solidFill>
-                  <a:srgbClr val="000000"/>
-                </a:solidFill>
-              </a:defRPr>
-            </a:pPr>
-            <a:r>
-              <a:t>Result: Automatic recovery from most failure modes</a:t>
+            <a:pPr algn="l">
+              <a:defRPr sz="1400" b="1">
+                <a:solidFill>
+                  <a:srgbClr val="0D47A1"/>
+                </a:solidFill>
+              </a:defRPr>
+            </a:pPr>
+            <a:r>
+              <a:t>The Pattern:</a:t>
+            </a:r>
+          </a:p>
+        </p:txBody>
+      </p:sp>
+      <p:sp>
+        <p:nvSpPr>
+          <p:cNvPr id="7" name="TextBox 6"/>
+          <p:cNvSpPr txBox="1"/>
+          <p:nvPr/>
+        </p:nvSpPr>
+        <p:spPr>
+          <a:xfrm>
+            <a:off x="457200" y="5394960"/>
+            <a:ext cx="10972800" cy="914400"/>
+          </a:xfrm>
+          <a:prstGeom prst="rect">
+            <a:avLst/>
+          </a:prstGeom>
+          <a:noFill/>
+        </p:spPr>
+        <p:txBody>
+          <a:bodyPr wrap="square">
+            <a:spAutoFit/>
+          </a:bodyPr>
+          <a:lstStyle/>
+          <a:p>
+            <a:pPr algn="l">
+              <a:defRPr sz="1300" b="0">
+                <a:solidFill>
+                  <a:srgbClr val="616161"/>
+                </a:solidFill>
+              </a:defRPr>
+            </a:pPr>
+            <a:r>
+              <a:t>Mark tasks with research_required: true and provide research_queries. BOB researches BEFORE coding, storing findings for the implementation phase. This eliminates expensive trial-and-error cycles.</a:t>
             </a:r>
           </a:p>
         </p:txBody>
@@ -5860,13 +8373,13 @@
         <p:spPr>
           <a:xfrm>
             <a:off x="0" y="0"/>
-            <a:ext cx="9144000" cy="914400"/>
+            <a:ext cx="12191695" cy="1005840"/>
           </a:xfrm>
           <a:prstGeom prst="rect">
             <a:avLst/>
           </a:prstGeom>
           <a:solidFill>
-            <a:srgbClr val="FFCC00"/>
+            <a:srgbClr val="FFC107"/>
           </a:solidFill>
           <a:ln>
             <a:noFill/>
@@ -5902,8 +8415,8 @@
         </p:nvSpPr>
         <p:spPr>
           <a:xfrm>
-            <a:off x="274320" y="182880"/>
-            <a:ext cx="8595360" cy="640080"/>
+            <a:off x="457200" y="228600"/>
+            <a:ext cx="10972800" cy="640080"/>
           </a:xfrm>
           <a:prstGeom prst="rect">
             <a:avLst/>
@@ -5917,14 +8430,14 @@
           <a:lstStyle/>
           <a:p>
             <a:pPr>
-              <a:defRPr sz="2800" b="1">
-                <a:solidFill>
-                  <a:srgbClr val="003366"/>
-                </a:solidFill>
-              </a:defRPr>
-            </a:pPr>
-            <a:r>
-              <a:t>🔨 Research-First Workflow</a:t>
+              <a:defRPr sz="3200" b="1">
+                <a:solidFill>
+                  <a:srgbClr val="0D47A1"/>
+                </a:solidFill>
+              </a:defRPr>
+            </a:pPr>
+            <a:r>
+              <a:t>Parallel Task Execution</a:t>
             </a:r>
           </a:p>
         </p:txBody>
@@ -5937,8 +8450,67 @@
         </p:nvSpPr>
         <p:spPr>
           <a:xfrm>
-            <a:off x="457200" y="1097280"/>
-            <a:ext cx="8229600" cy="5029200"/>
+            <a:off x="457200" y="594360"/>
+            <a:ext cx="10972800" cy="365760"/>
+          </a:xfrm>
+          <a:prstGeom prst="rect">
+            <a:avLst/>
+          </a:prstGeom>
+          <a:noFill/>
+        </p:spPr>
+        <p:txBody>
+          <a:bodyPr wrap="none">
+            <a:spAutoFit/>
+          </a:bodyPr>
+          <a:lstStyle/>
+          <a:p>
+            <a:pPr>
+              <a:defRPr sz="1400">
+                <a:solidFill>
+                  <a:srgbClr val="616161"/>
+                </a:solidFill>
+              </a:defRPr>
+            </a:pPr>
+            <a:r>
+              <a:t>DAG-Aware Concurrent Processing</a:t>
+            </a:r>
+          </a:p>
+        </p:txBody>
+      </p:sp>
+      <p:pic>
+        <p:nvPicPr>
+          <p:cNvPr id="5" name="Picture 4" descr="parallel_execution.png"/>
+          <p:cNvPicPr>
+            <a:picLocks noChangeAspect="1"/>
+          </p:cNvPicPr>
+          <p:nvPr/>
+        </p:nvPicPr>
+        <p:blipFill>
+          <a:blip r:embed="rId2"/>
+          <a:stretch>
+            <a:fillRect/>
+          </a:stretch>
+        </p:blipFill>
+        <p:spPr>
+          <a:xfrm>
+            <a:off x="274320" y="1188720"/>
+            <a:ext cx="11430000" cy="5666975"/>
+          </a:xfrm>
+          <a:prstGeom prst="rect">
+            <a:avLst/>
+          </a:prstGeom>
+        </p:spPr>
+      </p:pic>
+      <p:sp>
+        <p:nvSpPr>
+          <p:cNvPr id="6" name="TextBox 5"/>
+          <p:cNvSpPr txBox="1"/>
+          <p:nvPr/>
+        </p:nvSpPr>
+        <p:spPr>
+          <a:xfrm>
+            <a:off x="457200" y="5029200"/>
+            <a:ext cx="10972800" cy="1371600"/>
           </a:xfrm>
           <a:prstGeom prst="rect">
             <a:avLst/>
@@ -5953,187 +8525,61 @@
           <a:p>
             <a:pPr>
               <a:spcAft>
-                <a:spcPts val="600"/>
+                <a:spcPts val="800"/>
               </a:spcAft>
-              <a:defRPr sz="1400">
-                <a:solidFill>
-                  <a:srgbClr val="000000"/>
-                </a:solidFill>
-              </a:defRPr>
-            </a:pPr>
-            <a:r>
-              <a:t>Traditional: Code -&gt; Fail -&gt; Research -&gt; Code -&gt; Fail -&gt; ... -&gt; Success</a:t>
+              <a:defRPr sz="1300">
+                <a:solidFill>
+                  <a:srgbClr val="212121"/>
+                </a:solidFill>
+              </a:defRPr>
+            </a:pPr>
+            <a:r>
+              <a:t>Independent tasks execute concurrently</a:t>
             </a:r>
           </a:p>
           <a:p>
             <a:pPr>
               <a:spcAft>
-                <a:spcPts val="600"/>
+                <a:spcPts val="800"/>
               </a:spcAft>
-              <a:defRPr sz="1400">
-                <a:solidFill>
-                  <a:srgbClr val="000000"/>
-                </a:solidFill>
-              </a:defRPr>
-            </a:pPr>
-            <a:r>
-              <a:t>             [Expensive: Multiple Opus escalations]</a:t>
+              <a:defRPr sz="1300">
+                <a:solidFill>
+                  <a:srgbClr val="212121"/>
+                </a:solidFill>
+              </a:defRPr>
+            </a:pPr>
+            <a:r>
+              <a:t>Dependency resolution via topological sort</a:t>
             </a:r>
           </a:p>
           <a:p>
             <a:pPr>
               <a:spcAft>
-                <a:spcPts val="600"/>
+                <a:spcPts val="800"/>
               </a:spcAft>
-              <a:defRPr sz="1400">
-                <a:solidFill>
-                  <a:srgbClr val="000000"/>
-                </a:solidFill>
-              </a:defRPr>
-            </a:pPr>
+              <a:defRPr sz="1300">
+                <a:solidFill>
+                  <a:srgbClr val="212121"/>
+                </a:solidFill>
+              </a:defRPr>
+            </a:pPr>
+            <a:r>
+              <a:t>Each task gets isolated session</a:t>
+            </a:r>
           </a:p>
           <a:p>
             <a:pPr>
               <a:spcAft>
-                <a:spcPts val="600"/>
+                <a:spcPts val="800"/>
               </a:spcAft>
-              <a:defRPr sz="1400">
-                <a:solidFill>
-                  <a:srgbClr val="000000"/>
-                </a:solidFill>
-              </a:defRPr>
-            </a:pPr>
-            <a:r>
-              <a:t>BOB's Approach: Research -&gt; Code -&gt; Success</a:t>
-            </a:r>
-          </a:p>
-          <a:p>
-            <a:pPr>
-              <a:spcAft>
-                <a:spcPts val="600"/>
-              </a:spcAft>
-              <a:defRPr sz="1400">
-                <a:solidFill>
-                  <a:srgbClr val="000000"/>
-                </a:solidFill>
-              </a:defRPr>
-            </a:pPr>
-            <a:r>
-              <a:t>                [Efficient: Research upfront]</a:t>
-            </a:r>
-          </a:p>
-          <a:p>
-            <a:pPr>
-              <a:spcAft>
-                <a:spcPts val="600"/>
-              </a:spcAft>
-              <a:defRPr sz="1400">
-                <a:solidFill>
-                  <a:srgbClr val="000000"/>
-                </a:solidFill>
-              </a:defRPr>
-            </a:pPr>
-          </a:p>
-          <a:p>
-            <a:pPr>
-              <a:spcAft>
-                <a:spcPts val="600"/>
-              </a:spcAft>
-              <a:defRPr sz="1400">
-                <a:solidFill>
-                  <a:srgbClr val="000000"/>
-                </a:solidFill>
-              </a:defRPr>
-            </a:pPr>
-            <a:r>
-              <a:t>tasks:</a:t>
-            </a:r>
-          </a:p>
-          <a:p>
-            <a:pPr>
-              <a:spcAft>
-                <a:spcPts val="600"/>
-              </a:spcAft>
-              <a:defRPr sz="1400">
-                <a:solidFill>
-                  <a:srgbClr val="000000"/>
-                </a:solidFill>
-              </a:defRPr>
-            </a:pPr>
-            <a:r>
-              <a:t>  - id: optimize-queries</a:t>
-            </a:r>
-          </a:p>
-          <a:p>
-            <a:pPr>
-              <a:spcAft>
-                <a:spcPts val="600"/>
-              </a:spcAft>
-              <a:defRPr sz="1400">
-                <a:solidFill>
-                  <a:srgbClr val="000000"/>
-                </a:solidFill>
-              </a:defRPr>
-            </a:pPr>
-            <a:r>
-              <a:t>    research_required: true</a:t>
-            </a:r>
-          </a:p>
-          <a:p>
-            <a:pPr>
-              <a:spcAft>
-                <a:spcPts val="600"/>
-              </a:spcAft>
-              <a:defRPr sz="1400">
-                <a:solidFill>
-                  <a:srgbClr val="000000"/>
-                </a:solidFill>
-              </a:defRPr>
-            </a:pPr>
-            <a:r>
-              <a:t>    research_queries:</a:t>
-            </a:r>
-          </a:p>
-          <a:p>
-            <a:pPr>
-              <a:spcAft>
-                <a:spcPts val="600"/>
-              </a:spcAft>
-              <a:defRPr sz="1400">
-                <a:solidFill>
-                  <a:srgbClr val="000000"/>
-                </a:solidFill>
-              </a:defRPr>
-            </a:pPr>
-            <a:r>
-              <a:t>      - "PostgreSQL EXPLAIN ANALYZE patterns"</a:t>
-            </a:r>
-          </a:p>
-          <a:p>
-            <a:pPr>
-              <a:spcAft>
-                <a:spcPts val="600"/>
-              </a:spcAft>
-              <a:defRPr sz="1400">
-                <a:solidFill>
-                  <a:srgbClr val="000000"/>
-                </a:solidFill>
-              </a:defRPr>
-            </a:pPr>
-          </a:p>
-          <a:p>
-            <a:pPr>
-              <a:spcAft>
-                <a:spcPts val="600"/>
-              </a:spcAft>
-              <a:defRPr sz="1400">
-                <a:solidFill>
-                  <a:srgbClr val="000000"/>
-                </a:solidFill>
-              </a:defRPr>
-            </a:pPr>
-            <a:r>
-              <a:t>Benefits: Proactive - Domain-specific - Persistent findings</a:t>
+              <a:defRPr sz="1300">
+                <a:solidFill>
+                  <a:srgbClr val="212121"/>
+                </a:solidFill>
+              </a:defRPr>
+            </a:pPr>
+            <a:r>
+              <a:t>Failures don't block independent work</a:t>
             </a:r>
           </a:p>
         </p:txBody>
@@ -6165,13 +8611,13 @@
         <p:spPr>
           <a:xfrm>
             <a:off x="0" y="0"/>
-            <a:ext cx="9144000" cy="914400"/>
+            <a:ext cx="12191695" cy="1005840"/>
           </a:xfrm>
           <a:prstGeom prst="rect">
             <a:avLst/>
           </a:prstGeom>
           <a:solidFill>
-            <a:srgbClr val="FFCC00"/>
+            <a:srgbClr val="FFC107"/>
           </a:solidFill>
           <a:ln>
             <a:noFill/>
@@ -6207,8 +8653,8 @@
         </p:nvSpPr>
         <p:spPr>
           <a:xfrm>
-            <a:off x="274320" y="182880"/>
-            <a:ext cx="8595360" cy="640080"/>
+            <a:off x="457200" y="228600"/>
+            <a:ext cx="10972800" cy="640080"/>
           </a:xfrm>
           <a:prstGeom prst="rect">
             <a:avLst/>
@@ -6222,14 +8668,14 @@
           <a:lstStyle/>
           <a:p>
             <a:pPr>
-              <a:defRPr sz="2800" b="1">
-                <a:solidFill>
-                  <a:srgbClr val="003366"/>
-                </a:solidFill>
-              </a:defRPr>
-            </a:pPr>
-            <a:r>
-              <a:t>🔨 Real-Time Cost Visibility</a:t>
+              <a:defRPr sz="3200" b="1">
+                <a:solidFill>
+                  <a:srgbClr val="0D47A1"/>
+                </a:solidFill>
+              </a:defRPr>
+            </a:pPr>
+            <a:r>
+              <a:t>Key Features Overview</a:t>
             </a:r>
           </a:p>
         </p:txBody>
@@ -6242,189 +8688,57 @@
         </p:nvSpPr>
         <p:spPr>
           <a:xfrm>
-            <a:off x="457200" y="1097280"/>
-            <a:ext cx="8229600" cy="5029200"/>
-          </a:xfrm>
-          <a:prstGeom prst="rect">
-            <a:avLst/>
-          </a:prstGeom>
-          <a:noFill/>
-        </p:spPr>
-        <p:txBody>
-          <a:bodyPr wrap="square">
+            <a:off x="457200" y="594360"/>
+            <a:ext cx="10972800" cy="365760"/>
+          </a:xfrm>
+          <a:prstGeom prst="rect">
+            <a:avLst/>
+          </a:prstGeom>
+          <a:noFill/>
+        </p:spPr>
+        <p:txBody>
+          <a:bodyPr wrap="none">
             <a:spAutoFit/>
           </a:bodyPr>
           <a:lstStyle/>
           <a:p>
             <a:pPr>
-              <a:spcAft>
-                <a:spcPts val="600"/>
-              </a:spcAft>
               <a:defRPr sz="1400">
                 <a:solidFill>
-                  <a:srgbClr val="000000"/>
-                </a:solidFill>
-              </a:defRPr>
-            </a:pPr>
-            <a:r>
-              <a:t>$ bob costs</a:t>
-            </a:r>
-          </a:p>
-          <a:p>
-            <a:pPr>
-              <a:spcAft>
-                <a:spcPts val="600"/>
-              </a:spcAft>
-              <a:defRPr sz="1400">
-                <a:solidFill>
-                  <a:srgbClr val="000000"/>
-                </a:solidFill>
-              </a:defRPr>
-            </a:pPr>
-          </a:p>
-          <a:p>
-            <a:pPr>
-              <a:spcAft>
-                <a:spcPts val="600"/>
-              </a:spcAft>
-              <a:defRPr sz="1400">
-                <a:solidFill>
-                  <a:srgbClr val="000000"/>
-                </a:solidFill>
-              </a:defRPr>
-            </a:pPr>
-            <a:r>
-              <a:t>Total Cost: $45.67</a:t>
-            </a:r>
-          </a:p>
-          <a:p>
-            <a:pPr>
-              <a:spcAft>
-                <a:spcPts val="600"/>
-              </a:spcAft>
-              <a:defRPr sz="1400">
-                <a:solidFill>
-                  <a:srgbClr val="000000"/>
-                </a:solidFill>
-              </a:defRPr>
-            </a:pPr>
-          </a:p>
-          <a:p>
-            <a:pPr>
-              <a:spcAft>
-                <a:spcPts val="600"/>
-              </a:spcAft>
-              <a:defRPr sz="1400">
-                <a:solidFill>
-                  <a:srgbClr val="000000"/>
-                </a:solidFill>
-              </a:defRPr>
-            </a:pPr>
-            <a:r>
-              <a:t>By Model:   claude-sonnet-4-5: $32.10 (70.3%)</a:t>
-            </a:r>
-          </a:p>
-          <a:p>
-            <a:pPr>
-              <a:spcAft>
-                <a:spcPts val="600"/>
-              </a:spcAft>
-              <a:defRPr sz="1400">
-                <a:solidFill>
-                  <a:srgbClr val="000000"/>
-                </a:solidFill>
-              </a:defRPr>
-            </a:pPr>
-            <a:r>
-              <a:t>            claude-opus-4-5:   $13.57 (29.7%)</a:t>
-            </a:r>
-          </a:p>
-          <a:p>
-            <a:pPr>
-              <a:spcAft>
-                <a:spcPts val="600"/>
-              </a:spcAft>
-              <a:defRPr sz="1400">
-                <a:solidFill>
-                  <a:srgbClr val="000000"/>
-                </a:solidFill>
-              </a:defRPr>
-            </a:pPr>
-          </a:p>
-          <a:p>
-            <a:pPr>
-              <a:spcAft>
-                <a:spcPts val="600"/>
-              </a:spcAft>
-              <a:defRPr sz="1400">
-                <a:solidFill>
-                  <a:srgbClr val="000000"/>
-                </a:solidFill>
-              </a:defRPr>
-            </a:pPr>
-            <a:r>
-              <a:t>By Agent:   coding: $38.00 | research: $4.50 | diagnosis: $3.17</a:t>
-            </a:r>
-          </a:p>
-          <a:p>
-            <a:pPr>
-              <a:spcAft>
-                <a:spcPts val="600"/>
-              </a:spcAft>
-              <a:defRPr sz="1400">
-                <a:solidFill>
-                  <a:srgbClr val="000000"/>
-                </a:solidFill>
-              </a:defRPr>
-            </a:pPr>
-          </a:p>
-          <a:p>
-            <a:pPr>
-              <a:spcAft>
-                <a:spcPts val="600"/>
-              </a:spcAft>
-              <a:defRPr sz="1400">
-                <a:solidFill>
-                  <a:srgbClr val="000000"/>
-                </a:solidFill>
-              </a:defRPr>
-            </a:pPr>
-            <a:r>
-              <a:t>Budget Controls:</a:t>
-            </a:r>
-          </a:p>
-          <a:p>
-            <a:pPr>
-              <a:spcAft>
-                <a:spcPts val="600"/>
-              </a:spcAft>
-              <a:defRPr sz="1400">
-                <a:solidFill>
-                  <a:srgbClr val="000000"/>
-                </a:solidFill>
-              </a:defRPr>
-            </a:pPr>
-            <a:r>
-              <a:t>  max_cost_per_project: 100.0</a:t>
-            </a:r>
-          </a:p>
-          <a:p>
-            <a:pPr>
-              <a:spcAft>
-                <a:spcPts val="600"/>
-              </a:spcAft>
-              <a:defRPr sz="1400">
-                <a:solidFill>
-                  <a:srgbClr val="000000"/>
-                </a:solidFill>
-              </a:defRPr>
-            </a:pPr>
-            <a:r>
-              <a:t>  max_cost_per_session: 5.0</a:t>
-            </a:r>
-          </a:p>
-        </p:txBody>
-      </p:sp>
+                  <a:srgbClr val="616161"/>
+                </a:solidFill>
+              </a:defRPr>
+            </a:pPr>
+            <a:r>
+              <a:t>Production-Ready Capabilities</a:t>
+            </a:r>
+          </a:p>
+        </p:txBody>
+      </p:sp>
+      <p:pic>
+        <p:nvPicPr>
+          <p:cNvPr id="5" name="Picture 4" descr="features_overview.png"/>
+          <p:cNvPicPr>
+            <a:picLocks noChangeAspect="1"/>
+          </p:cNvPicPr>
+          <p:nvPr/>
+        </p:nvPicPr>
+        <p:blipFill>
+          <a:blip r:embed="rId2"/>
+          <a:stretch>
+            <a:fillRect/>
+          </a:stretch>
+        </p:blipFill>
+        <p:spPr>
+          <a:xfrm>
+            <a:off x="457200" y="1188720"/>
+            <a:ext cx="11277295" cy="7486608"/>
+          </a:xfrm>
+          <a:prstGeom prst="rect">
+            <a:avLst/>
+          </a:prstGeom>
+        </p:spPr>
+      </p:pic>
     </p:spTree>
   </p:cSld>
   <p:clrMapOvr>
@@ -6452,13 +8766,13 @@
         <p:spPr>
           <a:xfrm>
             <a:off x="0" y="0"/>
-            <a:ext cx="9144000" cy="914400"/>
+            <a:ext cx="12191695" cy="1005840"/>
           </a:xfrm>
           <a:prstGeom prst="rect">
             <a:avLst/>
           </a:prstGeom>
           <a:solidFill>
-            <a:srgbClr val="FFCC00"/>
+            <a:srgbClr val="FFC107"/>
           </a:solidFill>
           <a:ln>
             <a:noFill/>
@@ -6494,8 +8808,8 @@
         </p:nvSpPr>
         <p:spPr>
           <a:xfrm>
-            <a:off x="274320" y="182880"/>
-            <a:ext cx="8595360" cy="640080"/>
+            <a:off x="457200" y="228600"/>
+            <a:ext cx="10972800" cy="640080"/>
           </a:xfrm>
           <a:prstGeom prst="rect">
             <a:avLst/>
@@ -6509,14 +8823,14 @@
           <a:lstStyle/>
           <a:p>
             <a:pPr>
-              <a:defRPr sz="2800" b="1">
-                <a:solidFill>
-                  <a:srgbClr val="003366"/>
-                </a:solidFill>
-              </a:defRPr>
-            </a:pPr>
-            <a:r>
-              <a:t>🔨 Developer-Friendly CLI</a:t>
+              <a:defRPr sz="3200" b="1">
+                <a:solidFill>
+                  <a:srgbClr val="0D47A1"/>
+                </a:solidFill>
+              </a:defRPr>
+            </a:pPr>
+            <a:r>
+              <a:t>Real-Time Cost Visibility</a:t>
             </a:r>
           </a:p>
         </p:txBody>
@@ -6529,8 +8843,102 @@
         </p:nvSpPr>
         <p:spPr>
           <a:xfrm>
-            <a:off x="457200" y="1097280"/>
-            <a:ext cx="8229600" cy="5029200"/>
+            <a:off x="457200" y="594360"/>
+            <a:ext cx="10972800" cy="365760"/>
+          </a:xfrm>
+          <a:prstGeom prst="rect">
+            <a:avLst/>
+          </a:prstGeom>
+          <a:noFill/>
+        </p:spPr>
+        <p:txBody>
+          <a:bodyPr wrap="none">
+            <a:spAutoFit/>
+          </a:bodyPr>
+          <a:lstStyle/>
+          <a:p>
+            <a:pPr>
+              <a:defRPr sz="1400">
+                <a:solidFill>
+                  <a:srgbClr val="616161"/>
+                </a:solidFill>
+              </a:defRPr>
+            </a:pPr>
+            <a:r>
+              <a:t>Budget Controls and Tracking</a:t>
+            </a:r>
+          </a:p>
+        </p:txBody>
+      </p:sp>
+      <p:pic>
+        <p:nvPicPr>
+          <p:cNvPr id="5" name="Picture 4" descr="cost_tracking.png"/>
+          <p:cNvPicPr>
+            <a:picLocks noChangeAspect="1"/>
+          </p:cNvPicPr>
+          <p:nvPr/>
+        </p:nvPicPr>
+        <p:blipFill>
+          <a:blip r:embed="rId2"/>
+          <a:stretch>
+            <a:fillRect/>
+          </a:stretch>
+        </p:blipFill>
+        <p:spPr>
+          <a:xfrm>
+            <a:off x="457200" y="1371600"/>
+            <a:ext cx="5486400" cy="3262284"/>
+          </a:xfrm>
+          <a:prstGeom prst="rect">
+            <a:avLst/>
+          </a:prstGeom>
+        </p:spPr>
+      </p:pic>
+      <p:sp>
+        <p:nvSpPr>
+          <p:cNvPr id="6" name="TextBox 5"/>
+          <p:cNvSpPr txBox="1"/>
+          <p:nvPr/>
+        </p:nvSpPr>
+        <p:spPr>
+          <a:xfrm>
+            <a:off x="6400800" y="1371600"/>
+            <a:ext cx="5303520" cy="365760"/>
+          </a:xfrm>
+          <a:prstGeom prst="rect">
+            <a:avLst/>
+          </a:prstGeom>
+          <a:noFill/>
+        </p:spPr>
+        <p:txBody>
+          <a:bodyPr wrap="square">
+            <a:spAutoFit/>
+          </a:bodyPr>
+          <a:lstStyle/>
+          <a:p>
+            <a:pPr algn="l">
+              <a:defRPr sz="1600" b="1">
+                <a:solidFill>
+                  <a:srgbClr val="0D47A1"/>
+                </a:solidFill>
+              </a:defRPr>
+            </a:pPr>
+            <a:r>
+              <a:t>COST FEATURES</a:t>
+            </a:r>
+          </a:p>
+        </p:txBody>
+      </p:sp>
+      <p:sp>
+        <p:nvSpPr>
+          <p:cNvPr id="7" name="TextBox 6"/>
+          <p:cNvSpPr txBox="1"/>
+          <p:nvPr/>
+        </p:nvSpPr>
+        <p:spPr>
+          <a:xfrm>
+            <a:off x="6400800" y="1828800"/>
+            <a:ext cx="5303520" cy="3657600"/>
           </a:xfrm>
           <a:prstGeom prst="rect">
             <a:avLst/>
@@ -6545,71 +8953,71 @@
           <a:p>
             <a:pPr>
               <a:spcAft>
-                <a:spcPts val="600"/>
+                <a:spcPts val="800"/>
               </a:spcAft>
-              <a:defRPr sz="1400">
-                <a:solidFill>
-                  <a:srgbClr val="000000"/>
-                </a:solidFill>
-              </a:defRPr>
-            </a:pPr>
-            <a:r>
-              <a:t>PROJECT: bob project create/list/use/status</a:t>
+              <a:defRPr sz="1300">
+                <a:solidFill>
+                  <a:srgbClr val="212121"/>
+                </a:solidFill>
+              </a:defRPr>
+            </a:pPr>
+            <a:r>
+              <a:t>Per-project cost tracking</a:t>
             </a:r>
           </a:p>
           <a:p>
             <a:pPr>
               <a:spcAft>
-                <a:spcPts val="600"/>
+                <a:spcPts val="800"/>
               </a:spcAft>
-              <a:defRPr sz="1400">
-                <a:solidFill>
-                  <a:srgbClr val="000000"/>
-                </a:solidFill>
-              </a:defRPr>
-            </a:pPr>
-            <a:r>
-              <a:t>TASK:    bob task list --status failed --needs-research</a:t>
+              <a:defRPr sz="1300">
+                <a:solidFill>
+                  <a:srgbClr val="212121"/>
+                </a:solidFill>
+              </a:defRPr>
+            </a:pPr>
+            <a:r>
+              <a:t>Per-session breakdown</a:t>
             </a:r>
           </a:p>
           <a:p>
             <a:pPr>
               <a:spcAft>
-                <a:spcPts val="600"/>
+                <a:spcPts val="800"/>
               </a:spcAft>
-              <a:defRPr sz="1400">
-                <a:solidFill>
-                  <a:srgbClr val="000000"/>
-                </a:solidFill>
-              </a:defRPr>
-            </a:pPr>
-            <a:r>
-              <a:t>RUN:     bob run / bob run --parallel 3 / bob run --resume</a:t>
+              <a:defRPr sz="1300">
+                <a:solidFill>
+                  <a:srgbClr val="212121"/>
+                </a:solidFill>
+              </a:defRPr>
+            </a:pPr>
+            <a:r>
+              <a:t>Per-model analysis</a:t>
             </a:r>
           </a:p>
           <a:p>
             <a:pPr>
               <a:spcAft>
-                <a:spcPts val="600"/>
+                <a:spcPts val="800"/>
               </a:spcAft>
-              <a:defRPr sz="1400">
-                <a:solidFill>
-                  <a:srgbClr val="000000"/>
-                </a:solidFill>
-              </a:defRPr>
-            </a:pPr>
-            <a:r>
-              <a:t>MONITOR: bob status / bob logs --follow / bob costs</a:t>
+              <a:defRPr sz="1300">
+                <a:solidFill>
+                  <a:srgbClr val="212121"/>
+                </a:solidFill>
+              </a:defRPr>
+            </a:pPr>
+            <a:r>
+              <a:t>Per-agent attribution</a:t>
             </a:r>
           </a:p>
           <a:p>
             <a:pPr>
               <a:spcAft>
-                <a:spcPts val="600"/>
+                <a:spcPts val="800"/>
               </a:spcAft>
-              <a:defRPr sz="1400">
-                <a:solidFill>
-                  <a:srgbClr val="000000"/>
+              <a:defRPr sz="1300">
+                <a:solidFill>
+                  <a:srgbClr val="212121"/>
                 </a:solidFill>
               </a:defRPr>
             </a:pPr>
@@ -6617,16 +9025,88 @@
           <a:p>
             <a:pPr>
               <a:spcAft>
-                <a:spcPts val="600"/>
+                <a:spcPts val="800"/>
               </a:spcAft>
-              <a:defRPr sz="1400">
-                <a:solidFill>
-                  <a:srgbClr val="000000"/>
-                </a:solidFill>
-              </a:defRPr>
-            </a:pPr>
-            <a:r>
-              <a:t>All commands support --json for scripting integration</a:t>
+              <a:defRPr sz="1300">
+                <a:solidFill>
+                  <a:srgbClr val="212121"/>
+                </a:solidFill>
+              </a:defRPr>
+            </a:pPr>
+            <a:r>
+              <a:t>BUDGET CONTROLS:</a:t>
+            </a:r>
+          </a:p>
+          <a:p>
+            <a:pPr>
+              <a:spcAft>
+                <a:spcPts val="800"/>
+              </a:spcAft>
+              <a:defRPr sz="1300">
+                <a:solidFill>
+                  <a:srgbClr val="212121"/>
+                </a:solidFill>
+              </a:defRPr>
+            </a:pPr>
+            <a:r>
+              <a:t>- max_cost_per_project</a:t>
+            </a:r>
+          </a:p>
+          <a:p>
+            <a:pPr>
+              <a:spcAft>
+                <a:spcPts val="800"/>
+              </a:spcAft>
+              <a:defRPr sz="1300">
+                <a:solidFill>
+                  <a:srgbClr val="212121"/>
+                </a:solidFill>
+              </a:defRPr>
+            </a:pPr>
+            <a:r>
+              <a:t>- max_cost_per_session</a:t>
+            </a:r>
+          </a:p>
+          <a:p>
+            <a:pPr>
+              <a:spcAft>
+                <a:spcPts val="800"/>
+              </a:spcAft>
+              <a:defRPr sz="1300">
+                <a:solidFill>
+                  <a:srgbClr val="212121"/>
+                </a:solidFill>
+              </a:defRPr>
+            </a:pPr>
+            <a:r>
+              <a:t>- warn_at_percent threshold</a:t>
+            </a:r>
+          </a:p>
+          <a:p>
+            <a:pPr>
+              <a:spcAft>
+                <a:spcPts val="800"/>
+              </a:spcAft>
+              <a:defRPr sz="1300">
+                <a:solidFill>
+                  <a:srgbClr val="212121"/>
+                </a:solidFill>
+              </a:defRPr>
+            </a:pPr>
+          </a:p>
+          <a:p>
+            <a:pPr>
+              <a:spcAft>
+                <a:spcPts val="800"/>
+              </a:spcAft>
+              <a:defRPr sz="1300">
+                <a:solidFill>
+                  <a:srgbClr val="212121"/>
+                </a:solidFill>
+              </a:defRPr>
+            </a:pPr>
+            <a:r>
+              <a:t>All costs visible via: bob costs</a:t>
             </a:r>
           </a:p>
         </p:txBody>

--- a/docs/BOB_Presentation.pptx
+++ b/docs/BOB_Presentation.pptx
@@ -6587,7 +6587,7 @@
         <p:spPr>
           <a:xfrm>
             <a:off x="6400800" y="1371600"/>
-            <a:ext cx="5486400" cy="3269673"/>
+            <a:ext cx="5486400" cy="2720148"/>
           </a:xfrm>
           <a:prstGeom prst="rect">
             <a:avLst/>
@@ -7769,7 +7769,7 @@
         <p:spPr>
           <a:xfrm>
             <a:off x="457200" y="1188720"/>
-            <a:ext cx="11277295" cy="7486608"/>
+            <a:ext cx="11277295" cy="7220714"/>
           </a:xfrm>
           <a:prstGeom prst="rect">
             <a:avLst/>
@@ -7924,7 +7924,7 @@
         <p:spPr>
           <a:xfrm>
             <a:off x="274320" y="1097280"/>
-            <a:ext cx="7315200" cy="5837382"/>
+            <a:ext cx="7315200" cy="5489484"/>
           </a:xfrm>
           <a:prstGeom prst="rect">
             <a:avLst/>
@@ -8269,7 +8269,7 @@
         <p:spPr>
           <a:xfrm>
             <a:off x="274320" y="1188720"/>
-            <a:ext cx="11430000" cy="5666975"/>
+            <a:ext cx="11430000" cy="4851583"/>
           </a:xfrm>
           <a:prstGeom prst="rect">
             <a:avLst/>
@@ -8494,7 +8494,7 @@
         <p:spPr>
           <a:xfrm>
             <a:off x="274320" y="1188720"/>
-            <a:ext cx="11430000" cy="5666975"/>
+            <a:ext cx="11430000" cy="5673885"/>
           </a:xfrm>
           <a:prstGeom prst="rect">
             <a:avLst/>
@@ -8732,7 +8732,7 @@
         <p:spPr>
           <a:xfrm>
             <a:off x="457200" y="1188720"/>
-            <a:ext cx="11277295" cy="7486608"/>
+            <a:ext cx="11277295" cy="6409398"/>
           </a:xfrm>
           <a:prstGeom prst="rect">
             <a:avLst/>
@@ -8887,7 +8887,7 @@
         <p:spPr>
           <a:xfrm>
             <a:off x="457200" y="1371600"/>
-            <a:ext cx="5486400" cy="3262284"/>
+            <a:ext cx="5486400" cy="3251200"/>
           </a:xfrm>
           <a:prstGeom prst="rect">
             <a:avLst/>

--- a/docs/BOB_Presentation.pptx
+++ b/docs/BOB_Presentation.pptx
@@ -4433,19 +4433,17 @@
         </p:nvSpPr>
         <p:spPr>
           <a:xfrm>
-            <a:off x="457200" y="1371600"/>
-            <a:ext cx="2743200" cy="3200400"/>
+            <a:off x="457200" y="1280160"/>
+            <a:ext cx="2651760" cy="411480"/>
           </a:xfrm>
           <a:prstGeom prst="roundRect">
             <a:avLst/>
           </a:prstGeom>
           <a:solidFill>
-            <a:srgbClr val="F5F5F5"/>
+            <a:srgbClr val="2196F3"/>
           </a:solidFill>
           <a:ln>
-            <a:solidFill>
-              <a:srgbClr val="2196F3"/>
-            </a:solidFill>
+            <a:noFill/>
           </a:ln>
         </p:spPr>
         <p:style>
@@ -4478,8 +4476,8 @@
         </p:nvSpPr>
         <p:spPr>
           <a:xfrm>
-            <a:off x="548640" y="1463040"/>
-            <a:ext cx="2560320" cy="365760"/>
+            <a:off x="548640" y="1325880"/>
+            <a:ext cx="2468879" cy="365760"/>
           </a:xfrm>
           <a:prstGeom prst="rect">
             <a:avLst/>
@@ -4493,9 +4491,9 @@
           <a:lstStyle/>
           <a:p>
             <a:pPr algn="l">
-              <a:defRPr sz="1400" b="1">
-                <a:solidFill>
-                  <a:srgbClr val="2196F3"/>
+              <a:defRPr sz="1300" b="1">
+                <a:solidFill>
+                  <a:srgbClr val="FFFFFF"/>
                 </a:solidFill>
               </a:defRPr>
             </a:pPr>
@@ -4507,63 +4505,16 @@
       </p:sp>
       <p:sp>
         <p:nvSpPr>
-          <p:cNvPr id="7" name="TextBox 6"/>
-          <p:cNvSpPr txBox="1"/>
-          <p:nvPr/>
-        </p:nvSpPr>
-        <p:spPr>
-          <a:xfrm>
-            <a:off x="548640" y="1920240"/>
-            <a:ext cx="2560320" cy="2560320"/>
-          </a:xfrm>
-          <a:prstGeom prst="rect">
-            <a:avLst/>
-          </a:prstGeom>
-          <a:noFill/>
-        </p:spPr>
-        <p:txBody>
-          <a:bodyPr wrap="square">
-            <a:spAutoFit/>
-          </a:bodyPr>
-          <a:lstStyle/>
-          <a:p>
-            <a:pPr algn="l">
-              <a:defRPr sz="1000" b="0">
-                <a:solidFill>
-                  <a:srgbClr val="212121"/>
-                </a:solidFill>
-              </a:defRPr>
-            </a:pPr>
-            <a:r>
-              <a:t>tasks:</a:t>
-            </a:r>
-            <a:br/>
-            <a:r>
-              <a:t>  - id: auth</a:t>
-            </a:r>
-            <a:br/>
-            <a:r>
-              <a:t>    title: User Auth</a:t>
-            </a:r>
-            <a:br/>
-            <a:r>
-              <a:t>    priority: critical</a:t>
-            </a:r>
-          </a:p>
-        </p:txBody>
-      </p:sp>
-      <p:sp>
-        <p:nvSpPr>
-          <p:cNvPr id="8" name="Rounded Rectangle 7"/>
+          <p:cNvPr id="7" name="Rectangle 6"/>
           <p:cNvSpPr/>
           <p:nvPr/>
         </p:nvSpPr>
         <p:spPr>
           <a:xfrm>
-            <a:off x="3383280" y="1371600"/>
-            <a:ext cx="2743200" cy="3200400"/>
-          </a:xfrm>
-          <a:prstGeom prst="roundRect">
+            <a:off x="457200" y="1691640"/>
+            <a:ext cx="2651760" cy="3200400"/>
+          </a:xfrm>
+          <a:prstGeom prst="rect">
             <a:avLst/>
           </a:prstGeom>
           <a:solidFill>
@@ -4571,7 +4522,7 @@
           </a:solidFill>
           <a:ln>
             <a:solidFill>
-              <a:srgbClr val="FF9800"/>
+              <a:srgbClr val="2196F3"/>
             </a:solidFill>
           </a:ln>
         </p:spPr>
@@ -4599,14 +4550,14 @@
       </p:sp>
       <p:sp>
         <p:nvSpPr>
-          <p:cNvPr id="9" name="TextBox 8"/>
-          <p:cNvSpPr txBox="1"/>
-          <p:nvPr/>
-        </p:nvSpPr>
-        <p:spPr>
-          <a:xfrm>
-            <a:off x="3474720" y="1463040"/>
-            <a:ext cx="2560320" cy="365760"/>
+          <p:cNvPr id="8" name="TextBox 7"/>
+          <p:cNvSpPr txBox="1"/>
+          <p:nvPr/>
+        </p:nvSpPr>
+        <p:spPr>
+          <a:xfrm>
+            <a:off x="548640" y="1783080"/>
+            <a:ext cx="2468879" cy="3017520"/>
           </a:xfrm>
           <a:prstGeom prst="rect">
             <a:avLst/>
@@ -4619,87 +4570,75 @@
           </a:bodyPr>
           <a:lstStyle/>
           <a:p>
-            <a:pPr algn="l">
-              <a:defRPr sz="1400" b="1">
-                <a:solidFill>
-                  <a:srgbClr val="FF9800"/>
-                </a:solidFill>
-              </a:defRPr>
-            </a:pPr>
-            <a:r>
-              <a:t>JSON</a:t>
-            </a:r>
-          </a:p>
-        </p:txBody>
-      </p:sp>
-      <p:sp>
-        <p:nvSpPr>
-          <p:cNvPr id="10" name="TextBox 9"/>
-          <p:cNvSpPr txBox="1"/>
-          <p:nvPr/>
-        </p:nvSpPr>
-        <p:spPr>
-          <a:xfrm>
-            <a:off x="3474720" y="1920240"/>
-            <a:ext cx="2560320" cy="2560320"/>
-          </a:xfrm>
-          <a:prstGeom prst="rect">
-            <a:avLst/>
-          </a:prstGeom>
-          <a:noFill/>
-        </p:spPr>
-        <p:txBody>
-          <a:bodyPr wrap="square">
-            <a:spAutoFit/>
-          </a:bodyPr>
-          <a:lstStyle/>
-          <a:p>
-            <a:pPr algn="l">
-              <a:defRPr sz="1000" b="0">
+            <a:pPr>
+              <a:defRPr sz="900">
                 <a:solidFill>
                   <a:srgbClr val="212121"/>
                 </a:solidFill>
               </a:defRPr>
             </a:pPr>
             <a:r>
-              <a:t>{"tasks": [</a:t>
+              <a:t>name: My App</a:t>
             </a:r>
             <a:br/>
-            <a:r>
-              <a:t>  {"id": "auth",</a:t>
-            </a:r>
             <a:br/>
             <a:r>
-              <a:t>   "title": "User Auth"}</a:t>
+              <a:t>tasks:</a:t>
             </a:r>
             <a:br/>
             <a:r>
-              <a:t>]}</a:t>
-            </a:r>
-          </a:p>
-        </p:txBody>
-      </p:sp>
-      <p:sp>
-        <p:nvSpPr>
-          <p:cNvPr id="11" name="Rounded Rectangle 10"/>
+              <a:t>  - id: auth</a:t>
+            </a:r>
+            <a:br/>
+            <a:r>
+              <a:t>    title: User Auth</a:t>
+            </a:r>
+            <a:br/>
+            <a:r>
+              <a:t>    priority: critical</a:t>
+            </a:r>
+            <a:br/>
+            <a:r>
+              <a:t>    depends_on:</a:t>
+            </a:r>
+            <a:br/>
+            <a:r>
+              <a:t>      - database</a:t>
+            </a:r>
+            <a:br/>
+            <a:r>
+              <a:t>    acceptance_criteria:</a:t>
+            </a:r>
+            <a:br/>
+            <a:r>
+              <a:t>      - Login works</a:t>
+            </a:r>
+            <a:br/>
+            <a:r>
+              <a:t>      - Logout works</a:t>
+            </a:r>
+          </a:p>
+        </p:txBody>
+      </p:sp>
+      <p:sp>
+        <p:nvSpPr>
+          <p:cNvPr id="9" name="Rounded Rectangle 8"/>
           <p:cNvSpPr/>
           <p:nvPr/>
         </p:nvSpPr>
         <p:spPr>
           <a:xfrm>
-            <a:off x="6309360" y="1371600"/>
-            <a:ext cx="2743200" cy="3200400"/>
+            <a:off x="3383280" y="1280160"/>
+            <a:ext cx="2651760" cy="411480"/>
           </a:xfrm>
           <a:prstGeom prst="roundRect">
             <a:avLst/>
           </a:prstGeom>
           <a:solidFill>
-            <a:srgbClr val="F5F5F5"/>
+            <a:srgbClr val="FF9800"/>
           </a:solidFill>
           <a:ln>
-            <a:solidFill>
-              <a:srgbClr val="4CAF50"/>
-            </a:solidFill>
+            <a:noFill/>
           </a:ln>
         </p:spPr>
         <p:style>
@@ -4726,14 +4665,14 @@
       </p:sp>
       <p:sp>
         <p:nvSpPr>
-          <p:cNvPr id="12" name="TextBox 11"/>
-          <p:cNvSpPr txBox="1"/>
-          <p:nvPr/>
-        </p:nvSpPr>
-        <p:spPr>
-          <a:xfrm>
-            <a:off x="6400800" y="1463040"/>
-            <a:ext cx="2560320" cy="365760"/>
+          <p:cNvPr id="10" name="TextBox 9"/>
+          <p:cNvSpPr txBox="1"/>
+          <p:nvPr/>
+        </p:nvSpPr>
+        <p:spPr>
+          <a:xfrm>
+            <a:off x="3474720" y="1325880"/>
+            <a:ext cx="2468879" cy="365760"/>
           </a:xfrm>
           <a:prstGeom prst="rect">
             <a:avLst/>
@@ -4747,78 +4686,30 @@
           <a:lstStyle/>
           <a:p>
             <a:pPr algn="l">
-              <a:defRPr sz="1400" b="1">
-                <a:solidFill>
-                  <a:srgbClr val="4CAF50"/>
-                </a:solidFill>
-              </a:defRPr>
-            </a:pPr>
-            <a:r>
-              <a:t>Markdown</a:t>
-            </a:r>
-          </a:p>
-        </p:txBody>
-      </p:sp>
-      <p:sp>
-        <p:nvSpPr>
-          <p:cNvPr id="13" name="TextBox 12"/>
-          <p:cNvSpPr txBox="1"/>
-          <p:nvPr/>
-        </p:nvSpPr>
-        <p:spPr>
-          <a:xfrm>
-            <a:off x="6400800" y="1920240"/>
-            <a:ext cx="2560320" cy="2560320"/>
-          </a:xfrm>
-          <a:prstGeom prst="rect">
-            <a:avLst/>
-          </a:prstGeom>
-          <a:noFill/>
-        </p:spPr>
-        <p:txBody>
-          <a:bodyPr wrap="square">
-            <a:spAutoFit/>
-          </a:bodyPr>
-          <a:lstStyle/>
-          <a:p>
-            <a:pPr algn="l">
-              <a:defRPr sz="1000" b="0">
-                <a:solidFill>
-                  <a:srgbClr val="212121"/>
-                </a:solidFill>
-              </a:defRPr>
-            </a:pPr>
-            <a:r>
-              <a:t>## auth: User Auth</a:t>
-            </a:r>
-            <a:br/>
-            <a:r>
-              <a:t>[priority:critical]</a:t>
-            </a:r>
-            <a:br/>
-            <a:br/>
-            <a:r>
-              <a:t>### Criteria</a:t>
-            </a:r>
-            <a:br/>
-            <a:r>
-              <a:t>- Login works</a:t>
-            </a:r>
-          </a:p>
-        </p:txBody>
-      </p:sp>
-      <p:sp>
-        <p:nvSpPr>
-          <p:cNvPr id="14" name="Rounded Rectangle 13"/>
+              <a:defRPr sz="1300" b="1">
+                <a:solidFill>
+                  <a:srgbClr val="FFFFFF"/>
+                </a:solidFill>
+              </a:defRPr>
+            </a:pPr>
+            <a:r>
+              <a:t>JSON</a:t>
+            </a:r>
+          </a:p>
+        </p:txBody>
+      </p:sp>
+      <p:sp>
+        <p:nvSpPr>
+          <p:cNvPr id="11" name="Rectangle 10"/>
           <p:cNvSpPr/>
           <p:nvPr/>
         </p:nvSpPr>
         <p:spPr>
           <a:xfrm>
-            <a:off x="9235440" y="1371600"/>
-            <a:ext cx="2743200" cy="3200400"/>
-          </a:xfrm>
-          <a:prstGeom prst="roundRect">
+            <a:off x="3383280" y="1691640"/>
+            <a:ext cx="2651760" cy="3200400"/>
+          </a:xfrm>
+          <a:prstGeom prst="rect">
             <a:avLst/>
           </a:prstGeom>
           <a:solidFill>
@@ -4826,7 +4717,7 @@
           </a:solidFill>
           <a:ln>
             <a:solidFill>
-              <a:srgbClr val="0D47A1"/>
+              <a:srgbClr val="FF9800"/>
             </a:solidFill>
           </a:ln>
         </p:spPr>
@@ -4854,14 +4745,14 @@
       </p:sp>
       <p:sp>
         <p:nvSpPr>
-          <p:cNvPr id="15" name="TextBox 14"/>
-          <p:cNvSpPr txBox="1"/>
-          <p:nvPr/>
-        </p:nvSpPr>
-        <p:spPr>
-          <a:xfrm>
-            <a:off x="9326880" y="1463040"/>
-            <a:ext cx="2560320" cy="365760"/>
+          <p:cNvPr id="12" name="TextBox 11"/>
+          <p:cNvSpPr txBox="1"/>
+          <p:nvPr/>
+        </p:nvSpPr>
+        <p:spPr>
+          <a:xfrm>
+            <a:off x="3474720" y="1783080"/>
+            <a:ext cx="2468879" cy="3017520"/>
           </a:xfrm>
           <a:prstGeom prst="rect">
             <a:avLst/>
@@ -4874,16 +4765,179 @@
           </a:bodyPr>
           <a:lstStyle/>
           <a:p>
+            <a:pPr>
+              <a:defRPr sz="900">
+                <a:solidFill>
+                  <a:srgbClr val="212121"/>
+                </a:solidFill>
+              </a:defRPr>
+            </a:pPr>
+            <a:r>
+              <a:t>{</a:t>
+            </a:r>
+            <a:br/>
+            <a:r>
+              <a:t>  "name": "My App",</a:t>
+            </a:r>
+            <a:br/>
+            <a:r>
+              <a:t>  "tasks": [{</a:t>
+            </a:r>
+            <a:br/>
+            <a:r>
+              <a:t>    "id": "auth",</a:t>
+            </a:r>
+            <a:br/>
+            <a:r>
+              <a:t>    "title": "User Auth",</a:t>
+            </a:r>
+            <a:br/>
+            <a:r>
+              <a:t>    "priority": "critical",</a:t>
+            </a:r>
+            <a:br/>
+            <a:r>
+              <a:t>    "depends_on": [</a:t>
+            </a:r>
+            <a:br/>
+            <a:r>
+              <a:t>      "database"</a:t>
+            </a:r>
+            <a:br/>
+            <a:r>
+              <a:t>    ]</a:t>
+            </a:r>
+            <a:br/>
+            <a:r>
+              <a:t>  }]</a:t>
+            </a:r>
+            <a:br/>
+            <a:r>
+              <a:t>}</a:t>
+            </a:r>
+          </a:p>
+        </p:txBody>
+      </p:sp>
+      <p:sp>
+        <p:nvSpPr>
+          <p:cNvPr id="13" name="Rounded Rectangle 12"/>
+          <p:cNvSpPr/>
+          <p:nvPr/>
+        </p:nvSpPr>
+        <p:spPr>
+          <a:xfrm>
+            <a:off x="6309360" y="1280160"/>
+            <a:ext cx="2651760" cy="411480"/>
+          </a:xfrm>
+          <a:prstGeom prst="roundRect">
+            <a:avLst/>
+          </a:prstGeom>
+          <a:solidFill>
+            <a:srgbClr val="4CAF50"/>
+          </a:solidFill>
+          <a:ln>
+            <a:noFill/>
+          </a:ln>
+        </p:spPr>
+        <p:style>
+          <a:lnRef idx="1">
+            <a:schemeClr val="accent1"/>
+          </a:lnRef>
+          <a:fillRef idx="3">
+            <a:schemeClr val="accent1"/>
+          </a:fillRef>
+          <a:effectRef idx="2">
+            <a:schemeClr val="accent1"/>
+          </a:effectRef>
+          <a:fontRef idx="minor">
+            <a:schemeClr val="lt1"/>
+          </a:fontRef>
+        </p:style>
+        <p:txBody>
+          <a:bodyPr rtlCol="0" anchor="ctr"/>
+          <a:lstStyle/>
+          <a:p>
+            <a:pPr algn="ctr"/>
+          </a:p>
+        </p:txBody>
+      </p:sp>
+      <p:sp>
+        <p:nvSpPr>
+          <p:cNvPr id="14" name="TextBox 13"/>
+          <p:cNvSpPr txBox="1"/>
+          <p:nvPr/>
+        </p:nvSpPr>
+        <p:spPr>
+          <a:xfrm>
+            <a:off x="6400800" y="1325880"/>
+            <a:ext cx="2468879" cy="365760"/>
+          </a:xfrm>
+          <a:prstGeom prst="rect">
+            <a:avLst/>
+          </a:prstGeom>
+          <a:noFill/>
+        </p:spPr>
+        <p:txBody>
+          <a:bodyPr wrap="square">
+            <a:spAutoFit/>
+          </a:bodyPr>
+          <a:lstStyle/>
+          <a:p>
             <a:pPr algn="l">
-              <a:defRPr sz="1400" b="1">
-                <a:solidFill>
-                  <a:srgbClr val="0D47A1"/>
-                </a:solidFill>
-              </a:defRPr>
-            </a:pPr>
-            <a:r>
-              <a:t>GitHub Issues</a:t>
-            </a:r>
+              <a:defRPr sz="1300" b="1">
+                <a:solidFill>
+                  <a:srgbClr val="FFFFFF"/>
+                </a:solidFill>
+              </a:defRPr>
+            </a:pPr>
+            <a:r>
+              <a:t>Markdown</a:t>
+            </a:r>
+          </a:p>
+        </p:txBody>
+      </p:sp>
+      <p:sp>
+        <p:nvSpPr>
+          <p:cNvPr id="15" name="Rectangle 14"/>
+          <p:cNvSpPr/>
+          <p:nvPr/>
+        </p:nvSpPr>
+        <p:spPr>
+          <a:xfrm>
+            <a:off x="6309360" y="1691640"/>
+            <a:ext cx="2651760" cy="3200400"/>
+          </a:xfrm>
+          <a:prstGeom prst="rect">
+            <a:avLst/>
+          </a:prstGeom>
+          <a:solidFill>
+            <a:srgbClr val="F5F5F5"/>
+          </a:solidFill>
+          <a:ln>
+            <a:solidFill>
+              <a:srgbClr val="4CAF50"/>
+            </a:solidFill>
+          </a:ln>
+        </p:spPr>
+        <p:style>
+          <a:lnRef idx="1">
+            <a:schemeClr val="accent1"/>
+          </a:lnRef>
+          <a:fillRef idx="3">
+            <a:schemeClr val="accent1"/>
+          </a:fillRef>
+          <a:effectRef idx="2">
+            <a:schemeClr val="accent1"/>
+          </a:effectRef>
+          <a:fontRef idx="minor">
+            <a:schemeClr val="lt1"/>
+          </a:fontRef>
+        </p:style>
+        <p:txBody>
+          <a:bodyPr rtlCol="0" anchor="ctr"/>
+          <a:lstStyle/>
+          <a:p>
+            <a:pPr algn="ctr"/>
           </a:p>
         </p:txBody>
       </p:sp>
@@ -4895,8 +4949,8 @@
         </p:nvSpPr>
         <p:spPr>
           <a:xfrm>
-            <a:off x="9326880" y="1920240"/>
-            <a:ext cx="2560320" cy="2560320"/>
+            <a:off x="6400800" y="1783080"/>
+            <a:ext cx="2468879" cy="3017520"/>
           </a:xfrm>
           <a:prstGeom prst="rect">
             <a:avLst/>
@@ -4909,38 +4963,252 @@
           </a:bodyPr>
           <a:lstStyle/>
           <a:p>
-            <a:pPr algn="l">
-              <a:defRPr sz="1000" b="0">
+            <a:pPr>
+              <a:defRPr sz="900">
                 <a:solidFill>
                   <a:srgbClr val="212121"/>
                 </a:solidFill>
               </a:defRPr>
             </a:pPr>
             <a:r>
-              <a:t>Issue #42: User Auth</a:t>
-            </a:r>
-            <a:br/>
-            <a:r>
-              <a:t>Labels: ai-implement</a:t>
+              <a:t># My App Spec</a:t>
             </a:r>
             <a:br/>
             <a:br/>
             <a:r>
-              <a:t>Checkboxes as criteria</a:t>
-            </a:r>
-          </a:p>
-        </p:txBody>
-      </p:sp>
-      <p:sp>
-        <p:nvSpPr>
-          <p:cNvPr id="17" name="TextBox 16"/>
-          <p:cNvSpPr txBox="1"/>
-          <p:nvPr/>
-        </p:nvSpPr>
-        <p:spPr>
-          <a:xfrm>
-            <a:off x="457200" y="5029200"/>
-            <a:ext cx="10972800" cy="365760"/>
+              <a:t>## auth: User Auth</a:t>
+            </a:r>
+            <a:br/>
+            <a:r>
+              <a:t>[priority:critical]</a:t>
+            </a:r>
+            <a:br/>
+            <a:r>
+              <a:t>[depends:database]</a:t>
+            </a:r>
+            <a:br/>
+            <a:br/>
+            <a:r>
+              <a:t>Implement user</a:t>
+            </a:r>
+            <a:br/>
+            <a:r>
+              <a:t>authentication.</a:t>
+            </a:r>
+            <a:br/>
+            <a:br/>
+            <a:r>
+              <a:t>### Criteria</a:t>
+            </a:r>
+            <a:br/>
+            <a:r>
+              <a:t>- Login works</a:t>
+            </a:r>
+            <a:br/>
+            <a:r>
+              <a:t>- Logout works</a:t>
+            </a:r>
+          </a:p>
+        </p:txBody>
+      </p:sp>
+      <p:sp>
+        <p:nvSpPr>
+          <p:cNvPr id="17" name="Rounded Rectangle 16"/>
+          <p:cNvSpPr/>
+          <p:nvPr/>
+        </p:nvSpPr>
+        <p:spPr>
+          <a:xfrm>
+            <a:off x="9235440" y="1280160"/>
+            <a:ext cx="2651760" cy="411480"/>
+          </a:xfrm>
+          <a:prstGeom prst="roundRect">
+            <a:avLst/>
+          </a:prstGeom>
+          <a:solidFill>
+            <a:srgbClr val="0D47A1"/>
+          </a:solidFill>
+          <a:ln>
+            <a:noFill/>
+          </a:ln>
+        </p:spPr>
+        <p:style>
+          <a:lnRef idx="1">
+            <a:schemeClr val="accent1"/>
+          </a:lnRef>
+          <a:fillRef idx="3">
+            <a:schemeClr val="accent1"/>
+          </a:fillRef>
+          <a:effectRef idx="2">
+            <a:schemeClr val="accent1"/>
+          </a:effectRef>
+          <a:fontRef idx="minor">
+            <a:schemeClr val="lt1"/>
+          </a:fontRef>
+        </p:style>
+        <p:txBody>
+          <a:bodyPr rtlCol="0" anchor="ctr"/>
+          <a:lstStyle/>
+          <a:p>
+            <a:pPr algn="ctr"/>
+          </a:p>
+        </p:txBody>
+      </p:sp>
+      <p:sp>
+        <p:nvSpPr>
+          <p:cNvPr id="18" name="TextBox 17"/>
+          <p:cNvSpPr txBox="1"/>
+          <p:nvPr/>
+        </p:nvSpPr>
+        <p:spPr>
+          <a:xfrm>
+            <a:off x="9326880" y="1325880"/>
+            <a:ext cx="2468879" cy="365760"/>
+          </a:xfrm>
+          <a:prstGeom prst="rect">
+            <a:avLst/>
+          </a:prstGeom>
+          <a:noFill/>
+        </p:spPr>
+        <p:txBody>
+          <a:bodyPr wrap="square">
+            <a:spAutoFit/>
+          </a:bodyPr>
+          <a:lstStyle/>
+          <a:p>
+            <a:pPr algn="l">
+              <a:defRPr sz="1300" b="1">
+                <a:solidFill>
+                  <a:srgbClr val="FFFFFF"/>
+                </a:solidFill>
+              </a:defRPr>
+            </a:pPr>
+            <a:r>
+              <a:t>GitHub Issues</a:t>
+            </a:r>
+          </a:p>
+        </p:txBody>
+      </p:sp>
+      <p:sp>
+        <p:nvSpPr>
+          <p:cNvPr id="19" name="Rectangle 18"/>
+          <p:cNvSpPr/>
+          <p:nvPr/>
+        </p:nvSpPr>
+        <p:spPr>
+          <a:xfrm>
+            <a:off x="9235440" y="1691640"/>
+            <a:ext cx="2651760" cy="3200400"/>
+          </a:xfrm>
+          <a:prstGeom prst="rect">
+            <a:avLst/>
+          </a:prstGeom>
+          <a:solidFill>
+            <a:srgbClr val="F5F5F5"/>
+          </a:solidFill>
+          <a:ln>
+            <a:solidFill>
+              <a:srgbClr val="0D47A1"/>
+            </a:solidFill>
+          </a:ln>
+        </p:spPr>
+        <p:style>
+          <a:lnRef idx="1">
+            <a:schemeClr val="accent1"/>
+          </a:lnRef>
+          <a:fillRef idx="3">
+            <a:schemeClr val="accent1"/>
+          </a:fillRef>
+          <a:effectRef idx="2">
+            <a:schemeClr val="accent1"/>
+          </a:effectRef>
+          <a:fontRef idx="minor">
+            <a:schemeClr val="lt1"/>
+          </a:fontRef>
+        </p:style>
+        <p:txBody>
+          <a:bodyPr rtlCol="0" anchor="ctr"/>
+          <a:lstStyle/>
+          <a:p>
+            <a:pPr algn="ctr"/>
+          </a:p>
+        </p:txBody>
+      </p:sp>
+      <p:sp>
+        <p:nvSpPr>
+          <p:cNvPr id="20" name="TextBox 19"/>
+          <p:cNvSpPr txBox="1"/>
+          <p:nvPr/>
+        </p:nvSpPr>
+        <p:spPr>
+          <a:xfrm>
+            <a:off x="9326880" y="1783080"/>
+            <a:ext cx="2468879" cy="3017520"/>
+          </a:xfrm>
+          <a:prstGeom prst="rect">
+            <a:avLst/>
+          </a:prstGeom>
+          <a:noFill/>
+        </p:spPr>
+        <p:txBody>
+          <a:bodyPr wrap="square">
+            <a:spAutoFit/>
+          </a:bodyPr>
+          <a:lstStyle/>
+          <a:p>
+            <a:pPr>
+              <a:defRPr sz="900">
+                <a:solidFill>
+                  <a:srgbClr val="212121"/>
+                </a:solidFill>
+              </a:defRPr>
+            </a:pPr>
+            <a:r>
+              <a:t>Issue #42</a:t>
+            </a:r>
+            <a:br/>
+            <a:r>
+              <a:t>Title: User Auth</a:t>
+            </a:r>
+            <a:br/>
+            <a:br/>
+            <a:r>
+              <a:t>Labels:</a:t>
+            </a:r>
+            <a:br/>
+            <a:r>
+              <a:t>  - ai-implement</a:t>
+            </a:r>
+            <a:br/>
+            <a:r>
+              <a:t>  - priority-critical</a:t>
+            </a:r>
+            <a:br/>
+            <a:br/>
+            <a:r>
+              <a:t>Acceptance:</a:t>
+            </a:r>
+            <a:br/>
+            <a:r>
+              <a:t>- [ ] Login works</a:t>
+            </a:r>
+            <a:br/>
+            <a:r>
+              <a:t>- [ ] Logout works</a:t>
+            </a:r>
+          </a:p>
+        </p:txBody>
+      </p:sp>
+      <p:sp>
+        <p:nvSpPr>
+          <p:cNvPr id="21" name="TextBox 20"/>
+          <p:cNvSpPr txBox="1"/>
+          <p:nvPr/>
+        </p:nvSpPr>
+        <p:spPr>
+          <a:xfrm>
+            <a:off x="457200" y="5120640"/>
+            <a:ext cx="11277295" cy="365760"/>
           </a:xfrm>
           <a:prstGeom prst="rect">
             <a:avLst/>
@@ -4961,21 +5229,21 @@
               </a:defRPr>
             </a:pPr>
             <a:r>
-              <a:t>$ bob project create app ./work github://org/repo?label=ai-implement</a:t>
-            </a:r>
-          </a:p>
-        </p:txBody>
-      </p:sp>
-      <p:sp>
-        <p:nvSpPr>
-          <p:cNvPr id="18" name="TextBox 17"/>
-          <p:cNvSpPr txBox="1"/>
-          <p:nvPr/>
-        </p:nvSpPr>
-        <p:spPr>
-          <a:xfrm>
-            <a:off x="457200" y="5486400"/>
-            <a:ext cx="10972800" cy="365760"/>
+              <a:t>$ bob project create app ./workspace github://org/repo?label=ai-implement</a:t>
+            </a:r>
+          </a:p>
+        </p:txBody>
+      </p:sp>
+      <p:sp>
+        <p:nvSpPr>
+          <p:cNvPr id="22" name="TextBox 21"/>
+          <p:cNvSpPr txBox="1"/>
+          <p:nvPr/>
+        </p:nvSpPr>
+        <p:spPr>
+          <a:xfrm>
+            <a:off x="457200" y="5577840"/>
+            <a:ext cx="11277295" cy="365760"/>
           </a:xfrm>
           <a:prstGeom prst="rect">
             <a:avLst/>
@@ -4989,14 +5257,14 @@
           <a:lstStyle/>
           <a:p>
             <a:pPr algn="ctr">
-              <a:defRPr sz="1300" b="0">
+              <a:defRPr sz="1200" b="0">
                 <a:solidFill>
                   <a:srgbClr val="616161"/>
                 </a:solidFill>
               </a:defRPr>
             </a:pPr>
             <a:r>
-              <a:t>Sync GitHub issues directly as tasks!</a:t>
+              <a:t>Sync GitHub issues directly as tasks - labels become priorities and metadata!</a:t>
             </a:r>
           </a:p>
         </p:txBody>
@@ -5873,7 +6141,7 @@
         <p:spPr>
           <a:xfrm>
             <a:off x="457200" y="5669280"/>
-            <a:ext cx="10972800" cy="365760"/>
+            <a:ext cx="11277295" cy="365760"/>
           </a:xfrm>
           <a:prstGeom prst="rect">
             <a:avLst/>
@@ -7768,14 +8036,273 @@
         </p:blipFill>
         <p:spPr>
           <a:xfrm>
-            <a:off x="457200" y="1188720"/>
-            <a:ext cx="11277295" cy="7220714"/>
+            <a:off x="274320" y="1097280"/>
+            <a:ext cx="7772400" cy="4976573"/>
           </a:xfrm>
           <a:prstGeom prst="rect">
             <a:avLst/>
           </a:prstGeom>
         </p:spPr>
       </p:pic>
+      <p:sp>
+        <p:nvSpPr>
+          <p:cNvPr id="6" name="TextBox 5"/>
+          <p:cNvSpPr txBox="1"/>
+          <p:nvPr/>
+        </p:nvSpPr>
+        <p:spPr>
+          <a:xfrm>
+            <a:off x="8229600" y="1371600"/>
+            <a:ext cx="3657600" cy="365760"/>
+          </a:xfrm>
+          <a:prstGeom prst="rect">
+            <a:avLst/>
+          </a:prstGeom>
+          <a:noFill/>
+        </p:spPr>
+        <p:txBody>
+          <a:bodyPr wrap="square">
+            <a:spAutoFit/>
+          </a:bodyPr>
+          <a:lstStyle/>
+          <a:p>
+            <a:pPr algn="l">
+              <a:defRPr sz="1600" b="1">
+                <a:solidFill>
+                  <a:srgbClr val="0D47A1"/>
+                </a:solidFill>
+              </a:defRPr>
+            </a:pPr>
+            <a:r>
+              <a:t>DESIGN HIGHLIGHTS</a:t>
+            </a:r>
+          </a:p>
+        </p:txBody>
+      </p:sp>
+      <p:sp>
+        <p:nvSpPr>
+          <p:cNvPr id="7" name="TextBox 6"/>
+          <p:cNvSpPr txBox="1"/>
+          <p:nvPr/>
+        </p:nvSpPr>
+        <p:spPr>
+          <a:xfrm>
+            <a:off x="8229600" y="1828800"/>
+            <a:ext cx="3657600" cy="4572000"/>
+          </a:xfrm>
+          <a:prstGeom prst="rect">
+            <a:avLst/>
+          </a:prstGeom>
+          <a:noFill/>
+        </p:spPr>
+        <p:txBody>
+          <a:bodyPr wrap="square">
+            <a:spAutoFit/>
+          </a:bodyPr>
+          <a:lstStyle/>
+          <a:p>
+            <a:pPr>
+              <a:spcAft>
+                <a:spcPts val="800"/>
+              </a:spcAft>
+              <a:defRPr sz="1200">
+                <a:solidFill>
+                  <a:srgbClr val="212121"/>
+                </a:solidFill>
+              </a:defRPr>
+            </a:pPr>
+            <a:r>
+              <a:t>CLI provides unified interface</a:t>
+            </a:r>
+          </a:p>
+          <a:p>
+            <a:pPr>
+              <a:spcAft>
+                <a:spcPts val="800"/>
+              </a:spcAft>
+              <a:defRPr sz="1200">
+                <a:solidFill>
+                  <a:srgbClr val="212121"/>
+                </a:solidFill>
+              </a:defRPr>
+            </a:pPr>
+          </a:p>
+          <a:p>
+            <a:pPr>
+              <a:spcAft>
+                <a:spcPts val="800"/>
+              </a:spcAft>
+              <a:defRPr sz="1200">
+                <a:solidFill>
+                  <a:srgbClr val="212121"/>
+                </a:solidFill>
+              </a:defRPr>
+            </a:pPr>
+            <a:r>
+              <a:t>Three core managers:</a:t>
+            </a:r>
+          </a:p>
+          <a:p>
+            <a:pPr>
+              <a:spcAft>
+                <a:spcPts val="800"/>
+              </a:spcAft>
+              <a:defRPr sz="1200">
+                <a:solidFill>
+                  <a:srgbClr val="212121"/>
+                </a:solidFill>
+              </a:defRPr>
+            </a:pPr>
+            <a:r>
+              <a:t>  - Projects (isolation)</a:t>
+            </a:r>
+          </a:p>
+          <a:p>
+            <a:pPr>
+              <a:spcAft>
+                <a:spcPts val="800"/>
+              </a:spcAft>
+              <a:defRPr sz="1200">
+                <a:solidFill>
+                  <a:srgbClr val="212121"/>
+                </a:solidFill>
+              </a:defRPr>
+            </a:pPr>
+            <a:r>
+              <a:t>  - Specs (flexibility)</a:t>
+            </a:r>
+          </a:p>
+          <a:p>
+            <a:pPr>
+              <a:spcAft>
+                <a:spcPts val="800"/>
+              </a:spcAft>
+              <a:defRPr sz="1200">
+                <a:solidFill>
+                  <a:srgbClr val="212121"/>
+                </a:solidFill>
+              </a:defRPr>
+            </a:pPr>
+            <a:r>
+              <a:t>  - Agents (specialization)</a:t>
+            </a:r>
+          </a:p>
+          <a:p>
+            <a:pPr>
+              <a:spcAft>
+                <a:spcPts val="800"/>
+              </a:spcAft>
+              <a:defRPr sz="1200">
+                <a:solidFill>
+                  <a:srgbClr val="212121"/>
+                </a:solidFill>
+              </a:defRPr>
+            </a:pPr>
+          </a:p>
+          <a:p>
+            <a:pPr>
+              <a:spcAft>
+                <a:spcPts val="800"/>
+              </a:spcAft>
+              <a:defRPr sz="1200">
+                <a:solidFill>
+                  <a:srgbClr val="212121"/>
+                </a:solidFill>
+              </a:defRPr>
+            </a:pPr>
+            <a:r>
+              <a:t>Orchestration engine:</a:t>
+            </a:r>
+          </a:p>
+          <a:p>
+            <a:pPr>
+              <a:spcAft>
+                <a:spcPts val="800"/>
+              </a:spcAft>
+              <a:defRPr sz="1200">
+                <a:solidFill>
+                  <a:srgbClr val="212121"/>
+                </a:solidFill>
+              </a:defRPr>
+            </a:pPr>
+            <a:r>
+              <a:t>  - DAG task scheduling</a:t>
+            </a:r>
+          </a:p>
+          <a:p>
+            <a:pPr>
+              <a:spcAft>
+                <a:spcPts val="800"/>
+              </a:spcAft>
+              <a:defRPr sz="1200">
+                <a:solidFill>
+                  <a:srgbClr val="212121"/>
+                </a:solidFill>
+              </a:defRPr>
+            </a:pPr>
+            <a:r>
+              <a:t>  - Escalation control</a:t>
+            </a:r>
+          </a:p>
+          <a:p>
+            <a:pPr>
+              <a:spcAft>
+                <a:spcPts val="800"/>
+              </a:spcAft>
+              <a:defRPr sz="1200">
+                <a:solidFill>
+                  <a:srgbClr val="212121"/>
+                </a:solidFill>
+              </a:defRPr>
+            </a:pPr>
+            <a:r>
+              <a:t>  - Research coordination</a:t>
+            </a:r>
+          </a:p>
+          <a:p>
+            <a:pPr>
+              <a:spcAft>
+                <a:spcPts val="800"/>
+              </a:spcAft>
+              <a:defRPr sz="1200">
+                <a:solidFill>
+                  <a:srgbClr val="212121"/>
+                </a:solidFill>
+              </a:defRPr>
+            </a:pPr>
+          </a:p>
+          <a:p>
+            <a:pPr>
+              <a:spcAft>
+                <a:spcPts val="800"/>
+              </a:spcAft>
+              <a:defRPr sz="1200">
+                <a:solidFill>
+                  <a:srgbClr val="212121"/>
+                </a:solidFill>
+              </a:defRPr>
+            </a:pPr>
+            <a:r>
+              <a:t>SQLite for persistence</a:t>
+            </a:r>
+          </a:p>
+          <a:p>
+            <a:pPr>
+              <a:spcAft>
+                <a:spcPts val="800"/>
+              </a:spcAft>
+              <a:defRPr sz="1200">
+                <a:solidFill>
+                  <a:srgbClr val="212121"/>
+                </a:solidFill>
+              </a:defRPr>
+            </a:pPr>
+            <a:r>
+              <a:t>JSON logs for observability</a:t>
+            </a:r>
+          </a:p>
+        </p:txBody>
+      </p:sp>
     </p:spTree>
   </p:cSld>
   <p:clrMapOvr>
@@ -7923,8 +8450,8 @@
         </p:blipFill>
         <p:spPr>
           <a:xfrm>
-            <a:off x="274320" y="1097280"/>
-            <a:ext cx="7315200" cy="5489484"/>
+            <a:off x="182880" y="1097280"/>
+            <a:ext cx="6400800" cy="4803298"/>
           </a:xfrm>
           <a:prstGeom prst="rect">
             <a:avLst/>
@@ -7939,8 +8466,8 @@
         </p:nvSpPr>
         <p:spPr>
           <a:xfrm>
-            <a:off x="7772400" y="1371600"/>
-            <a:ext cx="4114800" cy="365760"/>
+            <a:off x="6858000" y="1280160"/>
+            <a:ext cx="5029200" cy="365760"/>
           </a:xfrm>
           <a:prstGeom prst="rect">
             <a:avLst/>
@@ -7961,7 +8488,7 @@
               </a:defRPr>
             </a:pPr>
             <a:r>
-              <a:t>WHY THIS WORKS</a:t>
+              <a:t>HOW IT WORKS</a:t>
             </a:r>
           </a:p>
         </p:txBody>
@@ -7974,8 +8501,8 @@
         </p:nvSpPr>
         <p:spPr>
           <a:xfrm>
-            <a:off x="7772400" y="1828800"/>
-            <a:ext cx="4114800" cy="3657600"/>
+            <a:off x="6858000" y="1737360"/>
+            <a:ext cx="5029200" cy="2560320"/>
           </a:xfrm>
           <a:prstGeom prst="rect">
             <a:avLst/>
@@ -7999,7 +8526,7 @@
               </a:defRPr>
             </a:pPr>
             <a:r>
-              <a:t>70%+ tasks succeed with Sonnet</a:t>
+              <a:t>1. Start with Sonnet (fast, cheap)</a:t>
             </a:r>
           </a:p>
           <a:p>
@@ -8014,7 +8541,7 @@
               </a:defRPr>
             </a:pPr>
             <a:r>
-              <a:t>Only escalate on actual failures</a:t>
+              <a:t>   - 3 attempts before escalating</a:t>
             </a:r>
           </a:p>
           <a:p>
@@ -8029,7 +8556,7 @@
               </a:defRPr>
             </a:pPr>
             <a:r>
-              <a:t>Diagnosis identifies root cause</a:t>
+              <a:t>   - Handles 70%+ of tasks</a:t>
             </a:r>
           </a:p>
           <a:p>
@@ -8043,9 +8570,6 @@
                 </a:solidFill>
               </a:defRPr>
             </a:pPr>
-            <a:r>
-              <a:t>Actions are targeted, not random</a:t>
-            </a:r>
           </a:p>
           <a:p>
             <a:pPr>
@@ -8058,6 +8582,9 @@
                 </a:solidFill>
               </a:defRPr>
             </a:pPr>
+            <a:r>
+              <a:t>2. Escalate to Opus if needed</a:t>
+            </a:r>
           </a:p>
           <a:p>
             <a:pPr>
@@ -8071,7 +8598,7 @@
               </a:defRPr>
             </a:pPr>
             <a:r>
-              <a:t>COST OPTIMIZATION:</a:t>
+              <a:t>   - More capable reasoning</a:t>
             </a:r>
           </a:p>
           <a:p>
@@ -8086,7 +8613,7 @@
               </a:defRPr>
             </a:pPr>
             <a:r>
-              <a:t>- Sonnet: $3/$15 per 1M tokens</a:t>
+              <a:t>   - 3 more attempts</a:t>
             </a:r>
           </a:p>
           <a:p>
@@ -8100,9 +8627,6 @@
                 </a:solidFill>
               </a:defRPr>
             </a:pPr>
-            <a:r>
-              <a:t>- Opus: $15/$75 per 1M tokens</a:t>
-            </a:r>
           </a:p>
           <a:p>
             <a:pPr>
@@ -8116,7 +8640,140 @@
               </a:defRPr>
             </a:pPr>
             <a:r>
-              <a:t>- 5x cheaper for most tasks</a:t>
+              <a:t>3. Diagnosis on persistent failure</a:t>
+            </a:r>
+          </a:p>
+          <a:p>
+            <a:pPr>
+              <a:spcAft>
+                <a:spcPts val="800"/>
+              </a:spcAft>
+              <a:defRPr sz="1200">
+                <a:solidFill>
+                  <a:srgbClr val="212121"/>
+                </a:solidFill>
+              </a:defRPr>
+            </a:pPr>
+            <a:r>
+              <a:t>   - Analyzes root cause</a:t>
+            </a:r>
+          </a:p>
+          <a:p>
+            <a:pPr>
+              <a:spcAft>
+                <a:spcPts val="800"/>
+              </a:spcAft>
+              <a:defRPr sz="1200">
+                <a:solidFill>
+                  <a:srgbClr val="212121"/>
+                </a:solidFill>
+              </a:defRPr>
+            </a:pPr>
+            <a:r>
+              <a:t>   - Takes targeted action</a:t>
+            </a:r>
+          </a:p>
+        </p:txBody>
+      </p:sp>
+      <p:sp>
+        <p:nvSpPr>
+          <p:cNvPr id="8" name="TextBox 7"/>
+          <p:cNvSpPr txBox="1"/>
+          <p:nvPr/>
+        </p:nvSpPr>
+        <p:spPr>
+          <a:xfrm>
+            <a:off x="6858000" y="4389120"/>
+            <a:ext cx="5029200" cy="365760"/>
+          </a:xfrm>
+          <a:prstGeom prst="rect">
+            <a:avLst/>
+          </a:prstGeom>
+          <a:noFill/>
+        </p:spPr>
+        <p:txBody>
+          <a:bodyPr wrap="square">
+            <a:spAutoFit/>
+          </a:bodyPr>
+          <a:lstStyle/>
+          <a:p>
+            <a:pPr algn="l">
+              <a:defRPr sz="1400" b="1">
+                <a:solidFill>
+                  <a:srgbClr val="4CAF50"/>
+                </a:solidFill>
+              </a:defRPr>
+            </a:pPr>
+            <a:r>
+              <a:t>COST BENEFIT</a:t>
+            </a:r>
+          </a:p>
+        </p:txBody>
+      </p:sp>
+      <p:sp>
+        <p:nvSpPr>
+          <p:cNvPr id="9" name="TextBox 8"/>
+          <p:cNvSpPr txBox="1"/>
+          <p:nvPr/>
+        </p:nvSpPr>
+        <p:spPr>
+          <a:xfrm>
+            <a:off x="6858000" y="4754880"/>
+            <a:ext cx="5029200" cy="1097280"/>
+          </a:xfrm>
+          <a:prstGeom prst="rect">
+            <a:avLst/>
+          </a:prstGeom>
+          <a:noFill/>
+        </p:spPr>
+        <p:txBody>
+          <a:bodyPr wrap="square">
+            <a:spAutoFit/>
+          </a:bodyPr>
+          <a:lstStyle/>
+          <a:p>
+            <a:pPr>
+              <a:spcAft>
+                <a:spcPts val="800"/>
+              </a:spcAft>
+              <a:defRPr sz="1200">
+                <a:solidFill>
+                  <a:srgbClr val="212121"/>
+                </a:solidFill>
+              </a:defRPr>
+            </a:pPr>
+            <a:r>
+              <a:t>Sonnet: $3/$15 per 1M tokens</a:t>
+            </a:r>
+          </a:p>
+          <a:p>
+            <a:pPr>
+              <a:spcAft>
+                <a:spcPts val="800"/>
+              </a:spcAft>
+              <a:defRPr sz="1200">
+                <a:solidFill>
+                  <a:srgbClr val="212121"/>
+                </a:solidFill>
+              </a:defRPr>
+            </a:pPr>
+            <a:r>
+              <a:t>Opus: $15/$75 per 1M tokens</a:t>
+            </a:r>
+          </a:p>
+          <a:p>
+            <a:pPr>
+              <a:spcAft>
+                <a:spcPts val="800"/>
+              </a:spcAft>
+              <a:defRPr sz="1200">
+                <a:solidFill>
+                  <a:srgbClr val="212121"/>
+                </a:solidFill>
+              </a:defRPr>
+            </a:pPr>
+            <a:r>
+              <a:t>5x savings on most tasks!</a:t>
             </a:r>
           </a:p>
         </p:txBody>
@@ -8509,8 +9166,8 @@
         </p:nvSpPr>
         <p:spPr>
           <a:xfrm>
-            <a:off x="457200" y="5029200"/>
-            <a:ext cx="10972800" cy="1371600"/>
+            <a:off x="457200" y="5303520"/>
+            <a:ext cx="10972800" cy="731520"/>
           </a:xfrm>
           <a:prstGeom prst="rect">
             <a:avLst/>
@@ -8527,59 +9184,14 @@
               <a:spcAft>
                 <a:spcPts val="800"/>
               </a:spcAft>
-              <a:defRPr sz="1300">
+              <a:defRPr sz="1200">
                 <a:solidFill>
                   <a:srgbClr val="212121"/>
                 </a:solidFill>
               </a:defRPr>
             </a:pPr>
             <a:r>
-              <a:t>Independent tasks execute concurrently</a:t>
-            </a:r>
-          </a:p>
-          <a:p>
-            <a:pPr>
-              <a:spcAft>
-                <a:spcPts val="800"/>
-              </a:spcAft>
-              <a:defRPr sz="1300">
-                <a:solidFill>
-                  <a:srgbClr val="212121"/>
-                </a:solidFill>
-              </a:defRPr>
-            </a:pPr>
-            <a:r>
-              <a:t>Dependency resolution via topological sort</a:t>
-            </a:r>
-          </a:p>
-          <a:p>
-            <a:pPr>
-              <a:spcAft>
-                <a:spcPts val="800"/>
-              </a:spcAft>
-              <a:defRPr sz="1300">
-                <a:solidFill>
-                  <a:srgbClr val="212121"/>
-                </a:solidFill>
-              </a:defRPr>
-            </a:pPr>
-            <a:r>
-              <a:t>Each task gets isolated session</a:t>
-            </a:r>
-          </a:p>
-          <a:p>
-            <a:pPr>
-              <a:spcAft>
-                <a:spcPts val="800"/>
-              </a:spcAft>
-              <a:defRPr sz="1300">
-                <a:solidFill>
-                  <a:srgbClr val="212121"/>
-                </a:solidFill>
-              </a:defRPr>
-            </a:pPr>
-            <a:r>
-              <a:t>Failures don't block independent work</a:t>
+              <a:t>Independent tasks execute concurrently  |  Dependency resolution via topological sort  |  Each task gets isolated session  |  Failures don't block independent work</a:t>
             </a:r>
           </a:p>
         </p:txBody>
